--- a/decks/Cursor_Enterprise_Disco_Challenge.pptx
+++ b/decks/Cursor_Enterprise_Disco_Challenge.pptx
@@ -19849,7 +19849,7 @@
                 </a:solidFill>
                 <a:latin typeface="Inter"/>
               </a:rPr>
-              <a:t>Fortune 100</a:t>
+              <a:t>Spain &amp; Italy</a:t>
             </a:r>
           </a:p>
           <a:p>
@@ -19904,7 +19904,7 @@
                 </a:solidFill>
                 <a:latin typeface="Inter"/>
               </a:rPr>
-              <a:t>Show how to create momentum. Top 5 ranked, then deep dive into #1 :</a:t>
+              <a:t>GTM Iberia + Italie. Top 5 ranked, deep dive sur Santander :</a:t>
             </a:r>
           </a:p>
           <a:p>
@@ -20299,7 +20299,7 @@
                 </a:solidFill>
                 <a:latin typeface="Inter"/>
               </a:rPr>
-              <a:t>Comment je classe une F100 pour Cursor.</a:t>
+              <a:t>Comment je classe un compte ENT Spain &amp; Italy.</a:t>
             </a:r>
           </a:p>
         </p:txBody>
@@ -20777,7 +20777,7 @@
                 </a:solidFill>
                 <a:latin typeface="Inter"/>
               </a:rPr>
-              <a:t>Régulés (finance, santé) = Privacy Mode est un enabler, pas un blocker. Notre edge.</a:t>
+              <a:t>Régulés EU (DORA, EU AI Act, ECB) = Privacy Mode = enabler, pas blocker. Notre edge.</a:t>
             </a:r>
           </a:p>
         </p:txBody>
@@ -21483,7 +21483,7 @@
                 </a:solidFill>
                 <a:latin typeface="Inter"/>
               </a:rPr>
-              <a:t>Top 5 Fortune 100 pour Cursor.</a:t>
+              <a:t>Top 5 GTM Spain &amp; Italy.</a:t>
             </a:r>
           </a:p>
         </p:txBody>
@@ -21522,7 +21522,7 @@
                 </a:solidFill>
                 <a:latin typeface="Inter"/>
               </a:rPr>
-              <a:t>Ranking défendable. #1 deep-dive sur la slide suivante.</a:t>
+              <a:t>Ranking défendable. Santander en #1 → deep-dive sur les 4 slides qui suivent.</a:t>
             </a:r>
           </a:p>
         </p:txBody>
@@ -21688,7 +21688,7 @@
                 </a:solidFill>
                 <a:latin typeface="Inter"/>
               </a:rPr>
-              <a:t>JPMorgan Chase</a:t>
+              <a:t>Santander</a:t>
             </a:r>
           </a:p>
         </p:txBody>
@@ -21727,7 +21727,7 @@
                 </a:solidFill>
                 <a:latin typeface="Inter"/>
               </a:rPr>
-              <a:t>~56 K ingés · LLM Suite déjà en prod · régulé = Privacy Mode = enabler · path procurement clair.</a:t>
+              <a:t>~15–20 K tech · « One Transformation » sous Dirk Marzluf · régulé multi-juridictions · Openbank = wedge digital-native.</a:t>
             </a:r>
           </a:p>
         </p:txBody>
@@ -21766,7 +21766,7 @@
                 </a:solidFill>
                 <a:latin typeface="Inter"/>
               </a:rPr>
-              <a:t>Plus gros TAM F100 + champion-ready.</a:t>
+              <a:t>Plus gros TAM Iberia + champion-ready.</a:t>
             </a:r>
           </a:p>
         </p:txBody>
@@ -21932,7 +21932,7 @@
                 </a:solidFill>
                 <a:latin typeface="Inter"/>
               </a:rPr>
-              <a:t>Capital One</a:t>
+              <a:t>BBVA</a:t>
             </a:r>
           </a:p>
         </p:txBody>
@@ -21971,7 +21971,7 @@
                 </a:solidFill>
                 <a:latin typeface="Inter"/>
               </a:rPr>
-              <a:t>~12 K ingés · culture eng-led, rare en F100 · ChatGPT Enterprise déjà acheté · procurement décisive.</a:t>
+              <a:t>~10 K tech · ChatGPT Enterprise déjà déployé org-wide · narrative « born digital » sous Carlos Torres.</a:t>
             </a:r>
           </a:p>
         </p:txBody>
@@ -22010,7 +22010,7 @@
                 </a:solidFill>
                 <a:latin typeface="Inter"/>
               </a:rPr>
-              <a:t>Vélocité de deal la plus forte.</a:t>
+              <a:t>AI-ready buyer, vélocité forte.</a:t>
             </a:r>
           </a:p>
         </p:txBody>
@@ -22176,7 +22176,7 @@
                 </a:solidFill>
                 <a:latin typeface="Inter"/>
               </a:rPr>
-              <a:t>Walmart (Global Tech)</a:t>
+              <a:t>Enel</a:t>
             </a:r>
           </a:p>
         </p:txBody>
@@ -22215,7 +22215,7 @@
                 </a:solidFill>
                 <a:latin typeface="Inter"/>
               </a:rPr>
-              <a:t>~20 K ingés · CTO Suresh Kumar pousse IA hard · ROI math énorme · Sam's + Walmart.com + Bonobos surface.</a:t>
+              <a:t>~15 K tech · transition énergétique = urgence · OpenInnovability AI lab · CISO mature.</a:t>
             </a:r>
           </a:p>
         </p:txBody>
@@ -22254,7 +22254,7 @@
                 </a:solidFill>
                 <a:latin typeface="Inter"/>
               </a:rPr>
-              <a:t>Gros TAM, brand-effect F100 retail.</a:t>
+              <a:t>Plus gros TAM Italie.</a:t>
             </a:r>
           </a:p>
         </p:txBody>
@@ -22420,7 +22420,7 @@
                 </a:solidFill>
                 <a:latin typeface="Inter"/>
               </a:rPr>
-              <a:t>Goldman Sachs</a:t>
+              <a:t>EssilorLuxottica</a:t>
             </a:r>
           </a:p>
         </p:txBody>
@@ -22459,7 +22459,7 @@
                 </a:solidFill>
                 <a:latin typeface="Inter"/>
               </a:rPr>
-              <a:t>~12 K ingés · Marquee, Atlas · AI-first messaging (Solomon) · régulé = même wedge que JPM.</a:t>
+              <a:t>~5–7 K tech / 190 K total · Industry 4.0 + e-commerce push · régulé (medical devices).</a:t>
             </a:r>
           </a:p>
         </p:txBody>
@@ -22498,7 +22498,7 @@
                 </a:solidFill>
                 <a:latin typeface="Inter"/>
               </a:rPr>
-              <a:t>High-velocity tech investment.</a:t>
+              <a:t>Compte FR/IT, leverage industriel.</a:t>
             </a:r>
           </a:p>
         </p:txBody>
@@ -22664,7 +22664,7 @@
                 </a:solidFill>
                 <a:latin typeface="Inter"/>
               </a:rPr>
-              <a:t>Disney (Streaming + Parks)</a:t>
+              <a:t>El Corte Inglés</a:t>
             </a:r>
           </a:p>
         </p:txBody>
@@ -22703,7 +22703,7 @@
                 </a:solidFill>
                 <a:latin typeface="Inter"/>
               </a:rPr>
-              <a:t>~10 K ingés · modernisation Disney+ · eng-driven streaming · brand reference massive.</a:t>
+              <a:t>~2–3 K tech · transformation e-commerce + supply chain sous Marta Álvarez · moins de concurrence.</a:t>
             </a:r>
           </a:p>
         </p:txBody>
@@ -22742,7 +22742,7 @@
                 </a:solidFill>
                 <a:latin typeface="Inter"/>
               </a:rPr>
-              <a:t>Reference customer halo effect.</a:t>
+              <a:t>Moins crowded, deal accessible.</a:t>
             </a:r>
           </a:p>
         </p:txBody>
@@ -22882,7 +22882,7 @@
                 </a:solidFill>
                 <a:latin typeface="Inter"/>
               </a:rPr>
-              <a:t>PART 1  ·  DEEP DIVE · JPMORGAN</a:t>
+              <a:t>PART 1  ·  DEEP DIVE · SANTANDER</a:t>
             </a:r>
           </a:p>
         </p:txBody>
@@ -23082,7 +23082,7 @@
                 </a:solidFill>
                 <a:latin typeface="Inter"/>
               </a:rPr>
-              <a:t>JPMorgan Chase — why now, where Cursor wins.</a:t>
+              <a:t>Santander — why now, where Cursor wins.</a:t>
             </a:r>
           </a:p>
         </p:txBody>
@@ -23121,7 +23121,7 @@
                 </a:solidFill>
                 <a:latin typeface="Inter"/>
               </a:rPr>
-              <a:t>5 angles. Tous ont une preuve publique citable.</a:t>
+              <a:t>4 angles. Tous ont une preuve publique citable (analyst calls, presse Iberia).</a:t>
             </a:r>
           </a:p>
         </p:txBody>
@@ -23248,7 +23248,7 @@
                 </a:solidFill>
                 <a:latin typeface="Inter"/>
               </a:rPr>
-              <a:t>WHY JPM</a:t>
+              <a:t>WHY SANTANDER</a:t>
             </a:r>
           </a:p>
         </p:txBody>
@@ -23287,7 +23287,7 @@
                 </a:solidFill>
                 <a:latin typeface="Inter"/>
               </a:rPr>
-              <a:t>~56 K ingés tech.</a:t>
+              <a:t>~15–20 K tech (Santander Global</a:t>
             </a:r>
           </a:p>
           <a:p>
@@ -23303,7 +23303,7 @@
                 </a:solidFill>
                 <a:latin typeface="Inter"/>
               </a:rPr>
-              <a:t>LLM Suite (interne) déjà rolled out à</a:t>
+              <a:t>T&amp;O + Openbank + Cardinal).</a:t>
             </a:r>
           </a:p>
           <a:p>
@@ -23319,7 +23319,7 @@
                 </a:solidFill>
                 <a:latin typeface="Inter"/>
               </a:rPr>
-              <a:t>200 K+ employés en 2024.</a:t>
+              <a:t>Ana Botín mentionne l'IA à chaque</a:t>
             </a:r>
           </a:p>
           <a:p>
@@ -23335,7 +23335,7 @@
                 </a:solidFill>
                 <a:latin typeface="Inter"/>
               </a:rPr>
-              <a:t>Jamie Dimon mentionne l'IA dans</a:t>
+              <a:t>results call.</a:t>
             </a:r>
           </a:p>
           <a:p>
@@ -23351,7 +23351,23 @@
                 </a:solidFill>
                 <a:latin typeface="Inter"/>
               </a:rPr>
-              <a:t>chaque shareholder letter.</a:t>
+              <a:t>Partenariats OpenAI + Google Cloud</a:t>
+            </a:r>
+          </a:p>
+          <a:p>
+            <a:pPr algn="l">
+              <a:lnSpc>
+                <a:spcPct val="150000"/>
+              </a:lnSpc>
+            </a:pPr>
+            <a:r>
+              <a:rPr sz="1100" b="0" i="0">
+                <a:solidFill>
+                  <a:srgbClr val="F5F5F5"/>
+                </a:solidFill>
+                <a:latin typeface="Inter"/>
+              </a:rPr>
+              <a:t>annoncés en 2024.</a:t>
             </a:r>
           </a:p>
         </p:txBody>
@@ -23517,7 +23533,7 @@
                 </a:solidFill>
                 <a:latin typeface="Inter"/>
               </a:rPr>
-              <a:t>Pression Mary Erdoes + Daniel Pinto</a:t>
+              <a:t>« One Transformation » T&amp;O lancée</a:t>
             </a:r>
           </a:p>
           <a:p>
@@ -23533,7 +23549,7 @@
                 </a:solidFill>
                 <a:latin typeface="Inter"/>
               </a:rPr>
-              <a:t>sur productivité dev.</a:t>
+              <a:t>2024 sous Dirk Marzluf.</a:t>
             </a:r>
           </a:p>
           <a:p>
@@ -23549,7 +23565,7 @@
                 </a:solidFill>
                 <a:latin typeface="Inter"/>
               </a:rPr>
-              <a:t>Copilot déployé mais ROI sous-mesuré.</a:t>
+              <a:t>BBVA a déployé ChatGPT Enterprise</a:t>
             </a:r>
           </a:p>
           <a:p>
@@ -23565,7 +23581,7 @@
                 </a:solidFill>
                 <a:latin typeface="Inter"/>
               </a:rPr>
-              <a:t>Auditeurs OCC / Fed regardent les</a:t>
+              <a:t>org-wide → pression compétitive directe.</a:t>
             </a:r>
           </a:p>
           <a:p>
@@ -23581,7 +23597,23 @@
                 </a:solidFill>
                 <a:latin typeface="Inter"/>
               </a:rPr>
-              <a:t>outils AI sanctionnés.</a:t>
+              <a:t>DORA + EU AI Act = urgence</a:t>
+            </a:r>
+          </a:p>
+          <a:p>
+            <a:pPr algn="l">
+              <a:lnSpc>
+                <a:spcPct val="150000"/>
+              </a:lnSpc>
+            </a:pPr>
+            <a:r>
+              <a:rPr sz="1100" b="0" i="0">
+                <a:solidFill>
+                  <a:srgbClr val="F5F5F5"/>
+                </a:solidFill>
+                <a:latin typeface="Inter"/>
+              </a:rPr>
+              <a:t>gouvernance IA.</a:t>
             </a:r>
           </a:p>
         </p:txBody>
@@ -23747,7 +23779,7 @@
                 </a:solidFill>
                 <a:latin typeface="Inter"/>
               </a:rPr>
-              <a:t>Velocity (Markets Tech).</a:t>
+              <a:t>Velocity (Openbank, digital-native).</a:t>
             </a:r>
           </a:p>
           <a:p>
@@ -23779,7 +23811,7 @@
                 </a:solidFill>
                 <a:latin typeface="Inter"/>
               </a:rPr>
-              <a:t>données régulées).</a:t>
+              <a:t>ECB / BoE / Fed).</a:t>
             </a:r>
           </a:p>
           <a:p>
@@ -23795,7 +23827,7 @@
                 </a:solidFill>
                 <a:latin typeface="Inter"/>
               </a:rPr>
-              <a:t>Onboarding (rotations internes).</a:t>
+              <a:t>Onboarding (rotations 10+ pays).</a:t>
             </a:r>
           </a:p>
           <a:p>
@@ -23811,7 +23843,7 @@
                 </a:solidFill>
                 <a:latin typeface="Inter"/>
               </a:rPr>
-              <a:t>Cost (Copilot ne couvre plus le besoin).</a:t>
+              <a:t>Cost (réduction IT spend / revenue).</a:t>
             </a:r>
           </a:p>
         </p:txBody>
@@ -23977,7 +24009,7 @@
                 </a:solidFill>
                 <a:latin typeface="Inter"/>
               </a:rPr>
-              <a:t>Frontier models évoluent vite —</a:t>
+              <a:t>Talent IA cher en Iberia →</a:t>
             </a:r>
           </a:p>
           <a:p>
@@ -23993,7 +24025,7 @@
                 </a:solidFill>
                 <a:latin typeface="Inter"/>
               </a:rPr>
-              <a:t>model neutrality est un argument</a:t>
+              <a:t>outil = levier hiring &amp; rétention.</a:t>
             </a:r>
           </a:p>
           <a:p>
@@ -24009,7 +24041,7 @@
                 </a:solidFill>
                 <a:latin typeface="Inter"/>
               </a:rPr>
-              <a:t>de résilience.</a:t>
+              <a:t>Model neutrality = résilience face à</a:t>
             </a:r>
           </a:p>
           <a:p>
@@ -24025,7 +24057,7 @@
                 </a:solidFill>
                 <a:latin typeface="Inter"/>
               </a:rPr>
-              <a:t>Claude Code en évaluation chez les</a:t>
+              <a:t>l'écosystème EU souverain.</a:t>
             </a:r>
           </a:p>
           <a:p>
@@ -24041,7 +24073,23 @@
                 </a:solidFill>
                 <a:latin typeface="Inter"/>
               </a:rPr>
-              <a:t>pairs (GS, Citi) → urgence.</a:t>
+              <a:t>Claude Code en éval chez les pairs</a:t>
+            </a:r>
+          </a:p>
+          <a:p>
+            <a:pPr algn="l">
+              <a:lnSpc>
+                <a:spcPct val="150000"/>
+              </a:lnSpc>
+            </a:pPr>
+            <a:r>
+              <a:rPr sz="1100" b="0" i="0">
+                <a:solidFill>
+                  <a:srgbClr val="F5F5F5"/>
+                </a:solidFill>
+                <a:latin typeface="Inter"/>
+              </a:rPr>
+              <a:t>Européens (ING, BNP).</a:t>
             </a:r>
           </a:p>
         </p:txBody>
@@ -24181,7 +24229,7 @@
                 </a:solidFill>
                 <a:latin typeface="Inter"/>
               </a:rPr>
-              <a:t>PART 1  ·  JPMORGAN · STAKEHOLDERS</a:t>
+              <a:t>PART 1  ·  SANTANDER · STAKEHOLDERS</a:t>
             </a:r>
           </a:p>
         </p:txBody>
@@ -24420,7 +24468,7 @@
                 </a:solidFill>
                 <a:latin typeface="Inter"/>
               </a:rPr>
-              <a:t>Power signals : budget, hiring, public statements, sponsorship d'initiatives IA.</a:t>
+              <a:t>Power signals : budget T&amp;O, hiring T&amp;O Madrid/London, sponsorship d'initiatives IA Botín-niveau.</a:t>
             </a:r>
           </a:p>
         </p:txBody>
@@ -24498,7 +24546,7 @@
                 </a:solidFill>
                 <a:latin typeface="Inter"/>
               </a:rPr>
-              <a:t>Dir / VP Dev Productivity</a:t>
+              <a:t>Openbank CTO + Head of Engineering</a:t>
             </a:r>
           </a:p>
         </p:txBody>
@@ -24537,7 +24585,7 @@
                 </a:solidFill>
                 <a:latin typeface="Inter"/>
               </a:rPr>
-              <a:t>Buyer économique des dev tools. Première porte d'entrée.</a:t>
+              <a:t>Wedge #1. Filiale digital-native, autonome, procurement plus court.</a:t>
             </a:r>
           </a:p>
         </p:txBody>
@@ -24576,7 +24624,7 @@
                 </a:solidFill>
                 <a:latin typeface="Inter"/>
               </a:rPr>
-              <a:t>LinkedIn → cold email avec ROI one-pager + ref customer.</a:t>
+              <a:t>Cold + LinkedIn. Message : « pilote 30 j sur 1 squad, métriques pré-définies ».</a:t>
             </a:r>
           </a:p>
         </p:txBody>
@@ -24698,7 +24746,7 @@
                 </a:solidFill>
                 <a:latin typeface="Inter"/>
               </a:rPr>
-              <a:t>Mariana Lopes / Larry Feinsmith</a:t>
+              <a:t>Dir / VP Developer Productivity — Santander T&amp;O</a:t>
             </a:r>
           </a:p>
         </p:txBody>
@@ -24737,7 +24785,7 @@
                 </a:solidFill>
                 <a:latin typeface="Inter"/>
               </a:rPr>
-              <a:t>Strategic Tech / Innovation. Sponsor possible LLM Suite v2.</a:t>
+              <a:t>Buyer économique au niveau Groupe. Porte le budget dev tools.</a:t>
             </a:r>
           </a:p>
         </p:txBody>
@@ -24776,7 +24824,7 @@
                 </a:solidFill>
                 <a:latin typeface="Inter"/>
               </a:rPr>
-              <a:t>Warm intro via Cursor exec ou customer ref. Conférence (QCon).</a:t>
+              <a:t>Warm intro Madrid tech community + ref customer EU bank si dispo.</a:t>
             </a:r>
           </a:p>
         </p:txBody>
@@ -24898,7 +24946,7 @@
                 </a:solidFill>
                 <a:latin typeface="Inter"/>
               </a:rPr>
-              <a:t>AppSec leadership (sous Pat Opet, CISO)</a:t>
+              <a:t>AppSec leadership (sous le CISO Groupe)</a:t>
             </a:r>
           </a:p>
         </p:txBody>
@@ -24937,7 +24985,7 @@
                 </a:solidFill>
                 <a:latin typeface="Inter"/>
               </a:rPr>
-              <a:t>Gatekeeper. Pas un blocker si Privacy Mode + SOC 2 anticipés.</a:t>
+              <a:t>Gatekeeper. Pas un blocker si Privacy Mode + SOC 2 + DORA-aligned anticipés.</a:t>
             </a:r>
           </a:p>
         </p:txBody>
@@ -24976,7 +25024,7 @@
                 </a:solidFill>
                 <a:latin typeface="Inter"/>
               </a:rPr>
-              <a:t>On les inclut tôt, on envoie SIG + pentest avant de demander.</a:t>
+              <a:t>On les inclut tôt, on envoie SIG + pentest + DPA avant de demander.</a:t>
             </a:r>
           </a:p>
         </p:txBody>
@@ -25098,7 +25146,7 @@
                 </a:solidFill>
                 <a:latin typeface="Inter"/>
               </a:rPr>
-              <a:t>Lori Beer (Global CIO)</a:t>
+              <a:t>Dirk Marzluf (Group Head of T&amp;O)</a:t>
             </a:r>
           </a:p>
         </p:txBody>
@@ -25137,7 +25185,7 @@
                 </a:solidFill>
                 <a:latin typeface="Inter"/>
               </a:rPr>
-              <a:t>Exec sponsor. Pas en first touch — on l'engage quand on a un signal.</a:t>
+              <a:t>Exec sponsor. Pas en first touch — on l'engage quand on a un POC chiffré.</a:t>
             </a:r>
           </a:p>
         </p:txBody>
@@ -25176,7 +25224,7 @@
                 </a:solidFill>
                 <a:latin typeface="Inter"/>
               </a:rPr>
-              <a:t>Une fois pilote chiffré : board-level ROI + risk reduction story.</a:t>
+              <a:t>Une fois POC live : board-level ROI + risk reduction story.</a:t>
             </a:r>
           </a:p>
         </p:txBody>
@@ -25337,7 +25385,7 @@
                 </a:solidFill>
                 <a:latin typeface="Inter"/>
               </a:rPr>
-              <a:t>Adoption shadow = signal Marcel-style. Free tier monitoring.</a:t>
+              <a:t>Adoption shadow = signal Marcel-style. Free tier monitoring sur emails Santander.</a:t>
             </a:r>
           </a:p>
         </p:txBody>
@@ -25376,7 +25424,7 @@
                 </a:solidFill>
                 <a:latin typeface="Inter"/>
               </a:rPr>
-              <a:t>On surveille les signups internes, on identifie un champion IC.</a:t>
+              <a:t>On surveille signups, on identifie un staff IC champion à Madrid.</a:t>
             </a:r>
           </a:p>
         </p:txBody>
@@ -25560,7 +25608,7 @@
                 </a:solidFill>
                 <a:latin typeface="Inter"/>
               </a:rPr>
-              <a:t>PART 1  ·  JPMORGAN · ENTRY + 90 DAYS</a:t>
+              <a:t>PART 1  ·  SANTANDER · ENTRY + 90 DAYS</a:t>
             </a:r>
           </a:p>
         </p:txBody>
@@ -25799,7 +25847,7 @@
                 </a:solidFill>
                 <a:latin typeface="Inter"/>
               </a:rPr>
-              <a:t>Outreach multi-canal, séquencé, mesurable. 90 jours pour un POC chiffré.</a:t>
+              <a:t>Outreach multi-canal, séquencé, mesurable. 90 jours pour un POC Openbank chiffré.</a:t>
             </a:r>
           </a:p>
         </p:txBody>
@@ -25965,7 +26013,7 @@
                 </a:solidFill>
                 <a:latin typeface="Inter"/>
               </a:rPr>
-              <a:t>Cold outbound</a:t>
+              <a:t>Openbank-first</a:t>
             </a:r>
           </a:p>
         </p:txBody>
@@ -26004,7 +26052,7 @@
                 </a:solidFill>
                 <a:latin typeface="Inter"/>
               </a:rPr>
-              <a:t>Dir DevProd + AppSec, 3 touches/sem, message ROI + 1 ref F100.</a:t>
+              <a:t>Wedge digital-native. Cible Openbank CTO + Head of Eng. Procurement plus court.</a:t>
             </a:r>
           </a:p>
         </p:txBody>
@@ -26043,7 +26091,7 @@
                 </a:solidFill>
                 <a:latin typeface="Inter"/>
               </a:rPr>
-              <a:t>Warm intro</a:t>
+              <a:t>Cold outbound</a:t>
             </a:r>
           </a:p>
         </p:txBody>
@@ -26082,7 +26130,7 @@
                 </a:solidFill>
                 <a:latin typeface="Inter"/>
               </a:rPr>
-              <a:t>Via investor / advisor / customer overlap (Capital One, GS si déjà clients).</a:t>
+              <a:t>Dir DevProd Santander T&amp;O + AppSec, 3 touches/sem, ROI + ref EU bank.</a:t>
             </a:r>
           </a:p>
         </p:txBody>
@@ -26121,7 +26169,7 @@
                 </a:solidFill>
                 <a:latin typeface="Inter"/>
               </a:rPr>
-              <a:t>Conférence</a:t>
+              <a:t>Warm intro</a:t>
             </a:r>
           </a:p>
         </p:txBody>
@@ -26160,7 +26208,7 @@
                 </a:solidFill>
                 <a:latin typeface="Inter"/>
               </a:rPr>
-              <a:t>QCon NY, AWS re:Invent, Strange Loop — chasser les talks JPM.</a:t>
+              <a:t>Madrid tech community (South Summit, Endeavor, Wayra alumni). Petit monde.</a:t>
             </a:r>
           </a:p>
         </p:txBody>
@@ -26199,7 +26247,7 @@
                 </a:solidFill>
                 <a:latin typeface="Inter"/>
               </a:rPr>
-              <a:t>Bottom-up</a:t>
+              <a:t>Conférence</a:t>
             </a:r>
           </a:p>
         </p:txBody>
@@ -26238,7 +26286,7 @@
                 </a:solidFill>
                 <a:latin typeface="Inter"/>
               </a:rPr>
-              <a:t>Free tier monitoring → identification d'un champion IC interne.</a:t>
+              <a:t>South Summit Madrid · Money 20/20 Europe · DevOpsCon Madrid.</a:t>
             </a:r>
           </a:p>
         </p:txBody>
@@ -26277,7 +26325,7 @@
                 </a:solidFill>
                 <a:latin typeface="Inter"/>
               </a:rPr>
-              <a:t>Content</a:t>
+              <a:t>Bottom-up</a:t>
             </a:r>
           </a:p>
         </p:txBody>
@@ -26316,7 +26364,7 @@
                 </a:solidFill>
                 <a:latin typeface="Inter"/>
               </a:rPr>
-              <a:t>POV blog : « AI coding in regulated FS » — share organique ciblé.</a:t>
+              <a:t>Free tier monitoring sur @santander.com → champion IC à Madrid/Boston.</a:t>
             </a:r>
           </a:p>
         </p:txBody>
@@ -26521,7 +26569,7 @@
                 </a:solidFill>
                 <a:latin typeface="Inter"/>
               </a:rPr>
-              <a:t>Research deep + 3 cold touches/sem + 1 warm intro vise.</a:t>
+              <a:t>Research Openbank + Santander T&amp;O.</a:t>
             </a:r>
           </a:p>
           <a:p>
@@ -26537,7 +26585,23 @@
                 </a:solidFill>
                 <a:latin typeface="Inter"/>
               </a:rPr>
-              <a:t>Success : 1 meeting Dir DevProd, 1 meeting AppSec.</a:t>
+              <a:t>3 cold touches/sem + 1 warm intro Madrid.</a:t>
+            </a:r>
+          </a:p>
+          <a:p>
+            <a:pPr algn="l">
+              <a:lnSpc>
+                <a:spcPct val="135000"/>
+              </a:lnSpc>
+            </a:pPr>
+            <a:r>
+              <a:rPr sz="1050" b="0" i="0">
+                <a:solidFill>
+                  <a:srgbClr val="A0A0A0"/>
+                </a:solidFill>
+                <a:latin typeface="Inter"/>
+              </a:rPr>
+              <a:t>Success : 1 mtg Openbank CTO, 1 mtg AppSec.</a:t>
             </a:r>
           </a:p>
         </p:txBody>
@@ -26615,7 +26679,7 @@
                 </a:solidFill>
                 <a:latin typeface="Inter"/>
               </a:rPr>
-              <a:t>Discovery + scoping POC.</a:t>
+              <a:t>Discovery Openbank + parallel intro T&amp;O.</a:t>
             </a:r>
           </a:p>
           <a:p>
@@ -26631,7 +26695,7 @@
                 </a:solidFill>
                 <a:latin typeface="Inter"/>
               </a:rPr>
-              <a:t>Success : POC 20 ingés signé sur Markets Tech ou</a:t>
+              <a:t>Success : POC 20–30 ingés signé sur 1 squad</a:t>
             </a:r>
           </a:p>
           <a:p>
@@ -26647,7 +26711,7 @@
                 </a:solidFill>
                 <a:latin typeface="Inter"/>
               </a:rPr>
-              <a:t>Corporate Sector.</a:t>
+              <a:t>Openbank (mobile ou backend).</a:t>
             </a:r>
           </a:p>
         </p:txBody>
@@ -26725,7 +26789,7 @@
                 </a:solidFill>
                 <a:latin typeface="Inter"/>
               </a:rPr>
-              <a:t>POC live, Privacy Mode + audit baked-in.</a:t>
+              <a:t>POC live, Privacy Mode mandaté + DORA-aligned.</a:t>
             </a:r>
           </a:p>
           <a:p>
@@ -26757,7 +26821,7 @@
                 </a:solidFill>
                 <a:latin typeface="Inter"/>
               </a:rPr>
-              <a:t>Ready for procurement conversation.</a:t>
+              <a:t>Ouvre conversation Groupe T&amp;O sur 1 K+ seats.</a:t>
             </a:r>
           </a:p>
         </p:txBody>
@@ -26897,7 +26961,7 @@
                 </a:solidFill>
                 <a:latin typeface="Inter"/>
               </a:rPr>
-              <a:t>PART 1  ·  JPMORGAN · PILOT MOTION</a:t>
+              <a:t>PART 1  ·  SANTANDER · PILOT MOTION</a:t>
             </a:r>
           </a:p>
         </p:txBody>
@@ -27058,7 +27122,7 @@
                 </a:solidFill>
                 <a:latin typeface="Inter"/>
               </a:rPr>
-              <a:t>INITIAL PILOT MOTION</a:t>
+              <a:t>INITIAL PILOT MOTION · OPENBANK WEDGE</a:t>
             </a:r>
           </a:p>
         </p:txBody>
@@ -27136,7 +27200,7 @@
                 </a:solidFill>
                 <a:latin typeface="Inter"/>
               </a:rPr>
-              <a:t>Scope serré, métriques pré-définies, security baked-in, sortie de POC = procurement-ready.</a:t>
+              <a:t>Openbank = path of least resistance. Success ici ouvre la conversation Groupe T&amp;O sur 1 K+ seats.</a:t>
             </a:r>
           </a:p>
         </p:txBody>
@@ -27302,7 +27366,7 @@
                 </a:solidFill>
                 <a:latin typeface="Inter"/>
               </a:rPr>
-              <a:t>20 ingés Markets Tech (high agentic</a:t>
+              <a:t>20–30 ingés Openbank (digital-native,</a:t>
             </a:r>
           </a:p>
           <a:p>
@@ -27318,7 +27382,7 @@
                 </a:solidFill>
                 <a:latin typeface="Inter"/>
               </a:rPr>
-              <a:t>relevance, multi-repo, complexité élevée).</a:t>
+              <a:t>stack moderne, vélocité élevée).</a:t>
             </a:r>
           </a:p>
           <a:p>
@@ -27350,7 +27414,23 @@
                 </a:solidFill>
                 <a:latin typeface="Inter"/>
               </a:rPr>
-              <a:t>1 repo de référence + 1 service annexe.</a:t>
+              <a:t>1 squad mobile ou backend, 1 repo de</a:t>
+            </a:r>
+          </a:p>
+          <a:p>
+            <a:pPr algn="l">
+              <a:lnSpc>
+                <a:spcPct val="150000"/>
+              </a:lnSpc>
+            </a:pPr>
+            <a:r>
+              <a:rPr sz="1100" b="0" i="0">
+                <a:solidFill>
+                  <a:srgbClr val="F5F5F5"/>
+                </a:solidFill>
+                <a:latin typeface="Inter"/>
+              </a:rPr>
+              <a:t>référence.</a:t>
             </a:r>
           </a:p>
         </p:txBody>
@@ -27762,7 +27842,7 @@
                 </a:solidFill>
                 <a:latin typeface="Inter"/>
               </a:rPr>
-              <a:t>AppSec dans loop dès le scoping.</a:t>
+              <a:t>DORA-aligned : audit logs, data</a:t>
             </a:r>
           </a:p>
           <a:p>
@@ -27778,7 +27858,23 @@
                 </a:solidFill>
                 <a:latin typeface="Inter"/>
               </a:rPr>
-              <a:t>Path audit logs validé avant le go-live.</a:t>
+              <a:t>residency EU validés.</a:t>
+            </a:r>
+          </a:p>
+          <a:p>
+            <a:pPr algn="l">
+              <a:lnSpc>
+                <a:spcPct val="150000"/>
+              </a:lnSpc>
+            </a:pPr>
+            <a:r>
+              <a:rPr sz="1100" b="0" i="0">
+                <a:solidFill>
+                  <a:srgbClr val="F5F5F5"/>
+                </a:solidFill>
+                <a:latin typeface="Inter"/>
+              </a:rPr>
+              <a:t>AppSec Groupe dans la loop dès J0.</a:t>
             </a:r>
           </a:p>
         </p:txBody>
@@ -27992,7 +28088,7 @@
                 </a:solidFill>
                 <a:latin typeface="Inter"/>
               </a:rPr>
-              <a:t>→ ouvre la conversation procurement</a:t>
+              <a:t>→ ouvre Groupe T&amp;O sur Santander</a:t>
             </a:r>
           </a:p>
           <a:p>
@@ -28008,7 +28104,7 @@
                 </a:solidFill>
                 <a:latin typeface="Inter"/>
               </a:rPr>
-              <a:t>sur 500–1 000 seats.</a:t>
+              <a:t>Global Tech : 1 000–5 000 seats.</a:t>
             </a:r>
           </a:p>
         </p:txBody>

--- a/decks/Cursor_Enterprise_Disco_Challenge.pptx
+++ b/decks/Cursor_Enterprise_Disco_Challenge.pptx
@@ -3426,7 +3426,7 @@
                 </a:solidFill>
                 <a:latin typeface="Inter"/>
               </a:rPr>
-              <a:t>~70 % des Fortune 1000 l'utilisent déjà.</a:t>
+              <a:t>~70% of the Fortune 1000 already use it.</a:t>
             </a:r>
           </a:p>
         </p:txBody>
@@ -3498,13 +3498,13 @@
               </a:lnSpc>
             </a:pPr>
             <a:r>
-              <a:rPr sz="1400" b="0" i="0">
+              <a:rPr sz="1300" b="0" i="0">
                 <a:solidFill>
                   <a:srgbClr val="F5F5F5"/>
                 </a:solidFill>
                 <a:latin typeface="Inter"/>
               </a:rPr>
-              <a:t>P1 · Greenfield F100  (20–25')</a:t>
+              <a:t>P1 · Greenfield (Spain &amp; Italy)  (20–25')</a:t>
             </a:r>
           </a:p>
           <a:p>
@@ -3514,7 +3514,7 @@
               </a:lnSpc>
             </a:pPr>
             <a:r>
-              <a:rPr sz="1400" b="0" i="0">
+              <a:rPr sz="1300" b="0" i="0">
                 <a:solidFill>
                   <a:srgbClr val="F5F5F5"/>
                 </a:solidFill>
@@ -3530,7 +3530,7 @@
               </a:lnSpc>
             </a:pPr>
             <a:r>
-              <a:rPr sz="1400" b="0" i="0">
+              <a:rPr sz="1300" b="0" i="0">
                 <a:solidFill>
                   <a:srgbClr val="F5F5F5"/>
                 </a:solidFill>
@@ -4046,7 +4046,7 @@
                 </a:solidFill>
                 <a:latin typeface="Inter"/>
               </a:rPr>
-              <a:t>VP Eng · ~650 ingénieurs · 85 % VS Code · Copilot déployé ·</a:t>
+              <a:t>VP Eng · ~650 engineers · 85% VS Code · Copilot deployed ·</a:t>
             </a:r>
           </a:p>
           <a:p>
@@ -4062,7 +4062,7 @@
                 </a:solidFill>
                 <a:latin typeface="Inter"/>
               </a:rPr>
-              <a:t>Claude Code en évaluation · 31 Cursor Pro shadow (Privacy Mode mixte).</a:t>
+              <a:t>Claude Code being evaluated · 31 Cursor Pro shadow users (mixed Privacy Mode).</a:t>
             </a:r>
           </a:p>
         </p:txBody>
@@ -4402,7 +4402,7 @@
                 </a:solidFill>
                 <a:latin typeface="Inter"/>
               </a:rPr>
-              <a:t>CE QU'ON SAIT AVANT D'ENTRER</a:t>
+              <a:t>WHAT WE KNOW BEFORE WE WALK IN</a:t>
             </a:r>
           </a:p>
         </p:txBody>
@@ -4441,7 +4441,7 @@
                 </a:solidFill>
                 <a:latin typeface="Inter"/>
               </a:rPr>
-              <a:t>Le brief, en 6 faits.</a:t>
+              <a:t>The brief, in 6 facts.</a:t>
             </a:r>
           </a:p>
         </p:txBody>
@@ -4480,7 +4480,7 @@
                 </a:solidFill>
                 <a:latin typeface="Inter"/>
               </a:rPr>
-              <a:t>Chaque fait est un levier discovery. On les exploite — pas on les répète.</a:t>
+              <a:t>Every fact is a discovery lever. We leverage them — not repeat them.</a:t>
             </a:r>
           </a:p>
         </p:txBody>
@@ -4597,7 +4597,7 @@
                 </a:solidFill>
                 <a:latin typeface="Inter"/>
               </a:rPr>
-              <a:t>→ Buyer économique principal. KPI : vélocité, talent.</a:t>
+              <a:t>→ Primary economic buyer. KPIs: velocity, talent.</a:t>
             </a:r>
           </a:p>
         </p:txBody>
@@ -4680,7 +4680,7 @@
                 </a:solidFill>
                 <a:latin typeface="Inter"/>
               </a:rPr>
-              <a:t>~85 % sur VS Code</a:t>
+              <a:t>~85% on VS Code</a:t>
             </a:r>
           </a:p>
         </p:txBody>
@@ -4719,7 +4719,7 @@
                 </a:solidFill>
                 <a:latin typeface="Inter"/>
               </a:rPr>
-              <a:t>Standard interne dominant.</a:t>
+              <a:t>Dominant internal standard.</a:t>
             </a:r>
           </a:p>
         </p:txBody>
@@ -4880,7 +4880,7 @@
                 </a:solidFill>
                 <a:latin typeface="Inter"/>
               </a:rPr>
-              <a:t>Déployé sur toute l'équipe.</a:t>
+              <a:t>Deployed across the entire team.</a:t>
             </a:r>
           </a:p>
         </p:txBody>
@@ -4919,7 +4919,7 @@
                 </a:solidFill>
                 <a:latin typeface="Inter"/>
               </a:rPr>
-              <a:t>→ Baseline connu. « Why change » = quality gap, pas absence d'outil.</a:t>
+              <a:t>→ Known baseline. 'Why change' = quality gap, not absence of tool.</a:t>
             </a:r>
           </a:p>
         </p:txBody>
@@ -5041,7 +5041,7 @@
                 </a:solidFill>
                 <a:latin typeface="Inter"/>
               </a:rPr>
-              <a:t>En évaluation active en ce moment.</a:t>
+              <a:t>Actively under evaluation right now.</a:t>
             </a:r>
           </a:p>
         </p:txBody>
@@ -5080,7 +5080,7 @@
                 </a:solidFill>
                 <a:latin typeface="Inter"/>
               </a:rPr>
-              <a:t>→ THE compétiteur. Why now est déjà établi de leur côté.</a:t>
+              <a:t>→ THE competitor. 'Why now' is already established on their side.</a:t>
             </a:r>
           </a:p>
         </p:txBody>
@@ -5202,7 +5202,7 @@
                 </a:solidFill>
                 <a:latin typeface="Inter"/>
               </a:rPr>
-              <a:t>Shadow usage interne, Privacy Mode mixte.</a:t>
+              <a:t>Shadow internal usage, mixed Privacy Mode.</a:t>
             </a:r>
           </a:p>
         </p:txBody>
@@ -5241,7 +5241,7 @@
                 </a:solidFill>
                 <a:latin typeface="Inter"/>
               </a:rPr>
-              <a:t>→ Or pur. Champion silencieux + risque sécu = leur problème, notre wedge.</a:t>
+              <a:t>→ Gold. Silent champion + sec risk = their problem, our wedge.</a:t>
             </a:r>
           </a:p>
         </p:txBody>
@@ -5402,7 +5402,7 @@
                 </a:solidFill>
                 <a:latin typeface="Inter"/>
               </a:rPr>
-              <a:t>→ 2/3 sécu. La conversation est sécurité-first, pas velocity-first.</a:t>
+              <a:t>→ 2 of 3 are security. This is a security-first conversation.</a:t>
             </a:r>
           </a:p>
         </p:txBody>
@@ -5747,7 +5747,7 @@
                 </a:solidFill>
                 <a:latin typeface="Inter"/>
               </a:rPr>
-              <a:t>STRUCTURE DU CALL</a:t>
+              <a:t>CALL STRUCTURE</a:t>
             </a:r>
           </a:p>
         </p:txBody>
@@ -5786,7 +5786,7 @@
                 </a:solidFill>
                 <a:latin typeface="Inter"/>
               </a:rPr>
-              <a:t>20–25 minutes, timeboxé.</a:t>
+              <a:t>20–25 minutes, timeboxed.</a:t>
             </a:r>
           </a:p>
         </p:txBody>
@@ -5825,7 +5825,7 @@
                 </a:solidFill>
                 <a:latin typeface="Inter"/>
               </a:rPr>
-              <a:t>Marcel parle d'abord. Sécu entre minute 5. Goal = follow-up précis, pas pilote.</a:t>
+              <a:t>Marcel speaks first. Security joins minute 5. Goal = specific follow-up, not pilot close.</a:t>
             </a:r>
           </a:p>
         </p:txBody>
@@ -5903,7 +5903,7 @@
                 </a:solidFill>
                 <a:latin typeface="Inter"/>
               </a:rPr>
-              <a:t>Cadrage</a:t>
+              <a:t>Framing</a:t>
             </a:r>
           </a:p>
         </p:txBody>
@@ -5942,7 +5942,7 @@
                 </a:solidFill>
                 <a:latin typeface="Inter"/>
               </a:rPr>
-              <a:t>Agenda · permission · ancrage sur les 31 Pro users.</a:t>
+              <a:t>Agenda · permission · anchor on the 31 Pro users.</a:t>
             </a:r>
           </a:p>
         </p:txBody>
@@ -6103,7 +6103,7 @@
                 </a:solidFill>
                 <a:latin typeface="Inter"/>
               </a:rPr>
-              <a:t>Marcel d'abord, Sécurité à partir de 5:00.</a:t>
+              <a:t>Marcel first, Security from minute 5.</a:t>
             </a:r>
           </a:p>
         </p:txBody>
@@ -6225,7 +6225,7 @@
                 </a:solidFill>
                 <a:latin typeface="Inter"/>
               </a:rPr>
-              <a:t>Thèse + 1 proof point</a:t>
+              <a:t>Thesis + 1 proof point</a:t>
             </a:r>
           </a:p>
         </p:txBody>
@@ -6264,7 +6264,7 @@
                 </a:solidFill>
                 <a:latin typeface="Inter"/>
               </a:rPr>
-              <a:t>Why now (urgence eux) · why Cursor (vs Claude Code).</a:t>
+              <a:t>Why now (their urgency) · why Cursor (vs Claude Code).</a:t>
             </a:r>
           </a:p>
         </p:txBody>
@@ -6386,7 +6386,7 @@
                 </a:solidFill>
                 <a:latin typeface="Inter"/>
               </a:rPr>
-              <a:t>Sécurité</a:t>
+              <a:t>Security</a:t>
             </a:r>
           </a:p>
         </p:txBody>
@@ -6425,7 +6425,7 @@
                 </a:solidFill>
                 <a:latin typeface="Inter"/>
               </a:rPr>
-              <a:t>Privacy Mode 3 bullets + SOC 2. J'ouvre, pas eux.</a:t>
+              <a:t>Privacy Mode 3 bullets + SOC 2. I open it, not them.</a:t>
             </a:r>
           </a:p>
         </p:txBody>
@@ -6547,7 +6547,7 @@
                 </a:solidFill>
                 <a:latin typeface="Inter"/>
               </a:rPr>
-              <a:t>Next step précis</a:t>
+              <a:t>Specific next step</a:t>
             </a:r>
           </a:p>
         </p:txBody>
@@ -6586,7 +6586,7 @@
                 </a:solidFill>
                 <a:latin typeface="Inter"/>
               </a:rPr>
-              <a:t>Follow-up nommé : qui, quand, pour quoi faire.</a:t>
+              <a:t>Named follow-up: who, when, what for.</a:t>
             </a:r>
           </a:p>
         </p:txBody>
@@ -6931,7 +6931,7 @@
                 </a:solidFill>
                 <a:latin typeface="Inter"/>
               </a:rPr>
-              <a:t>LES 90 PREMIÈRES SECONDES</a:t>
+              <a:t>THE FIRST 90 SECONDS</a:t>
             </a:r>
           </a:p>
         </p:txBody>
@@ -6970,7 +6970,7 @@
                 </a:solidFill>
                 <a:latin typeface="Inter"/>
               </a:rPr>
-              <a:t>Script d'ouverture.</a:t>
+              <a:t>Opening script.</a:t>
             </a:r>
           </a:p>
         </p:txBody>
@@ -7009,7 +7009,7 @@
                 </a:solidFill>
                 <a:latin typeface="Inter"/>
               </a:rPr>
-              <a:t>Préparation visible (nom, faits) · pas de pitch · pré-engagement sur l'agenda.</a:t>
+              <a:t>Visible preparation (name, facts) · no pitch · pre-engagement on the agenda.</a:t>
             </a:r>
           </a:p>
         </p:txBody>
@@ -7175,7 +7175,7 @@
                 </a:solidFill>
                 <a:latin typeface="Inter"/>
               </a:rPr>
-              <a:t>Marcel, merci pour ces 20 minutes — et merci à [Security Eng Lead] et [Sec team member] de vous être joints, c'est exactement la configuration la plus utile pour cette conversation. Avant de commencer : j'ai noté que 31 de vos ingénieurs sont déjà sur Cursor Pro en mode mixte. Plutôt que de pitcher, je préfère partir de cette réalité — comprendre ce que vous en voyez en interne, ce qui pousse l'évaluation Claude Code en parallèle, et où vous voulez emmener tout ça à 6 mois. Je vais passer le plus clair du temps à poser des questions. Goal côté Cursor : un follow-up précis et utile, pas un pitch. Ça vous va comme cadrage ?</a:t>
+              <a:t>Marcel, thanks for the 20 minutes — and thanks to [Security Eng Lead] and [Sec team member] for joining, this is exactly the right room for this conversation. Before we start: I noticed 31 of your engineers are already on Cursor Pro in mixed Privacy Mode. Rather than pitching, I'd rather start from that reality — understand what you're seeing internally, what's pulling the Claude Code evaluation in parallel, and where you want all of this to be in 6 months. I'm going to spend most of the time asking questions. My goal on Cursor's side: a specific, useful follow-up, not a pitch. Does that framing work for you?</a:t>
             </a:r>
           </a:p>
         </p:txBody>
@@ -7214,7 +7214,7 @@
                 </a:solidFill>
                 <a:latin typeface="Inter"/>
               </a:rPr>
-              <a:t>EFFETS — préparation visible (31 Pro, Claude Code) · self-aware (pas de pitch) · pré-engagement · sécu impliquée dès le mot 1</a:t>
+              <a:t>EFFECTS — visible preparation (31 Pro, Claude Code) · self-aware (no pitch) · pre-engagement · security involved from word 1</a:t>
             </a:r>
           </a:p>
         </p:txBody>
@@ -7554,7 +7554,7 @@
                 </a:solidFill>
                 <a:latin typeface="Inter"/>
               </a:rPr>
-              <a:t>Questions ancrées sur les faits.</a:t>
+              <a:t>Questions anchored on the facts.</a:t>
             </a:r>
           </a:p>
         </p:txBody>
@@ -7593,7 +7593,7 @@
                 </a:solidFill>
                 <a:latin typeface="Inter"/>
               </a:rPr>
-              <a:t>Chaque question pointe un fait connu. Pas de question générique.</a:t>
+              <a:t>Every question points at a known fact. No generic questions.</a:t>
             </a:r>
           </a:p>
         </p:txBody>
@@ -7671,7 +7671,7 @@
                 </a:solidFill>
                 <a:latin typeface="Inter"/>
               </a:rPr>
-              <a:t>Origine du shadow</a:t>
+              <a:t>Origin of shadow</a:t>
             </a:r>
           </a:p>
         </p:txBody>
@@ -7710,7 +7710,7 @@
                 </a:solidFill>
                 <a:latin typeface="Inter"/>
               </a:rPr>
-              <a:t>« 31 ingés sur Cursor Pro — comment c'est arrivé, et qu'est-ce qu'ils en disent quand vous leur demandez ? »</a:t>
+              <a:t>"31 engineers on Cursor Pro — how did that happen, and what do they say when you ask them?"</a:t>
             </a:r>
           </a:p>
         </p:txBody>
@@ -7749,7 +7749,7 @@
                 </a:solidFill>
                 <a:latin typeface="Inter"/>
               </a:rPr>
-              <a:t>→ Bottom-up signal. Si Marcel l'ignorait, c'est un trou de visibilité = wedge.</a:t>
+              <a:t>→ Bottom-up signal. If Marcel didn't know, that's a visibility gap = wedge.</a:t>
             </a:r>
           </a:p>
         </p:txBody>
@@ -7910,7 +7910,7 @@
                 </a:solidFill>
                 <a:latin typeface="Inter"/>
               </a:rPr>
-              <a:t>« Qu'est-ce qui vous a fait regarder Claude Code maintenant plutôt qu'il y a 6 mois, et qu'est-ce que vous attendez d'un éventuel switch ? »</a:t>
+              <a:t>"What made you look at Claude Code now rather than 6 months ago, and what would you expect from a switch?"</a:t>
             </a:r>
           </a:p>
         </p:txBody>
@@ -7949,7 +7949,7 @@
                 </a:solidFill>
                 <a:latin typeface="Inter"/>
               </a:rPr>
-              <a:t>→ Le « why now » est ici. On laisse Marcel le formuler à notre place.</a:t>
+              <a:t>→ 'Why now' lives here. We let Marcel articulate it for us.</a:t>
             </a:r>
           </a:p>
         </p:txBody>
@@ -8071,7 +8071,7 @@
                 </a:solidFill>
                 <a:latin typeface="Inter"/>
               </a:rPr>
-              <a:t>Gap Copilot</a:t>
+              <a:t>Copilot gap</a:t>
             </a:r>
           </a:p>
         </p:txBody>
@@ -8110,7 +8110,7 @@
                 </a:solidFill>
                 <a:latin typeface="Inter"/>
               </a:rPr>
-              <a:t>« Copilot est déployé wall-to-wall — quel est le travail qui devrait être assisté et ne l'est pas aujourd'hui ? »</a:t>
+              <a:t>"Copilot is deployed wall-to-wall — what work should be assisted but isn't today?"</a:t>
             </a:r>
           </a:p>
         </p:txBody>
@@ -8149,7 +8149,7 @@
                 </a:solidFill>
                 <a:latin typeface="Inter"/>
               </a:rPr>
-              <a:t>→ Refactos · large context · review. Là où Cursor a un edge tangible.</a:t>
+              <a:t>→ Refactors · large context · review. Where Cursor has a tangible edge.</a:t>
             </a:r>
           </a:p>
         </p:txBody>
@@ -8310,7 +8310,7 @@
                 </a:solidFill>
                 <a:latin typeface="Inter"/>
               </a:rPr>
-              <a:t>« Les seniors et les juniors utilisent Copilot pareil ? Y a-t-il un tier qui a discrètement décroché ? »</a:t>
+              <a:t>"Are senior and junior engineers using Copilot the same way? Is there a tier that's quietly disengaged?"</a:t>
             </a:r>
           </a:p>
         </p:txBody>
@@ -8349,7 +8349,7 @@
                 </a:solidFill>
                 <a:latin typeface="Inter"/>
               </a:rPr>
-              <a:t>→ Senior opt-out = plafond ROI ~5 %. Notre meilleure preuve de gap.</a:t>
+              <a:t>→ Senior opt-out = org ROI capped at ~5%. Our strongest gap proof.</a:t>
             </a:r>
           </a:p>
         </p:txBody>
@@ -8533,7 +8533,7 @@
                 </a:solidFill>
                 <a:latin typeface="Inter"/>
               </a:rPr>
-              <a:t>PART 2  ·  DISCO · SÉCURITÉ</a:t>
+              <a:t>PART 2  ·  DISCO · SECURITY</a:t>
             </a:r>
           </a:p>
         </p:txBody>
@@ -8694,7 +8694,7 @@
                 </a:solidFill>
                 <a:latin typeface="Inter"/>
               </a:rPr>
-              <a:t>EMBARQUER LA SÉCURITÉ (2/3 ATTENDEES)</a:t>
+              <a:t>BRING SECURITY IN (2 OF 3 ATTENDEES)</a:t>
             </a:r>
           </a:p>
         </p:txBody>
@@ -8733,7 +8733,7 @@
                 </a:solidFill>
                 <a:latin typeface="Inter"/>
               </a:rPr>
-              <a:t>Questions sécurité ancrées sur le shadow Cursor.</a:t>
+              <a:t>Security questions anchored on the shadow Cursor reality.</a:t>
             </a:r>
           </a:p>
         </p:txBody>
@@ -8772,7 +8772,7 @@
                 </a:solidFill>
                 <a:latin typeface="Inter"/>
               </a:rPr>
-              <a:t>Le sujet est déjà sur leur table — 31 Pro users en mode mixte. On le nomme.</a:t>
+              <a:t>The topic is already on their desk — 31 Pro users in mixed Privacy Mode. We name it.</a:t>
             </a:r>
           </a:p>
         </p:txBody>
@@ -8889,7 +8889,7 @@
                 </a:solidFill>
                 <a:latin typeface="Inter"/>
               </a:rPr>
-              <a:t>« Les 31 utilisateurs Pro avec Privacy Mode mixte — ça a déclenché un review interne, ou pas encore ? »</a:t>
+              <a:t>"The 31 Pro users in mixed Privacy Mode — has that triggered an internal review yet, or not?"</a:t>
             </a:r>
           </a:p>
         </p:txBody>
@@ -8928,7 +8928,7 @@
                 </a:solidFill>
                 <a:latin typeface="Inter"/>
               </a:rPr>
-              <a:t>→ Pose la réalité du risque actuel sans la dramatiser.</a:t>
+              <a:t>→ Surface the existing risk without dramatizing it.</a:t>
             </a:r>
           </a:p>
         </p:txBody>
@@ -9050,7 +9050,7 @@
                 </a:solidFill>
                 <a:latin typeface="Inter"/>
               </a:rPr>
-              <a:t>Critères de sanction</a:t>
+              <a:t>Sanction criteria</a:t>
             </a:r>
           </a:p>
         </p:txBody>
@@ -9089,7 +9089,7 @@
                 </a:solidFill>
                 <a:latin typeface="Inter"/>
               </a:rPr>
-              <a:t>« Qu'est-ce qu'un outil IA de code doit prouver pour être sanctionné chez Figma — au-delà de SOC 2 ? »</a:t>
+              <a:t>"What does an AI coding tool need to prove to be sanctioned at Figma — beyond SOC 2?"</a:t>
             </a:r>
           </a:p>
         </p:txBody>
@@ -9128,7 +9128,7 @@
                 </a:solidFill>
                 <a:latin typeface="Inter"/>
               </a:rPr>
-              <a:t>→ Audit logs ? Data residency ? BYO-key ? On note pour anticiper.</a:t>
+              <a:t>→ Audit logs? Data residency? BYO-key? We note it to anticipate.</a:t>
             </a:r>
           </a:p>
         </p:txBody>
@@ -9250,7 +9250,7 @@
                 </a:solidFill>
                 <a:latin typeface="Inter"/>
               </a:rPr>
-              <a:t>Posture Claude Code</a:t>
+              <a:t>Claude Code security posture</a:t>
             </a:r>
           </a:p>
         </p:txBody>
@@ -9289,7 +9289,7 @@
                 </a:solidFill>
                 <a:latin typeface="Inter"/>
               </a:rPr>
-              <a:t>« Comment l'évaluation Claude Code se passe côté sécurité — qu'est-ce que vous regardez en parallèle de la capacité produit ? »</a:t>
+              <a:t>"How is the Claude Code evaluation going on the security side — what are you looking at alongside product capability?"</a:t>
             </a:r>
           </a:p>
         </p:txBody>
@@ -9328,7 +9328,7 @@
                 </a:solidFill>
                 <a:latin typeface="Inter"/>
               </a:rPr>
-              <a:t>→ Donne le terrain de comparaison. Privacy Mode est un argument différenciateur.</a:t>
+              <a:t>→ Reveals the comparison terrain. Privacy Mode is a differentiated argument.</a:t>
             </a:r>
           </a:p>
         </p:txBody>
@@ -9673,7 +9673,7 @@
                 </a:solidFill>
                 <a:latin typeface="Inter"/>
               </a:rPr>
-              <a:t>TROIS ANGLES QUI MATCHENT LEUR RÉALITÉ</a:t>
+              <a:t>THREE ANGLES THAT MATCH THEIR REALITY</a:t>
             </a:r>
           </a:p>
         </p:txBody>
@@ -9712,7 +9712,7 @@
                 </a:solidFill>
                 <a:latin typeface="Inter"/>
               </a:rPr>
-              <a:t>Pourquoi Cursor — calibré pour ce dossier précis.</a:t>
+              <a:t>Why Cursor — calibrated for this specific account.</a:t>
             </a:r>
           </a:p>
         </p:txBody>
@@ -9751,7 +9751,7 @@
                 </a:solidFill>
                 <a:latin typeface="Inter"/>
               </a:rPr>
-              <a:t>On reprend les 4 différenciateurs officiels et on les zoom sur Figma.</a:t>
+              <a:t>We take the 4 official differentiators and zoom them onto Figma.</a:t>
             </a:r>
           </a:p>
         </p:txBody>
@@ -9956,7 +9956,7 @@
                 </a:solidFill>
                 <a:latin typeface="Inter"/>
               </a:rPr>
-              <a:t>85 % de l'équipe est déjà sur VS Code. Muscle memory, extensions, keymaps, settings transfèrent. Coût d'adoption ≈ 0.</a:t>
+              <a:t>85% of the team is already on VS Code. Muscle memory, extensions, keymaps, settings carry over. Adoption cost ≈ 0.</a:t>
             </a:r>
           </a:p>
         </p:txBody>
@@ -10161,7 +10161,7 @@
                 </a:solidFill>
                 <a:latin typeface="Inter"/>
               </a:rPr>
-              <a:t>Éditeur C++/WASM + infra Rust/TS = repo complexe. C'est exactement le terrain où Cursor surperforme — semantic search, indexing, retrieval.</a:t>
+              <a:t>C++/WASM editor + Rust/TS infra = complex repo. Exactly where Cursor outperforms — semantic search, indexing, retrieval.</a:t>
             </a:r>
           </a:p>
         </p:txBody>
@@ -10366,7 +10366,7 @@
                 </a:solidFill>
                 <a:latin typeface="Inter"/>
               </a:rPr>
-              <a:t>Claude Code = Anthropic-locked. Cursor donne accès au SOTA en continu — vous ne pariez pas la prochaine année sur un seul provider.</a:t>
+              <a:t>Claude Code = Anthropic-locked. Cursor keeps SOTA access flowing — you don't bet the next year on a single provider.</a:t>
             </a:r>
           </a:p>
         </p:txBody>
@@ -10571,7 +10571,7 @@
                 </a:solidFill>
                 <a:latin typeface="Inter"/>
               </a:rPr>
-              <a:t>Plan · write · review · debug · iterate dans un seul environnement. Pas un CLI à côté de l'IDE. Workflow integration &gt; intelligence brute.</a:t>
+              <a:t>Plan · write · review · debug · iterate in one environment. Not a CLI next to the IDE. Workflow integration &gt; raw intelligence.</a:t>
             </a:r>
           </a:p>
         </p:txBody>
@@ -10711,7 +10711,7 @@
                 </a:solidFill>
                 <a:latin typeface="Inter"/>
               </a:rPr>
-              <a:t>PART 2  ·  SÉCURITÉ · PRIVACY MODE</a:t>
+              <a:t>PART 2  ·  SECURITY · PRIVACY MODE</a:t>
             </a:r>
           </a:p>
         </p:txBody>
@@ -10872,7 +10872,7 @@
                 </a:solidFill>
                 <a:latin typeface="Inter"/>
               </a:rPr>
-              <a:t>MINUTE 13 — JE L'OUVRE MOI-MÊME</a:t>
+              <a:t>MINUTE 13 — I RAISE IT MYSELF</a:t>
             </a:r>
           </a:p>
         </p:txBody>
@@ -10911,7 +10911,7 @@
                 </a:solidFill>
                 <a:latin typeface="Inter"/>
               </a:rPr>
-              <a:t>Le sujet est déjà chez eux. On le tranche.</a:t>
+              <a:t>The topic is already with them. We resolve it.</a:t>
             </a:r>
           </a:p>
         </p:txBody>
@@ -10950,7 +10950,7 @@
                 </a:solidFill>
                 <a:latin typeface="Inter"/>
               </a:rPr>
-              <a:t>31 Pro users en Privacy Mode mixte = le risque est déjà réel. Voici comment Cursor le règle.</a:t>
+              <a:t>31 Pro users in mixed Privacy Mode = real existing risk. Here's how Cursor resolves it.</a:t>
             </a:r>
           </a:p>
         </p:txBody>
@@ -11028,7 +11028,7 @@
                 </a:solidFill>
                 <a:latin typeface="Inter"/>
               </a:rPr>
-              <a:t>Code non-stocké</a:t>
+              <a:t>Code not retained</a:t>
             </a:r>
           </a:p>
         </p:txBody>
@@ -11067,7 +11067,7 @@
                 </a:solidFill>
                 <a:latin typeface="Inter"/>
               </a:rPr>
-              <a:t>Customer code is not stored or retained — c'est contractuel, pas un toggle.</a:t>
+              <a:t>Customer code is not stored or retained — contractual, not a toggle.</a:t>
             </a:r>
           </a:p>
         </p:txBody>
@@ -11189,7 +11189,7 @@
                 </a:solidFill>
                 <a:latin typeface="Inter"/>
               </a:rPr>
-              <a:t>Pas d'entraînement</a:t>
+              <a:t>No training</a:t>
             </a:r>
           </a:p>
         </p:txBody>
@@ -11228,7 +11228,7 @@
                 </a:solidFill>
                 <a:latin typeface="Inter"/>
               </a:rPr>
-              <a:t>Code is not used to train models — ni les nôtres, ni ceux des providers tiers.</a:t>
+              <a:t>Code is not used to train models — neither ours, nor third-party providers'.</a:t>
             </a:r>
           </a:p>
         </p:txBody>
@@ -11350,7 +11350,7 @@
                 </a:solidFill>
                 <a:latin typeface="Inter"/>
               </a:rPr>
-              <a:t>Requêtes éphémères</a:t>
+              <a:t>Ephemeral requests</a:t>
             </a:r>
           </a:p>
         </p:txBody>
@@ -11389,7 +11389,7 @@
                 </a:solidFill>
                 <a:latin typeface="Inter"/>
               </a:rPr>
-              <a:t>Requests are isolated and ephemeral — pas de log persistant des prompts.</a:t>
+              <a:t>Requests are isolated and ephemeral — no persistent prompt logs.</a:t>
             </a:r>
           </a:p>
         </p:txBody>
@@ -11550,7 +11550,7 @@
                 </a:solidFill>
                 <a:latin typeface="Inter"/>
               </a:rPr>
-              <a:t>SOC 2 · contrôles admin · visibilité · SSO. Call security ↔ security sous 7 jours.</a:t>
+              <a:t>SOC 2 · admin controls · visibility · SSO. Security ↔ security call within 7 days.</a:t>
             </a:r>
           </a:p>
         </p:txBody>
@@ -11672,7 +11672,7 @@
                 </a:solidFill>
                 <a:latin typeface="Inter"/>
               </a:rPr>
-              <a:t>Conversion shadow → sanctionné</a:t>
+              <a:t>Shadow → sanctioned</a:t>
             </a:r>
           </a:p>
         </p:txBody>
@@ -11711,7 +11711,7 @@
                 </a:solidFill>
                 <a:latin typeface="Inter"/>
               </a:rPr>
-              <a:t>Les 31 Pro users actuels peuvent basculer en Privacy Mode mandaté en &lt; 1 jour.</a:t>
+              <a:t>The 31 current Pro users can switch to mandated Privacy Mode in &lt; 1 day.</a:t>
             </a:r>
           </a:p>
         </p:txBody>
@@ -12056,7 +12056,7 @@
                 </a:solidFill>
                 <a:latin typeface="Inter"/>
               </a:rPr>
-              <a:t>MINUTE 17 — LA SORTIE</a:t>
+              <a:t>MINUTE 17 — THE EXIT</a:t>
             </a:r>
           </a:p>
         </p:txBody>
@@ -12095,7 +12095,7 @@
                 </a:solidFill>
                 <a:latin typeface="Inter"/>
               </a:rPr>
-              <a:t>Goal de l'exercice : un follow-up précis.</a:t>
+              <a:t>The exercise goal: a specific follow-up.</a:t>
             </a:r>
           </a:p>
         </p:txBody>
@@ -12134,7 +12134,7 @@
                 </a:solidFill>
                 <a:latin typeface="Inter"/>
               </a:rPr>
-              <a:t>Pas un pilote. Pas un « on se rappelle ». Un meeting nommé, daté, avec un purpose.</a:t>
+              <a:t>Not a pilot. Not a 'let's reconnect.' A named meeting, dated, with a purpose.</a:t>
             </a:r>
           </a:p>
         </p:txBody>
@@ -12261,7 +12261,7 @@
                 </a:solidFill>
                 <a:latin typeface="Inter"/>
               </a:rPr>
-              <a:t>FOLLOW-UP PROPOSÉ</a:t>
+              <a:t>PROPOSED FOLLOW-UP</a:t>
             </a:r>
           </a:p>
         </p:txBody>
@@ -12294,13 +12294,13 @@
               </a:lnSpc>
             </a:pPr>
             <a:r>
-              <a:rPr sz="1800" b="1" i="0">
+              <a:rPr sz="1700" b="1" i="0">
                 <a:solidFill>
                   <a:srgbClr val="F5F5F5"/>
                 </a:solidFill>
                 <a:latin typeface="Inter"/>
               </a:rPr>
-              <a:t>60 min, sous 10 jours — Cursor SE + Cursor Security ↔ Figma DevEx + AppSec.</a:t>
+              <a:t>60 minutes, within 10 days — Cursor SE + Cursor Security ↔ Figma DevEx + AppSec.</a:t>
             </a:r>
           </a:p>
         </p:txBody>
@@ -12339,7 +12339,7 @@
                 </a:solidFill>
                 <a:latin typeface="Inter"/>
               </a:rPr>
-              <a:t>Purpose : (1) scoping technique d'un POC 20–30 ingés sur un repo nommé, métriques pré-définies,</a:t>
+              <a:t>Purpose: (1) technical scoping of a 20–30-engineer POC on a named repo, pre-defined metrics,</a:t>
             </a:r>
           </a:p>
           <a:p>
@@ -12355,7 +12355,7 @@
                 </a:solidFill>
                 <a:latin typeface="Inter"/>
               </a:rPr>
-              <a:t>Privacy Mode mandaté ; (2) review sécu parallèle (SIG, pentest, archi, DPA envoyés J-7).</a:t>
+              <a:t>Privacy Mode mandated; (2) parallel security review (SIG, pentest, architecture, DPA sent D-7).</a:t>
             </a:r>
           </a:p>
         </p:txBody>
@@ -12394,7 +12394,7 @@
                 </a:solidFill>
                 <a:latin typeface="Inter"/>
               </a:rPr>
-              <a:t>PHRASE À DIRE</a:t>
+              <a:t>WHAT TO SAY</a:t>
             </a:r>
           </a:p>
         </p:txBody>
@@ -12433,7 +12433,7 @@
                 </a:solidFill>
                 <a:latin typeface="Inter"/>
               </a:rPr>
-              <a:t>« Marcel, ça vaut le coup qu'on bloque 60 min sous 10 jours, vous + sécu + nos équivalents ? Je vous envoie le draft d'agenda dans la journée. »</a:t>
+              <a:t>"Marcel, is it worth blocking 60 minutes within 10 days — you + security + our counterparts? I'll send you a draft agenda today."</a:t>
             </a:r>
           </a:p>
         </p:txBody>
@@ -12755,7 +12755,7 @@
                 </a:solidFill>
                 <a:latin typeface="Inter"/>
               </a:rPr>
-              <a:t>2–3 min silencieuses pour rassembler. Puis : top insights · deal hypothesis ·</a:t>
+              <a:t>2–3 silent minutes to gather. Then: top insights · deal hypothesis ·</a:t>
             </a:r>
           </a:p>
           <a:p>
@@ -12771,7 +12771,7 @@
                 </a:solidFill>
                 <a:latin typeface="Inter"/>
               </a:rPr>
-              <a:t>questions stratégiques · risks · self-assessment.</a:t>
+              <a:t>strategic questions · risks · self-assessment.</a:t>
             </a:r>
           </a:p>
         </p:txBody>
@@ -13111,7 +13111,7 @@
                 </a:solidFill>
                 <a:latin typeface="Inter"/>
               </a:rPr>
-              <a:t>60 MINUTES, TROIS EXERCICES CONNECTÉS</a:t>
+              <a:t>60 MINUTES, THREE CONNECTED EXERCISES</a:t>
             </a:r>
           </a:p>
         </p:txBody>
@@ -13150,7 +13150,7 @@
                 </a:solidFill>
                 <a:latin typeface="Inter"/>
               </a:rPr>
-              <a:t>Comment le temps va passer.</a:t>
+              <a:t>How the time will be spent.</a:t>
             </a:r>
           </a:p>
         </p:txBody>
@@ -13189,7 +13189,7 @@
                 </a:solidFill>
                 <a:latin typeface="Inter"/>
               </a:rPr>
-              <a:t>Account-development mindset informe la discovery. Une histoire, trois preuves.</a:t>
+              <a:t>Account-development mindset informs discovery. One story, three proofs.</a:t>
             </a:r>
           </a:p>
         </p:txBody>
@@ -13394,7 +13394,7 @@
                 </a:solidFill>
                 <a:latin typeface="Inter"/>
               </a:rPr>
-              <a:t>Greenfield Pipeline (F100)</a:t>
+              <a:t>Greenfield Pipeline (Spain &amp; Italy)</a:t>
             </a:r>
           </a:p>
         </p:txBody>
@@ -14222,7 +14222,7 @@
                 </a:solidFill>
                 <a:latin typeface="Inter"/>
               </a:rPr>
-              <a:t>À REMPLIR PENDANT LES 2 MIN SILENCIEUSES</a:t>
+              <a:t>TO FILL IN DURING THE 2 SILENT MINUTES</a:t>
             </a:r>
           </a:p>
         </p:txBody>
@@ -14261,7 +14261,7 @@
                 </a:solidFill>
                 <a:latin typeface="Inter"/>
               </a:rPr>
-              <a:t>Top 3–5 insights + hypothèse de deal.</a:t>
+              <a:t>Top 3–5 insights + deal hypothesis.</a:t>
             </a:r>
           </a:p>
         </p:txBody>
@@ -14300,7 +14300,7 @@
                 </a:solidFill>
                 <a:latin typeface="Inter"/>
               </a:rPr>
-              <a:t>Format : un insight = un fait observé en disco + ce qu'il déclenche.</a:t>
+              <a:t>Format: one insight = one observed fact from discovery + what it triggers.</a:t>
             </a:r>
           </a:p>
         </p:txBody>
@@ -14427,7 +14427,7 @@
                 </a:solidFill>
                 <a:latin typeface="Inter"/>
               </a:rPr>
-              <a:t>TOP INSIGHTS (à formuler en live)</a:t>
+              <a:t>TOP INSIGHTS (formulate live)</a:t>
             </a:r>
           </a:p>
         </p:txBody>
@@ -14466,7 +14466,7 @@
                 </a:solidFill>
                 <a:latin typeface="Inter"/>
               </a:rPr>
-              <a:t>1. Marcel sait pour les 31 ? → si oui, champion potentiel ; si non, trou de visibilité.</a:t>
+              <a:t>1. Does Marcel know about the 31? → if yes, potential champion; if no, visibility gap.</a:t>
             </a:r>
           </a:p>
         </p:txBody>
@@ -14505,7 +14505,7 @@
                 </a:solidFill>
                 <a:latin typeface="Inter"/>
               </a:rPr>
-              <a:t>2. Claude Code = vrai eval ou veille ? → urgence réelle ou parking.</a:t>
+              <a:t>2. Claude Code = real eval or scouting? → real urgency or parked.</a:t>
             </a:r>
           </a:p>
         </p:txBody>
@@ -14544,7 +14544,7 @@
                 </a:solidFill>
                 <a:latin typeface="Inter"/>
               </a:rPr>
-              <a:t>3. Senior IC opt-out sur Copilot ? → preuve de gap quality, pas absence d'outil.</a:t>
+              <a:t>3. Senior IC opt-out on Copilot? → proof of quality gap, not tool absence.</a:t>
             </a:r>
           </a:p>
         </p:txBody>
@@ -14583,7 +14583,7 @@
                 </a:solidFill>
                 <a:latin typeface="Inter"/>
               </a:rPr>
-              <a:t>4. Posture sécu : bloquant ou facilitant ? → vitesse de deal.</a:t>
+              <a:t>4. Security posture: blocking or facilitating? → deal velocity.</a:t>
             </a:r>
           </a:p>
         </p:txBody>
@@ -14622,7 +14622,7 @@
                 </a:solidFill>
                 <a:latin typeface="Inter"/>
               </a:rPr>
-              <a:t>5. Budget pré-alloué ? → délai de signature 3 mois vs 9 mois.</a:t>
+              <a:t>5. Pre-allocated budget? → 3-month vs 9-month signature delay.</a:t>
             </a:r>
           </a:p>
         </p:txBody>
@@ -14788,7 +14788,7 @@
                 </a:solidFill>
                 <a:latin typeface="Inter"/>
               </a:rPr>
-              <a:t>Setup typique :</a:t>
+              <a:t>Typical setup:</a:t>
             </a:r>
           </a:p>
           <a:p>
@@ -14804,7 +14804,7 @@
                 </a:solidFill>
                 <a:latin typeface="Inter"/>
               </a:rPr>
-              <a:t>• Urgence moyenne (Claude Code</a:t>
+              <a:t>• Medium urgency (Claude Code</a:t>
             </a:r>
           </a:p>
           <a:p>
@@ -14820,7 +14820,7 @@
                 </a:solidFill>
                 <a:latin typeface="Inter"/>
               </a:rPr>
-              <a:t>   est en eval, pas en décision)</a:t>
+              <a:t>   is in eval, not decision)</a:t>
             </a:r>
           </a:p>
           <a:p>
@@ -14836,7 +14836,7 @@
                 </a:solidFill>
                 <a:latin typeface="Inter"/>
               </a:rPr>
-              <a:t>• Champion à confirmer (Marcel ?</a:t>
+              <a:t>• Champion TBD (Marcel? or a</a:t>
             </a:r>
           </a:p>
           <a:p>
@@ -14852,7 +14852,7 @@
                 </a:solidFill>
                 <a:latin typeface="Inter"/>
               </a:rPr>
-              <a:t>   ou un staff IC sur les 31 Pro ?)</a:t>
+              <a:t>   staff IC among the 31 Pro?)</a:t>
             </a:r>
           </a:p>
           <a:p>
@@ -14868,7 +14868,7 @@
                 </a:solidFill>
                 <a:latin typeface="Inter"/>
               </a:rPr>
-              <a:t>• Sécu = vraie variable</a:t>
+              <a:t>• Security = real variable</a:t>
             </a:r>
           </a:p>
           <a:p>
@@ -14884,7 +14884,7 @@
                 </a:solidFill>
                 <a:latin typeface="Inter"/>
               </a:rPr>
-              <a:t>   (deal-maker ou deal-killer)</a:t>
+              <a:t>   (deal-maker or deal-killer)</a:t>
             </a:r>
           </a:p>
           <a:p>
@@ -14900,7 +14900,7 @@
                 </a:solidFill>
                 <a:latin typeface="Inter"/>
               </a:rPr>
-              <a:t>• Deal réaliste : POC à 60 j,</a:t>
+              <a:t>• Realistic deal: 60-day POC,</a:t>
             </a:r>
           </a:p>
           <a:p>
@@ -14916,7 +14916,7 @@
                 </a:solidFill>
                 <a:latin typeface="Inter"/>
               </a:rPr>
-              <a:t>   500–650 seats à 6–9 mois.</a:t>
+              <a:t>   500–650 seats at 6–9 months.</a:t>
             </a:r>
           </a:p>
         </p:txBody>
@@ -15056,7 +15056,7 @@
                 </a:solidFill>
                 <a:latin typeface="Inter"/>
               </a:rPr>
-              <a:t>PART 3  ·  DEBRIEF · QUESTIONS STRATÉGIQUES</a:t>
+              <a:t>PART 3  ·  DEBRIEF · STRATEGIC QUESTIONS</a:t>
             </a:r>
           </a:p>
         </p:txBody>
@@ -15217,7 +15217,7 @@
                 </a:solidFill>
                 <a:latin typeface="Inter"/>
               </a:rPr>
-              <a:t>LES 4 QUESTIONS DU PROMPT</a:t>
+              <a:t>THE 4 QUESTIONS FROM THE PROMPT</a:t>
             </a:r>
           </a:p>
         </p:txBody>
@@ -15256,7 +15256,7 @@
                 </a:solidFill>
                 <a:latin typeface="Inter"/>
               </a:rPr>
-              <a:t>Réponses préparées — à reformuler à chaud.</a:t>
+              <a:t>Pre-prepared answers — to reformulate live.</a:t>
             </a:r>
           </a:p>
         </p:txBody>
@@ -15295,7 +15295,7 @@
                 </a:solidFill>
                 <a:latin typeface="Inter"/>
               </a:rPr>
-              <a:t>Ne pas réciter. Reformuler avec ce qu'on aura entendu en disco.</a:t>
+              <a:t>Don't recite. Reformulate with what you heard in discovery.</a:t>
             </a:r>
           </a:p>
         </p:txBody>
@@ -15373,7 +15373,7 @@
                 </a:solidFill>
                 <a:latin typeface="Inter"/>
               </a:rPr>
-              <a:t>Pourquoi Figma a besoin d'une solution IA coding — Cursor ou pas ?</a:t>
+              <a:t>Why does Figma need an AI coding solution — Cursor or not?</a:t>
             </a:r>
           </a:p>
         </p:txBody>
@@ -15412,7 +15412,7 @@
                 </a:solidFill>
                 <a:latin typeface="Inter"/>
               </a:rPr>
-              <a:t>650 ingés sur du C++/WASM + Rust + TS = travail à haute complexité. Sans levier IA structuré, le talent senior va chercher la productivité ailleurs (interne ou externe).</a:t>
+              <a:t>650 engineers on C++/WASM + Rust + TS = high-complexity work. Without a structured AI lever, senior talent looks for productivity elsewhere (internal or external).</a:t>
             </a:r>
           </a:p>
         </p:txBody>
@@ -15534,7 +15534,7 @@
                 </a:solidFill>
                 <a:latin typeface="Inter"/>
               </a:rPr>
-              <a:t>Que se passe-t-il s'ils ne font rien pendant 3–6 mois ?</a:t>
+              <a:t>What happens if they do nothing for 3–6 months?</a:t>
             </a:r>
           </a:p>
         </p:txBody>
@@ -15573,7 +15573,7 @@
                 </a:solidFill>
                 <a:latin typeface="Inter"/>
               </a:rPr>
-              <a:t>Shadow Cursor monte de 31 à 100+. Claude Code peut-être déployé sans gouvernance. Le coût n'est pas l'outil — c'est la sécurité non-contrôlée + patterns figés sur Copilot.</a:t>
+              <a:t>Shadow Cursor grows from 31 to 100+. Claude Code may roll out without governance. The cost isn't the tool — it's uncontrolled security + patterns locked on Copilot.</a:t>
             </a:r>
           </a:p>
         </p:txBody>
@@ -15695,7 +15695,7 @@
                 </a:solidFill>
                 <a:latin typeface="Inter"/>
               </a:rPr>
-              <a:t>Y a-t-il un champion crédible ? Preuves ?</a:t>
+              <a:t>Is there a credible champion? Evidence?</a:t>
             </a:r>
           </a:p>
         </p:txBody>
@@ -15734,7 +15734,7 @@
                 </a:solidFill>
                 <a:latin typeface="Inter"/>
               </a:rPr>
-              <a:t>À tester : Marcel sait-il pour les 31 ? Un staff IC parmi eux est-il identifiable ? Champion = quelqu'un qui défend le deal quand on n'est pas dans la salle.</a:t>
+              <a:t>To test: does Marcel know about the 31? Is a staff IC among them identifiable? Champion = someone who defends the deal when we're not in the room.</a:t>
             </a:r>
           </a:p>
         </p:txBody>
@@ -15856,7 +15856,7 @@
                 </a:solidFill>
                 <a:latin typeface="Inter"/>
               </a:rPr>
-              <a:t>Comment Cursor est-il uniquement positionné ?</a:t>
+              <a:t>How is Cursor uniquely positioned?</a:t>
             </a:r>
           </a:p>
         </p:txBody>
@@ -15895,7 +15895,7 @@
                 </a:solidFill>
                 <a:latin typeface="Inter"/>
               </a:rPr>
-              <a:t>VS Code fork (drop-in pour 85 % de l'équipe) + model neutrality (vs Claude Code) + large codebase performance (vs Copilot) + Privacy Mode (vs shadow actuel).</a:t>
+              <a:t>VS Code fork (drop-in for 85% of the team) + model neutrality (vs Claude Code) + large codebase performance (vs Copilot) + Privacy Mode (vs current shadow usage).</a:t>
             </a:r>
           </a:p>
         </p:txBody>
@@ -16240,7 +16240,7 @@
                 </a:solidFill>
                 <a:latin typeface="Inter"/>
               </a:rPr>
-              <a:t>ANTICIPER, PUIS SE CRITIQUER</a:t>
+              <a:t>ANTICIPATE, THEN SELF-CRITIQUE</a:t>
             </a:r>
           </a:p>
         </p:txBody>
@@ -16279,7 +16279,7 @@
                 </a:solidFill>
                 <a:latin typeface="Inter"/>
               </a:rPr>
-              <a:t>Risks attendus + qu'est-ce que je changerais.</a:t>
+              <a:t>Expected risks + what I would change.</a:t>
             </a:r>
           </a:p>
         </p:txBody>
@@ -16318,7 +16318,7 @@
                 </a:solidFill>
                 <a:latin typeface="Inter"/>
               </a:rPr>
-              <a:t>Self-aware &gt; overconfident. Nommer les fragilités avant qu'on les pointe.</a:t>
+              <a:t>Self-aware &gt; overconfident. Name the fragilities before they're called out.</a:t>
             </a:r>
           </a:p>
         </p:txBody>
@@ -16445,7 +16445,7 @@
                 </a:solidFill>
                 <a:latin typeface="Inter"/>
               </a:rPr>
-              <a:t>DEAL RISKS ANTICIPÉS</a:t>
+              <a:t>ANTICIPATED DEAL RISKS</a:t>
             </a:r>
           </a:p>
         </p:txBody>
@@ -16484,7 +16484,7 @@
                 </a:solidFill>
                 <a:latin typeface="Inter"/>
               </a:rPr>
-              <a:t>Compétition Claude Code</a:t>
+              <a:t>Claude Code competition</a:t>
             </a:r>
           </a:p>
         </p:txBody>
@@ -16523,7 +16523,7 @@
                 </a:solidFill>
                 <a:latin typeface="Inter"/>
               </a:rPr>
-              <a:t>L'eval peut conclure « assez bon » avant qu'on ait livré le POC.</a:t>
+              <a:t>Eval may conclude 'good enough' before we ship our POC.</a:t>
             </a:r>
           </a:p>
         </p:txBody>
@@ -16562,7 +16562,7 @@
                 </a:solidFill>
                 <a:latin typeface="Inter"/>
               </a:rPr>
-              <a:t>Sécurité bloquante</a:t>
+              <a:t>Security as blocker</a:t>
             </a:r>
           </a:p>
         </p:txBody>
@@ -16601,7 +16601,7 @@
                 </a:solidFill>
                 <a:latin typeface="Inter"/>
               </a:rPr>
-              <a:t>Si AppSec n'est pas adressé J0, le pilote glisse de 3 mois.</a:t>
+              <a:t>If AppSec isn't addressed D0, pilot slips 3 months.</a:t>
             </a:r>
           </a:p>
         </p:txBody>
@@ -16640,7 +16640,7 @@
                 </a:solidFill>
                 <a:latin typeface="Inter"/>
               </a:rPr>
-              <a:t>Politique interne</a:t>
+              <a:t>Internal politics</a:t>
             </a:r>
           </a:p>
         </p:txBody>
@@ -16679,7 +16679,7 @@
                 </a:solidFill>
                 <a:latin typeface="Inter"/>
               </a:rPr>
-              <a:t>Copilot a un sponsor org — switch perçu comme un échec interne.</a:t>
+              <a:t>Copilot has an internal sponsor — switch read as a failure.</a:t>
             </a:r>
           </a:p>
         </p:txBody>
@@ -16718,7 +16718,7 @@
                 </a:solidFill>
                 <a:latin typeface="Inter"/>
               </a:rPr>
-              <a:t>Sprawl outils</a:t>
+              <a:t>Tool sprawl</a:t>
             </a:r>
           </a:p>
         </p:txBody>
@@ -16757,7 +16757,7 @@
                 </a:solidFill>
                 <a:latin typeface="Inter"/>
               </a:rPr>
-              <a:t>Cursor + Copilot + Claude Code en parallèle = personne ne décide.</a:t>
+              <a:t>Cursor + Copilot + Claude Code in parallel = no one decides.</a:t>
             </a:r>
           </a:p>
         </p:txBody>
@@ -16835,7 +16835,7 @@
                 </a:solidFill>
                 <a:latin typeface="Inter"/>
               </a:rPr>
-              <a:t>Vendor risk review + DPA = 60–90 j incompressibles.</a:t>
+              <a:t>Vendor risk review + DPA = 60–90 days, non-compressible.</a:t>
             </a:r>
           </a:p>
         </p:txBody>
@@ -17001,7 +17001,7 @@
                 </a:solidFill>
                 <a:latin typeface="Inter"/>
               </a:rPr>
-              <a:t>Ce qui a marché</a:t>
+              <a:t>What worked</a:t>
             </a:r>
           </a:p>
         </p:txBody>
@@ -17040,7 +17040,7 @@
                 </a:solidFill>
                 <a:latin typeface="Inter"/>
               </a:rPr>
-              <a:t>Ouvrir sur les 31 Pro = preuve de prep.</a:t>
+              <a:t>Opening on the 31 Pro = proof of prep.</a:t>
             </a:r>
           </a:p>
           <a:p>
@@ -17056,7 +17056,7 @@
                 </a:solidFill>
                 <a:latin typeface="Inter"/>
               </a:rPr>
-              <a:t>Laisser Marcel formuler le « why now ».</a:t>
+              <a:t>Letting Marcel articulate 'why now'.</a:t>
             </a:r>
           </a:p>
         </p:txBody>
@@ -17095,7 +17095,7 @@
                 </a:solidFill>
                 <a:latin typeface="Inter"/>
               </a:rPr>
-              <a:t>Ce que je changerais</a:t>
+              <a:t>What I'd change</a:t>
             </a:r>
           </a:p>
         </p:txBody>
@@ -17134,7 +17134,7 @@
                 </a:solidFill>
                 <a:latin typeface="Inter"/>
               </a:rPr>
-              <a:t>Plus de temps sur les use-cases concrets (refactos vs review).</a:t>
+              <a:t>More time on concrete use cases (refactors vs review).</a:t>
             </a:r>
           </a:p>
           <a:p>
@@ -17150,7 +17150,7 @@
                 </a:solidFill>
                 <a:latin typeface="Inter"/>
               </a:rPr>
-              <a:t>Pousser plus tôt sur le budget.</a:t>
+              <a:t>Push earlier on budget.</a:t>
             </a:r>
           </a:p>
         </p:txBody>
@@ -17228,7 +17228,7 @@
                 </a:solidFill>
                 <a:latin typeface="Inter"/>
               </a:rPr>
-              <a:t>Account thesis nourrit les questions ciblées.</a:t>
+              <a:t>Account thesis fuels targeted questions.</a:t>
             </a:r>
           </a:p>
           <a:p>
@@ -17244,7 +17244,7 @@
                 </a:solidFill>
                 <a:latin typeface="Inter"/>
               </a:rPr>
-              <a:t>Faits connus = wedges, pas accessoires.</a:t>
+              <a:t>Known facts = wedges, not accessories.</a:t>
             </a:r>
           </a:p>
         </p:txBody>
@@ -17384,7 +17384,7 @@
                 </a:solidFill>
                 <a:latin typeface="Inter"/>
               </a:rPr>
-              <a:t>PART 2  ·  ANTI-BLANK · PHRASES CLÉS</a:t>
+              <a:t>PART 2  ·  ANTI-BLANK · KEY PHRASES</a:t>
             </a:r>
           </a:p>
         </p:txBody>
@@ -17545,7 +17545,7 @@
                 </a:solidFill>
                 <a:latin typeface="Inter"/>
               </a:rPr>
-              <a:t>QUAND ON PERD LE FIL</a:t>
+              <a:t>WHEN YOU LOSE THE THREAD</a:t>
             </a:r>
           </a:p>
         </p:txBody>
@@ -17584,7 +17584,7 @@
                 </a:solidFill>
                 <a:latin typeface="Inter"/>
               </a:rPr>
-              <a:t>6 phrases à dire mot pour mot.</a:t>
+              <a:t>6 phrases to use word-for-word.</a:t>
             </a:r>
           </a:p>
         </p:txBody>
@@ -17623,7 +17623,7 @@
                 </a:solidFill>
                 <a:latin typeface="Inter"/>
               </a:rPr>
-              <a:t>Reprendre la main sans pitcher. Garder l'executive presence sous pression.</a:t>
+              <a:t>Take the wheel back without pitching. Keep executive presence under pressure.</a:t>
             </a:r>
           </a:p>
         </p:txBody>
@@ -17662,7 +17662,7 @@
                 </a:solidFill>
                 <a:latin typeface="Inter"/>
               </a:rPr>
-              <a:t>SI LE SILENCE DURE</a:t>
+              <a:t>IF SILENCE DRAGS</a:t>
             </a:r>
           </a:p>
         </p:txBody>
@@ -17701,7 +17701,7 @@
                 </a:solidFill>
                 <a:latin typeface="Inter"/>
               </a:rPr>
-              <a:t>« Je préfère vous laisser le temps — c'est votre conversation. »</a:t>
+              <a:t>"I'd rather give you the time — this is your conversation."</a:t>
             </a:r>
           </a:p>
         </p:txBody>
@@ -17740,7 +17740,7 @@
                 </a:solidFill>
                 <a:latin typeface="Inter"/>
               </a:rPr>
-              <a:t>SI ON TAPE SUR CURSOR</a:t>
+              <a:t>IF CURSOR GETS HIT</a:t>
             </a:r>
           </a:p>
         </p:txBody>
@@ -17779,7 +17779,7 @@
                 </a:solidFill>
                 <a:latin typeface="Inter"/>
               </a:rPr>
-              <a:t>« C'est un retour fair — voilà ce qu'on fait bien, voilà où on n'est pas le meilleur. »</a:t>
+              <a:t>"Fair feedback — here's what we do well, here's where we're not the best."</a:t>
             </a:r>
           </a:p>
         </p:txBody>
@@ -17818,7 +17818,7 @@
                 </a:solidFill>
                 <a:latin typeface="Inter"/>
               </a:rPr>
-              <a:t>SI ON DEMANDE UN CHIFFRE QU'ON IGNORE</a:t>
+              <a:t>IF ASKED A NUMBER YOU DON'T KNOW</a:t>
             </a:r>
           </a:p>
         </p:txBody>
@@ -17857,7 +17857,7 @@
                 </a:solidFill>
                 <a:latin typeface="Inter"/>
               </a:rPr>
-              <a:t>« Je ne veux pas inventer — je vous reviens dans la journée avec la vraie réponse. »</a:t>
+              <a:t>"I don't want to make one up — I'll get back to you with the real answer today."</a:t>
             </a:r>
           </a:p>
         </p:txBody>
@@ -17896,7 +17896,7 @@
                 </a:solidFill>
                 <a:latin typeface="Inter"/>
               </a:rPr>
-              <a:t>POUR PRESSURE-TEST</a:t>
+              <a:t>TO PRESSURE-TEST</a:t>
             </a:r>
           </a:p>
         </p:txBody>
@@ -17935,7 +17935,7 @@
                 </a:solidFill>
                 <a:latin typeface="Inter"/>
               </a:rPr>
-              <a:t>« Qu'est-ce qui devrait être vrai pour que ce soit un non ? »</a:t>
+              <a:t>"What would need to be true for this to be a no?"</a:t>
             </a:r>
           </a:p>
         </p:txBody>
@@ -17974,7 +17974,7 @@
                 </a:solidFill>
                 <a:latin typeface="Inter"/>
               </a:rPr>
-              <a:t>POUR PASSER À LA SÉCU</a:t>
+              <a:t>TO PIVOT TO SECURITY</a:t>
             </a:r>
           </a:p>
         </p:txBody>
@@ -18013,7 +18013,7 @@
                 </a:solidFill>
                 <a:latin typeface="Inter"/>
               </a:rPr>
-              <a:t>« Avant qu'on aille plus loin, je veux ouvrir la sécu — c'est là où ça se joue. »</a:t>
+              <a:t>"Before we go further, I want to open security — that's where this gets real."</a:t>
             </a:r>
           </a:p>
         </p:txBody>
@@ -18052,7 +18052,7 @@
                 </a:solidFill>
                 <a:latin typeface="Inter"/>
               </a:rPr>
-              <a:t>POUR CLORE</a:t>
+              <a:t>TO CLOSE</a:t>
             </a:r>
           </a:p>
         </p:txBody>
@@ -18091,7 +18091,7 @@
                 </a:solidFill>
                 <a:latin typeface="Inter"/>
               </a:rPr>
-              <a:t>« Une question avant qu'on bloque le follow-up : qu'est-ce que j'aurais dû demander ? »</a:t>
+              <a:t>"One question before we book the follow-up: what should I have asked?"</a:t>
             </a:r>
           </a:p>
         </p:txBody>
@@ -18392,7 +18392,7 @@
                 </a:solidFill>
                 <a:latin typeface="Inter"/>
               </a:rPr>
-              <a:t>À MASQUER PENDANT L'EXERCICE</a:t>
+              <a:t>HIDE DURING THE EXERCISE</a:t>
             </a:r>
           </a:p>
         </p:txBody>
@@ -18431,7 +18431,7 @@
                 </a:solidFill>
                 <a:latin typeface="Inter"/>
               </a:rPr>
-              <a:t>Ce qui est vraiment évalué.</a:t>
+              <a:t>What is actually being evaluated.</a:t>
             </a:r>
           </a:p>
         </p:txBody>
@@ -18470,7 +18470,7 @@
                 </a:solidFill>
                 <a:latin typeface="Inter"/>
               </a:rPr>
-              <a:t>Six dimensions, explicites dans le prompt. À émettre activement les 60 min.</a:t>
+              <a:t>Six dimensions, explicit in the prompt. To project actively across the full 60 min.</a:t>
             </a:r>
           </a:p>
         </p:txBody>
@@ -18597,7 +18597,7 @@
                 </a:solidFill>
                 <a:latin typeface="Inter"/>
               </a:rPr>
-              <a:t>CE QUI EST ÉVALUÉ (du prompt)</a:t>
+              <a:t>WHAT'S BEING EVALUATED (from prompt)</a:t>
             </a:r>
           </a:p>
         </p:txBody>
@@ -18987,7 +18987,7 @@
                 </a:solidFill>
                 <a:latin typeface="Inter"/>
               </a:rPr>
-              <a:t>Executive presence &amp; clarity</a:t>
+              <a:t>Executive presence &amp; clarity of thought</a:t>
             </a:r>
           </a:p>
         </p:txBody>
@@ -19192,7 +19192,7 @@
                 </a:solidFill>
                 <a:latin typeface="Inter"/>
               </a:rPr>
-              <a:t>SIGNAUX (du doc Cursor)</a:t>
+              <a:t>SIGNALS (from Cursor prep doc)</a:t>
             </a:r>
           </a:p>
         </p:txBody>
@@ -19231,7 +19231,7 @@
                 </a:solidFill>
                 <a:latin typeface="Inter"/>
               </a:rPr>
-              <a:t>FORTS — à émettre</a:t>
+              <a:t>STRONG — to project</a:t>
             </a:r>
           </a:p>
         </p:txBody>
@@ -19465,7 +19465,7 @@
                 </a:solidFill>
                 <a:latin typeface="Inter"/>
               </a:rPr>
-              <a:t>FAIBLES — à éviter</a:t>
+              <a:t>WEAK — to avoid</a:t>
             </a:r>
           </a:p>
         </p:txBody>
@@ -19582,7 +19582,7 @@
                 </a:solidFill>
                 <a:latin typeface="Inter"/>
               </a:rPr>
-              <a:t>○ Overconfident sans grounding</a:t>
+              <a:t>○ Overconfident without grounding</a:t>
             </a:r>
           </a:p>
         </p:txBody>
@@ -19904,7 +19904,7 @@
                 </a:solidFill>
                 <a:latin typeface="Inter"/>
               </a:rPr>
-              <a:t>GTM Iberia + Italie. Top 5 ranked, deep dive sur Santander :</a:t>
+              <a:t>Iberia + Italy GTM. Top 5 ranked, deep dive on Santander:</a:t>
             </a:r>
           </a:p>
           <a:p>
@@ -20099,7 +20099,7 @@
                 </a:solidFill>
                 <a:latin typeface="Inter"/>
               </a:rPr>
-              <a:t>PART 1  ·  CRITÈRES DE RANKING</a:t>
+              <a:t>PART 1  ·  RANKING CRITERIA</a:t>
             </a:r>
           </a:p>
         </p:txBody>
@@ -20260,7 +20260,7 @@
                 </a:solidFill>
                 <a:latin typeface="Inter"/>
               </a:rPr>
-              <a:t>AVANT LE TOP 5</a:t>
+              <a:t>BEFORE THE TOP 5</a:t>
             </a:r>
           </a:p>
         </p:txBody>
@@ -20299,7 +20299,7 @@
                 </a:solidFill>
                 <a:latin typeface="Inter"/>
               </a:rPr>
-              <a:t>Comment je classe un compte ENT Spain &amp; Italy.</a:t>
+              <a:t>How I rank an ENT account in Spain &amp; Italy.</a:t>
             </a:r>
           </a:p>
         </p:txBody>
@@ -20338,7 +20338,7 @@
                 </a:solidFill>
                 <a:latin typeface="Inter"/>
               </a:rPr>
-              <a:t>Cinq lentilles, pondérées. Toute exception = on cherche pourquoi.</a:t>
+              <a:t>Five lenses, weighted. Any exception — I find out why.</a:t>
             </a:r>
           </a:p>
         </p:txBody>
@@ -20455,7 +20455,7 @@
                 </a:solidFill>
                 <a:latin typeface="Inter"/>
               </a:rPr>
-              <a:t>≥ 5 K ingés pour un deal enterprise pertinent. Plus c'est gros, plus le math ROI parle.</a:t>
+              <a:t>≥ 5K engineers for a meaningful enterprise deal. The bigger, the louder ROI math gets.</a:t>
             </a:r>
           </a:p>
         </p:txBody>
@@ -20577,7 +20577,7 @@
                 </a:solidFill>
                 <a:latin typeface="Inter"/>
               </a:rPr>
-              <a:t>02 · AI mandate public</a:t>
+              <a:t>02 · Public AI mandate</a:t>
             </a:r>
           </a:p>
         </p:txBody>
@@ -20616,7 +20616,7 @@
                 </a:solidFill>
                 <a:latin typeface="Inter"/>
               </a:rPr>
-              <a:t>Roadmap IA exécutive annoncée → champion réception facilitée, urgence existante.</a:t>
+              <a:t>Executive-announced AI roadmap → easier champion uptake, urgency already exists.</a:t>
             </a:r>
           </a:p>
         </p:txBody>
@@ -20777,7 +20777,7 @@
                 </a:solidFill>
                 <a:latin typeface="Inter"/>
               </a:rPr>
-              <a:t>Régulés EU (DORA, EU AI Act, ECB) = Privacy Mode = enabler, pas blocker. Notre edge.</a:t>
+              <a:t>EU regulated (DORA, EU AI Act, ECB) = Privacy Mode = enabler, not blocker. Our edge.</a:t>
             </a:r>
           </a:p>
         </p:txBody>
@@ -20899,7 +20899,7 @@
                 </a:solidFill>
                 <a:latin typeface="Inter"/>
               </a:rPr>
-              <a:t>04 · Codebase complexité</a:t>
+              <a:t>04 · Codebase complexity</a:t>
             </a:r>
           </a:p>
         </p:txBody>
@@ -20938,7 +20938,7 @@
                 </a:solidFill>
                 <a:latin typeface="Inter"/>
               </a:rPr>
-              <a:t>Legacy + modern + mono / multi repo = large codebase performance pertinent.</a:t>
+              <a:t>Legacy + modern + mono/multi-repo = large codebase performance becomes pivotal.</a:t>
             </a:r>
           </a:p>
         </p:txBody>
@@ -21099,7 +21099,7 @@
                 </a:solidFill>
                 <a:latin typeface="Inter"/>
               </a:rPr>
-              <a:t>Équipe dev-tools identifiable + path procurement traçable = vélocité de deal.</a:t>
+              <a:t>Identifiable dev-tools team + traceable procurement path = deal velocity.</a:t>
             </a:r>
           </a:p>
         </p:txBody>
@@ -21483,7 +21483,7 @@
                 </a:solidFill>
                 <a:latin typeface="Inter"/>
               </a:rPr>
-              <a:t>Top 5 GTM Spain &amp; Italy.</a:t>
+              <a:t>Top 5 — Spain &amp; Italy GTM.</a:t>
             </a:r>
           </a:p>
         </p:txBody>
@@ -21522,7 +21522,7 @@
                 </a:solidFill>
                 <a:latin typeface="Inter"/>
               </a:rPr>
-              <a:t>Ranking défendable. Santander en #1 → deep-dive sur les 4 slides qui suivent.</a:t>
+              <a:t>Defensible ranking. Santander as #1 → deep-dive on the next 4 slides.</a:t>
             </a:r>
           </a:p>
         </p:txBody>
@@ -21727,7 +21727,7 @@
                 </a:solidFill>
                 <a:latin typeface="Inter"/>
               </a:rPr>
-              <a:t>~15–20 K tech · « One Transformation » sous Dirk Marzluf · régulé multi-juridictions · Openbank = wedge digital-native.</a:t>
+              <a:t>~15–20K tech · 'One Transformation' under Dirk Marzluf · multi-jurisdiction regulated · Openbank = digital-native wedge.</a:t>
             </a:r>
           </a:p>
         </p:txBody>
@@ -21766,7 +21766,7 @@
                 </a:solidFill>
                 <a:latin typeface="Inter"/>
               </a:rPr>
-              <a:t>Plus gros TAM Iberia + champion-ready.</a:t>
+              <a:t>Largest Iberia TAM + champion-ready.</a:t>
             </a:r>
           </a:p>
         </p:txBody>
@@ -21971,7 +21971,7 @@
                 </a:solidFill>
                 <a:latin typeface="Inter"/>
               </a:rPr>
-              <a:t>~10 K tech · ChatGPT Enterprise déjà déployé org-wide · narrative « born digital » sous Carlos Torres.</a:t>
+              <a:t>~10K tech · ChatGPT Enterprise already rolled out org-wide · 'born digital' under Carlos Torres.</a:t>
             </a:r>
           </a:p>
         </p:txBody>
@@ -22010,7 +22010,7 @@
                 </a:solidFill>
                 <a:latin typeface="Inter"/>
               </a:rPr>
-              <a:t>AI-ready buyer, vélocité forte.</a:t>
+              <a:t>AI-ready buyer, strong deal velocity.</a:t>
             </a:r>
           </a:p>
         </p:txBody>
@@ -22215,7 +22215,7 @@
                 </a:solidFill>
                 <a:latin typeface="Inter"/>
               </a:rPr>
-              <a:t>~15 K tech · transition énergétique = urgence · OpenInnovability AI lab · CISO mature.</a:t>
+              <a:t>~15K tech · energy transition = urgency · OpenInnovability AI lab · mature CISO function.</a:t>
             </a:r>
           </a:p>
         </p:txBody>
@@ -22254,7 +22254,7 @@
                 </a:solidFill>
                 <a:latin typeface="Inter"/>
               </a:rPr>
-              <a:t>Plus gros TAM Italie.</a:t>
+              <a:t>Largest Italy TAM.</a:t>
             </a:r>
           </a:p>
         </p:txBody>
@@ -22459,7 +22459,7 @@
                 </a:solidFill>
                 <a:latin typeface="Inter"/>
               </a:rPr>
-              <a:t>~5–7 K tech / 190 K total · Industry 4.0 + e-commerce push · régulé (medical devices).</a:t>
+              <a:t>~5–7K tech / 190K total · Industry 4.0 + e-commerce push · regulated (medical devices).</a:t>
             </a:r>
           </a:p>
         </p:txBody>
@@ -22498,7 +22498,7 @@
                 </a:solidFill>
                 <a:latin typeface="Inter"/>
               </a:rPr>
-              <a:t>Compte FR/IT, leverage industriel.</a:t>
+              <a:t>FR/IT footprint, industrial leverage.</a:t>
             </a:r>
           </a:p>
         </p:txBody>
@@ -22703,7 +22703,7 @@
                 </a:solidFill>
                 <a:latin typeface="Inter"/>
               </a:rPr>
-              <a:t>~2–3 K tech · transformation e-commerce + supply chain sous Marta Álvarez · moins de concurrence.</a:t>
+              <a:t>~2–3K tech · e-commerce + supply chain transformation under Marta Álvarez · less crowded.</a:t>
             </a:r>
           </a:p>
         </p:txBody>
@@ -22742,7 +22742,7 @@
                 </a:solidFill>
                 <a:latin typeface="Inter"/>
               </a:rPr>
-              <a:t>Moins crowded, deal accessible.</a:t>
+              <a:t>Less competitive crowding, accessible.</a:t>
             </a:r>
           </a:p>
         </p:txBody>
@@ -23121,7 +23121,7 @@
                 </a:solidFill>
                 <a:latin typeface="Inter"/>
               </a:rPr>
-              <a:t>4 angles. Tous ont une preuve publique citable (analyst calls, presse Iberia).</a:t>
+              <a:t>4 angles. Every one has a public, citable proof point.</a:t>
             </a:r>
           </a:p>
         </p:txBody>
@@ -23287,7 +23287,7 @@
                 </a:solidFill>
                 <a:latin typeface="Inter"/>
               </a:rPr>
-              <a:t>~15–20 K tech (Santander Global</a:t>
+              <a:t>~15–20K tech (Santander Global</a:t>
             </a:r>
           </a:p>
           <a:p>
@@ -23319,7 +23319,7 @@
                 </a:solidFill>
                 <a:latin typeface="Inter"/>
               </a:rPr>
-              <a:t>Ana Botín mentionne l'IA à chaque</a:t>
+              <a:t>Ana Botín references AI on every</a:t>
             </a:r>
           </a:p>
           <a:p>
@@ -23335,7 +23335,7 @@
                 </a:solidFill>
                 <a:latin typeface="Inter"/>
               </a:rPr>
-              <a:t>results call.</a:t>
+              <a:t>earnings call.</a:t>
             </a:r>
           </a:p>
           <a:p>
@@ -23351,7 +23351,7 @@
                 </a:solidFill>
                 <a:latin typeface="Inter"/>
               </a:rPr>
-              <a:t>Partenariats OpenAI + Google Cloud</a:t>
+              <a:t>OpenAI + Google Cloud partnerships</a:t>
             </a:r>
           </a:p>
           <a:p>
@@ -23367,7 +23367,7 @@
                 </a:solidFill>
                 <a:latin typeface="Inter"/>
               </a:rPr>
-              <a:t>annoncés en 2024.</a:t>
+              <a:t>announced in 2024.</a:t>
             </a:r>
           </a:p>
         </p:txBody>
@@ -23533,7 +23533,7 @@
                 </a:solidFill>
                 <a:latin typeface="Inter"/>
               </a:rPr>
-              <a:t>« One Transformation » T&amp;O lancée</a:t>
+              <a:t>'One Transformation' T&amp;O launched</a:t>
             </a:r>
           </a:p>
           <a:p>
@@ -23549,7 +23549,7 @@
                 </a:solidFill>
                 <a:latin typeface="Inter"/>
               </a:rPr>
-              <a:t>2024 sous Dirk Marzluf.</a:t>
+              <a:t>2024 under Dirk Marzluf.</a:t>
             </a:r>
           </a:p>
           <a:p>
@@ -23565,7 +23565,7 @@
                 </a:solidFill>
                 <a:latin typeface="Inter"/>
               </a:rPr>
-              <a:t>BBVA a déployé ChatGPT Enterprise</a:t>
+              <a:t>BBVA deployed ChatGPT Enterprise</a:t>
             </a:r>
           </a:p>
           <a:p>
@@ -23581,7 +23581,7 @@
                 </a:solidFill>
                 <a:latin typeface="Inter"/>
               </a:rPr>
-              <a:t>org-wide → pression compétitive directe.</a:t>
+              <a:t>org-wide → direct competitive pressure.</a:t>
             </a:r>
           </a:p>
           <a:p>
@@ -23597,7 +23597,7 @@
                 </a:solidFill>
                 <a:latin typeface="Inter"/>
               </a:rPr>
-              <a:t>DORA + EU AI Act = urgence</a:t>
+              <a:t>DORA + EU AI Act = AI governance</a:t>
             </a:r>
           </a:p>
           <a:p>
@@ -23613,7 +23613,7 @@
                 </a:solidFill>
                 <a:latin typeface="Inter"/>
               </a:rPr>
-              <a:t>gouvernance IA.</a:t>
+              <a:t>urgency.</a:t>
             </a:r>
           </a:p>
         </p:txBody>
@@ -23740,7 +23740,7 @@
                 </a:solidFill>
                 <a:latin typeface="Inter"/>
               </a:rPr>
-              <a:t>LEVIERS CURSOR</a:t>
+              <a:t>CURSOR LEVERS</a:t>
             </a:r>
           </a:p>
         </p:txBody>
@@ -23795,7 +23795,7 @@
                 </a:solidFill>
                 <a:latin typeface="Inter"/>
               </a:rPr>
-              <a:t>Governance (Privacy Mode pour</a:t>
+              <a:t>Governance (Privacy Mode for</a:t>
             </a:r>
           </a:p>
           <a:p>
@@ -23827,7 +23827,7 @@
                 </a:solidFill>
                 <a:latin typeface="Inter"/>
               </a:rPr>
-              <a:t>Onboarding (rotations 10+ pays).</a:t>
+              <a:t>Onboarding (rotations across 10+</a:t>
             </a:r>
           </a:p>
           <a:p>
@@ -23843,7 +23843,23 @@
                 </a:solidFill>
                 <a:latin typeface="Inter"/>
               </a:rPr>
-              <a:t>Cost (réduction IT spend / revenue).</a:t>
+              <a:t>countries).</a:t>
+            </a:r>
+          </a:p>
+          <a:p>
+            <a:pPr algn="l">
+              <a:lnSpc>
+                <a:spcPct val="150000"/>
+              </a:lnSpc>
+            </a:pPr>
+            <a:r>
+              <a:rPr sz="1100" b="0" i="0">
+                <a:solidFill>
+                  <a:srgbClr val="F5F5F5"/>
+                </a:solidFill>
+                <a:latin typeface="Inter"/>
+              </a:rPr>
+              <a:t>Cost (lower IT spend / revenue ratio).</a:t>
             </a:r>
           </a:p>
         </p:txBody>
@@ -23970,7 +23986,7 @@
                 </a:solidFill>
                 <a:latin typeface="Inter"/>
               </a:rPr>
-              <a:t>FORCES MARCHÉ</a:t>
+              <a:t>MARKET FORCES</a:t>
             </a:r>
           </a:p>
         </p:txBody>
@@ -24009,7 +24025,7 @@
                 </a:solidFill>
                 <a:latin typeface="Inter"/>
               </a:rPr>
-              <a:t>Talent IA cher en Iberia →</a:t>
+              <a:t>AI talent costly in Iberia →</a:t>
             </a:r>
           </a:p>
           <a:p>
@@ -24025,7 +24041,7 @@
                 </a:solidFill>
                 <a:latin typeface="Inter"/>
               </a:rPr>
-              <a:t>outil = levier hiring &amp; rétention.</a:t>
+              <a:t>tool = hiring &amp; retention lever.</a:t>
             </a:r>
           </a:p>
           <a:p>
@@ -24041,7 +24057,7 @@
                 </a:solidFill>
                 <a:latin typeface="Inter"/>
               </a:rPr>
-              <a:t>Model neutrality = résilience face à</a:t>
+              <a:t>Model neutrality = resilience vs</a:t>
             </a:r>
           </a:p>
           <a:p>
@@ -24057,7 +24073,7 @@
                 </a:solidFill>
                 <a:latin typeface="Inter"/>
               </a:rPr>
-              <a:t>l'écosystème EU souverain.</a:t>
+              <a:t>EU sovereign-AI ecosystem.</a:t>
             </a:r>
           </a:p>
           <a:p>
@@ -24073,7 +24089,7 @@
                 </a:solidFill>
                 <a:latin typeface="Inter"/>
               </a:rPr>
-              <a:t>Claude Code en éval chez les pairs</a:t>
+              <a:t>Claude Code being evaluated at EU</a:t>
             </a:r>
           </a:p>
           <a:p>
@@ -24089,7 +24105,7 @@
                 </a:solidFill>
                 <a:latin typeface="Inter"/>
               </a:rPr>
-              <a:t>Européens (ING, BNP).</a:t>
+              <a:t>peers (ING, BNP).</a:t>
             </a:r>
           </a:p>
         </p:txBody>
@@ -24429,7 +24445,7 @@
                 </a:solidFill>
                 <a:latin typeface="Inter"/>
               </a:rPr>
-              <a:t>Qui je cible, dans quel ordre, et pourquoi.</a:t>
+              <a:t>Who I target, in what order, and why.</a:t>
             </a:r>
           </a:p>
         </p:txBody>
@@ -24468,7 +24484,7 @@
                 </a:solidFill>
                 <a:latin typeface="Inter"/>
               </a:rPr>
-              <a:t>Power signals : budget T&amp;O, hiring T&amp;O Madrid/London, sponsorship d'initiatives IA Botín-niveau.</a:t>
+              <a:t>Power signals: T&amp;O budget, T&amp;O hiring in Madrid/London, sponsorship of board-level AI initiatives.</a:t>
             </a:r>
           </a:p>
         </p:txBody>
@@ -24585,7 +24601,7 @@
                 </a:solidFill>
                 <a:latin typeface="Inter"/>
               </a:rPr>
-              <a:t>Wedge #1. Filiale digital-native, autonome, procurement plus court.</a:t>
+              <a:t>Wedge #1. Digital-native subsidiary, autonomous, shorter procurement.</a:t>
             </a:r>
           </a:p>
         </p:txBody>
@@ -24624,7 +24640,7 @@
                 </a:solidFill>
                 <a:latin typeface="Inter"/>
               </a:rPr>
-              <a:t>Cold + LinkedIn. Message : « pilote 30 j sur 1 squad, métriques pré-définies ».</a:t>
+              <a:t>Cold + LinkedIn. Message: '30-day pilot on one squad, metrics pre-defined.'</a:t>
             </a:r>
           </a:p>
         </p:txBody>
@@ -24746,7 +24762,7 @@
                 </a:solidFill>
                 <a:latin typeface="Inter"/>
               </a:rPr>
-              <a:t>Dir / VP Developer Productivity — Santander T&amp;O</a:t>
+              <a:t>VP / Director of Developer Productivity — Santander T&amp;O</a:t>
             </a:r>
           </a:p>
         </p:txBody>
@@ -24785,7 +24801,7 @@
                 </a:solidFill>
                 <a:latin typeface="Inter"/>
               </a:rPr>
-              <a:t>Buyer économique au niveau Groupe. Porte le budget dev tools.</a:t>
+              <a:t>Economic buyer at Group level. Owns the dev tools budget.</a:t>
             </a:r>
           </a:p>
         </p:txBody>
@@ -24824,7 +24840,7 @@
                 </a:solidFill>
                 <a:latin typeface="Inter"/>
               </a:rPr>
-              <a:t>Warm intro Madrid tech community + ref customer EU bank si dispo.</a:t>
+              <a:t>Warm intro via Madrid tech community + EU bank reference customer.</a:t>
             </a:r>
           </a:p>
         </p:txBody>
@@ -24946,7 +24962,7 @@
                 </a:solidFill>
                 <a:latin typeface="Inter"/>
               </a:rPr>
-              <a:t>AppSec leadership (sous le CISO Groupe)</a:t>
+              <a:t>AppSec leadership (under the Group CISO)</a:t>
             </a:r>
           </a:p>
         </p:txBody>
@@ -24985,7 +25001,7 @@
                 </a:solidFill>
                 <a:latin typeface="Inter"/>
               </a:rPr>
-              <a:t>Gatekeeper. Pas un blocker si Privacy Mode + SOC 2 + DORA-aligned anticipés.</a:t>
+              <a:t>Gatekeeper. Not a blocker if Privacy Mode + SOC 2 + DORA-aligned anticipated.</a:t>
             </a:r>
           </a:p>
         </p:txBody>
@@ -25024,7 +25040,7 @@
                 </a:solidFill>
                 <a:latin typeface="Inter"/>
               </a:rPr>
-              <a:t>On les inclut tôt, on envoie SIG + pentest + DPA avant de demander.</a:t>
+              <a:t>Include them early, send SIG + pentest + DPA before asking.</a:t>
             </a:r>
           </a:p>
         </p:txBody>
@@ -25185,7 +25201,7 @@
                 </a:solidFill>
                 <a:latin typeface="Inter"/>
               </a:rPr>
-              <a:t>Exec sponsor. Pas en first touch — on l'engage quand on a un POC chiffré.</a:t>
+              <a:t>Executive sponsor. Not first-touch — engaged once we have a quantified POC.</a:t>
             </a:r>
           </a:p>
         </p:txBody>
@@ -25224,7 +25240,7 @@
                 </a:solidFill>
                 <a:latin typeface="Inter"/>
               </a:rPr>
-              <a:t>Une fois POC live : board-level ROI + risk reduction story.</a:t>
+              <a:t>Once POC live: board-level ROI + risk reduction narrative.</a:t>
             </a:r>
           </a:p>
         </p:txBody>
@@ -25385,7 +25401,7 @@
                 </a:solidFill>
                 <a:latin typeface="Inter"/>
               </a:rPr>
-              <a:t>Adoption shadow = signal Marcel-style. Free tier monitoring sur emails Santander.</a:t>
+              <a:t>Shadow adoption = Marcel-style signal. Free-tier monitoring on @santander.com.</a:t>
             </a:r>
           </a:p>
         </p:txBody>
@@ -25424,7 +25440,7 @@
                 </a:solidFill>
                 <a:latin typeface="Inter"/>
               </a:rPr>
-              <a:t>On surveille signups, on identifie un staff IC champion à Madrid.</a:t>
+              <a:t>Track signups, identify a staff IC champion in Madrid.</a:t>
             </a:r>
           </a:p>
         </p:txBody>
@@ -25808,7 +25824,7 @@
                 </a:solidFill>
                 <a:latin typeface="Inter"/>
               </a:rPr>
-              <a:t>Comment je crée le momentum.</a:t>
+              <a:t>How I create momentum.</a:t>
             </a:r>
           </a:p>
         </p:txBody>
@@ -25847,7 +25863,7 @@
                 </a:solidFill>
                 <a:latin typeface="Inter"/>
               </a:rPr>
-              <a:t>Outreach multi-canal, séquencé, mesurable. 90 jours pour un POC Openbank chiffré.</a:t>
+              <a:t>Multi-channel, sequenced, measurable outreach. 90 days to a quantified Openbank POC.</a:t>
             </a:r>
           </a:p>
         </p:txBody>
@@ -25974,7 +25990,7 @@
                 </a:solidFill>
                 <a:latin typeface="Inter"/>
               </a:rPr>
-              <a:t>ENTRY POINTS — séquencés</a:t>
+              <a:t>ENTRY POINTS — sequenced</a:t>
             </a:r>
           </a:p>
         </p:txBody>
@@ -26052,7 +26068,7 @@
                 </a:solidFill>
                 <a:latin typeface="Inter"/>
               </a:rPr>
-              <a:t>Wedge digital-native. Cible Openbank CTO + Head of Eng. Procurement plus court.</a:t>
+              <a:t>Digital-native wedge. Target Openbank CTO + Head of Eng. Shorter procurement.</a:t>
             </a:r>
           </a:p>
         </p:txBody>
@@ -26130,7 +26146,7 @@
                 </a:solidFill>
                 <a:latin typeface="Inter"/>
               </a:rPr>
-              <a:t>Dir DevProd Santander T&amp;O + AppSec, 3 touches/sem, ROI + ref EU bank.</a:t>
+              <a:t>Dir DevProd Santander T&amp;O + AppSec, 3 touches/week, ROI + EU bank reference.</a:t>
             </a:r>
           </a:p>
         </p:txBody>
@@ -26208,7 +26224,7 @@
                 </a:solidFill>
                 <a:latin typeface="Inter"/>
               </a:rPr>
-              <a:t>Madrid tech community (South Summit, Endeavor, Wayra alumni). Petit monde.</a:t>
+              <a:t>Madrid tech community (South Summit, Endeavor, Wayra alumni). Small world.</a:t>
             </a:r>
           </a:p>
         </p:txBody>
@@ -26247,7 +26263,7 @@
                 </a:solidFill>
                 <a:latin typeface="Inter"/>
               </a:rPr>
-              <a:t>Conférence</a:t>
+              <a:t>Conference</a:t>
             </a:r>
           </a:p>
         </p:txBody>
@@ -26364,7 +26380,7 @@
                 </a:solidFill>
                 <a:latin typeface="Inter"/>
               </a:rPr>
-              <a:t>Free tier monitoring sur @santander.com → champion IC à Madrid/Boston.</a:t>
+              <a:t>Free-tier monitoring on @santander.com → IC champion in Madrid/Boston.</a:t>
             </a:r>
           </a:p>
         </p:txBody>
@@ -26530,7 +26546,7 @@
                 </a:solidFill>
                 <a:latin typeface="JetBrains Mono"/>
               </a:rPr>
-              <a:t>J0–J30</a:t>
+              <a:t>D0–D30</a:t>
             </a:r>
           </a:p>
         </p:txBody>
@@ -26585,7 +26601,7 @@
                 </a:solidFill>
                 <a:latin typeface="Inter"/>
               </a:rPr>
-              <a:t>3 cold touches/sem + 1 warm intro Madrid.</a:t>
+              <a:t>3 cold touches/week + 1 warm intro Madrid.</a:t>
             </a:r>
           </a:p>
           <a:p>
@@ -26601,7 +26617,7 @@
                 </a:solidFill>
                 <a:latin typeface="Inter"/>
               </a:rPr>
-              <a:t>Success : 1 mtg Openbank CTO, 1 mtg AppSec.</a:t>
+              <a:t>Success: 1 mtg Openbank CTO, 1 mtg AppSec.</a:t>
             </a:r>
           </a:p>
         </p:txBody>
@@ -26640,7 +26656,7 @@
                 </a:solidFill>
                 <a:latin typeface="JetBrains Mono"/>
               </a:rPr>
-              <a:t>J30–J60</a:t>
+              <a:t>D30–D60</a:t>
             </a:r>
           </a:p>
         </p:txBody>
@@ -26679,7 +26695,7 @@
                 </a:solidFill>
                 <a:latin typeface="Inter"/>
               </a:rPr>
-              <a:t>Discovery Openbank + parallel intro T&amp;O.</a:t>
+              <a:t>Discovery Openbank + parallel T&amp;O intro.</a:t>
             </a:r>
           </a:p>
           <a:p>
@@ -26695,7 +26711,7 @@
                 </a:solidFill>
                 <a:latin typeface="Inter"/>
               </a:rPr>
-              <a:t>Success : POC 20–30 ingés signé sur 1 squad</a:t>
+              <a:t>Success: 20–30-engineer POC signed on</a:t>
             </a:r>
           </a:p>
           <a:p>
@@ -26711,7 +26727,7 @@
                 </a:solidFill>
                 <a:latin typeface="Inter"/>
               </a:rPr>
-              <a:t>Openbank (mobile ou backend).</a:t>
+              <a:t>one Openbank squad (mobile or backend).</a:t>
             </a:r>
           </a:p>
         </p:txBody>
@@ -26750,7 +26766,7 @@
                 </a:solidFill>
                 <a:latin typeface="JetBrains Mono"/>
               </a:rPr>
-              <a:t>J60–J90</a:t>
+              <a:t>D60–D90</a:t>
             </a:r>
           </a:p>
         </p:txBody>
@@ -26789,7 +26805,7 @@
                 </a:solidFill>
                 <a:latin typeface="Inter"/>
               </a:rPr>
-              <a:t>POC live, Privacy Mode mandaté + DORA-aligned.</a:t>
+              <a:t>POC live, Privacy Mode mandated + DORA-aligned.</a:t>
             </a:r>
           </a:p>
           <a:p>
@@ -26805,7 +26821,7 @@
                 </a:solidFill>
                 <a:latin typeface="Inter"/>
               </a:rPr>
-              <a:t>Success : cycle-time + PR + NPS mesurés.</a:t>
+              <a:t>Success: cycle-time + PR + NPS measured.</a:t>
             </a:r>
           </a:p>
           <a:p>
@@ -26821,7 +26837,7 @@
                 </a:solidFill>
                 <a:latin typeface="Inter"/>
               </a:rPr>
-              <a:t>Ouvre conversation Groupe T&amp;O sur 1 K+ seats.</a:t>
+              <a:t>Opens Group T&amp;O conversation on 1K+ seats.</a:t>
             </a:r>
           </a:p>
         </p:txBody>
@@ -27161,7 +27177,7 @@
                 </a:solidFill>
                 <a:latin typeface="Inter"/>
               </a:rPr>
-              <a:t>À quoi ressemble le POC chiffré.</a:t>
+              <a:t>What the quantified POC looks like.</a:t>
             </a:r>
           </a:p>
         </p:txBody>
@@ -27200,7 +27216,7 @@
                 </a:solidFill>
                 <a:latin typeface="Inter"/>
               </a:rPr>
-              <a:t>Openbank = path of least resistance. Success ici ouvre la conversation Groupe T&amp;O sur 1 K+ seats.</a:t>
+              <a:t>Openbank = path of least resistance. Success here opens Group T&amp;O on 1K+ seats.</a:t>
             </a:r>
           </a:p>
         </p:txBody>
@@ -27366,7 +27382,7 @@
                 </a:solidFill>
                 <a:latin typeface="Inter"/>
               </a:rPr>
-              <a:t>20–30 ingés Openbank (digital-native,</a:t>
+              <a:t>20–30 Openbank engineers</a:t>
             </a:r>
           </a:p>
           <a:p>
@@ -27382,7 +27398,7 @@
                 </a:solidFill>
                 <a:latin typeface="Inter"/>
               </a:rPr>
-              <a:t>stack moderne, vélocité élevée).</a:t>
+              <a:t>(digital-native, modern stack,</a:t>
             </a:r>
           </a:p>
           <a:p>
@@ -27398,7 +27414,7 @@
                 </a:solidFill>
                 <a:latin typeface="Inter"/>
               </a:rPr>
-              <a:t>30 jours.</a:t>
+              <a:t>high velocity).</a:t>
             </a:r>
           </a:p>
           <a:p>
@@ -27414,7 +27430,7 @@
                 </a:solidFill>
                 <a:latin typeface="Inter"/>
               </a:rPr>
-              <a:t>1 squad mobile ou backend, 1 repo de</a:t>
+              <a:t>30 days.</a:t>
             </a:r>
           </a:p>
           <a:p>
@@ -27430,7 +27446,23 @@
                 </a:solidFill>
                 <a:latin typeface="Inter"/>
               </a:rPr>
-              <a:t>référence.</a:t>
+              <a:t>1 mobile or backend squad,</a:t>
+            </a:r>
+          </a:p>
+          <a:p>
+            <a:pPr algn="l">
+              <a:lnSpc>
+                <a:spcPct val="150000"/>
+              </a:lnSpc>
+            </a:pPr>
+            <a:r>
+              <a:rPr sz="1100" b="0" i="0">
+                <a:solidFill>
+                  <a:srgbClr val="F5F5F5"/>
+                </a:solidFill>
+                <a:latin typeface="Inter"/>
+              </a:rPr>
+              <a:t>1 reference repo.</a:t>
             </a:r>
           </a:p>
         </p:txBody>
@@ -27557,7 +27589,7 @@
                 </a:solidFill>
                 <a:latin typeface="Inter"/>
               </a:rPr>
-              <a:t>MÉTRIQUES</a:t>
+              <a:t>METRICS</a:t>
             </a:r>
           </a:p>
         </p:txBody>
@@ -27612,7 +27644,7 @@
                 </a:solidFill>
                 <a:latin typeface="Inter"/>
               </a:rPr>
-              <a:t>PR throughput / ingé / semaine</a:t>
+              <a:t>PR throughput / engineer / week</a:t>
             </a:r>
           </a:p>
           <a:p>
@@ -27644,7 +27676,7 @@
                 </a:solidFill>
                 <a:latin typeface="Inter"/>
               </a:rPr>
-              <a:t>NPS engagement à J+15 et J+30.</a:t>
+              <a:t>NPS engagement at D+15 and D+30.</a:t>
             </a:r>
           </a:p>
         </p:txBody>
@@ -27810,7 +27842,7 @@
                 </a:solidFill>
                 <a:latin typeface="Inter"/>
               </a:rPr>
-              <a:t>Privacy Mode obligatoire.</a:t>
+              <a:t>Privacy Mode mandatory.</a:t>
             </a:r>
           </a:p>
           <a:p>
@@ -27826,7 +27858,7 @@
                 </a:solidFill>
                 <a:latin typeface="Inter"/>
               </a:rPr>
-              <a:t>SOC 2 + SIG envoyés J-7.</a:t>
+              <a:t>SOC 2 + SIG sent D-7.</a:t>
             </a:r>
           </a:p>
           <a:p>
@@ -27842,7 +27874,7 @@
                 </a:solidFill>
                 <a:latin typeface="Inter"/>
               </a:rPr>
-              <a:t>DORA-aligned : audit logs, data</a:t>
+              <a:t>DORA-aligned: audit logs, EU data</a:t>
             </a:r>
           </a:p>
           <a:p>
@@ -27858,7 +27890,7 @@
                 </a:solidFill>
                 <a:latin typeface="Inter"/>
               </a:rPr>
-              <a:t>residency EU validés.</a:t>
+              <a:t>residency validated.</a:t>
             </a:r>
           </a:p>
           <a:p>
@@ -27874,7 +27906,7 @@
                 </a:solidFill>
                 <a:latin typeface="Inter"/>
               </a:rPr>
-              <a:t>AppSec Groupe dans la loop dès J0.</a:t>
+              <a:t>Group AppSec in the loop from D0.</a:t>
             </a:r>
           </a:p>
         </p:txBody>
@@ -28040,7 +28072,7 @@
                 </a:solidFill>
                 <a:latin typeface="Inter"/>
               </a:rPr>
-              <a:t>Cycle-time ↓ ≥ 12 %</a:t>
+              <a:t>Cycle-time ↓ ≥ 12%</a:t>
             </a:r>
           </a:p>
           <a:p>
@@ -28072,7 +28104,7 @@
                 </a:solidFill>
                 <a:latin typeface="Inter"/>
               </a:rPr>
-              <a:t>Senior IC adoption ≥ 60 %</a:t>
+              <a:t>Senior IC adoption ≥ 60%</a:t>
             </a:r>
           </a:p>
           <a:p>
@@ -28088,7 +28120,7 @@
                 </a:solidFill>
                 <a:latin typeface="Inter"/>
               </a:rPr>
-              <a:t>→ ouvre Groupe T&amp;O sur Santander</a:t>
+              <a:t>→ opens Group T&amp;O conversation</a:t>
             </a:r>
           </a:p>
           <a:p>
@@ -28104,7 +28136,7 @@
                 </a:solidFill>
                 <a:latin typeface="Inter"/>
               </a:rPr>
-              <a:t>Global Tech : 1 000–5 000 seats.</a:t>
+              <a:t>on Santander Global Tech: 1K–5K seats.</a:t>
             </a:r>
           </a:p>
         </p:txBody>

--- a/decks/Cursor_Enterprise_Disco_Challenge.pptx
+++ b/decks/Cursor_Enterprise_Disco_Challenge.pptx
@@ -3126,7 +3126,7 @@
             <a:avLst/>
           </a:prstGeom>
           <a:solidFill>
-            <a:srgbClr val="0A0A0A"/>
+            <a:srgbClr val="F0EAE0"/>
           </a:solidFill>
           <a:ln>
             <a:noFill/>
@@ -3170,7 +3170,7 @@
             <a:avLst/>
           </a:prstGeom>
           <a:solidFill>
-            <a:srgbClr val="141414"/>
+            <a:srgbClr val="E5DDCE"/>
           </a:solidFill>
           <a:ln>
             <a:noFill/>
@@ -3214,7 +3214,7 @@
             <a:avLst/>
           </a:prstGeom>
           <a:solidFill>
-            <a:srgbClr val="2A2A2A"/>
+            <a:srgbClr val="C8BDA8"/>
           </a:solidFill>
           <a:ln>
             <a:noFill/>
@@ -3273,7 +3273,7 @@
             <a:r>
               <a:rPr sz="1200" b="1" i="0" spc="20">
                 <a:solidFill>
-                  <a:srgbClr val="F5F5F5"/>
+                  <a:srgbClr val="1F1B16"/>
                 </a:solidFill>
                 <a:latin typeface="Inter"/>
               </a:rPr>
@@ -3312,7 +3312,7 @@
             <a:r>
               <a:rPr sz="1100" b="0" i="0" spc="400">
                 <a:solidFill>
-                  <a:srgbClr val="6B6B6B"/>
+                  <a:srgbClr val="8E867B"/>
                 </a:solidFill>
                 <a:latin typeface="Inter"/>
               </a:rPr>
@@ -3351,7 +3351,7 @@
             <a:r>
               <a:rPr sz="5200" b="1" i="0">
                 <a:solidFill>
-                  <a:srgbClr val="F5F5F5"/>
+                  <a:srgbClr val="1F1B16"/>
                 </a:solidFill>
                 <a:latin typeface="Inter"/>
               </a:rPr>
@@ -3367,7 +3367,7 @@
             <a:r>
               <a:rPr sz="5200" b="1" i="0">
                 <a:solidFill>
-                  <a:srgbClr val="F5F5F5"/>
+                  <a:srgbClr val="1F1B16"/>
                 </a:solidFill>
                 <a:latin typeface="Inter"/>
               </a:rPr>
@@ -3406,7 +3406,7 @@
             <a:r>
               <a:rPr sz="1500" b="0" i="1">
                 <a:solidFill>
-                  <a:srgbClr val="A0A0A0"/>
+                  <a:srgbClr val="5C544A"/>
                 </a:solidFill>
                 <a:latin typeface="Inter"/>
               </a:rPr>
@@ -3422,7 +3422,7 @@
             <a:r>
               <a:rPr sz="1500" b="0" i="1">
                 <a:solidFill>
-                  <a:srgbClr val="A0A0A0"/>
+                  <a:srgbClr val="5C544A"/>
                 </a:solidFill>
                 <a:latin typeface="Inter"/>
               </a:rPr>
@@ -3461,7 +3461,7 @@
             <a:r>
               <a:rPr sz="1000" b="0" i="0" spc="300">
                 <a:solidFill>
-                  <a:srgbClr val="6B6B6B"/>
+                  <a:srgbClr val="8E867B"/>
                 </a:solidFill>
                 <a:latin typeface="Inter"/>
               </a:rPr>
@@ -3500,7 +3500,7 @@
             <a:r>
               <a:rPr sz="1300" b="0" i="0">
                 <a:solidFill>
-                  <a:srgbClr val="F5F5F5"/>
+                  <a:srgbClr val="1F1B16"/>
                 </a:solidFill>
                 <a:latin typeface="Inter"/>
               </a:rPr>
@@ -3516,7 +3516,7 @@
             <a:r>
               <a:rPr sz="1300" b="0" i="0">
                 <a:solidFill>
-                  <a:srgbClr val="F5F5F5"/>
+                  <a:srgbClr val="1F1B16"/>
                 </a:solidFill>
                 <a:latin typeface="Inter"/>
               </a:rPr>
@@ -3532,7 +3532,7 @@
             <a:r>
               <a:rPr sz="1300" b="0" i="0">
                 <a:solidFill>
-                  <a:srgbClr val="F5F5F5"/>
+                  <a:srgbClr val="1F1B16"/>
                 </a:solidFill>
                 <a:latin typeface="Inter"/>
               </a:rPr>
@@ -3571,7 +3571,7 @@
             <a:r>
               <a:rPr sz="1000" b="0" i="0" spc="300">
                 <a:solidFill>
-                  <a:srgbClr val="6B6B6B"/>
+                  <a:srgbClr val="8E867B"/>
                 </a:solidFill>
                 <a:latin typeface="Inter"/>
               </a:rPr>
@@ -3610,7 +3610,7 @@
             <a:r>
               <a:rPr sz="1250" b="0" i="0">
                 <a:solidFill>
-                  <a:srgbClr val="F5F5F5"/>
+                  <a:srgbClr val="1F1B16"/>
                 </a:solidFill>
                 <a:latin typeface="Inter"/>
               </a:rPr>
@@ -3626,7 +3626,7 @@
             <a:r>
               <a:rPr sz="1250" b="0" i="0">
                 <a:solidFill>
-                  <a:srgbClr val="F5F5F5"/>
+                  <a:srgbClr val="1F1B16"/>
                 </a:solidFill>
                 <a:latin typeface="Inter"/>
               </a:rPr>
@@ -3642,7 +3642,7 @@
             <a:r>
               <a:rPr sz="1250" b="0" i="0">
                 <a:solidFill>
-                  <a:srgbClr val="F5F5F5"/>
+                  <a:srgbClr val="1F1B16"/>
                 </a:solidFill>
                 <a:latin typeface="Inter"/>
               </a:rPr>
@@ -3681,7 +3681,7 @@
             <a:r>
               <a:rPr sz="900" b="0" i="0" spc="80">
                 <a:solidFill>
-                  <a:srgbClr val="6B6B6B"/>
+                  <a:srgbClr val="8E867B"/>
                 </a:solidFill>
                 <a:latin typeface="Inter"/>
               </a:rPr>
@@ -3720,7 +3720,7 @@
             <a:r>
               <a:rPr sz="900" b="0" i="0">
                 <a:solidFill>
-                  <a:srgbClr val="6B6B6B"/>
+                  <a:srgbClr val="8E867B"/>
                 </a:solidFill>
                 <a:latin typeface="JetBrains Mono"/>
               </a:rPr>
@@ -3762,7 +3762,7 @@
             <a:avLst/>
           </a:prstGeom>
           <a:solidFill>
-            <a:srgbClr val="0A0A0A"/>
+            <a:srgbClr val="F0EAE0"/>
           </a:solidFill>
           <a:ln>
             <a:noFill/>
@@ -3806,7 +3806,7 @@
             <a:avLst/>
           </a:prstGeom>
           <a:solidFill>
-            <a:srgbClr val="141414"/>
+            <a:srgbClr val="E5DDCE"/>
           </a:solidFill>
           <a:ln>
             <a:noFill/>
@@ -3850,7 +3850,7 @@
             <a:avLst/>
           </a:prstGeom>
           <a:solidFill>
-            <a:srgbClr val="2A2A2A"/>
+            <a:srgbClr val="C8BDA8"/>
           </a:solidFill>
           <a:ln>
             <a:noFill/>
@@ -3909,7 +3909,7 @@
             <a:r>
               <a:rPr sz="1200" b="1" i="0" spc="20">
                 <a:solidFill>
-                  <a:srgbClr val="F5F5F5"/>
+                  <a:srgbClr val="1F1B16"/>
                 </a:solidFill>
                 <a:latin typeface="Inter"/>
               </a:rPr>
@@ -3948,7 +3948,7 @@
             <a:r>
               <a:rPr sz="1100" b="0" i="0" spc="400">
                 <a:solidFill>
-                  <a:srgbClr val="6B6B6B"/>
+                  <a:srgbClr val="8E867B"/>
                 </a:solidFill>
                 <a:latin typeface="Inter"/>
               </a:rPr>
@@ -3987,7 +3987,7 @@
             <a:r>
               <a:rPr sz="5000" b="1" i="0">
                 <a:solidFill>
-                  <a:srgbClr val="F5F5F5"/>
+                  <a:srgbClr val="1F1B16"/>
                 </a:solidFill>
                 <a:latin typeface="Inter"/>
               </a:rPr>
@@ -4003,7 +4003,7 @@
             <a:r>
               <a:rPr sz="5000" b="1" i="0">
                 <a:solidFill>
-                  <a:srgbClr val="F5F5F5"/>
+                  <a:srgbClr val="1F1B16"/>
                 </a:solidFill>
                 <a:latin typeface="Inter"/>
               </a:rPr>
@@ -4042,7 +4042,7 @@
             <a:r>
               <a:rPr sz="1500" b="0" i="1">
                 <a:solidFill>
-                  <a:srgbClr val="A0A0A0"/>
+                  <a:srgbClr val="5C544A"/>
                 </a:solidFill>
                 <a:latin typeface="Inter"/>
               </a:rPr>
@@ -4058,7 +4058,7 @@
             <a:r>
               <a:rPr sz="1500" b="0" i="1">
                 <a:solidFill>
-                  <a:srgbClr val="A0A0A0"/>
+                  <a:srgbClr val="5C544A"/>
                 </a:solidFill>
                 <a:latin typeface="Inter"/>
               </a:rPr>
@@ -4097,7 +4097,7 @@
             <a:r>
               <a:rPr sz="900" b="0" i="0">
                 <a:solidFill>
-                  <a:srgbClr val="6B6B6B"/>
+                  <a:srgbClr val="8E867B"/>
                 </a:solidFill>
                 <a:latin typeface="JetBrains Mono"/>
               </a:rPr>
@@ -4139,7 +4139,7 @@
             <a:avLst/>
           </a:prstGeom>
           <a:solidFill>
-            <a:srgbClr val="0A0A0A"/>
+            <a:srgbClr val="F0EAE0"/>
           </a:solidFill>
           <a:ln>
             <a:noFill/>
@@ -4198,7 +4198,7 @@
             <a:r>
               <a:rPr sz="1100" b="1" i="0" spc="20">
                 <a:solidFill>
-                  <a:srgbClr val="F5F5F5"/>
+                  <a:srgbClr val="1F1B16"/>
                 </a:solidFill>
                 <a:latin typeface="Inter"/>
               </a:rPr>
@@ -4237,7 +4237,7 @@
             <a:r>
               <a:rPr sz="900" b="0" i="0" spc="200">
                 <a:solidFill>
-                  <a:srgbClr val="6B6B6B"/>
+                  <a:srgbClr val="8E867B"/>
                 </a:solidFill>
                 <a:latin typeface="Inter"/>
               </a:rPr>
@@ -4276,7 +4276,7 @@
             <a:r>
               <a:rPr sz="900" b="0" i="0" spc="80">
                 <a:solidFill>
-                  <a:srgbClr val="6B6B6B"/>
+                  <a:srgbClr val="8E867B"/>
                 </a:solidFill>
                 <a:latin typeface="Inter"/>
               </a:rPr>
@@ -4315,7 +4315,7 @@
             <a:r>
               <a:rPr sz="900" b="0" i="0" spc="50">
                 <a:solidFill>
-                  <a:srgbClr val="6B6B6B"/>
+                  <a:srgbClr val="8E867B"/>
                 </a:solidFill>
                 <a:latin typeface="JetBrains Mono"/>
               </a:rPr>
@@ -4339,7 +4339,7 @@
             <a:avLst/>
           </a:prstGeom>
           <a:solidFill>
-            <a:srgbClr val="2A2A2A"/>
+            <a:srgbClr val="C8BDA8"/>
           </a:solidFill>
           <a:ln>
             <a:noFill/>
@@ -4398,7 +4398,7 @@
             <a:r>
               <a:rPr sz="1000" b="0" i="0" spc="300">
                 <a:solidFill>
-                  <a:srgbClr val="6B6B6B"/>
+                  <a:srgbClr val="8E867B"/>
                 </a:solidFill>
                 <a:latin typeface="Inter"/>
               </a:rPr>
@@ -4437,7 +4437,7 @@
             <a:r>
               <a:rPr sz="3400" b="1" i="0">
                 <a:solidFill>
-                  <a:srgbClr val="F5F5F5"/>
+                  <a:srgbClr val="1F1B16"/>
                 </a:solidFill>
                 <a:latin typeface="Inter"/>
               </a:rPr>
@@ -4476,7 +4476,7 @@
             <a:r>
               <a:rPr sz="1400" b="0" i="0">
                 <a:solidFill>
-                  <a:srgbClr val="A0A0A0"/>
+                  <a:srgbClr val="5C544A"/>
                 </a:solidFill>
                 <a:latin typeface="Inter"/>
               </a:rPr>
@@ -4515,7 +4515,7 @@
             <a:r>
               <a:rPr sz="1200" b="1" i="0">
                 <a:solidFill>
-                  <a:srgbClr val="F5F5F5"/>
+                  <a:srgbClr val="1F1B16"/>
                 </a:solidFill>
                 <a:latin typeface="Inter"/>
               </a:rPr>
@@ -4554,7 +4554,7 @@
             <a:r>
               <a:rPr sz="1150" b="0" i="0">
                 <a:solidFill>
-                  <a:srgbClr val="A0A0A0"/>
+                  <a:srgbClr val="5C544A"/>
                 </a:solidFill>
                 <a:latin typeface="Inter"/>
               </a:rPr>
@@ -4593,7 +4593,7 @@
             <a:r>
               <a:rPr sz="1100" b="0" i="1">
                 <a:solidFill>
-                  <a:srgbClr val="E5E5E5"/>
+                  <a:srgbClr val="3A332C"/>
                 </a:solidFill>
                 <a:latin typeface="Inter"/>
               </a:rPr>
@@ -4617,7 +4617,7 @@
             <a:avLst/>
           </a:prstGeom>
           <a:solidFill>
-            <a:srgbClr val="2A2A2A"/>
+            <a:srgbClr val="C8BDA8"/>
           </a:solidFill>
           <a:ln>
             <a:noFill/>
@@ -4676,7 +4676,7 @@
             <a:r>
               <a:rPr sz="1200" b="1" i="0">
                 <a:solidFill>
-                  <a:srgbClr val="F5F5F5"/>
+                  <a:srgbClr val="1F1B16"/>
                 </a:solidFill>
                 <a:latin typeface="Inter"/>
               </a:rPr>
@@ -4715,7 +4715,7 @@
             <a:r>
               <a:rPr sz="1150" b="0" i="0">
                 <a:solidFill>
-                  <a:srgbClr val="A0A0A0"/>
+                  <a:srgbClr val="5C544A"/>
                 </a:solidFill>
                 <a:latin typeface="Inter"/>
               </a:rPr>
@@ -4754,7 +4754,7 @@
             <a:r>
               <a:rPr sz="1100" b="0" i="1">
                 <a:solidFill>
-                  <a:srgbClr val="E5E5E5"/>
+                  <a:srgbClr val="3A332C"/>
                 </a:solidFill>
                 <a:latin typeface="Inter"/>
               </a:rPr>
@@ -4778,7 +4778,7 @@
             <a:avLst/>
           </a:prstGeom>
           <a:solidFill>
-            <a:srgbClr val="2A2A2A"/>
+            <a:srgbClr val="C8BDA8"/>
           </a:solidFill>
           <a:ln>
             <a:noFill/>
@@ -4837,7 +4837,7 @@
             <a:r>
               <a:rPr sz="1200" b="1" i="0">
                 <a:solidFill>
-                  <a:srgbClr val="F5F5F5"/>
+                  <a:srgbClr val="1F1B16"/>
                 </a:solidFill>
                 <a:latin typeface="Inter"/>
               </a:rPr>
@@ -4876,7 +4876,7 @@
             <a:r>
               <a:rPr sz="1150" b="0" i="0">
                 <a:solidFill>
-                  <a:srgbClr val="A0A0A0"/>
+                  <a:srgbClr val="5C544A"/>
                 </a:solidFill>
                 <a:latin typeface="Inter"/>
               </a:rPr>
@@ -4915,7 +4915,7 @@
             <a:r>
               <a:rPr sz="1100" b="0" i="1">
                 <a:solidFill>
-                  <a:srgbClr val="E5E5E5"/>
+                  <a:srgbClr val="3A332C"/>
                 </a:solidFill>
                 <a:latin typeface="Inter"/>
               </a:rPr>
@@ -4939,7 +4939,7 @@
             <a:avLst/>
           </a:prstGeom>
           <a:solidFill>
-            <a:srgbClr val="2A2A2A"/>
+            <a:srgbClr val="C8BDA8"/>
           </a:solidFill>
           <a:ln>
             <a:noFill/>
@@ -4998,7 +4998,7 @@
             <a:r>
               <a:rPr sz="1200" b="1" i="0">
                 <a:solidFill>
-                  <a:srgbClr val="F5F5F5"/>
+                  <a:srgbClr val="1F1B16"/>
                 </a:solidFill>
                 <a:latin typeface="Inter"/>
               </a:rPr>
@@ -5037,7 +5037,7 @@
             <a:r>
               <a:rPr sz="1150" b="0" i="0">
                 <a:solidFill>
-                  <a:srgbClr val="A0A0A0"/>
+                  <a:srgbClr val="5C544A"/>
                 </a:solidFill>
                 <a:latin typeface="Inter"/>
               </a:rPr>
@@ -5076,7 +5076,7 @@
             <a:r>
               <a:rPr sz="1100" b="0" i="1">
                 <a:solidFill>
-                  <a:srgbClr val="E5E5E5"/>
+                  <a:srgbClr val="3A332C"/>
                 </a:solidFill>
                 <a:latin typeface="Inter"/>
               </a:rPr>
@@ -5100,7 +5100,7 @@
             <a:avLst/>
           </a:prstGeom>
           <a:solidFill>
-            <a:srgbClr val="2A2A2A"/>
+            <a:srgbClr val="C8BDA8"/>
           </a:solidFill>
           <a:ln>
             <a:noFill/>
@@ -5159,7 +5159,7 @@
             <a:r>
               <a:rPr sz="1200" b="1" i="0">
                 <a:solidFill>
-                  <a:srgbClr val="F5F5F5"/>
+                  <a:srgbClr val="1F1B16"/>
                 </a:solidFill>
                 <a:latin typeface="Inter"/>
               </a:rPr>
@@ -5198,7 +5198,7 @@
             <a:r>
               <a:rPr sz="1150" b="0" i="0">
                 <a:solidFill>
-                  <a:srgbClr val="A0A0A0"/>
+                  <a:srgbClr val="5C544A"/>
                 </a:solidFill>
                 <a:latin typeface="Inter"/>
               </a:rPr>
@@ -5237,7 +5237,7 @@
             <a:r>
               <a:rPr sz="1100" b="0" i="1">
                 <a:solidFill>
-                  <a:srgbClr val="E5E5E5"/>
+                  <a:srgbClr val="3A332C"/>
                 </a:solidFill>
                 <a:latin typeface="Inter"/>
               </a:rPr>
@@ -5261,7 +5261,7 @@
             <a:avLst/>
           </a:prstGeom>
           <a:solidFill>
-            <a:srgbClr val="2A2A2A"/>
+            <a:srgbClr val="C8BDA8"/>
           </a:solidFill>
           <a:ln>
             <a:noFill/>
@@ -5320,7 +5320,7 @@
             <a:r>
               <a:rPr sz="1200" b="1" i="0">
                 <a:solidFill>
-                  <a:srgbClr val="F5F5F5"/>
+                  <a:srgbClr val="1F1B16"/>
                 </a:solidFill>
                 <a:latin typeface="Inter"/>
               </a:rPr>
@@ -5359,7 +5359,7 @@
             <a:r>
               <a:rPr sz="1150" b="0" i="0">
                 <a:solidFill>
-                  <a:srgbClr val="A0A0A0"/>
+                  <a:srgbClr val="5C544A"/>
                 </a:solidFill>
                 <a:latin typeface="Inter"/>
               </a:rPr>
@@ -5398,7 +5398,7 @@
             <a:r>
               <a:rPr sz="1100" b="0" i="1">
                 <a:solidFill>
-                  <a:srgbClr val="E5E5E5"/>
+                  <a:srgbClr val="3A332C"/>
                 </a:solidFill>
                 <a:latin typeface="Inter"/>
               </a:rPr>
@@ -5422,7 +5422,7 @@
             <a:avLst/>
           </a:prstGeom>
           <a:solidFill>
-            <a:srgbClr val="2A2A2A"/>
+            <a:srgbClr val="C8BDA8"/>
           </a:solidFill>
           <a:ln>
             <a:noFill/>
@@ -5484,7 +5484,7 @@
             <a:avLst/>
           </a:prstGeom>
           <a:solidFill>
-            <a:srgbClr val="0A0A0A"/>
+            <a:srgbClr val="F0EAE0"/>
           </a:solidFill>
           <a:ln>
             <a:noFill/>
@@ -5543,7 +5543,7 @@
             <a:r>
               <a:rPr sz="1100" b="1" i="0" spc="20">
                 <a:solidFill>
-                  <a:srgbClr val="F5F5F5"/>
+                  <a:srgbClr val="1F1B16"/>
                 </a:solidFill>
                 <a:latin typeface="Inter"/>
               </a:rPr>
@@ -5582,7 +5582,7 @@
             <a:r>
               <a:rPr sz="900" b="0" i="0" spc="200">
                 <a:solidFill>
-                  <a:srgbClr val="6B6B6B"/>
+                  <a:srgbClr val="8E867B"/>
                 </a:solidFill>
                 <a:latin typeface="Inter"/>
               </a:rPr>
@@ -5621,7 +5621,7 @@
             <a:r>
               <a:rPr sz="900" b="0" i="0" spc="80">
                 <a:solidFill>
-                  <a:srgbClr val="6B6B6B"/>
+                  <a:srgbClr val="8E867B"/>
                 </a:solidFill>
                 <a:latin typeface="Inter"/>
               </a:rPr>
@@ -5660,7 +5660,7 @@
             <a:r>
               <a:rPr sz="900" b="0" i="0" spc="50">
                 <a:solidFill>
-                  <a:srgbClr val="6B6B6B"/>
+                  <a:srgbClr val="8E867B"/>
                 </a:solidFill>
                 <a:latin typeface="JetBrains Mono"/>
               </a:rPr>
@@ -5684,7 +5684,7 @@
             <a:avLst/>
           </a:prstGeom>
           <a:solidFill>
-            <a:srgbClr val="2A2A2A"/>
+            <a:srgbClr val="C8BDA8"/>
           </a:solidFill>
           <a:ln>
             <a:noFill/>
@@ -5743,7 +5743,7 @@
             <a:r>
               <a:rPr sz="1000" b="0" i="0" spc="300">
                 <a:solidFill>
-                  <a:srgbClr val="6B6B6B"/>
+                  <a:srgbClr val="8E867B"/>
                 </a:solidFill>
                 <a:latin typeface="Inter"/>
               </a:rPr>
@@ -5782,7 +5782,7 @@
             <a:r>
               <a:rPr sz="3400" b="1" i="0">
                 <a:solidFill>
-                  <a:srgbClr val="F5F5F5"/>
+                  <a:srgbClr val="1F1B16"/>
                 </a:solidFill>
                 <a:latin typeface="Inter"/>
               </a:rPr>
@@ -5821,7 +5821,7 @@
             <a:r>
               <a:rPr sz="1400" b="0" i="0">
                 <a:solidFill>
-                  <a:srgbClr val="A0A0A0"/>
+                  <a:srgbClr val="5C544A"/>
                 </a:solidFill>
                 <a:latin typeface="Inter"/>
               </a:rPr>
@@ -5860,7 +5860,7 @@
             <a:r>
               <a:rPr sz="1200" b="0" i="0">
                 <a:solidFill>
-                  <a:srgbClr val="6B6B6B"/>
+                  <a:srgbClr val="8E867B"/>
                 </a:solidFill>
                 <a:latin typeface="JetBrains Mono"/>
               </a:rPr>
@@ -5899,7 +5899,7 @@
             <a:r>
               <a:rPr sz="1400" b="1" i="0">
                 <a:solidFill>
-                  <a:srgbClr val="F5F5F5"/>
+                  <a:srgbClr val="1F1B16"/>
                 </a:solidFill>
                 <a:latin typeface="Inter"/>
               </a:rPr>
@@ -5938,7 +5938,7 @@
             <a:r>
               <a:rPr sz="1200" b="0" i="0">
                 <a:solidFill>
-                  <a:srgbClr val="A0A0A0"/>
+                  <a:srgbClr val="5C544A"/>
                 </a:solidFill>
                 <a:latin typeface="Inter"/>
               </a:rPr>
@@ -5962,7 +5962,7 @@
             <a:avLst/>
           </a:prstGeom>
           <a:solidFill>
-            <a:srgbClr val="2A2A2A"/>
+            <a:srgbClr val="C8BDA8"/>
           </a:solidFill>
           <a:ln>
             <a:noFill/>
@@ -6021,7 +6021,7 @@
             <a:r>
               <a:rPr sz="1200" b="0" i="0">
                 <a:solidFill>
-                  <a:srgbClr val="6B6B6B"/>
+                  <a:srgbClr val="8E867B"/>
                 </a:solidFill>
                 <a:latin typeface="JetBrains Mono"/>
               </a:rPr>
@@ -6060,7 +6060,7 @@
             <a:r>
               <a:rPr sz="1400" b="1" i="0">
                 <a:solidFill>
-                  <a:srgbClr val="F5F5F5"/>
+                  <a:srgbClr val="1F1B16"/>
                 </a:solidFill>
                 <a:latin typeface="Inter"/>
               </a:rPr>
@@ -6099,7 +6099,7 @@
             <a:r>
               <a:rPr sz="1200" b="0" i="0">
                 <a:solidFill>
-                  <a:srgbClr val="A0A0A0"/>
+                  <a:srgbClr val="5C544A"/>
                 </a:solidFill>
                 <a:latin typeface="Inter"/>
               </a:rPr>
@@ -6123,7 +6123,7 @@
             <a:avLst/>
           </a:prstGeom>
           <a:solidFill>
-            <a:srgbClr val="2A2A2A"/>
+            <a:srgbClr val="C8BDA8"/>
           </a:solidFill>
           <a:ln>
             <a:noFill/>
@@ -6182,7 +6182,7 @@
             <a:r>
               <a:rPr sz="1200" b="0" i="0">
                 <a:solidFill>
-                  <a:srgbClr val="6B6B6B"/>
+                  <a:srgbClr val="8E867B"/>
                 </a:solidFill>
                 <a:latin typeface="JetBrains Mono"/>
               </a:rPr>
@@ -6221,7 +6221,7 @@
             <a:r>
               <a:rPr sz="1400" b="1" i="0">
                 <a:solidFill>
-                  <a:srgbClr val="F5F5F5"/>
+                  <a:srgbClr val="1F1B16"/>
                 </a:solidFill>
                 <a:latin typeface="Inter"/>
               </a:rPr>
@@ -6260,7 +6260,7 @@
             <a:r>
               <a:rPr sz="1200" b="0" i="0">
                 <a:solidFill>
-                  <a:srgbClr val="A0A0A0"/>
+                  <a:srgbClr val="5C544A"/>
                 </a:solidFill>
                 <a:latin typeface="Inter"/>
               </a:rPr>
@@ -6284,7 +6284,7 @@
             <a:avLst/>
           </a:prstGeom>
           <a:solidFill>
-            <a:srgbClr val="2A2A2A"/>
+            <a:srgbClr val="C8BDA8"/>
           </a:solidFill>
           <a:ln>
             <a:noFill/>
@@ -6343,7 +6343,7 @@
             <a:r>
               <a:rPr sz="1200" b="0" i="0">
                 <a:solidFill>
-                  <a:srgbClr val="6B6B6B"/>
+                  <a:srgbClr val="8E867B"/>
                 </a:solidFill>
                 <a:latin typeface="JetBrains Mono"/>
               </a:rPr>
@@ -6382,7 +6382,7 @@
             <a:r>
               <a:rPr sz="1400" b="1" i="0">
                 <a:solidFill>
-                  <a:srgbClr val="F5F5F5"/>
+                  <a:srgbClr val="1F1B16"/>
                 </a:solidFill>
                 <a:latin typeface="Inter"/>
               </a:rPr>
@@ -6421,7 +6421,7 @@
             <a:r>
               <a:rPr sz="1200" b="0" i="0">
                 <a:solidFill>
-                  <a:srgbClr val="A0A0A0"/>
+                  <a:srgbClr val="5C544A"/>
                 </a:solidFill>
                 <a:latin typeface="Inter"/>
               </a:rPr>
@@ -6445,7 +6445,7 @@
             <a:avLst/>
           </a:prstGeom>
           <a:solidFill>
-            <a:srgbClr val="2A2A2A"/>
+            <a:srgbClr val="C8BDA8"/>
           </a:solidFill>
           <a:ln>
             <a:noFill/>
@@ -6504,7 +6504,7 @@
             <a:r>
               <a:rPr sz="1200" b="0" i="0">
                 <a:solidFill>
-                  <a:srgbClr val="6B6B6B"/>
+                  <a:srgbClr val="8E867B"/>
                 </a:solidFill>
                 <a:latin typeface="JetBrains Mono"/>
               </a:rPr>
@@ -6543,7 +6543,7 @@
             <a:r>
               <a:rPr sz="1400" b="1" i="0">
                 <a:solidFill>
-                  <a:srgbClr val="F5F5F5"/>
+                  <a:srgbClr val="1F1B16"/>
                 </a:solidFill>
                 <a:latin typeface="Inter"/>
               </a:rPr>
@@ -6582,7 +6582,7 @@
             <a:r>
               <a:rPr sz="1200" b="0" i="0">
                 <a:solidFill>
-                  <a:srgbClr val="A0A0A0"/>
+                  <a:srgbClr val="5C544A"/>
                 </a:solidFill>
                 <a:latin typeface="Inter"/>
               </a:rPr>
@@ -6606,7 +6606,7 @@
             <a:avLst/>
           </a:prstGeom>
           <a:solidFill>
-            <a:srgbClr val="2A2A2A"/>
+            <a:srgbClr val="C8BDA8"/>
           </a:solidFill>
           <a:ln>
             <a:noFill/>
@@ -6668,7 +6668,7 @@
             <a:avLst/>
           </a:prstGeom>
           <a:solidFill>
-            <a:srgbClr val="0A0A0A"/>
+            <a:srgbClr val="F0EAE0"/>
           </a:solidFill>
           <a:ln>
             <a:noFill/>
@@ -6727,7 +6727,7 @@
             <a:r>
               <a:rPr sz="1100" b="1" i="0" spc="20">
                 <a:solidFill>
-                  <a:srgbClr val="F5F5F5"/>
+                  <a:srgbClr val="1F1B16"/>
                 </a:solidFill>
                 <a:latin typeface="Inter"/>
               </a:rPr>
@@ -6766,7 +6766,7 @@
             <a:r>
               <a:rPr sz="900" b="0" i="0" spc="200">
                 <a:solidFill>
-                  <a:srgbClr val="6B6B6B"/>
+                  <a:srgbClr val="8E867B"/>
                 </a:solidFill>
                 <a:latin typeface="Inter"/>
               </a:rPr>
@@ -6805,7 +6805,7 @@
             <a:r>
               <a:rPr sz="900" b="0" i="0" spc="80">
                 <a:solidFill>
-                  <a:srgbClr val="6B6B6B"/>
+                  <a:srgbClr val="8E867B"/>
                 </a:solidFill>
                 <a:latin typeface="Inter"/>
               </a:rPr>
@@ -6844,7 +6844,7 @@
             <a:r>
               <a:rPr sz="900" b="0" i="0" spc="50">
                 <a:solidFill>
-                  <a:srgbClr val="6B6B6B"/>
+                  <a:srgbClr val="8E867B"/>
                 </a:solidFill>
                 <a:latin typeface="JetBrains Mono"/>
               </a:rPr>
@@ -6868,7 +6868,7 @@
             <a:avLst/>
           </a:prstGeom>
           <a:solidFill>
-            <a:srgbClr val="2A2A2A"/>
+            <a:srgbClr val="C8BDA8"/>
           </a:solidFill>
           <a:ln>
             <a:noFill/>
@@ -6927,7 +6927,7 @@
             <a:r>
               <a:rPr sz="1000" b="0" i="0" spc="300">
                 <a:solidFill>
-                  <a:srgbClr val="6B6B6B"/>
+                  <a:srgbClr val="8E867B"/>
                 </a:solidFill>
                 <a:latin typeface="Inter"/>
               </a:rPr>
@@ -6966,7 +6966,7 @@
             <a:r>
               <a:rPr sz="3400" b="1" i="0">
                 <a:solidFill>
-                  <a:srgbClr val="F5F5F5"/>
+                  <a:srgbClr val="1F1B16"/>
                 </a:solidFill>
                 <a:latin typeface="Inter"/>
               </a:rPr>
@@ -7005,7 +7005,7 @@
             <a:r>
               <a:rPr sz="1400" b="0" i="0">
                 <a:solidFill>
-                  <a:srgbClr val="A0A0A0"/>
+                  <a:srgbClr val="5C544A"/>
                 </a:solidFill>
                 <a:latin typeface="Inter"/>
               </a:rPr>
@@ -7029,7 +7029,7 @@
             <a:avLst/>
           </a:prstGeom>
           <a:solidFill>
-            <a:srgbClr val="141414"/>
+            <a:srgbClr val="E5DDCE"/>
           </a:solidFill>
           <a:ln>
             <a:noFill/>
@@ -7073,7 +7073,7 @@
             <a:avLst/>
           </a:prstGeom>
           <a:solidFill>
-            <a:srgbClr val="2A2A2A"/>
+            <a:srgbClr val="C8BDA8"/>
           </a:solidFill>
           <a:ln>
             <a:noFill/>
@@ -7132,7 +7132,7 @@
             <a:r>
               <a:rPr sz="4400" b="0" i="0">
                 <a:solidFill>
-                  <a:srgbClr val="6B6B6B"/>
+                  <a:srgbClr val="8E867B"/>
                 </a:solidFill>
                 <a:latin typeface="Georgia"/>
               </a:rPr>
@@ -7171,7 +7171,7 @@
             <a:r>
               <a:rPr sz="1400" b="0" i="0">
                 <a:solidFill>
-                  <a:srgbClr val="F5F5F5"/>
+                  <a:srgbClr val="1F1B16"/>
                 </a:solidFill>
                 <a:latin typeface="Inter"/>
               </a:rPr>
@@ -7210,7 +7210,7 @@
             <a:r>
               <a:rPr sz="1000" b="0" i="0" spc="80">
                 <a:solidFill>
-                  <a:srgbClr val="6B6B6B"/>
+                  <a:srgbClr val="8E867B"/>
                 </a:solidFill>
                 <a:latin typeface="Inter"/>
               </a:rPr>
@@ -7252,7 +7252,7 @@
             <a:avLst/>
           </a:prstGeom>
           <a:solidFill>
-            <a:srgbClr val="0A0A0A"/>
+            <a:srgbClr val="F0EAE0"/>
           </a:solidFill>
           <a:ln>
             <a:noFill/>
@@ -7311,7 +7311,7 @@
             <a:r>
               <a:rPr sz="1100" b="1" i="0" spc="20">
                 <a:solidFill>
-                  <a:srgbClr val="F5F5F5"/>
+                  <a:srgbClr val="1F1B16"/>
                 </a:solidFill>
                 <a:latin typeface="Inter"/>
               </a:rPr>
@@ -7350,7 +7350,7 @@
             <a:r>
               <a:rPr sz="900" b="0" i="0" spc="200">
                 <a:solidFill>
-                  <a:srgbClr val="6B6B6B"/>
+                  <a:srgbClr val="8E867B"/>
                 </a:solidFill>
                 <a:latin typeface="Inter"/>
               </a:rPr>
@@ -7389,7 +7389,7 @@
             <a:r>
               <a:rPr sz="900" b="0" i="0" spc="80">
                 <a:solidFill>
-                  <a:srgbClr val="6B6B6B"/>
+                  <a:srgbClr val="8E867B"/>
                 </a:solidFill>
                 <a:latin typeface="Inter"/>
               </a:rPr>
@@ -7428,7 +7428,7 @@
             <a:r>
               <a:rPr sz="900" b="0" i="0" spc="50">
                 <a:solidFill>
-                  <a:srgbClr val="6B6B6B"/>
+                  <a:srgbClr val="8E867B"/>
                 </a:solidFill>
                 <a:latin typeface="JetBrains Mono"/>
               </a:rPr>
@@ -7452,7 +7452,7 @@
             <a:avLst/>
           </a:prstGeom>
           <a:solidFill>
-            <a:srgbClr val="2A2A2A"/>
+            <a:srgbClr val="C8BDA8"/>
           </a:solidFill>
           <a:ln>
             <a:noFill/>
@@ -7511,7 +7511,7 @@
             <a:r>
               <a:rPr sz="1000" b="0" i="0" spc="300">
                 <a:solidFill>
-                  <a:srgbClr val="6B6B6B"/>
+                  <a:srgbClr val="8E867B"/>
                 </a:solidFill>
                 <a:latin typeface="Inter"/>
               </a:rPr>
@@ -7550,7 +7550,7 @@
             <a:r>
               <a:rPr sz="3400" b="1" i="0">
                 <a:solidFill>
-                  <a:srgbClr val="F5F5F5"/>
+                  <a:srgbClr val="1F1B16"/>
                 </a:solidFill>
                 <a:latin typeface="Inter"/>
               </a:rPr>
@@ -7589,7 +7589,7 @@
             <a:r>
               <a:rPr sz="1400" b="0" i="0">
                 <a:solidFill>
-                  <a:srgbClr val="A0A0A0"/>
+                  <a:srgbClr val="5C544A"/>
                 </a:solidFill>
                 <a:latin typeface="Inter"/>
               </a:rPr>
@@ -7628,7 +7628,7 @@
             <a:r>
               <a:rPr sz="1400" b="0" i="0">
                 <a:solidFill>
-                  <a:srgbClr val="6B6B6B"/>
+                  <a:srgbClr val="8E867B"/>
                 </a:solidFill>
                 <a:latin typeface="JetBrains Mono"/>
               </a:rPr>
@@ -7667,7 +7667,7 @@
             <a:r>
               <a:rPr sz="1250" b="1" i="0">
                 <a:solidFill>
-                  <a:srgbClr val="F5F5F5"/>
+                  <a:srgbClr val="1F1B16"/>
                 </a:solidFill>
                 <a:latin typeface="Inter"/>
               </a:rPr>
@@ -7706,7 +7706,7 @@
             <a:r>
               <a:rPr sz="1150" b="0" i="0">
                 <a:solidFill>
-                  <a:srgbClr val="E5E5E5"/>
+                  <a:srgbClr val="3A332C"/>
                 </a:solidFill>
                 <a:latin typeface="Inter"/>
               </a:rPr>
@@ -7745,7 +7745,7 @@
             <a:r>
               <a:rPr sz="1050" b="0" i="0">
                 <a:solidFill>
-                  <a:srgbClr val="6B6B6B"/>
+                  <a:srgbClr val="8E867B"/>
                 </a:solidFill>
                 <a:latin typeface="Inter"/>
               </a:rPr>
@@ -7769,7 +7769,7 @@
             <a:avLst/>
           </a:prstGeom>
           <a:solidFill>
-            <a:srgbClr val="2A2A2A"/>
+            <a:srgbClr val="C8BDA8"/>
           </a:solidFill>
           <a:ln>
             <a:noFill/>
@@ -7828,7 +7828,7 @@
             <a:r>
               <a:rPr sz="1400" b="0" i="0">
                 <a:solidFill>
-                  <a:srgbClr val="6B6B6B"/>
+                  <a:srgbClr val="8E867B"/>
                 </a:solidFill>
                 <a:latin typeface="JetBrains Mono"/>
               </a:rPr>
@@ -7867,7 +7867,7 @@
             <a:r>
               <a:rPr sz="1250" b="1" i="0">
                 <a:solidFill>
-                  <a:srgbClr val="F5F5F5"/>
+                  <a:srgbClr val="1F1B16"/>
                 </a:solidFill>
                 <a:latin typeface="Inter"/>
               </a:rPr>
@@ -7906,7 +7906,7 @@
             <a:r>
               <a:rPr sz="1150" b="0" i="0">
                 <a:solidFill>
-                  <a:srgbClr val="E5E5E5"/>
+                  <a:srgbClr val="3A332C"/>
                 </a:solidFill>
                 <a:latin typeface="Inter"/>
               </a:rPr>
@@ -7945,7 +7945,7 @@
             <a:r>
               <a:rPr sz="1050" b="0" i="0">
                 <a:solidFill>
-                  <a:srgbClr val="6B6B6B"/>
+                  <a:srgbClr val="8E867B"/>
                 </a:solidFill>
                 <a:latin typeface="Inter"/>
               </a:rPr>
@@ -7969,7 +7969,7 @@
             <a:avLst/>
           </a:prstGeom>
           <a:solidFill>
-            <a:srgbClr val="2A2A2A"/>
+            <a:srgbClr val="C8BDA8"/>
           </a:solidFill>
           <a:ln>
             <a:noFill/>
@@ -8028,7 +8028,7 @@
             <a:r>
               <a:rPr sz="1400" b="0" i="0">
                 <a:solidFill>
-                  <a:srgbClr val="6B6B6B"/>
+                  <a:srgbClr val="8E867B"/>
                 </a:solidFill>
                 <a:latin typeface="JetBrains Mono"/>
               </a:rPr>
@@ -8067,7 +8067,7 @@
             <a:r>
               <a:rPr sz="1250" b="1" i="0">
                 <a:solidFill>
-                  <a:srgbClr val="F5F5F5"/>
+                  <a:srgbClr val="1F1B16"/>
                 </a:solidFill>
                 <a:latin typeface="Inter"/>
               </a:rPr>
@@ -8106,7 +8106,7 @@
             <a:r>
               <a:rPr sz="1150" b="0" i="0">
                 <a:solidFill>
-                  <a:srgbClr val="E5E5E5"/>
+                  <a:srgbClr val="3A332C"/>
                 </a:solidFill>
                 <a:latin typeface="Inter"/>
               </a:rPr>
@@ -8145,7 +8145,7 @@
             <a:r>
               <a:rPr sz="1050" b="0" i="0">
                 <a:solidFill>
-                  <a:srgbClr val="6B6B6B"/>
+                  <a:srgbClr val="8E867B"/>
                 </a:solidFill>
                 <a:latin typeface="Inter"/>
               </a:rPr>
@@ -8169,7 +8169,7 @@
             <a:avLst/>
           </a:prstGeom>
           <a:solidFill>
-            <a:srgbClr val="2A2A2A"/>
+            <a:srgbClr val="C8BDA8"/>
           </a:solidFill>
           <a:ln>
             <a:noFill/>
@@ -8228,7 +8228,7 @@
             <a:r>
               <a:rPr sz="1400" b="0" i="0">
                 <a:solidFill>
-                  <a:srgbClr val="6B6B6B"/>
+                  <a:srgbClr val="8E867B"/>
                 </a:solidFill>
                 <a:latin typeface="JetBrains Mono"/>
               </a:rPr>
@@ -8267,7 +8267,7 @@
             <a:r>
               <a:rPr sz="1250" b="1" i="0">
                 <a:solidFill>
-                  <a:srgbClr val="F5F5F5"/>
+                  <a:srgbClr val="1F1B16"/>
                 </a:solidFill>
                 <a:latin typeface="Inter"/>
               </a:rPr>
@@ -8306,7 +8306,7 @@
             <a:r>
               <a:rPr sz="1150" b="0" i="0">
                 <a:solidFill>
-                  <a:srgbClr val="E5E5E5"/>
+                  <a:srgbClr val="3A332C"/>
                 </a:solidFill>
                 <a:latin typeface="Inter"/>
               </a:rPr>
@@ -8345,7 +8345,7 @@
             <a:r>
               <a:rPr sz="1050" b="0" i="0">
                 <a:solidFill>
-                  <a:srgbClr val="6B6B6B"/>
+                  <a:srgbClr val="8E867B"/>
                 </a:solidFill>
                 <a:latin typeface="Inter"/>
               </a:rPr>
@@ -8369,7 +8369,7 @@
             <a:avLst/>
           </a:prstGeom>
           <a:solidFill>
-            <a:srgbClr val="2A2A2A"/>
+            <a:srgbClr val="C8BDA8"/>
           </a:solidFill>
           <a:ln>
             <a:noFill/>
@@ -8431,7 +8431,7 @@
             <a:avLst/>
           </a:prstGeom>
           <a:solidFill>
-            <a:srgbClr val="0A0A0A"/>
+            <a:srgbClr val="F0EAE0"/>
           </a:solidFill>
           <a:ln>
             <a:noFill/>
@@ -8490,7 +8490,7 @@
             <a:r>
               <a:rPr sz="1100" b="1" i="0" spc="20">
                 <a:solidFill>
-                  <a:srgbClr val="F5F5F5"/>
+                  <a:srgbClr val="1F1B16"/>
                 </a:solidFill>
                 <a:latin typeface="Inter"/>
               </a:rPr>
@@ -8529,7 +8529,7 @@
             <a:r>
               <a:rPr sz="900" b="0" i="0" spc="200">
                 <a:solidFill>
-                  <a:srgbClr val="6B6B6B"/>
+                  <a:srgbClr val="8E867B"/>
                 </a:solidFill>
                 <a:latin typeface="Inter"/>
               </a:rPr>
@@ -8568,7 +8568,7 @@
             <a:r>
               <a:rPr sz="900" b="0" i="0" spc="80">
                 <a:solidFill>
-                  <a:srgbClr val="6B6B6B"/>
+                  <a:srgbClr val="8E867B"/>
                 </a:solidFill>
                 <a:latin typeface="Inter"/>
               </a:rPr>
@@ -8607,7 +8607,7 @@
             <a:r>
               <a:rPr sz="900" b="0" i="0" spc="50">
                 <a:solidFill>
-                  <a:srgbClr val="6B6B6B"/>
+                  <a:srgbClr val="8E867B"/>
                 </a:solidFill>
                 <a:latin typeface="JetBrains Mono"/>
               </a:rPr>
@@ -8631,7 +8631,7 @@
             <a:avLst/>
           </a:prstGeom>
           <a:solidFill>
-            <a:srgbClr val="2A2A2A"/>
+            <a:srgbClr val="C8BDA8"/>
           </a:solidFill>
           <a:ln>
             <a:noFill/>
@@ -8690,7 +8690,7 @@
             <a:r>
               <a:rPr sz="1000" b="0" i="0" spc="300">
                 <a:solidFill>
-                  <a:srgbClr val="6B6B6B"/>
+                  <a:srgbClr val="8E867B"/>
                 </a:solidFill>
                 <a:latin typeface="Inter"/>
               </a:rPr>
@@ -8729,7 +8729,7 @@
             <a:r>
               <a:rPr sz="3400" b="1" i="0">
                 <a:solidFill>
-                  <a:srgbClr val="F5F5F5"/>
+                  <a:srgbClr val="1F1B16"/>
                 </a:solidFill>
                 <a:latin typeface="Inter"/>
               </a:rPr>
@@ -8768,7 +8768,7 @@
             <a:r>
               <a:rPr sz="1400" b="0" i="0">
                 <a:solidFill>
-                  <a:srgbClr val="A0A0A0"/>
+                  <a:srgbClr val="5C544A"/>
                 </a:solidFill>
                 <a:latin typeface="Inter"/>
               </a:rPr>
@@ -8807,7 +8807,7 @@
             <a:r>
               <a:rPr sz="1400" b="0" i="0">
                 <a:solidFill>
-                  <a:srgbClr val="6B6B6B"/>
+                  <a:srgbClr val="8E867B"/>
                 </a:solidFill>
                 <a:latin typeface="JetBrains Mono"/>
               </a:rPr>
@@ -8846,7 +8846,7 @@
             <a:r>
               <a:rPr sz="1250" b="1" i="0">
                 <a:solidFill>
-                  <a:srgbClr val="F5F5F5"/>
+                  <a:srgbClr val="1F1B16"/>
                 </a:solidFill>
                 <a:latin typeface="Inter"/>
               </a:rPr>
@@ -8885,7 +8885,7 @@
             <a:r>
               <a:rPr sz="1150" b="0" i="0">
                 <a:solidFill>
-                  <a:srgbClr val="E5E5E5"/>
+                  <a:srgbClr val="3A332C"/>
                 </a:solidFill>
                 <a:latin typeface="Inter"/>
               </a:rPr>
@@ -8924,7 +8924,7 @@
             <a:r>
               <a:rPr sz="1050" b="0" i="0">
                 <a:solidFill>
-                  <a:srgbClr val="6B6B6B"/>
+                  <a:srgbClr val="8E867B"/>
                 </a:solidFill>
                 <a:latin typeface="Inter"/>
               </a:rPr>
@@ -8948,7 +8948,7 @@
             <a:avLst/>
           </a:prstGeom>
           <a:solidFill>
-            <a:srgbClr val="2A2A2A"/>
+            <a:srgbClr val="C8BDA8"/>
           </a:solidFill>
           <a:ln>
             <a:noFill/>
@@ -9007,7 +9007,7 @@
             <a:r>
               <a:rPr sz="1400" b="0" i="0">
                 <a:solidFill>
-                  <a:srgbClr val="6B6B6B"/>
+                  <a:srgbClr val="8E867B"/>
                 </a:solidFill>
                 <a:latin typeface="JetBrains Mono"/>
               </a:rPr>
@@ -9046,7 +9046,7 @@
             <a:r>
               <a:rPr sz="1250" b="1" i="0">
                 <a:solidFill>
-                  <a:srgbClr val="F5F5F5"/>
+                  <a:srgbClr val="1F1B16"/>
                 </a:solidFill>
                 <a:latin typeface="Inter"/>
               </a:rPr>
@@ -9085,7 +9085,7 @@
             <a:r>
               <a:rPr sz="1150" b="0" i="0">
                 <a:solidFill>
-                  <a:srgbClr val="E5E5E5"/>
+                  <a:srgbClr val="3A332C"/>
                 </a:solidFill>
                 <a:latin typeface="Inter"/>
               </a:rPr>
@@ -9124,7 +9124,7 @@
             <a:r>
               <a:rPr sz="1050" b="0" i="0">
                 <a:solidFill>
-                  <a:srgbClr val="6B6B6B"/>
+                  <a:srgbClr val="8E867B"/>
                 </a:solidFill>
                 <a:latin typeface="Inter"/>
               </a:rPr>
@@ -9148,7 +9148,7 @@
             <a:avLst/>
           </a:prstGeom>
           <a:solidFill>
-            <a:srgbClr val="2A2A2A"/>
+            <a:srgbClr val="C8BDA8"/>
           </a:solidFill>
           <a:ln>
             <a:noFill/>
@@ -9207,7 +9207,7 @@
             <a:r>
               <a:rPr sz="1400" b="0" i="0">
                 <a:solidFill>
-                  <a:srgbClr val="6B6B6B"/>
+                  <a:srgbClr val="8E867B"/>
                 </a:solidFill>
                 <a:latin typeface="JetBrains Mono"/>
               </a:rPr>
@@ -9246,7 +9246,7 @@
             <a:r>
               <a:rPr sz="1250" b="1" i="0">
                 <a:solidFill>
-                  <a:srgbClr val="F5F5F5"/>
+                  <a:srgbClr val="1F1B16"/>
                 </a:solidFill>
                 <a:latin typeface="Inter"/>
               </a:rPr>
@@ -9285,7 +9285,7 @@
             <a:r>
               <a:rPr sz="1150" b="0" i="0">
                 <a:solidFill>
-                  <a:srgbClr val="E5E5E5"/>
+                  <a:srgbClr val="3A332C"/>
                 </a:solidFill>
                 <a:latin typeface="Inter"/>
               </a:rPr>
@@ -9324,7 +9324,7 @@
             <a:r>
               <a:rPr sz="1050" b="0" i="0">
                 <a:solidFill>
-                  <a:srgbClr val="6B6B6B"/>
+                  <a:srgbClr val="8E867B"/>
                 </a:solidFill>
                 <a:latin typeface="Inter"/>
               </a:rPr>
@@ -9348,7 +9348,7 @@
             <a:avLst/>
           </a:prstGeom>
           <a:solidFill>
-            <a:srgbClr val="2A2A2A"/>
+            <a:srgbClr val="C8BDA8"/>
           </a:solidFill>
           <a:ln>
             <a:noFill/>
@@ -9410,7 +9410,7 @@
             <a:avLst/>
           </a:prstGeom>
           <a:solidFill>
-            <a:srgbClr val="0A0A0A"/>
+            <a:srgbClr val="F0EAE0"/>
           </a:solidFill>
           <a:ln>
             <a:noFill/>
@@ -9469,7 +9469,7 @@
             <a:r>
               <a:rPr sz="1100" b="1" i="0" spc="20">
                 <a:solidFill>
-                  <a:srgbClr val="F5F5F5"/>
+                  <a:srgbClr val="1F1B16"/>
                 </a:solidFill>
                 <a:latin typeface="Inter"/>
               </a:rPr>
@@ -9508,7 +9508,7 @@
             <a:r>
               <a:rPr sz="900" b="0" i="0" spc="200">
                 <a:solidFill>
-                  <a:srgbClr val="6B6B6B"/>
+                  <a:srgbClr val="8E867B"/>
                 </a:solidFill>
                 <a:latin typeface="Inter"/>
               </a:rPr>
@@ -9547,7 +9547,7 @@
             <a:r>
               <a:rPr sz="900" b="0" i="0" spc="80">
                 <a:solidFill>
-                  <a:srgbClr val="6B6B6B"/>
+                  <a:srgbClr val="8E867B"/>
                 </a:solidFill>
                 <a:latin typeface="Inter"/>
               </a:rPr>
@@ -9586,7 +9586,7 @@
             <a:r>
               <a:rPr sz="900" b="0" i="0" spc="50">
                 <a:solidFill>
-                  <a:srgbClr val="6B6B6B"/>
+                  <a:srgbClr val="8E867B"/>
                 </a:solidFill>
                 <a:latin typeface="JetBrains Mono"/>
               </a:rPr>
@@ -9610,7 +9610,7 @@
             <a:avLst/>
           </a:prstGeom>
           <a:solidFill>
-            <a:srgbClr val="2A2A2A"/>
+            <a:srgbClr val="C8BDA8"/>
           </a:solidFill>
           <a:ln>
             <a:noFill/>
@@ -9669,7 +9669,7 @@
             <a:r>
               <a:rPr sz="1000" b="0" i="0" spc="300">
                 <a:solidFill>
-                  <a:srgbClr val="6B6B6B"/>
+                  <a:srgbClr val="8E867B"/>
                 </a:solidFill>
                 <a:latin typeface="Inter"/>
               </a:rPr>
@@ -9708,7 +9708,7 @@
             <a:r>
               <a:rPr sz="3400" b="1" i="0">
                 <a:solidFill>
-                  <a:srgbClr val="F5F5F5"/>
+                  <a:srgbClr val="1F1B16"/>
                 </a:solidFill>
                 <a:latin typeface="Inter"/>
               </a:rPr>
@@ -9747,7 +9747,7 @@
             <a:r>
               <a:rPr sz="1400" b="0" i="0">
                 <a:solidFill>
-                  <a:srgbClr val="A0A0A0"/>
+                  <a:srgbClr val="5C544A"/>
                 </a:solidFill>
                 <a:latin typeface="Inter"/>
               </a:rPr>
@@ -9771,7 +9771,7 @@
             <a:avLst/>
           </a:prstGeom>
           <a:solidFill>
-            <a:srgbClr val="141414"/>
+            <a:srgbClr val="E5DDCE"/>
           </a:solidFill>
           <a:ln>
             <a:noFill/>
@@ -9815,7 +9815,7 @@
             <a:avLst/>
           </a:prstGeom>
           <a:solidFill>
-            <a:srgbClr val="2A2A2A"/>
+            <a:srgbClr val="C8BDA8"/>
           </a:solidFill>
           <a:ln>
             <a:noFill/>
@@ -9874,7 +9874,7 @@
             <a:r>
               <a:rPr sz="1800" b="0" i="0">
                 <a:solidFill>
-                  <a:srgbClr val="6B6B6B"/>
+                  <a:srgbClr val="8E867B"/>
                 </a:solidFill>
                 <a:latin typeface="JetBrains Mono"/>
               </a:rPr>
@@ -9913,7 +9913,7 @@
             <a:r>
               <a:rPr sz="1400" b="1" i="0">
                 <a:solidFill>
-                  <a:srgbClr val="F5F5F5"/>
+                  <a:srgbClr val="1F1B16"/>
                 </a:solidFill>
                 <a:latin typeface="Inter"/>
               </a:rPr>
@@ -9952,7 +9952,7 @@
             <a:r>
               <a:rPr sz="1100" b="0" i="0">
                 <a:solidFill>
-                  <a:srgbClr val="A0A0A0"/>
+                  <a:srgbClr val="5C544A"/>
                 </a:solidFill>
                 <a:latin typeface="Inter"/>
               </a:rPr>
@@ -9976,7 +9976,7 @@
             <a:avLst/>
           </a:prstGeom>
           <a:solidFill>
-            <a:srgbClr val="141414"/>
+            <a:srgbClr val="E5DDCE"/>
           </a:solidFill>
           <a:ln>
             <a:noFill/>
@@ -10020,7 +10020,7 @@
             <a:avLst/>
           </a:prstGeom>
           <a:solidFill>
-            <a:srgbClr val="2A2A2A"/>
+            <a:srgbClr val="C8BDA8"/>
           </a:solidFill>
           <a:ln>
             <a:noFill/>
@@ -10079,7 +10079,7 @@
             <a:r>
               <a:rPr sz="1800" b="0" i="0">
                 <a:solidFill>
-                  <a:srgbClr val="6B6B6B"/>
+                  <a:srgbClr val="8E867B"/>
                 </a:solidFill>
                 <a:latin typeface="JetBrains Mono"/>
               </a:rPr>
@@ -10118,7 +10118,7 @@
             <a:r>
               <a:rPr sz="1400" b="1" i="0">
                 <a:solidFill>
-                  <a:srgbClr val="F5F5F5"/>
+                  <a:srgbClr val="1F1B16"/>
                 </a:solidFill>
                 <a:latin typeface="Inter"/>
               </a:rPr>
@@ -10157,7 +10157,7 @@
             <a:r>
               <a:rPr sz="1100" b="0" i="0">
                 <a:solidFill>
-                  <a:srgbClr val="A0A0A0"/>
+                  <a:srgbClr val="5C544A"/>
                 </a:solidFill>
                 <a:latin typeface="Inter"/>
               </a:rPr>
@@ -10181,7 +10181,7 @@
             <a:avLst/>
           </a:prstGeom>
           <a:solidFill>
-            <a:srgbClr val="141414"/>
+            <a:srgbClr val="E5DDCE"/>
           </a:solidFill>
           <a:ln>
             <a:noFill/>
@@ -10225,7 +10225,7 @@
             <a:avLst/>
           </a:prstGeom>
           <a:solidFill>
-            <a:srgbClr val="2A2A2A"/>
+            <a:srgbClr val="C8BDA8"/>
           </a:solidFill>
           <a:ln>
             <a:noFill/>
@@ -10284,7 +10284,7 @@
             <a:r>
               <a:rPr sz="1800" b="0" i="0">
                 <a:solidFill>
-                  <a:srgbClr val="6B6B6B"/>
+                  <a:srgbClr val="8E867B"/>
                 </a:solidFill>
                 <a:latin typeface="JetBrains Mono"/>
               </a:rPr>
@@ -10323,7 +10323,7 @@
             <a:r>
               <a:rPr sz="1400" b="1" i="0">
                 <a:solidFill>
-                  <a:srgbClr val="F5F5F5"/>
+                  <a:srgbClr val="1F1B16"/>
                 </a:solidFill>
                 <a:latin typeface="Inter"/>
               </a:rPr>
@@ -10362,7 +10362,7 @@
             <a:r>
               <a:rPr sz="1100" b="0" i="0">
                 <a:solidFill>
-                  <a:srgbClr val="A0A0A0"/>
+                  <a:srgbClr val="5C544A"/>
                 </a:solidFill>
                 <a:latin typeface="Inter"/>
               </a:rPr>
@@ -10386,7 +10386,7 @@
             <a:avLst/>
           </a:prstGeom>
           <a:solidFill>
-            <a:srgbClr val="141414"/>
+            <a:srgbClr val="E5DDCE"/>
           </a:solidFill>
           <a:ln>
             <a:noFill/>
@@ -10430,7 +10430,7 @@
             <a:avLst/>
           </a:prstGeom>
           <a:solidFill>
-            <a:srgbClr val="2A2A2A"/>
+            <a:srgbClr val="C8BDA8"/>
           </a:solidFill>
           <a:ln>
             <a:noFill/>
@@ -10489,7 +10489,7 @@
             <a:r>
               <a:rPr sz="1800" b="0" i="0">
                 <a:solidFill>
-                  <a:srgbClr val="6B6B6B"/>
+                  <a:srgbClr val="8E867B"/>
                 </a:solidFill>
                 <a:latin typeface="JetBrains Mono"/>
               </a:rPr>
@@ -10528,7 +10528,7 @@
             <a:r>
               <a:rPr sz="1400" b="1" i="0">
                 <a:solidFill>
-                  <a:srgbClr val="F5F5F5"/>
+                  <a:srgbClr val="1F1B16"/>
                 </a:solidFill>
                 <a:latin typeface="Inter"/>
               </a:rPr>
@@ -10567,7 +10567,7 @@
             <a:r>
               <a:rPr sz="1100" b="0" i="0">
                 <a:solidFill>
-                  <a:srgbClr val="A0A0A0"/>
+                  <a:srgbClr val="5C544A"/>
                 </a:solidFill>
                 <a:latin typeface="Inter"/>
               </a:rPr>
@@ -10609,7 +10609,7 @@
             <a:avLst/>
           </a:prstGeom>
           <a:solidFill>
-            <a:srgbClr val="0A0A0A"/>
+            <a:srgbClr val="F0EAE0"/>
           </a:solidFill>
           <a:ln>
             <a:noFill/>
@@ -10668,7 +10668,7 @@
             <a:r>
               <a:rPr sz="1100" b="1" i="0" spc="20">
                 <a:solidFill>
-                  <a:srgbClr val="F5F5F5"/>
+                  <a:srgbClr val="1F1B16"/>
                 </a:solidFill>
                 <a:latin typeface="Inter"/>
               </a:rPr>
@@ -10707,7 +10707,7 @@
             <a:r>
               <a:rPr sz="900" b="0" i="0" spc="200">
                 <a:solidFill>
-                  <a:srgbClr val="6B6B6B"/>
+                  <a:srgbClr val="8E867B"/>
                 </a:solidFill>
                 <a:latin typeface="Inter"/>
               </a:rPr>
@@ -10746,7 +10746,7 @@
             <a:r>
               <a:rPr sz="900" b="0" i="0" spc="80">
                 <a:solidFill>
-                  <a:srgbClr val="6B6B6B"/>
+                  <a:srgbClr val="8E867B"/>
                 </a:solidFill>
                 <a:latin typeface="Inter"/>
               </a:rPr>
@@ -10785,7 +10785,7 @@
             <a:r>
               <a:rPr sz="900" b="0" i="0" spc="50">
                 <a:solidFill>
-                  <a:srgbClr val="6B6B6B"/>
+                  <a:srgbClr val="8E867B"/>
                 </a:solidFill>
                 <a:latin typeface="JetBrains Mono"/>
               </a:rPr>
@@ -10809,7 +10809,7 @@
             <a:avLst/>
           </a:prstGeom>
           <a:solidFill>
-            <a:srgbClr val="2A2A2A"/>
+            <a:srgbClr val="C8BDA8"/>
           </a:solidFill>
           <a:ln>
             <a:noFill/>
@@ -10868,7 +10868,7 @@
             <a:r>
               <a:rPr sz="1000" b="0" i="0" spc="300">
                 <a:solidFill>
-                  <a:srgbClr val="6B6B6B"/>
+                  <a:srgbClr val="8E867B"/>
                 </a:solidFill>
                 <a:latin typeface="Inter"/>
               </a:rPr>
@@ -10907,7 +10907,7 @@
             <a:r>
               <a:rPr sz="3400" b="1" i="0">
                 <a:solidFill>
-                  <a:srgbClr val="F5F5F5"/>
+                  <a:srgbClr val="1F1B16"/>
                 </a:solidFill>
                 <a:latin typeface="Inter"/>
               </a:rPr>
@@ -10946,7 +10946,7 @@
             <a:r>
               <a:rPr sz="1400" b="0" i="0">
                 <a:solidFill>
-                  <a:srgbClr val="A0A0A0"/>
+                  <a:srgbClr val="5C544A"/>
                 </a:solidFill>
                 <a:latin typeface="Inter"/>
               </a:rPr>
@@ -10985,7 +10985,7 @@
             <a:r>
               <a:rPr sz="1500" b="0" i="0">
                 <a:solidFill>
-                  <a:srgbClr val="6B6B6B"/>
+                  <a:srgbClr val="8E867B"/>
                 </a:solidFill>
                 <a:latin typeface="JetBrains Mono"/>
               </a:rPr>
@@ -11024,7 +11024,7 @@
             <a:r>
               <a:rPr sz="1350" b="1" i="0">
                 <a:solidFill>
-                  <a:srgbClr val="F5F5F5"/>
+                  <a:srgbClr val="1F1B16"/>
                 </a:solidFill>
                 <a:latin typeface="Inter"/>
               </a:rPr>
@@ -11063,7 +11063,7 @@
             <a:r>
               <a:rPr sz="1150" b="0" i="0">
                 <a:solidFill>
-                  <a:srgbClr val="A0A0A0"/>
+                  <a:srgbClr val="5C544A"/>
                 </a:solidFill>
                 <a:latin typeface="Inter"/>
               </a:rPr>
@@ -11087,7 +11087,7 @@
             <a:avLst/>
           </a:prstGeom>
           <a:solidFill>
-            <a:srgbClr val="2A2A2A"/>
+            <a:srgbClr val="C8BDA8"/>
           </a:solidFill>
           <a:ln>
             <a:noFill/>
@@ -11146,7 +11146,7 @@
             <a:r>
               <a:rPr sz="1500" b="0" i="0">
                 <a:solidFill>
-                  <a:srgbClr val="6B6B6B"/>
+                  <a:srgbClr val="8E867B"/>
                 </a:solidFill>
                 <a:latin typeface="JetBrains Mono"/>
               </a:rPr>
@@ -11185,7 +11185,7 @@
             <a:r>
               <a:rPr sz="1350" b="1" i="0">
                 <a:solidFill>
-                  <a:srgbClr val="F5F5F5"/>
+                  <a:srgbClr val="1F1B16"/>
                 </a:solidFill>
                 <a:latin typeface="Inter"/>
               </a:rPr>
@@ -11224,7 +11224,7 @@
             <a:r>
               <a:rPr sz="1150" b="0" i="0">
                 <a:solidFill>
-                  <a:srgbClr val="A0A0A0"/>
+                  <a:srgbClr val="5C544A"/>
                 </a:solidFill>
                 <a:latin typeface="Inter"/>
               </a:rPr>
@@ -11248,7 +11248,7 @@
             <a:avLst/>
           </a:prstGeom>
           <a:solidFill>
-            <a:srgbClr val="2A2A2A"/>
+            <a:srgbClr val="C8BDA8"/>
           </a:solidFill>
           <a:ln>
             <a:noFill/>
@@ -11307,7 +11307,7 @@
             <a:r>
               <a:rPr sz="1500" b="0" i="0">
                 <a:solidFill>
-                  <a:srgbClr val="6B6B6B"/>
+                  <a:srgbClr val="8E867B"/>
                 </a:solidFill>
                 <a:latin typeface="JetBrains Mono"/>
               </a:rPr>
@@ -11346,7 +11346,7 @@
             <a:r>
               <a:rPr sz="1350" b="1" i="0">
                 <a:solidFill>
-                  <a:srgbClr val="F5F5F5"/>
+                  <a:srgbClr val="1F1B16"/>
                 </a:solidFill>
                 <a:latin typeface="Inter"/>
               </a:rPr>
@@ -11385,7 +11385,7 @@
             <a:r>
               <a:rPr sz="1150" b="0" i="0">
                 <a:solidFill>
-                  <a:srgbClr val="A0A0A0"/>
+                  <a:srgbClr val="5C544A"/>
                 </a:solidFill>
                 <a:latin typeface="Inter"/>
               </a:rPr>
@@ -11409,7 +11409,7 @@
             <a:avLst/>
           </a:prstGeom>
           <a:solidFill>
-            <a:srgbClr val="2A2A2A"/>
+            <a:srgbClr val="C8BDA8"/>
           </a:solidFill>
           <a:ln>
             <a:noFill/>
@@ -11468,7 +11468,7 @@
             <a:r>
               <a:rPr sz="1500" b="0" i="0">
                 <a:solidFill>
-                  <a:srgbClr val="6B6B6B"/>
+                  <a:srgbClr val="8E867B"/>
                 </a:solidFill>
                 <a:latin typeface="JetBrains Mono"/>
               </a:rPr>
@@ -11507,7 +11507,7 @@
             <a:r>
               <a:rPr sz="1350" b="1" i="0">
                 <a:solidFill>
-                  <a:srgbClr val="F5F5F5"/>
+                  <a:srgbClr val="1F1B16"/>
                 </a:solidFill>
                 <a:latin typeface="Inter"/>
               </a:rPr>
@@ -11546,7 +11546,7 @@
             <a:r>
               <a:rPr sz="1150" b="0" i="0">
                 <a:solidFill>
-                  <a:srgbClr val="A0A0A0"/>
+                  <a:srgbClr val="5C544A"/>
                 </a:solidFill>
                 <a:latin typeface="Inter"/>
               </a:rPr>
@@ -11570,7 +11570,7 @@
             <a:avLst/>
           </a:prstGeom>
           <a:solidFill>
-            <a:srgbClr val="2A2A2A"/>
+            <a:srgbClr val="C8BDA8"/>
           </a:solidFill>
           <a:ln>
             <a:noFill/>
@@ -11629,7 +11629,7 @@
             <a:r>
               <a:rPr sz="1500" b="0" i="0">
                 <a:solidFill>
-                  <a:srgbClr val="6B6B6B"/>
+                  <a:srgbClr val="8E867B"/>
                 </a:solidFill>
                 <a:latin typeface="JetBrains Mono"/>
               </a:rPr>
@@ -11668,7 +11668,7 @@
             <a:r>
               <a:rPr sz="1350" b="1" i="0">
                 <a:solidFill>
-                  <a:srgbClr val="F5F5F5"/>
+                  <a:srgbClr val="1F1B16"/>
                 </a:solidFill>
                 <a:latin typeface="Inter"/>
               </a:rPr>
@@ -11707,7 +11707,7 @@
             <a:r>
               <a:rPr sz="1150" b="0" i="0">
                 <a:solidFill>
-                  <a:srgbClr val="A0A0A0"/>
+                  <a:srgbClr val="5C544A"/>
                 </a:solidFill>
                 <a:latin typeface="Inter"/>
               </a:rPr>
@@ -11731,7 +11731,7 @@
             <a:avLst/>
           </a:prstGeom>
           <a:solidFill>
-            <a:srgbClr val="2A2A2A"/>
+            <a:srgbClr val="C8BDA8"/>
           </a:solidFill>
           <a:ln>
             <a:noFill/>
@@ -11793,7 +11793,7 @@
             <a:avLst/>
           </a:prstGeom>
           <a:solidFill>
-            <a:srgbClr val="0A0A0A"/>
+            <a:srgbClr val="F0EAE0"/>
           </a:solidFill>
           <a:ln>
             <a:noFill/>
@@ -11852,7 +11852,7 @@
             <a:r>
               <a:rPr sz="1100" b="1" i="0" spc="20">
                 <a:solidFill>
-                  <a:srgbClr val="F5F5F5"/>
+                  <a:srgbClr val="1F1B16"/>
                 </a:solidFill>
                 <a:latin typeface="Inter"/>
               </a:rPr>
@@ -11891,7 +11891,7 @@
             <a:r>
               <a:rPr sz="900" b="0" i="0" spc="200">
                 <a:solidFill>
-                  <a:srgbClr val="6B6B6B"/>
+                  <a:srgbClr val="8E867B"/>
                 </a:solidFill>
                 <a:latin typeface="Inter"/>
               </a:rPr>
@@ -11930,7 +11930,7 @@
             <a:r>
               <a:rPr sz="900" b="0" i="0" spc="80">
                 <a:solidFill>
-                  <a:srgbClr val="6B6B6B"/>
+                  <a:srgbClr val="8E867B"/>
                 </a:solidFill>
                 <a:latin typeface="Inter"/>
               </a:rPr>
@@ -11969,7 +11969,7 @@
             <a:r>
               <a:rPr sz="900" b="0" i="0" spc="50">
                 <a:solidFill>
-                  <a:srgbClr val="6B6B6B"/>
+                  <a:srgbClr val="8E867B"/>
                 </a:solidFill>
                 <a:latin typeface="JetBrains Mono"/>
               </a:rPr>
@@ -11993,7 +11993,7 @@
             <a:avLst/>
           </a:prstGeom>
           <a:solidFill>
-            <a:srgbClr val="2A2A2A"/>
+            <a:srgbClr val="C8BDA8"/>
           </a:solidFill>
           <a:ln>
             <a:noFill/>
@@ -12052,7 +12052,7 @@
             <a:r>
               <a:rPr sz="1000" b="0" i="0" spc="300">
                 <a:solidFill>
-                  <a:srgbClr val="6B6B6B"/>
+                  <a:srgbClr val="8E867B"/>
                 </a:solidFill>
                 <a:latin typeface="Inter"/>
               </a:rPr>
@@ -12091,7 +12091,7 @@
             <a:r>
               <a:rPr sz="3400" b="1" i="0">
                 <a:solidFill>
-                  <a:srgbClr val="F5F5F5"/>
+                  <a:srgbClr val="1F1B16"/>
                 </a:solidFill>
                 <a:latin typeface="Inter"/>
               </a:rPr>
@@ -12130,7 +12130,7 @@
             <a:r>
               <a:rPr sz="1400" b="0" i="0">
                 <a:solidFill>
-                  <a:srgbClr val="A0A0A0"/>
+                  <a:srgbClr val="5C544A"/>
                 </a:solidFill>
                 <a:latin typeface="Inter"/>
               </a:rPr>
@@ -12154,7 +12154,7 @@
             <a:avLst/>
           </a:prstGeom>
           <a:solidFill>
-            <a:srgbClr val="141414"/>
+            <a:srgbClr val="E5DDCE"/>
           </a:solidFill>
           <a:ln>
             <a:noFill/>
@@ -12198,7 +12198,7 @@
             <a:avLst/>
           </a:prstGeom>
           <a:solidFill>
-            <a:srgbClr val="2A2A2A"/>
+            <a:srgbClr val="C8BDA8"/>
           </a:solidFill>
           <a:ln>
             <a:noFill/>
@@ -12257,7 +12257,7 @@
             <a:r>
               <a:rPr sz="1000" b="1" i="0" spc="300">
                 <a:solidFill>
-                  <a:srgbClr val="6B6B6B"/>
+                  <a:srgbClr val="8E867B"/>
                 </a:solidFill>
                 <a:latin typeface="Inter"/>
               </a:rPr>
@@ -12296,7 +12296,7 @@
             <a:r>
               <a:rPr sz="1700" b="1" i="0">
                 <a:solidFill>
-                  <a:srgbClr val="F5F5F5"/>
+                  <a:srgbClr val="1F1B16"/>
                 </a:solidFill>
                 <a:latin typeface="Inter"/>
               </a:rPr>
@@ -12335,7 +12335,7 @@
             <a:r>
               <a:rPr sz="1200" b="0" i="0">
                 <a:solidFill>
-                  <a:srgbClr val="A0A0A0"/>
+                  <a:srgbClr val="5C544A"/>
                 </a:solidFill>
                 <a:latin typeface="Inter"/>
               </a:rPr>
@@ -12351,7 +12351,7 @@
             <a:r>
               <a:rPr sz="1200" b="0" i="0">
                 <a:solidFill>
-                  <a:srgbClr val="A0A0A0"/>
+                  <a:srgbClr val="5C544A"/>
                 </a:solidFill>
                 <a:latin typeface="Inter"/>
               </a:rPr>
@@ -12390,7 +12390,7 @@
             <a:r>
               <a:rPr sz="1000" b="1" i="0" spc="300">
                 <a:solidFill>
-                  <a:srgbClr val="6B6B6B"/>
+                  <a:srgbClr val="8E867B"/>
                 </a:solidFill>
                 <a:latin typeface="Inter"/>
               </a:rPr>
@@ -12429,7 +12429,7 @@
             <a:r>
               <a:rPr sz="1200" b="0" i="1">
                 <a:solidFill>
-                  <a:srgbClr val="E5E5E5"/>
+                  <a:srgbClr val="3A332C"/>
                 </a:solidFill>
                 <a:latin typeface="Inter"/>
               </a:rPr>
@@ -12471,7 +12471,7 @@
             <a:avLst/>
           </a:prstGeom>
           <a:solidFill>
-            <a:srgbClr val="0A0A0A"/>
+            <a:srgbClr val="F0EAE0"/>
           </a:solidFill>
           <a:ln>
             <a:noFill/>
@@ -12515,7 +12515,7 @@
             <a:avLst/>
           </a:prstGeom>
           <a:solidFill>
-            <a:srgbClr val="141414"/>
+            <a:srgbClr val="E5DDCE"/>
           </a:solidFill>
           <a:ln>
             <a:noFill/>
@@ -12559,7 +12559,7 @@
             <a:avLst/>
           </a:prstGeom>
           <a:solidFill>
-            <a:srgbClr val="2A2A2A"/>
+            <a:srgbClr val="C8BDA8"/>
           </a:solidFill>
           <a:ln>
             <a:noFill/>
@@ -12618,7 +12618,7 @@
             <a:r>
               <a:rPr sz="1200" b="1" i="0" spc="20">
                 <a:solidFill>
-                  <a:srgbClr val="F5F5F5"/>
+                  <a:srgbClr val="1F1B16"/>
                 </a:solidFill>
                 <a:latin typeface="Inter"/>
               </a:rPr>
@@ -12657,7 +12657,7 @@
             <a:r>
               <a:rPr sz="1100" b="0" i="0" spc="400">
                 <a:solidFill>
-                  <a:srgbClr val="6B6B6B"/>
+                  <a:srgbClr val="8E867B"/>
                 </a:solidFill>
                 <a:latin typeface="Inter"/>
               </a:rPr>
@@ -12696,7 +12696,7 @@
             <a:r>
               <a:rPr sz="5000" b="1" i="0">
                 <a:solidFill>
-                  <a:srgbClr val="F5F5F5"/>
+                  <a:srgbClr val="1F1B16"/>
                 </a:solidFill>
                 <a:latin typeface="Inter"/>
               </a:rPr>
@@ -12712,7 +12712,7 @@
             <a:r>
               <a:rPr sz="5000" b="1" i="0">
                 <a:solidFill>
-                  <a:srgbClr val="F5F5F5"/>
+                  <a:srgbClr val="1F1B16"/>
                 </a:solidFill>
                 <a:latin typeface="Inter"/>
               </a:rPr>
@@ -12751,7 +12751,7 @@
             <a:r>
               <a:rPr sz="1500" b="0" i="1">
                 <a:solidFill>
-                  <a:srgbClr val="A0A0A0"/>
+                  <a:srgbClr val="5C544A"/>
                 </a:solidFill>
                 <a:latin typeface="Inter"/>
               </a:rPr>
@@ -12767,7 +12767,7 @@
             <a:r>
               <a:rPr sz="1500" b="0" i="1">
                 <a:solidFill>
-                  <a:srgbClr val="A0A0A0"/>
+                  <a:srgbClr val="5C544A"/>
                 </a:solidFill>
                 <a:latin typeface="Inter"/>
               </a:rPr>
@@ -12806,7 +12806,7 @@
             <a:r>
               <a:rPr sz="900" b="0" i="0">
                 <a:solidFill>
-                  <a:srgbClr val="6B6B6B"/>
+                  <a:srgbClr val="8E867B"/>
                 </a:solidFill>
                 <a:latin typeface="JetBrains Mono"/>
               </a:rPr>
@@ -12848,7 +12848,7 @@
             <a:avLst/>
           </a:prstGeom>
           <a:solidFill>
-            <a:srgbClr val="0A0A0A"/>
+            <a:srgbClr val="F0EAE0"/>
           </a:solidFill>
           <a:ln>
             <a:noFill/>
@@ -12907,7 +12907,7 @@
             <a:r>
               <a:rPr sz="1100" b="1" i="0" spc="20">
                 <a:solidFill>
-                  <a:srgbClr val="F5F5F5"/>
+                  <a:srgbClr val="1F1B16"/>
                 </a:solidFill>
                 <a:latin typeface="Inter"/>
               </a:rPr>
@@ -12946,7 +12946,7 @@
             <a:r>
               <a:rPr sz="900" b="0" i="0" spc="200">
                 <a:solidFill>
-                  <a:srgbClr val="6B6B6B"/>
+                  <a:srgbClr val="8E867B"/>
                 </a:solidFill>
                 <a:latin typeface="Inter"/>
               </a:rPr>
@@ -12985,7 +12985,7 @@
             <a:r>
               <a:rPr sz="900" b="0" i="0" spc="80">
                 <a:solidFill>
-                  <a:srgbClr val="6B6B6B"/>
+                  <a:srgbClr val="8E867B"/>
                 </a:solidFill>
                 <a:latin typeface="Inter"/>
               </a:rPr>
@@ -13024,7 +13024,7 @@
             <a:r>
               <a:rPr sz="900" b="0" i="0" spc="50">
                 <a:solidFill>
-                  <a:srgbClr val="6B6B6B"/>
+                  <a:srgbClr val="8E867B"/>
                 </a:solidFill>
                 <a:latin typeface="JetBrains Mono"/>
               </a:rPr>
@@ -13048,7 +13048,7 @@
             <a:avLst/>
           </a:prstGeom>
           <a:solidFill>
-            <a:srgbClr val="2A2A2A"/>
+            <a:srgbClr val="C8BDA8"/>
           </a:solidFill>
           <a:ln>
             <a:noFill/>
@@ -13107,7 +13107,7 @@
             <a:r>
               <a:rPr sz="1000" b="0" i="0" spc="300">
                 <a:solidFill>
-                  <a:srgbClr val="6B6B6B"/>
+                  <a:srgbClr val="8E867B"/>
                 </a:solidFill>
                 <a:latin typeface="Inter"/>
               </a:rPr>
@@ -13146,7 +13146,7 @@
             <a:r>
               <a:rPr sz="3400" b="1" i="0">
                 <a:solidFill>
-                  <a:srgbClr val="F5F5F5"/>
+                  <a:srgbClr val="1F1B16"/>
                 </a:solidFill>
                 <a:latin typeface="Inter"/>
               </a:rPr>
@@ -13185,7 +13185,7 @@
             <a:r>
               <a:rPr sz="1400" b="0" i="0">
                 <a:solidFill>
-                  <a:srgbClr val="A0A0A0"/>
+                  <a:srgbClr val="5C544A"/>
                 </a:solidFill>
                 <a:latin typeface="Inter"/>
               </a:rPr>
@@ -13209,7 +13209,7 @@
             <a:avLst/>
           </a:prstGeom>
           <a:solidFill>
-            <a:srgbClr val="141414"/>
+            <a:srgbClr val="E5DDCE"/>
           </a:solidFill>
           <a:ln>
             <a:noFill/>
@@ -13253,7 +13253,7 @@
             <a:avLst/>
           </a:prstGeom>
           <a:solidFill>
-            <a:srgbClr val="2A2A2A"/>
+            <a:srgbClr val="C8BDA8"/>
           </a:solidFill>
           <a:ln>
             <a:noFill/>
@@ -13312,7 +13312,7 @@
             <a:r>
               <a:rPr sz="1100" b="1" i="0" spc="200">
                 <a:solidFill>
-                  <a:srgbClr val="6B6B6B"/>
+                  <a:srgbClr val="8E867B"/>
                 </a:solidFill>
                 <a:latin typeface="JetBrains Mono"/>
               </a:rPr>
@@ -13351,7 +13351,7 @@
             <a:r>
               <a:rPr sz="1200" b="0" i="0">
                 <a:solidFill>
-                  <a:srgbClr val="A0A0A0"/>
+                  <a:srgbClr val="5C544A"/>
                 </a:solidFill>
                 <a:latin typeface="JetBrains Mono"/>
               </a:rPr>
@@ -13390,7 +13390,7 @@
             <a:r>
               <a:rPr sz="1500" b="1" i="0">
                 <a:solidFill>
-                  <a:srgbClr val="F5F5F5"/>
+                  <a:srgbClr val="1F1B16"/>
                 </a:solidFill>
                 <a:latin typeface="Inter"/>
               </a:rPr>
@@ -13429,7 +13429,7 @@
             <a:r>
               <a:rPr sz="1150" b="0" i="0">
                 <a:solidFill>
-                  <a:srgbClr val="A0A0A0"/>
+                  <a:srgbClr val="5C544A"/>
                 </a:solidFill>
                 <a:latin typeface="Inter"/>
               </a:rPr>
@@ -13453,7 +13453,7 @@
             <a:avLst/>
           </a:prstGeom>
           <a:solidFill>
-            <a:srgbClr val="141414"/>
+            <a:srgbClr val="E5DDCE"/>
           </a:solidFill>
           <a:ln>
             <a:noFill/>
@@ -13497,7 +13497,7 @@
             <a:avLst/>
           </a:prstGeom>
           <a:solidFill>
-            <a:srgbClr val="2A2A2A"/>
+            <a:srgbClr val="C8BDA8"/>
           </a:solidFill>
           <a:ln>
             <a:noFill/>
@@ -13556,7 +13556,7 @@
             <a:r>
               <a:rPr sz="1100" b="1" i="0" spc="200">
                 <a:solidFill>
-                  <a:srgbClr val="6B6B6B"/>
+                  <a:srgbClr val="8E867B"/>
                 </a:solidFill>
                 <a:latin typeface="JetBrains Mono"/>
               </a:rPr>
@@ -13595,7 +13595,7 @@
             <a:r>
               <a:rPr sz="1200" b="0" i="0">
                 <a:solidFill>
-                  <a:srgbClr val="A0A0A0"/>
+                  <a:srgbClr val="5C544A"/>
                 </a:solidFill>
                 <a:latin typeface="JetBrains Mono"/>
               </a:rPr>
@@ -13634,7 +13634,7 @@
             <a:r>
               <a:rPr sz="1500" b="1" i="0">
                 <a:solidFill>
-                  <a:srgbClr val="F5F5F5"/>
+                  <a:srgbClr val="1F1B16"/>
                 </a:solidFill>
                 <a:latin typeface="Inter"/>
               </a:rPr>
@@ -13673,7 +13673,7 @@
             <a:r>
               <a:rPr sz="1150" b="0" i="0">
                 <a:solidFill>
-                  <a:srgbClr val="A0A0A0"/>
+                  <a:srgbClr val="5C544A"/>
                 </a:solidFill>
                 <a:latin typeface="Inter"/>
               </a:rPr>
@@ -13697,7 +13697,7 @@
             <a:avLst/>
           </a:prstGeom>
           <a:solidFill>
-            <a:srgbClr val="141414"/>
+            <a:srgbClr val="E5DDCE"/>
           </a:solidFill>
           <a:ln>
             <a:noFill/>
@@ -13741,7 +13741,7 @@
             <a:avLst/>
           </a:prstGeom>
           <a:solidFill>
-            <a:srgbClr val="2A2A2A"/>
+            <a:srgbClr val="C8BDA8"/>
           </a:solidFill>
           <a:ln>
             <a:noFill/>
@@ -13800,7 +13800,7 @@
             <a:r>
               <a:rPr sz="1100" b="1" i="0" spc="200">
                 <a:solidFill>
-                  <a:srgbClr val="6B6B6B"/>
+                  <a:srgbClr val="8E867B"/>
                 </a:solidFill>
                 <a:latin typeface="JetBrains Mono"/>
               </a:rPr>
@@ -13839,7 +13839,7 @@
             <a:r>
               <a:rPr sz="1200" b="0" i="0">
                 <a:solidFill>
-                  <a:srgbClr val="A0A0A0"/>
+                  <a:srgbClr val="5C544A"/>
                 </a:solidFill>
                 <a:latin typeface="JetBrains Mono"/>
               </a:rPr>
@@ -13878,7 +13878,7 @@
             <a:r>
               <a:rPr sz="1500" b="1" i="0">
                 <a:solidFill>
-                  <a:srgbClr val="F5F5F5"/>
+                  <a:srgbClr val="1F1B16"/>
                 </a:solidFill>
                 <a:latin typeface="Inter"/>
               </a:rPr>
@@ -13917,7 +13917,7 @@
             <a:r>
               <a:rPr sz="1150" b="0" i="0">
                 <a:solidFill>
-                  <a:srgbClr val="A0A0A0"/>
+                  <a:srgbClr val="5C544A"/>
                 </a:solidFill>
                 <a:latin typeface="Inter"/>
               </a:rPr>
@@ -13959,7 +13959,7 @@
             <a:avLst/>
           </a:prstGeom>
           <a:solidFill>
-            <a:srgbClr val="0A0A0A"/>
+            <a:srgbClr val="F0EAE0"/>
           </a:solidFill>
           <a:ln>
             <a:noFill/>
@@ -14018,7 +14018,7 @@
             <a:r>
               <a:rPr sz="1100" b="1" i="0" spc="20">
                 <a:solidFill>
-                  <a:srgbClr val="F5F5F5"/>
+                  <a:srgbClr val="1F1B16"/>
                 </a:solidFill>
                 <a:latin typeface="Inter"/>
               </a:rPr>
@@ -14057,7 +14057,7 @@
             <a:r>
               <a:rPr sz="900" b="0" i="0" spc="200">
                 <a:solidFill>
-                  <a:srgbClr val="6B6B6B"/>
+                  <a:srgbClr val="8E867B"/>
                 </a:solidFill>
                 <a:latin typeface="Inter"/>
               </a:rPr>
@@ -14096,7 +14096,7 @@
             <a:r>
               <a:rPr sz="900" b="0" i="0" spc="80">
                 <a:solidFill>
-                  <a:srgbClr val="6B6B6B"/>
+                  <a:srgbClr val="8E867B"/>
                 </a:solidFill>
                 <a:latin typeface="Inter"/>
               </a:rPr>
@@ -14135,7 +14135,7 @@
             <a:r>
               <a:rPr sz="900" b="0" i="0" spc="50">
                 <a:solidFill>
-                  <a:srgbClr val="6B6B6B"/>
+                  <a:srgbClr val="8E867B"/>
                 </a:solidFill>
                 <a:latin typeface="JetBrains Mono"/>
               </a:rPr>
@@ -14159,7 +14159,7 @@
             <a:avLst/>
           </a:prstGeom>
           <a:solidFill>
-            <a:srgbClr val="2A2A2A"/>
+            <a:srgbClr val="C8BDA8"/>
           </a:solidFill>
           <a:ln>
             <a:noFill/>
@@ -14218,7 +14218,7 @@
             <a:r>
               <a:rPr sz="1000" b="0" i="0" spc="300">
                 <a:solidFill>
-                  <a:srgbClr val="6B6B6B"/>
+                  <a:srgbClr val="8E867B"/>
                 </a:solidFill>
                 <a:latin typeface="Inter"/>
               </a:rPr>
@@ -14257,7 +14257,7 @@
             <a:r>
               <a:rPr sz="3400" b="1" i="0">
                 <a:solidFill>
-                  <a:srgbClr val="F5F5F5"/>
+                  <a:srgbClr val="1F1B16"/>
                 </a:solidFill>
                 <a:latin typeface="Inter"/>
               </a:rPr>
@@ -14296,7 +14296,7 @@
             <a:r>
               <a:rPr sz="1400" b="0" i="0">
                 <a:solidFill>
-                  <a:srgbClr val="A0A0A0"/>
+                  <a:srgbClr val="5C544A"/>
                 </a:solidFill>
                 <a:latin typeface="Inter"/>
               </a:rPr>
@@ -14320,7 +14320,7 @@
             <a:avLst/>
           </a:prstGeom>
           <a:solidFill>
-            <a:srgbClr val="141414"/>
+            <a:srgbClr val="E5DDCE"/>
           </a:solidFill>
           <a:ln>
             <a:noFill/>
@@ -14364,7 +14364,7 @@
             <a:avLst/>
           </a:prstGeom>
           <a:solidFill>
-            <a:srgbClr val="2A2A2A"/>
+            <a:srgbClr val="C8BDA8"/>
           </a:solidFill>
           <a:ln>
             <a:noFill/>
@@ -14423,7 +14423,7 @@
             <a:r>
               <a:rPr sz="1000" b="1" i="0" spc="300">
                 <a:solidFill>
-                  <a:srgbClr val="6B6B6B"/>
+                  <a:srgbClr val="8E867B"/>
                 </a:solidFill>
                 <a:latin typeface="Inter"/>
               </a:rPr>
@@ -14462,7 +14462,7 @@
             <a:r>
               <a:rPr sz="1150" b="0" i="0">
                 <a:solidFill>
-                  <a:srgbClr val="F5F5F5"/>
+                  <a:srgbClr val="1F1B16"/>
                 </a:solidFill>
                 <a:latin typeface="Inter"/>
               </a:rPr>
@@ -14501,7 +14501,7 @@
             <a:r>
               <a:rPr sz="1150" b="0" i="0">
                 <a:solidFill>
-                  <a:srgbClr val="F5F5F5"/>
+                  <a:srgbClr val="1F1B16"/>
                 </a:solidFill>
                 <a:latin typeface="Inter"/>
               </a:rPr>
@@ -14540,7 +14540,7 @@
             <a:r>
               <a:rPr sz="1150" b="0" i="0">
                 <a:solidFill>
-                  <a:srgbClr val="F5F5F5"/>
+                  <a:srgbClr val="1F1B16"/>
                 </a:solidFill>
                 <a:latin typeface="Inter"/>
               </a:rPr>
@@ -14579,7 +14579,7 @@
             <a:r>
               <a:rPr sz="1150" b="0" i="0">
                 <a:solidFill>
-                  <a:srgbClr val="F5F5F5"/>
+                  <a:srgbClr val="1F1B16"/>
                 </a:solidFill>
                 <a:latin typeface="Inter"/>
               </a:rPr>
@@ -14618,7 +14618,7 @@
             <a:r>
               <a:rPr sz="1150" b="0" i="0">
                 <a:solidFill>
-                  <a:srgbClr val="F5F5F5"/>
+                  <a:srgbClr val="1F1B16"/>
                 </a:solidFill>
                 <a:latin typeface="Inter"/>
               </a:rPr>
@@ -14642,7 +14642,7 @@
             <a:avLst/>
           </a:prstGeom>
           <a:solidFill>
-            <a:srgbClr val="1C1C1C"/>
+            <a:srgbClr val="DAD0BE"/>
           </a:solidFill>
           <a:ln>
             <a:noFill/>
@@ -14686,7 +14686,7 @@
             <a:avLst/>
           </a:prstGeom>
           <a:solidFill>
-            <a:srgbClr val="2A2A2A"/>
+            <a:srgbClr val="C8BDA8"/>
           </a:solidFill>
           <a:ln>
             <a:noFill/>
@@ -14745,7 +14745,7 @@
             <a:r>
               <a:rPr sz="1000" b="1" i="0" spc="300">
                 <a:solidFill>
-                  <a:srgbClr val="6B6B6B"/>
+                  <a:srgbClr val="8E867B"/>
                 </a:solidFill>
                 <a:latin typeface="Inter"/>
               </a:rPr>
@@ -14784,7 +14784,7 @@
             <a:r>
               <a:rPr sz="1100" b="0" i="0">
                 <a:solidFill>
-                  <a:srgbClr val="F5F5F5"/>
+                  <a:srgbClr val="1F1B16"/>
                 </a:solidFill>
                 <a:latin typeface="Inter"/>
               </a:rPr>
@@ -14800,7 +14800,7 @@
             <a:r>
               <a:rPr sz="1100" b="0" i="0">
                 <a:solidFill>
-                  <a:srgbClr val="F5F5F5"/>
+                  <a:srgbClr val="1F1B16"/>
                 </a:solidFill>
                 <a:latin typeface="Inter"/>
               </a:rPr>
@@ -14816,7 +14816,7 @@
             <a:r>
               <a:rPr sz="1100" b="0" i="0">
                 <a:solidFill>
-                  <a:srgbClr val="F5F5F5"/>
+                  <a:srgbClr val="1F1B16"/>
                 </a:solidFill>
                 <a:latin typeface="Inter"/>
               </a:rPr>
@@ -14832,7 +14832,7 @@
             <a:r>
               <a:rPr sz="1100" b="0" i="0">
                 <a:solidFill>
-                  <a:srgbClr val="F5F5F5"/>
+                  <a:srgbClr val="1F1B16"/>
                 </a:solidFill>
                 <a:latin typeface="Inter"/>
               </a:rPr>
@@ -14848,7 +14848,7 @@
             <a:r>
               <a:rPr sz="1100" b="0" i="0">
                 <a:solidFill>
-                  <a:srgbClr val="F5F5F5"/>
+                  <a:srgbClr val="1F1B16"/>
                 </a:solidFill>
                 <a:latin typeface="Inter"/>
               </a:rPr>
@@ -14864,7 +14864,7 @@
             <a:r>
               <a:rPr sz="1100" b="0" i="0">
                 <a:solidFill>
-                  <a:srgbClr val="F5F5F5"/>
+                  <a:srgbClr val="1F1B16"/>
                 </a:solidFill>
                 <a:latin typeface="Inter"/>
               </a:rPr>
@@ -14880,7 +14880,7 @@
             <a:r>
               <a:rPr sz="1100" b="0" i="0">
                 <a:solidFill>
-                  <a:srgbClr val="F5F5F5"/>
+                  <a:srgbClr val="1F1B16"/>
                 </a:solidFill>
                 <a:latin typeface="Inter"/>
               </a:rPr>
@@ -14896,7 +14896,7 @@
             <a:r>
               <a:rPr sz="1100" b="0" i="0">
                 <a:solidFill>
-                  <a:srgbClr val="F5F5F5"/>
+                  <a:srgbClr val="1F1B16"/>
                 </a:solidFill>
                 <a:latin typeface="Inter"/>
               </a:rPr>
@@ -14912,7 +14912,7 @@
             <a:r>
               <a:rPr sz="1100" b="0" i="0">
                 <a:solidFill>
-                  <a:srgbClr val="F5F5F5"/>
+                  <a:srgbClr val="1F1B16"/>
                 </a:solidFill>
                 <a:latin typeface="Inter"/>
               </a:rPr>
@@ -14954,7 +14954,7 @@
             <a:avLst/>
           </a:prstGeom>
           <a:solidFill>
-            <a:srgbClr val="0A0A0A"/>
+            <a:srgbClr val="F0EAE0"/>
           </a:solidFill>
           <a:ln>
             <a:noFill/>
@@ -15013,7 +15013,7 @@
             <a:r>
               <a:rPr sz="1100" b="1" i="0" spc="20">
                 <a:solidFill>
-                  <a:srgbClr val="F5F5F5"/>
+                  <a:srgbClr val="1F1B16"/>
                 </a:solidFill>
                 <a:latin typeface="Inter"/>
               </a:rPr>
@@ -15052,7 +15052,7 @@
             <a:r>
               <a:rPr sz="900" b="0" i="0" spc="200">
                 <a:solidFill>
-                  <a:srgbClr val="6B6B6B"/>
+                  <a:srgbClr val="8E867B"/>
                 </a:solidFill>
                 <a:latin typeface="Inter"/>
               </a:rPr>
@@ -15091,7 +15091,7 @@
             <a:r>
               <a:rPr sz="900" b="0" i="0" spc="80">
                 <a:solidFill>
-                  <a:srgbClr val="6B6B6B"/>
+                  <a:srgbClr val="8E867B"/>
                 </a:solidFill>
                 <a:latin typeface="Inter"/>
               </a:rPr>
@@ -15130,7 +15130,7 @@
             <a:r>
               <a:rPr sz="900" b="0" i="0" spc="50">
                 <a:solidFill>
-                  <a:srgbClr val="6B6B6B"/>
+                  <a:srgbClr val="8E867B"/>
                 </a:solidFill>
                 <a:latin typeface="JetBrains Mono"/>
               </a:rPr>
@@ -15154,7 +15154,7 @@
             <a:avLst/>
           </a:prstGeom>
           <a:solidFill>
-            <a:srgbClr val="2A2A2A"/>
+            <a:srgbClr val="C8BDA8"/>
           </a:solidFill>
           <a:ln>
             <a:noFill/>
@@ -15213,7 +15213,7 @@
             <a:r>
               <a:rPr sz="1000" b="0" i="0" spc="300">
                 <a:solidFill>
-                  <a:srgbClr val="6B6B6B"/>
+                  <a:srgbClr val="8E867B"/>
                 </a:solidFill>
                 <a:latin typeface="Inter"/>
               </a:rPr>
@@ -15252,7 +15252,7 @@
             <a:r>
               <a:rPr sz="3400" b="1" i="0">
                 <a:solidFill>
-                  <a:srgbClr val="F5F5F5"/>
+                  <a:srgbClr val="1F1B16"/>
                 </a:solidFill>
                 <a:latin typeface="Inter"/>
               </a:rPr>
@@ -15291,7 +15291,7 @@
             <a:r>
               <a:rPr sz="1400" b="0" i="0">
                 <a:solidFill>
-                  <a:srgbClr val="A0A0A0"/>
+                  <a:srgbClr val="5C544A"/>
                 </a:solidFill>
                 <a:latin typeface="Inter"/>
               </a:rPr>
@@ -15330,7 +15330,7 @@
             <a:r>
               <a:rPr sz="1400" b="0" i="0">
                 <a:solidFill>
-                  <a:srgbClr val="6B6B6B"/>
+                  <a:srgbClr val="8E867B"/>
                 </a:solidFill>
                 <a:latin typeface="Inter"/>
               </a:rPr>
@@ -15369,7 +15369,7 @@
             <a:r>
               <a:rPr sz="1250" b="1" i="0">
                 <a:solidFill>
-                  <a:srgbClr val="F5F5F5"/>
+                  <a:srgbClr val="1F1B16"/>
                 </a:solidFill>
                 <a:latin typeface="Inter"/>
               </a:rPr>
@@ -15408,7 +15408,7 @@
             <a:r>
               <a:rPr sz="1100" b="0" i="0">
                 <a:solidFill>
-                  <a:srgbClr val="A0A0A0"/>
+                  <a:srgbClr val="5C544A"/>
                 </a:solidFill>
                 <a:latin typeface="Inter"/>
               </a:rPr>
@@ -15432,7 +15432,7 @@
             <a:avLst/>
           </a:prstGeom>
           <a:solidFill>
-            <a:srgbClr val="2A2A2A"/>
+            <a:srgbClr val="C8BDA8"/>
           </a:solidFill>
           <a:ln>
             <a:noFill/>
@@ -15491,7 +15491,7 @@
             <a:r>
               <a:rPr sz="1400" b="0" i="0">
                 <a:solidFill>
-                  <a:srgbClr val="6B6B6B"/>
+                  <a:srgbClr val="8E867B"/>
                 </a:solidFill>
                 <a:latin typeface="Inter"/>
               </a:rPr>
@@ -15530,7 +15530,7 @@
             <a:r>
               <a:rPr sz="1250" b="1" i="0">
                 <a:solidFill>
-                  <a:srgbClr val="F5F5F5"/>
+                  <a:srgbClr val="1F1B16"/>
                 </a:solidFill>
                 <a:latin typeface="Inter"/>
               </a:rPr>
@@ -15569,7 +15569,7 @@
             <a:r>
               <a:rPr sz="1100" b="0" i="0">
                 <a:solidFill>
-                  <a:srgbClr val="A0A0A0"/>
+                  <a:srgbClr val="5C544A"/>
                 </a:solidFill>
                 <a:latin typeface="Inter"/>
               </a:rPr>
@@ -15593,7 +15593,7 @@
             <a:avLst/>
           </a:prstGeom>
           <a:solidFill>
-            <a:srgbClr val="2A2A2A"/>
+            <a:srgbClr val="C8BDA8"/>
           </a:solidFill>
           <a:ln>
             <a:noFill/>
@@ -15652,7 +15652,7 @@
             <a:r>
               <a:rPr sz="1400" b="0" i="0">
                 <a:solidFill>
-                  <a:srgbClr val="6B6B6B"/>
+                  <a:srgbClr val="8E867B"/>
                 </a:solidFill>
                 <a:latin typeface="Inter"/>
               </a:rPr>
@@ -15691,7 +15691,7 @@
             <a:r>
               <a:rPr sz="1250" b="1" i="0">
                 <a:solidFill>
-                  <a:srgbClr val="F5F5F5"/>
+                  <a:srgbClr val="1F1B16"/>
                 </a:solidFill>
                 <a:latin typeface="Inter"/>
               </a:rPr>
@@ -15730,7 +15730,7 @@
             <a:r>
               <a:rPr sz="1100" b="0" i="0">
                 <a:solidFill>
-                  <a:srgbClr val="A0A0A0"/>
+                  <a:srgbClr val="5C544A"/>
                 </a:solidFill>
                 <a:latin typeface="Inter"/>
               </a:rPr>
@@ -15754,7 +15754,7 @@
             <a:avLst/>
           </a:prstGeom>
           <a:solidFill>
-            <a:srgbClr val="2A2A2A"/>
+            <a:srgbClr val="C8BDA8"/>
           </a:solidFill>
           <a:ln>
             <a:noFill/>
@@ -15813,7 +15813,7 @@
             <a:r>
               <a:rPr sz="1400" b="0" i="0">
                 <a:solidFill>
-                  <a:srgbClr val="6B6B6B"/>
+                  <a:srgbClr val="8E867B"/>
                 </a:solidFill>
                 <a:latin typeface="Inter"/>
               </a:rPr>
@@ -15852,7 +15852,7 @@
             <a:r>
               <a:rPr sz="1250" b="1" i="0">
                 <a:solidFill>
-                  <a:srgbClr val="F5F5F5"/>
+                  <a:srgbClr val="1F1B16"/>
                 </a:solidFill>
                 <a:latin typeface="Inter"/>
               </a:rPr>
@@ -15891,7 +15891,7 @@
             <a:r>
               <a:rPr sz="1100" b="0" i="0">
                 <a:solidFill>
-                  <a:srgbClr val="A0A0A0"/>
+                  <a:srgbClr val="5C544A"/>
                 </a:solidFill>
                 <a:latin typeface="Inter"/>
               </a:rPr>
@@ -15915,7 +15915,7 @@
             <a:avLst/>
           </a:prstGeom>
           <a:solidFill>
-            <a:srgbClr val="2A2A2A"/>
+            <a:srgbClr val="C8BDA8"/>
           </a:solidFill>
           <a:ln>
             <a:noFill/>
@@ -15977,7 +15977,7 @@
             <a:avLst/>
           </a:prstGeom>
           <a:solidFill>
-            <a:srgbClr val="0A0A0A"/>
+            <a:srgbClr val="F0EAE0"/>
           </a:solidFill>
           <a:ln>
             <a:noFill/>
@@ -16036,7 +16036,7 @@
             <a:r>
               <a:rPr sz="1100" b="1" i="0" spc="20">
                 <a:solidFill>
-                  <a:srgbClr val="F5F5F5"/>
+                  <a:srgbClr val="1F1B16"/>
                 </a:solidFill>
                 <a:latin typeface="Inter"/>
               </a:rPr>
@@ -16075,7 +16075,7 @@
             <a:r>
               <a:rPr sz="900" b="0" i="0" spc="200">
                 <a:solidFill>
-                  <a:srgbClr val="6B6B6B"/>
+                  <a:srgbClr val="8E867B"/>
                 </a:solidFill>
                 <a:latin typeface="Inter"/>
               </a:rPr>
@@ -16114,7 +16114,7 @@
             <a:r>
               <a:rPr sz="900" b="0" i="0" spc="80">
                 <a:solidFill>
-                  <a:srgbClr val="6B6B6B"/>
+                  <a:srgbClr val="8E867B"/>
                 </a:solidFill>
                 <a:latin typeface="Inter"/>
               </a:rPr>
@@ -16153,7 +16153,7 @@
             <a:r>
               <a:rPr sz="900" b="0" i="0" spc="50">
                 <a:solidFill>
-                  <a:srgbClr val="6B6B6B"/>
+                  <a:srgbClr val="8E867B"/>
                 </a:solidFill>
                 <a:latin typeface="JetBrains Mono"/>
               </a:rPr>
@@ -16177,7 +16177,7 @@
             <a:avLst/>
           </a:prstGeom>
           <a:solidFill>
-            <a:srgbClr val="2A2A2A"/>
+            <a:srgbClr val="C8BDA8"/>
           </a:solidFill>
           <a:ln>
             <a:noFill/>
@@ -16236,7 +16236,7 @@
             <a:r>
               <a:rPr sz="1000" b="0" i="0" spc="300">
                 <a:solidFill>
-                  <a:srgbClr val="6B6B6B"/>
+                  <a:srgbClr val="8E867B"/>
                 </a:solidFill>
                 <a:latin typeface="Inter"/>
               </a:rPr>
@@ -16275,7 +16275,7 @@
             <a:r>
               <a:rPr sz="3400" b="1" i="0">
                 <a:solidFill>
-                  <a:srgbClr val="F5F5F5"/>
+                  <a:srgbClr val="1F1B16"/>
                 </a:solidFill>
                 <a:latin typeface="Inter"/>
               </a:rPr>
@@ -16314,7 +16314,7 @@
             <a:r>
               <a:rPr sz="1400" b="0" i="0">
                 <a:solidFill>
-                  <a:srgbClr val="A0A0A0"/>
+                  <a:srgbClr val="5C544A"/>
                 </a:solidFill>
                 <a:latin typeface="Inter"/>
               </a:rPr>
@@ -16338,7 +16338,7 @@
             <a:avLst/>
           </a:prstGeom>
           <a:solidFill>
-            <a:srgbClr val="141414"/>
+            <a:srgbClr val="E5DDCE"/>
           </a:solidFill>
           <a:ln>
             <a:noFill/>
@@ -16382,7 +16382,7 @@
             <a:avLst/>
           </a:prstGeom>
           <a:solidFill>
-            <a:srgbClr val="2A2A2A"/>
+            <a:srgbClr val="C8BDA8"/>
           </a:solidFill>
           <a:ln>
             <a:noFill/>
@@ -16441,7 +16441,7 @@
             <a:r>
               <a:rPr sz="1000" b="1" i="0" spc="300">
                 <a:solidFill>
-                  <a:srgbClr val="6B6B6B"/>
+                  <a:srgbClr val="8E867B"/>
                 </a:solidFill>
                 <a:latin typeface="Inter"/>
               </a:rPr>
@@ -16480,7 +16480,7 @@
             <a:r>
               <a:rPr sz="1100" b="1" i="0">
                 <a:solidFill>
-                  <a:srgbClr val="F5F5F5"/>
+                  <a:srgbClr val="1F1B16"/>
                 </a:solidFill>
                 <a:latin typeface="Inter"/>
               </a:rPr>
@@ -16519,7 +16519,7 @@
             <a:r>
               <a:rPr sz="1050" b="0" i="0">
                 <a:solidFill>
-                  <a:srgbClr val="A0A0A0"/>
+                  <a:srgbClr val="5C544A"/>
                 </a:solidFill>
                 <a:latin typeface="Inter"/>
               </a:rPr>
@@ -16558,7 +16558,7 @@
             <a:r>
               <a:rPr sz="1100" b="1" i="0">
                 <a:solidFill>
-                  <a:srgbClr val="F5F5F5"/>
+                  <a:srgbClr val="1F1B16"/>
                 </a:solidFill>
                 <a:latin typeface="Inter"/>
               </a:rPr>
@@ -16597,7 +16597,7 @@
             <a:r>
               <a:rPr sz="1050" b="0" i="0">
                 <a:solidFill>
-                  <a:srgbClr val="A0A0A0"/>
+                  <a:srgbClr val="5C544A"/>
                 </a:solidFill>
                 <a:latin typeface="Inter"/>
               </a:rPr>
@@ -16636,7 +16636,7 @@
             <a:r>
               <a:rPr sz="1100" b="1" i="0">
                 <a:solidFill>
-                  <a:srgbClr val="F5F5F5"/>
+                  <a:srgbClr val="1F1B16"/>
                 </a:solidFill>
                 <a:latin typeface="Inter"/>
               </a:rPr>
@@ -16675,7 +16675,7 @@
             <a:r>
               <a:rPr sz="1050" b="0" i="0">
                 <a:solidFill>
-                  <a:srgbClr val="A0A0A0"/>
+                  <a:srgbClr val="5C544A"/>
                 </a:solidFill>
                 <a:latin typeface="Inter"/>
               </a:rPr>
@@ -16714,7 +16714,7 @@
             <a:r>
               <a:rPr sz="1100" b="1" i="0">
                 <a:solidFill>
-                  <a:srgbClr val="F5F5F5"/>
+                  <a:srgbClr val="1F1B16"/>
                 </a:solidFill>
                 <a:latin typeface="Inter"/>
               </a:rPr>
@@ -16753,7 +16753,7 @@
             <a:r>
               <a:rPr sz="1050" b="0" i="0">
                 <a:solidFill>
-                  <a:srgbClr val="A0A0A0"/>
+                  <a:srgbClr val="5C544A"/>
                 </a:solidFill>
                 <a:latin typeface="Inter"/>
               </a:rPr>
@@ -16792,7 +16792,7 @@
             <a:r>
               <a:rPr sz="1100" b="1" i="0">
                 <a:solidFill>
-                  <a:srgbClr val="F5F5F5"/>
+                  <a:srgbClr val="1F1B16"/>
                 </a:solidFill>
                 <a:latin typeface="Inter"/>
               </a:rPr>
@@ -16831,7 +16831,7 @@
             <a:r>
               <a:rPr sz="1050" b="0" i="0">
                 <a:solidFill>
-                  <a:srgbClr val="A0A0A0"/>
+                  <a:srgbClr val="5C544A"/>
                 </a:solidFill>
                 <a:latin typeface="Inter"/>
               </a:rPr>
@@ -16855,7 +16855,7 @@
             <a:avLst/>
           </a:prstGeom>
           <a:solidFill>
-            <a:srgbClr val="1C1C1C"/>
+            <a:srgbClr val="DAD0BE"/>
           </a:solidFill>
           <a:ln>
             <a:noFill/>
@@ -16899,7 +16899,7 @@
             <a:avLst/>
           </a:prstGeom>
           <a:solidFill>
-            <a:srgbClr val="2A2A2A"/>
+            <a:srgbClr val="C8BDA8"/>
           </a:solidFill>
           <a:ln>
             <a:noFill/>
@@ -16958,7 +16958,7 @@
             <a:r>
               <a:rPr sz="1000" b="1" i="0" spc="300">
                 <a:solidFill>
-                  <a:srgbClr val="6B6B6B"/>
+                  <a:srgbClr val="8E867B"/>
                 </a:solidFill>
                 <a:latin typeface="Inter"/>
               </a:rPr>
@@ -16997,7 +16997,7 @@
             <a:r>
               <a:rPr sz="1150" b="1" i="0">
                 <a:solidFill>
-                  <a:srgbClr val="F5F5F5"/>
+                  <a:srgbClr val="1F1B16"/>
                 </a:solidFill>
                 <a:latin typeface="Inter"/>
               </a:rPr>
@@ -17036,7 +17036,7 @@
             <a:r>
               <a:rPr sz="1050" b="0" i="0">
                 <a:solidFill>
-                  <a:srgbClr val="A0A0A0"/>
+                  <a:srgbClr val="5C544A"/>
                 </a:solidFill>
                 <a:latin typeface="Inter"/>
               </a:rPr>
@@ -17052,7 +17052,7 @@
             <a:r>
               <a:rPr sz="1050" b="0" i="0">
                 <a:solidFill>
-                  <a:srgbClr val="A0A0A0"/>
+                  <a:srgbClr val="5C544A"/>
                 </a:solidFill>
                 <a:latin typeface="Inter"/>
               </a:rPr>
@@ -17091,7 +17091,7 @@
             <a:r>
               <a:rPr sz="1150" b="1" i="0">
                 <a:solidFill>
-                  <a:srgbClr val="F5F5F5"/>
+                  <a:srgbClr val="1F1B16"/>
                 </a:solidFill>
                 <a:latin typeface="Inter"/>
               </a:rPr>
@@ -17130,7 +17130,7 @@
             <a:r>
               <a:rPr sz="1050" b="0" i="0">
                 <a:solidFill>
-                  <a:srgbClr val="A0A0A0"/>
+                  <a:srgbClr val="5C544A"/>
                 </a:solidFill>
                 <a:latin typeface="Inter"/>
               </a:rPr>
@@ -17146,7 +17146,7 @@
             <a:r>
               <a:rPr sz="1050" b="0" i="0">
                 <a:solidFill>
-                  <a:srgbClr val="A0A0A0"/>
+                  <a:srgbClr val="5C544A"/>
                 </a:solidFill>
                 <a:latin typeface="Inter"/>
               </a:rPr>
@@ -17185,7 +17185,7 @@
             <a:r>
               <a:rPr sz="1150" b="1" i="0">
                 <a:solidFill>
-                  <a:srgbClr val="F5F5F5"/>
+                  <a:srgbClr val="1F1B16"/>
                 </a:solidFill>
                 <a:latin typeface="Inter"/>
               </a:rPr>
@@ -17224,7 +17224,7 @@
             <a:r>
               <a:rPr sz="1050" b="0" i="0">
                 <a:solidFill>
-                  <a:srgbClr val="A0A0A0"/>
+                  <a:srgbClr val="5C544A"/>
                 </a:solidFill>
                 <a:latin typeface="Inter"/>
               </a:rPr>
@@ -17240,7 +17240,7 @@
             <a:r>
               <a:rPr sz="1050" b="0" i="0">
                 <a:solidFill>
-                  <a:srgbClr val="A0A0A0"/>
+                  <a:srgbClr val="5C544A"/>
                 </a:solidFill>
                 <a:latin typeface="Inter"/>
               </a:rPr>
@@ -17282,7 +17282,7 @@
             <a:avLst/>
           </a:prstGeom>
           <a:solidFill>
-            <a:srgbClr val="0A0A0A"/>
+            <a:srgbClr val="F0EAE0"/>
           </a:solidFill>
           <a:ln>
             <a:noFill/>
@@ -17341,7 +17341,7 @@
             <a:r>
               <a:rPr sz="1100" b="1" i="0" spc="20">
                 <a:solidFill>
-                  <a:srgbClr val="F5F5F5"/>
+                  <a:srgbClr val="1F1B16"/>
                 </a:solidFill>
                 <a:latin typeface="Inter"/>
               </a:rPr>
@@ -17380,7 +17380,7 @@
             <a:r>
               <a:rPr sz="900" b="0" i="0" spc="200">
                 <a:solidFill>
-                  <a:srgbClr val="6B6B6B"/>
+                  <a:srgbClr val="8E867B"/>
                 </a:solidFill>
                 <a:latin typeface="Inter"/>
               </a:rPr>
@@ -17419,7 +17419,7 @@
             <a:r>
               <a:rPr sz="900" b="0" i="0" spc="80">
                 <a:solidFill>
-                  <a:srgbClr val="6B6B6B"/>
+                  <a:srgbClr val="8E867B"/>
                 </a:solidFill>
                 <a:latin typeface="Inter"/>
               </a:rPr>
@@ -17458,7 +17458,7 @@
             <a:r>
               <a:rPr sz="900" b="0" i="0" spc="50">
                 <a:solidFill>
-                  <a:srgbClr val="6B6B6B"/>
+                  <a:srgbClr val="8E867B"/>
                 </a:solidFill>
                 <a:latin typeface="JetBrains Mono"/>
               </a:rPr>
@@ -17482,7 +17482,7 @@
             <a:avLst/>
           </a:prstGeom>
           <a:solidFill>
-            <a:srgbClr val="2A2A2A"/>
+            <a:srgbClr val="C8BDA8"/>
           </a:solidFill>
           <a:ln>
             <a:noFill/>
@@ -17541,7 +17541,7 @@
             <a:r>
               <a:rPr sz="1000" b="0" i="0" spc="300">
                 <a:solidFill>
-                  <a:srgbClr val="6B6B6B"/>
+                  <a:srgbClr val="8E867B"/>
                 </a:solidFill>
                 <a:latin typeface="Inter"/>
               </a:rPr>
@@ -17580,7 +17580,7 @@
             <a:r>
               <a:rPr sz="3400" b="1" i="0">
                 <a:solidFill>
-                  <a:srgbClr val="F5F5F5"/>
+                  <a:srgbClr val="1F1B16"/>
                 </a:solidFill>
                 <a:latin typeface="Inter"/>
               </a:rPr>
@@ -17619,7 +17619,7 @@
             <a:r>
               <a:rPr sz="1400" b="0" i="0">
                 <a:solidFill>
-                  <a:srgbClr val="A0A0A0"/>
+                  <a:srgbClr val="5C544A"/>
                 </a:solidFill>
                 <a:latin typeface="Inter"/>
               </a:rPr>
@@ -17658,7 +17658,7 @@
             <a:r>
               <a:rPr sz="1000" b="1" i="0" spc="200">
                 <a:solidFill>
-                  <a:srgbClr val="6B6B6B"/>
+                  <a:srgbClr val="8E867B"/>
                 </a:solidFill>
                 <a:latin typeface="Inter"/>
               </a:rPr>
@@ -17697,7 +17697,7 @@
             <a:r>
               <a:rPr sz="1200" b="0" i="1">
                 <a:solidFill>
-                  <a:srgbClr val="E5E5E5"/>
+                  <a:srgbClr val="3A332C"/>
                 </a:solidFill>
                 <a:latin typeface="Inter"/>
               </a:rPr>
@@ -17736,7 +17736,7 @@
             <a:r>
               <a:rPr sz="1000" b="1" i="0" spc="200">
                 <a:solidFill>
-                  <a:srgbClr val="6B6B6B"/>
+                  <a:srgbClr val="8E867B"/>
                 </a:solidFill>
                 <a:latin typeface="Inter"/>
               </a:rPr>
@@ -17775,7 +17775,7 @@
             <a:r>
               <a:rPr sz="1200" b="0" i="1">
                 <a:solidFill>
-                  <a:srgbClr val="E5E5E5"/>
+                  <a:srgbClr val="3A332C"/>
                 </a:solidFill>
                 <a:latin typeface="Inter"/>
               </a:rPr>
@@ -17814,7 +17814,7 @@
             <a:r>
               <a:rPr sz="1000" b="1" i="0" spc="200">
                 <a:solidFill>
-                  <a:srgbClr val="6B6B6B"/>
+                  <a:srgbClr val="8E867B"/>
                 </a:solidFill>
                 <a:latin typeface="Inter"/>
               </a:rPr>
@@ -17853,7 +17853,7 @@
             <a:r>
               <a:rPr sz="1200" b="0" i="1">
                 <a:solidFill>
-                  <a:srgbClr val="E5E5E5"/>
+                  <a:srgbClr val="3A332C"/>
                 </a:solidFill>
                 <a:latin typeface="Inter"/>
               </a:rPr>
@@ -17892,7 +17892,7 @@
             <a:r>
               <a:rPr sz="1000" b="1" i="0" spc="200">
                 <a:solidFill>
-                  <a:srgbClr val="6B6B6B"/>
+                  <a:srgbClr val="8E867B"/>
                 </a:solidFill>
                 <a:latin typeface="Inter"/>
               </a:rPr>
@@ -17931,7 +17931,7 @@
             <a:r>
               <a:rPr sz="1200" b="0" i="1">
                 <a:solidFill>
-                  <a:srgbClr val="E5E5E5"/>
+                  <a:srgbClr val="3A332C"/>
                 </a:solidFill>
                 <a:latin typeface="Inter"/>
               </a:rPr>
@@ -17970,7 +17970,7 @@
             <a:r>
               <a:rPr sz="1000" b="1" i="0" spc="200">
                 <a:solidFill>
-                  <a:srgbClr val="6B6B6B"/>
+                  <a:srgbClr val="8E867B"/>
                 </a:solidFill>
                 <a:latin typeface="Inter"/>
               </a:rPr>
@@ -18009,7 +18009,7 @@
             <a:r>
               <a:rPr sz="1200" b="0" i="1">
                 <a:solidFill>
-                  <a:srgbClr val="E5E5E5"/>
+                  <a:srgbClr val="3A332C"/>
                 </a:solidFill>
                 <a:latin typeface="Inter"/>
               </a:rPr>
@@ -18048,7 +18048,7 @@
             <a:r>
               <a:rPr sz="1000" b="1" i="0" spc="200">
                 <a:solidFill>
-                  <a:srgbClr val="6B6B6B"/>
+                  <a:srgbClr val="8E867B"/>
                 </a:solidFill>
                 <a:latin typeface="Inter"/>
               </a:rPr>
@@ -18087,7 +18087,7 @@
             <a:r>
               <a:rPr sz="1200" b="0" i="1">
                 <a:solidFill>
-                  <a:srgbClr val="E5E5E5"/>
+                  <a:srgbClr val="3A332C"/>
                 </a:solidFill>
                 <a:latin typeface="Inter"/>
               </a:rPr>
@@ -18129,7 +18129,7 @@
             <a:avLst/>
           </a:prstGeom>
           <a:solidFill>
-            <a:srgbClr val="0A0A0A"/>
+            <a:srgbClr val="F0EAE0"/>
           </a:solidFill>
           <a:ln>
             <a:noFill/>
@@ -18188,7 +18188,7 @@
             <a:r>
               <a:rPr sz="1100" b="1" i="0" spc="20">
                 <a:solidFill>
-                  <a:srgbClr val="F5F5F5"/>
+                  <a:srgbClr val="1F1B16"/>
                 </a:solidFill>
                 <a:latin typeface="Inter"/>
               </a:rPr>
@@ -18227,7 +18227,7 @@
             <a:r>
               <a:rPr sz="900" b="0" i="0" spc="200">
                 <a:solidFill>
-                  <a:srgbClr val="6B6B6B"/>
+                  <a:srgbClr val="8E867B"/>
                 </a:solidFill>
                 <a:latin typeface="Inter"/>
               </a:rPr>
@@ -18266,7 +18266,7 @@
             <a:r>
               <a:rPr sz="900" b="0" i="0" spc="80">
                 <a:solidFill>
-                  <a:srgbClr val="6B6B6B"/>
+                  <a:srgbClr val="8E867B"/>
                 </a:solidFill>
                 <a:latin typeface="Inter"/>
               </a:rPr>
@@ -18305,7 +18305,7 @@
             <a:r>
               <a:rPr sz="900" b="0" i="0" spc="50">
                 <a:solidFill>
-                  <a:srgbClr val="6B6B6B"/>
+                  <a:srgbClr val="8E867B"/>
                 </a:solidFill>
                 <a:latin typeface="JetBrains Mono"/>
               </a:rPr>
@@ -18329,7 +18329,7 @@
             <a:avLst/>
           </a:prstGeom>
           <a:solidFill>
-            <a:srgbClr val="2A2A2A"/>
+            <a:srgbClr val="C8BDA8"/>
           </a:solidFill>
           <a:ln>
             <a:noFill/>
@@ -18388,7 +18388,7 @@
             <a:r>
               <a:rPr sz="1000" b="0" i="0" spc="300">
                 <a:solidFill>
-                  <a:srgbClr val="6B6B6B"/>
+                  <a:srgbClr val="8E867B"/>
                 </a:solidFill>
                 <a:latin typeface="Inter"/>
               </a:rPr>
@@ -18427,7 +18427,7 @@
             <a:r>
               <a:rPr sz="3400" b="1" i="0">
                 <a:solidFill>
-                  <a:srgbClr val="F5F5F5"/>
+                  <a:srgbClr val="1F1B16"/>
                 </a:solidFill>
                 <a:latin typeface="Inter"/>
               </a:rPr>
@@ -18466,7 +18466,7 @@
             <a:r>
               <a:rPr sz="1400" b="0" i="0">
                 <a:solidFill>
-                  <a:srgbClr val="A0A0A0"/>
+                  <a:srgbClr val="5C544A"/>
                 </a:solidFill>
                 <a:latin typeface="Inter"/>
               </a:rPr>
@@ -18490,7 +18490,7 @@
             <a:avLst/>
           </a:prstGeom>
           <a:solidFill>
-            <a:srgbClr val="141414"/>
+            <a:srgbClr val="E5DDCE"/>
           </a:solidFill>
           <a:ln>
             <a:noFill/>
@@ -18534,7 +18534,7 @@
             <a:avLst/>
           </a:prstGeom>
           <a:solidFill>
-            <a:srgbClr val="2A2A2A"/>
+            <a:srgbClr val="C8BDA8"/>
           </a:solidFill>
           <a:ln>
             <a:noFill/>
@@ -18593,7 +18593,7 @@
             <a:r>
               <a:rPr sz="1000" b="1" i="0" spc="300">
                 <a:solidFill>
-                  <a:srgbClr val="6B6B6B"/>
+                  <a:srgbClr val="8E867B"/>
                 </a:solidFill>
                 <a:latin typeface="Inter"/>
               </a:rPr>
@@ -18632,7 +18632,7 @@
             <a:r>
               <a:rPr sz="1200" b="0" i="0">
                 <a:solidFill>
-                  <a:srgbClr val="E5E5E5"/>
+                  <a:srgbClr val="3A332C"/>
                 </a:solidFill>
                 <a:latin typeface="Inter"/>
               </a:rPr>
@@ -18671,7 +18671,7 @@
             <a:r>
               <a:rPr sz="1200" b="0" i="0">
                 <a:solidFill>
-                  <a:srgbClr val="F5F5F5"/>
+                  <a:srgbClr val="1F1B16"/>
                 </a:solidFill>
                 <a:latin typeface="Inter"/>
               </a:rPr>
@@ -18710,7 +18710,7 @@
             <a:r>
               <a:rPr sz="1200" b="0" i="0">
                 <a:solidFill>
-                  <a:srgbClr val="E5E5E5"/>
+                  <a:srgbClr val="3A332C"/>
                 </a:solidFill>
                 <a:latin typeface="Inter"/>
               </a:rPr>
@@ -18749,7 +18749,7 @@
             <a:r>
               <a:rPr sz="1200" b="0" i="0">
                 <a:solidFill>
-                  <a:srgbClr val="F5F5F5"/>
+                  <a:srgbClr val="1F1B16"/>
                 </a:solidFill>
                 <a:latin typeface="Inter"/>
               </a:rPr>
@@ -18788,7 +18788,7 @@
             <a:r>
               <a:rPr sz="1200" b="0" i="0">
                 <a:solidFill>
-                  <a:srgbClr val="E5E5E5"/>
+                  <a:srgbClr val="3A332C"/>
                 </a:solidFill>
                 <a:latin typeface="Inter"/>
               </a:rPr>
@@ -18827,7 +18827,7 @@
             <a:r>
               <a:rPr sz="1200" b="0" i="0">
                 <a:solidFill>
-                  <a:srgbClr val="F5F5F5"/>
+                  <a:srgbClr val="1F1B16"/>
                 </a:solidFill>
                 <a:latin typeface="Inter"/>
               </a:rPr>
@@ -18866,7 +18866,7 @@
             <a:r>
               <a:rPr sz="1200" b="0" i="0">
                 <a:solidFill>
-                  <a:srgbClr val="E5E5E5"/>
+                  <a:srgbClr val="3A332C"/>
                 </a:solidFill>
                 <a:latin typeface="Inter"/>
               </a:rPr>
@@ -18905,7 +18905,7 @@
             <a:r>
               <a:rPr sz="1200" b="0" i="0">
                 <a:solidFill>
-                  <a:srgbClr val="F5F5F5"/>
+                  <a:srgbClr val="1F1B16"/>
                 </a:solidFill>
                 <a:latin typeface="Inter"/>
               </a:rPr>
@@ -18944,7 +18944,7 @@
             <a:r>
               <a:rPr sz="1200" b="0" i="0">
                 <a:solidFill>
-                  <a:srgbClr val="E5E5E5"/>
+                  <a:srgbClr val="3A332C"/>
                 </a:solidFill>
                 <a:latin typeface="Inter"/>
               </a:rPr>
@@ -18983,7 +18983,7 @@
             <a:r>
               <a:rPr sz="1200" b="0" i="0">
                 <a:solidFill>
-                  <a:srgbClr val="F5F5F5"/>
+                  <a:srgbClr val="1F1B16"/>
                 </a:solidFill>
                 <a:latin typeface="Inter"/>
               </a:rPr>
@@ -19022,7 +19022,7 @@
             <a:r>
               <a:rPr sz="1200" b="0" i="0">
                 <a:solidFill>
-                  <a:srgbClr val="E5E5E5"/>
+                  <a:srgbClr val="3A332C"/>
                 </a:solidFill>
                 <a:latin typeface="Inter"/>
               </a:rPr>
@@ -19061,7 +19061,7 @@
             <a:r>
               <a:rPr sz="1200" b="0" i="0">
                 <a:solidFill>
-                  <a:srgbClr val="F5F5F5"/>
+                  <a:srgbClr val="1F1B16"/>
                 </a:solidFill>
                 <a:latin typeface="Inter"/>
               </a:rPr>
@@ -19085,7 +19085,7 @@
             <a:avLst/>
           </a:prstGeom>
           <a:solidFill>
-            <a:srgbClr val="1C1C1C"/>
+            <a:srgbClr val="DAD0BE"/>
           </a:solidFill>
           <a:ln>
             <a:noFill/>
@@ -19129,7 +19129,7 @@
             <a:avLst/>
           </a:prstGeom>
           <a:solidFill>
-            <a:srgbClr val="2A2A2A"/>
+            <a:srgbClr val="C8BDA8"/>
           </a:solidFill>
           <a:ln>
             <a:noFill/>
@@ -19188,7 +19188,7 @@
             <a:r>
               <a:rPr sz="1000" b="1" i="0" spc="300">
                 <a:solidFill>
-                  <a:srgbClr val="6B6B6B"/>
+                  <a:srgbClr val="8E867B"/>
                 </a:solidFill>
                 <a:latin typeface="Inter"/>
               </a:rPr>
@@ -19227,7 +19227,7 @@
             <a:r>
               <a:rPr sz="1000" b="1" i="0" spc="200">
                 <a:solidFill>
-                  <a:srgbClr val="E5E5E5"/>
+                  <a:srgbClr val="3A332C"/>
                 </a:solidFill>
                 <a:latin typeface="Inter"/>
               </a:rPr>
@@ -19266,7 +19266,7 @@
             <a:r>
               <a:rPr sz="1150" b="0" i="0">
                 <a:solidFill>
-                  <a:srgbClr val="F5F5F5"/>
+                  <a:srgbClr val="1F1B16"/>
                 </a:solidFill>
                 <a:latin typeface="Inter"/>
               </a:rPr>
@@ -19305,7 +19305,7 @@
             <a:r>
               <a:rPr sz="1150" b="0" i="0">
                 <a:solidFill>
-                  <a:srgbClr val="F5F5F5"/>
+                  <a:srgbClr val="1F1B16"/>
                 </a:solidFill>
                 <a:latin typeface="Inter"/>
               </a:rPr>
@@ -19344,7 +19344,7 @@
             <a:r>
               <a:rPr sz="1150" b="0" i="0">
                 <a:solidFill>
-                  <a:srgbClr val="F5F5F5"/>
+                  <a:srgbClr val="1F1B16"/>
                 </a:solidFill>
                 <a:latin typeface="Inter"/>
               </a:rPr>
@@ -19383,7 +19383,7 @@
             <a:r>
               <a:rPr sz="1150" b="0" i="0">
                 <a:solidFill>
-                  <a:srgbClr val="F5F5F5"/>
+                  <a:srgbClr val="1F1B16"/>
                 </a:solidFill>
                 <a:latin typeface="Inter"/>
               </a:rPr>
@@ -19422,7 +19422,7 @@
             <a:r>
               <a:rPr sz="1150" b="0" i="0">
                 <a:solidFill>
-                  <a:srgbClr val="F5F5F5"/>
+                  <a:srgbClr val="1F1B16"/>
                 </a:solidFill>
                 <a:latin typeface="Inter"/>
               </a:rPr>
@@ -19461,7 +19461,7 @@
             <a:r>
               <a:rPr sz="1000" b="1" i="0" spc="200">
                 <a:solidFill>
-                  <a:srgbClr val="6B6B6B"/>
+                  <a:srgbClr val="8E867B"/>
                 </a:solidFill>
                 <a:latin typeface="Inter"/>
               </a:rPr>
@@ -19500,7 +19500,7 @@
             <a:r>
               <a:rPr sz="1150" b="0" i="0">
                 <a:solidFill>
-                  <a:srgbClr val="6B6B6B"/>
+                  <a:srgbClr val="8E867B"/>
                 </a:solidFill>
                 <a:latin typeface="Inter"/>
               </a:rPr>
@@ -19539,7 +19539,7 @@
             <a:r>
               <a:rPr sz="1150" b="0" i="0">
                 <a:solidFill>
-                  <a:srgbClr val="6B6B6B"/>
+                  <a:srgbClr val="8E867B"/>
                 </a:solidFill>
                 <a:latin typeface="Inter"/>
               </a:rPr>
@@ -19578,7 +19578,7 @@
             <a:r>
               <a:rPr sz="1150" b="0" i="0">
                 <a:solidFill>
-                  <a:srgbClr val="6B6B6B"/>
+                  <a:srgbClr val="8E867B"/>
                 </a:solidFill>
                 <a:latin typeface="Inter"/>
               </a:rPr>
@@ -19620,7 +19620,7 @@
             <a:avLst/>
           </a:prstGeom>
           <a:solidFill>
-            <a:srgbClr val="0A0A0A"/>
+            <a:srgbClr val="F0EAE0"/>
           </a:solidFill>
           <a:ln>
             <a:noFill/>
@@ -19664,7 +19664,7 @@
             <a:avLst/>
           </a:prstGeom>
           <a:solidFill>
-            <a:srgbClr val="141414"/>
+            <a:srgbClr val="E5DDCE"/>
           </a:solidFill>
           <a:ln>
             <a:noFill/>
@@ -19708,7 +19708,7 @@
             <a:avLst/>
           </a:prstGeom>
           <a:solidFill>
-            <a:srgbClr val="2A2A2A"/>
+            <a:srgbClr val="C8BDA8"/>
           </a:solidFill>
           <a:ln>
             <a:noFill/>
@@ -19767,7 +19767,7 @@
             <a:r>
               <a:rPr sz="1200" b="1" i="0" spc="20">
                 <a:solidFill>
-                  <a:srgbClr val="F5F5F5"/>
+                  <a:srgbClr val="1F1B16"/>
                 </a:solidFill>
                 <a:latin typeface="Inter"/>
               </a:rPr>
@@ -19806,7 +19806,7 @@
             <a:r>
               <a:rPr sz="1100" b="0" i="0" spc="400">
                 <a:solidFill>
-                  <a:srgbClr val="6B6B6B"/>
+                  <a:srgbClr val="8E867B"/>
                 </a:solidFill>
                 <a:latin typeface="Inter"/>
               </a:rPr>
@@ -19845,7 +19845,7 @@
             <a:r>
               <a:rPr sz="5000" b="1" i="0">
                 <a:solidFill>
-                  <a:srgbClr val="F5F5F5"/>
+                  <a:srgbClr val="1F1B16"/>
                 </a:solidFill>
                 <a:latin typeface="Inter"/>
               </a:rPr>
@@ -19861,7 +19861,7 @@
             <a:r>
               <a:rPr sz="5000" b="1" i="0">
                 <a:solidFill>
-                  <a:srgbClr val="F5F5F5"/>
+                  <a:srgbClr val="1F1B16"/>
                 </a:solidFill>
                 <a:latin typeface="Inter"/>
               </a:rPr>
@@ -19900,7 +19900,7 @@
             <a:r>
               <a:rPr sz="1500" b="0" i="1">
                 <a:solidFill>
-                  <a:srgbClr val="A0A0A0"/>
+                  <a:srgbClr val="5C544A"/>
                 </a:solidFill>
                 <a:latin typeface="Inter"/>
               </a:rPr>
@@ -19916,7 +19916,7 @@
             <a:r>
               <a:rPr sz="1500" b="0" i="1">
                 <a:solidFill>
-                  <a:srgbClr val="A0A0A0"/>
+                  <a:srgbClr val="5C544A"/>
                 </a:solidFill>
                 <a:latin typeface="Inter"/>
               </a:rPr>
@@ -19955,7 +19955,7 @@
             <a:r>
               <a:rPr sz="900" b="0" i="0">
                 <a:solidFill>
-                  <a:srgbClr val="6B6B6B"/>
+                  <a:srgbClr val="8E867B"/>
                 </a:solidFill>
                 <a:latin typeface="JetBrains Mono"/>
               </a:rPr>
@@ -19997,7 +19997,7 @@
             <a:avLst/>
           </a:prstGeom>
           <a:solidFill>
-            <a:srgbClr val="0A0A0A"/>
+            <a:srgbClr val="F0EAE0"/>
           </a:solidFill>
           <a:ln>
             <a:noFill/>
@@ -20056,7 +20056,7 @@
             <a:r>
               <a:rPr sz="1100" b="1" i="0" spc="20">
                 <a:solidFill>
-                  <a:srgbClr val="F5F5F5"/>
+                  <a:srgbClr val="1F1B16"/>
                 </a:solidFill>
                 <a:latin typeface="Inter"/>
               </a:rPr>
@@ -20095,7 +20095,7 @@
             <a:r>
               <a:rPr sz="900" b="0" i="0" spc="200">
                 <a:solidFill>
-                  <a:srgbClr val="6B6B6B"/>
+                  <a:srgbClr val="8E867B"/>
                 </a:solidFill>
                 <a:latin typeface="Inter"/>
               </a:rPr>
@@ -20134,7 +20134,7 @@
             <a:r>
               <a:rPr sz="900" b="0" i="0" spc="80">
                 <a:solidFill>
-                  <a:srgbClr val="6B6B6B"/>
+                  <a:srgbClr val="8E867B"/>
                 </a:solidFill>
                 <a:latin typeface="Inter"/>
               </a:rPr>
@@ -20173,7 +20173,7 @@
             <a:r>
               <a:rPr sz="900" b="0" i="0" spc="50">
                 <a:solidFill>
-                  <a:srgbClr val="6B6B6B"/>
+                  <a:srgbClr val="8E867B"/>
                 </a:solidFill>
                 <a:latin typeface="JetBrains Mono"/>
               </a:rPr>
@@ -20197,7 +20197,7 @@
             <a:avLst/>
           </a:prstGeom>
           <a:solidFill>
-            <a:srgbClr val="2A2A2A"/>
+            <a:srgbClr val="C8BDA8"/>
           </a:solidFill>
           <a:ln>
             <a:noFill/>
@@ -20256,7 +20256,7 @@
             <a:r>
               <a:rPr sz="1000" b="0" i="0" spc="300">
                 <a:solidFill>
-                  <a:srgbClr val="6B6B6B"/>
+                  <a:srgbClr val="8E867B"/>
                 </a:solidFill>
                 <a:latin typeface="Inter"/>
               </a:rPr>
@@ -20295,7 +20295,7 @@
             <a:r>
               <a:rPr sz="3400" b="1" i="0">
                 <a:solidFill>
-                  <a:srgbClr val="F5F5F5"/>
+                  <a:srgbClr val="1F1B16"/>
                 </a:solidFill>
                 <a:latin typeface="Inter"/>
               </a:rPr>
@@ -20334,7 +20334,7 @@
             <a:r>
               <a:rPr sz="1400" b="0" i="0">
                 <a:solidFill>
-                  <a:srgbClr val="A0A0A0"/>
+                  <a:srgbClr val="5C544A"/>
                 </a:solidFill>
                 <a:latin typeface="Inter"/>
               </a:rPr>
@@ -20373,7 +20373,7 @@
             <a:r>
               <a:rPr sz="1600" b="0" i="0">
                 <a:solidFill>
-                  <a:srgbClr val="6B6B6B"/>
+                  <a:srgbClr val="8E867B"/>
                 </a:solidFill>
                 <a:latin typeface="Inter"/>
               </a:rPr>
@@ -20412,7 +20412,7 @@
             <a:r>
               <a:rPr sz="1400" b="1" i="0">
                 <a:solidFill>
-                  <a:srgbClr val="F5F5F5"/>
+                  <a:srgbClr val="1F1B16"/>
                 </a:solidFill>
                 <a:latin typeface="Inter"/>
               </a:rPr>
@@ -20451,7 +20451,7 @@
             <a:r>
               <a:rPr sz="1200" b="0" i="0">
                 <a:solidFill>
-                  <a:srgbClr val="A0A0A0"/>
+                  <a:srgbClr val="5C544A"/>
                 </a:solidFill>
                 <a:latin typeface="Inter"/>
               </a:rPr>
@@ -20475,7 +20475,7 @@
             <a:avLst/>
           </a:prstGeom>
           <a:solidFill>
-            <a:srgbClr val="2A2A2A"/>
+            <a:srgbClr val="C8BDA8"/>
           </a:solidFill>
           <a:ln>
             <a:noFill/>
@@ -20534,7 +20534,7 @@
             <a:r>
               <a:rPr sz="1600" b="0" i="0">
                 <a:solidFill>
-                  <a:srgbClr val="6B6B6B"/>
+                  <a:srgbClr val="8E867B"/>
                 </a:solidFill>
                 <a:latin typeface="Inter"/>
               </a:rPr>
@@ -20573,7 +20573,7 @@
             <a:r>
               <a:rPr sz="1400" b="1" i="0">
                 <a:solidFill>
-                  <a:srgbClr val="F5F5F5"/>
+                  <a:srgbClr val="1F1B16"/>
                 </a:solidFill>
                 <a:latin typeface="Inter"/>
               </a:rPr>
@@ -20612,7 +20612,7 @@
             <a:r>
               <a:rPr sz="1200" b="0" i="0">
                 <a:solidFill>
-                  <a:srgbClr val="A0A0A0"/>
+                  <a:srgbClr val="5C544A"/>
                 </a:solidFill>
                 <a:latin typeface="Inter"/>
               </a:rPr>
@@ -20636,7 +20636,7 @@
             <a:avLst/>
           </a:prstGeom>
           <a:solidFill>
-            <a:srgbClr val="2A2A2A"/>
+            <a:srgbClr val="C8BDA8"/>
           </a:solidFill>
           <a:ln>
             <a:noFill/>
@@ -20695,7 +20695,7 @@
             <a:r>
               <a:rPr sz="1600" b="0" i="0">
                 <a:solidFill>
-                  <a:srgbClr val="6B6B6B"/>
+                  <a:srgbClr val="8E867B"/>
                 </a:solidFill>
                 <a:latin typeface="Inter"/>
               </a:rPr>
@@ -20734,7 +20734,7 @@
             <a:r>
               <a:rPr sz="1400" b="1" i="0">
                 <a:solidFill>
-                  <a:srgbClr val="F5F5F5"/>
+                  <a:srgbClr val="1F1B16"/>
                 </a:solidFill>
                 <a:latin typeface="Inter"/>
               </a:rPr>
@@ -20773,7 +20773,7 @@
             <a:r>
               <a:rPr sz="1200" b="0" i="0">
                 <a:solidFill>
-                  <a:srgbClr val="A0A0A0"/>
+                  <a:srgbClr val="5C544A"/>
                 </a:solidFill>
                 <a:latin typeface="Inter"/>
               </a:rPr>
@@ -20797,7 +20797,7 @@
             <a:avLst/>
           </a:prstGeom>
           <a:solidFill>
-            <a:srgbClr val="2A2A2A"/>
+            <a:srgbClr val="C8BDA8"/>
           </a:solidFill>
           <a:ln>
             <a:noFill/>
@@ -20856,7 +20856,7 @@
             <a:r>
               <a:rPr sz="1600" b="0" i="0">
                 <a:solidFill>
-                  <a:srgbClr val="6B6B6B"/>
+                  <a:srgbClr val="8E867B"/>
                 </a:solidFill>
                 <a:latin typeface="Inter"/>
               </a:rPr>
@@ -20895,7 +20895,7 @@
             <a:r>
               <a:rPr sz="1400" b="1" i="0">
                 <a:solidFill>
-                  <a:srgbClr val="F5F5F5"/>
+                  <a:srgbClr val="1F1B16"/>
                 </a:solidFill>
                 <a:latin typeface="Inter"/>
               </a:rPr>
@@ -20934,7 +20934,7 @@
             <a:r>
               <a:rPr sz="1200" b="0" i="0">
                 <a:solidFill>
-                  <a:srgbClr val="A0A0A0"/>
+                  <a:srgbClr val="5C544A"/>
                 </a:solidFill>
                 <a:latin typeface="Inter"/>
               </a:rPr>
@@ -20958,7 +20958,7 @@
             <a:avLst/>
           </a:prstGeom>
           <a:solidFill>
-            <a:srgbClr val="2A2A2A"/>
+            <a:srgbClr val="C8BDA8"/>
           </a:solidFill>
           <a:ln>
             <a:noFill/>
@@ -21017,7 +21017,7 @@
             <a:r>
               <a:rPr sz="1600" b="0" i="0">
                 <a:solidFill>
-                  <a:srgbClr val="6B6B6B"/>
+                  <a:srgbClr val="8E867B"/>
                 </a:solidFill>
                 <a:latin typeface="Inter"/>
               </a:rPr>
@@ -21056,7 +21056,7 @@
             <a:r>
               <a:rPr sz="1400" b="1" i="0">
                 <a:solidFill>
-                  <a:srgbClr val="F5F5F5"/>
+                  <a:srgbClr val="1F1B16"/>
                 </a:solidFill>
                 <a:latin typeface="Inter"/>
               </a:rPr>
@@ -21095,7 +21095,7 @@
             <a:r>
               <a:rPr sz="1200" b="0" i="0">
                 <a:solidFill>
-                  <a:srgbClr val="A0A0A0"/>
+                  <a:srgbClr val="5C544A"/>
                 </a:solidFill>
                 <a:latin typeface="Inter"/>
               </a:rPr>
@@ -21119,7 +21119,7 @@
             <a:avLst/>
           </a:prstGeom>
           <a:solidFill>
-            <a:srgbClr val="2A2A2A"/>
+            <a:srgbClr val="C8BDA8"/>
           </a:solidFill>
           <a:ln>
             <a:noFill/>
@@ -21181,7 +21181,7 @@
             <a:avLst/>
           </a:prstGeom>
           <a:solidFill>
-            <a:srgbClr val="0A0A0A"/>
+            <a:srgbClr val="F0EAE0"/>
           </a:solidFill>
           <a:ln>
             <a:noFill/>
@@ -21240,7 +21240,7 @@
             <a:r>
               <a:rPr sz="1100" b="1" i="0" spc="20">
                 <a:solidFill>
-                  <a:srgbClr val="F5F5F5"/>
+                  <a:srgbClr val="1F1B16"/>
                 </a:solidFill>
                 <a:latin typeface="Inter"/>
               </a:rPr>
@@ -21279,7 +21279,7 @@
             <a:r>
               <a:rPr sz="900" b="0" i="0" spc="200">
                 <a:solidFill>
-                  <a:srgbClr val="6B6B6B"/>
+                  <a:srgbClr val="8E867B"/>
                 </a:solidFill>
                 <a:latin typeface="Inter"/>
               </a:rPr>
@@ -21318,7 +21318,7 @@
             <a:r>
               <a:rPr sz="900" b="0" i="0" spc="80">
                 <a:solidFill>
-                  <a:srgbClr val="6B6B6B"/>
+                  <a:srgbClr val="8E867B"/>
                 </a:solidFill>
                 <a:latin typeface="Inter"/>
               </a:rPr>
@@ -21357,7 +21357,7 @@
             <a:r>
               <a:rPr sz="900" b="0" i="0" spc="50">
                 <a:solidFill>
-                  <a:srgbClr val="6B6B6B"/>
+                  <a:srgbClr val="8E867B"/>
                 </a:solidFill>
                 <a:latin typeface="JetBrains Mono"/>
               </a:rPr>
@@ -21381,7 +21381,7 @@
             <a:avLst/>
           </a:prstGeom>
           <a:solidFill>
-            <a:srgbClr val="2A2A2A"/>
+            <a:srgbClr val="C8BDA8"/>
           </a:solidFill>
           <a:ln>
             <a:noFill/>
@@ -21440,7 +21440,7 @@
             <a:r>
               <a:rPr sz="1000" b="0" i="0" spc="300">
                 <a:solidFill>
-                  <a:srgbClr val="6B6B6B"/>
+                  <a:srgbClr val="8E867B"/>
                 </a:solidFill>
                 <a:latin typeface="Inter"/>
               </a:rPr>
@@ -21479,7 +21479,7 @@
             <a:r>
               <a:rPr sz="3400" b="1" i="0">
                 <a:solidFill>
-                  <a:srgbClr val="F5F5F5"/>
+                  <a:srgbClr val="1F1B16"/>
                 </a:solidFill>
                 <a:latin typeface="Inter"/>
               </a:rPr>
@@ -21518,7 +21518,7 @@
             <a:r>
               <a:rPr sz="1400" b="0" i="0">
                 <a:solidFill>
-                  <a:srgbClr val="A0A0A0"/>
+                  <a:srgbClr val="5C544A"/>
                 </a:solidFill>
                 <a:latin typeface="Inter"/>
               </a:rPr>
@@ -21542,7 +21542,7 @@
             <a:avLst/>
           </a:prstGeom>
           <a:solidFill>
-            <a:srgbClr val="141414"/>
+            <a:srgbClr val="E5DDCE"/>
           </a:solidFill>
           <a:ln>
             <a:noFill/>
@@ -21586,7 +21586,7 @@
             <a:avLst/>
           </a:prstGeom>
           <a:solidFill>
-            <a:srgbClr val="2A2A2A"/>
+            <a:srgbClr val="C8BDA8"/>
           </a:solidFill>
           <a:ln>
             <a:noFill/>
@@ -21645,7 +21645,7 @@
             <a:r>
               <a:rPr sz="1800" b="1" i="0">
                 <a:solidFill>
-                  <a:srgbClr val="F5F5F5"/>
+                  <a:srgbClr val="1F1B16"/>
                 </a:solidFill>
                 <a:latin typeface="JetBrains Mono"/>
               </a:rPr>
@@ -21684,7 +21684,7 @@
             <a:r>
               <a:rPr sz="1300" b="1" i="0">
                 <a:solidFill>
-                  <a:srgbClr val="F5F5F5"/>
+                  <a:srgbClr val="1F1B16"/>
                 </a:solidFill>
                 <a:latin typeface="Inter"/>
               </a:rPr>
@@ -21723,7 +21723,7 @@
             <a:r>
               <a:rPr sz="1050" b="0" i="0">
                 <a:solidFill>
-                  <a:srgbClr val="A0A0A0"/>
+                  <a:srgbClr val="5C544A"/>
                 </a:solidFill>
                 <a:latin typeface="Inter"/>
               </a:rPr>
@@ -21762,7 +21762,7 @@
             <a:r>
               <a:rPr sz="1000" b="0" i="1">
                 <a:solidFill>
-                  <a:srgbClr val="E5E5E5"/>
+                  <a:srgbClr val="3A332C"/>
                 </a:solidFill>
                 <a:latin typeface="Inter"/>
               </a:rPr>
@@ -21786,7 +21786,7 @@
             <a:avLst/>
           </a:prstGeom>
           <a:solidFill>
-            <a:srgbClr val="141414"/>
+            <a:srgbClr val="E5DDCE"/>
           </a:solidFill>
           <a:ln>
             <a:noFill/>
@@ -21830,7 +21830,7 @@
             <a:avLst/>
           </a:prstGeom>
           <a:solidFill>
-            <a:srgbClr val="2A2A2A"/>
+            <a:srgbClr val="C8BDA8"/>
           </a:solidFill>
           <a:ln>
             <a:noFill/>
@@ -21889,7 +21889,7 @@
             <a:r>
               <a:rPr sz="1800" b="1" i="0">
                 <a:solidFill>
-                  <a:srgbClr val="F5F5F5"/>
+                  <a:srgbClr val="1F1B16"/>
                 </a:solidFill>
                 <a:latin typeface="JetBrains Mono"/>
               </a:rPr>
@@ -21928,7 +21928,7 @@
             <a:r>
               <a:rPr sz="1300" b="1" i="0">
                 <a:solidFill>
-                  <a:srgbClr val="F5F5F5"/>
+                  <a:srgbClr val="1F1B16"/>
                 </a:solidFill>
                 <a:latin typeface="Inter"/>
               </a:rPr>
@@ -21967,7 +21967,7 @@
             <a:r>
               <a:rPr sz="1050" b="0" i="0">
                 <a:solidFill>
-                  <a:srgbClr val="A0A0A0"/>
+                  <a:srgbClr val="5C544A"/>
                 </a:solidFill>
                 <a:latin typeface="Inter"/>
               </a:rPr>
@@ -22006,7 +22006,7 @@
             <a:r>
               <a:rPr sz="1000" b="0" i="1">
                 <a:solidFill>
-                  <a:srgbClr val="E5E5E5"/>
+                  <a:srgbClr val="3A332C"/>
                 </a:solidFill>
                 <a:latin typeface="Inter"/>
               </a:rPr>
@@ -22030,7 +22030,7 @@
             <a:avLst/>
           </a:prstGeom>
           <a:solidFill>
-            <a:srgbClr val="141414"/>
+            <a:srgbClr val="E5DDCE"/>
           </a:solidFill>
           <a:ln>
             <a:noFill/>
@@ -22074,7 +22074,7 @@
             <a:avLst/>
           </a:prstGeom>
           <a:solidFill>
-            <a:srgbClr val="2A2A2A"/>
+            <a:srgbClr val="C8BDA8"/>
           </a:solidFill>
           <a:ln>
             <a:noFill/>
@@ -22133,7 +22133,7 @@
             <a:r>
               <a:rPr sz="1800" b="1" i="0">
                 <a:solidFill>
-                  <a:srgbClr val="F5F5F5"/>
+                  <a:srgbClr val="1F1B16"/>
                 </a:solidFill>
                 <a:latin typeface="JetBrains Mono"/>
               </a:rPr>
@@ -22172,7 +22172,7 @@
             <a:r>
               <a:rPr sz="1300" b="1" i="0">
                 <a:solidFill>
-                  <a:srgbClr val="F5F5F5"/>
+                  <a:srgbClr val="1F1B16"/>
                 </a:solidFill>
                 <a:latin typeface="Inter"/>
               </a:rPr>
@@ -22211,7 +22211,7 @@
             <a:r>
               <a:rPr sz="1050" b="0" i="0">
                 <a:solidFill>
-                  <a:srgbClr val="A0A0A0"/>
+                  <a:srgbClr val="5C544A"/>
                 </a:solidFill>
                 <a:latin typeface="Inter"/>
               </a:rPr>
@@ -22250,7 +22250,7 @@
             <a:r>
               <a:rPr sz="1000" b="0" i="1">
                 <a:solidFill>
-                  <a:srgbClr val="E5E5E5"/>
+                  <a:srgbClr val="3A332C"/>
                 </a:solidFill>
                 <a:latin typeface="Inter"/>
               </a:rPr>
@@ -22274,7 +22274,7 @@
             <a:avLst/>
           </a:prstGeom>
           <a:solidFill>
-            <a:srgbClr val="141414"/>
+            <a:srgbClr val="E5DDCE"/>
           </a:solidFill>
           <a:ln>
             <a:noFill/>
@@ -22318,7 +22318,7 @@
             <a:avLst/>
           </a:prstGeom>
           <a:solidFill>
-            <a:srgbClr val="2A2A2A"/>
+            <a:srgbClr val="C8BDA8"/>
           </a:solidFill>
           <a:ln>
             <a:noFill/>
@@ -22377,7 +22377,7 @@
             <a:r>
               <a:rPr sz="1800" b="1" i="0">
                 <a:solidFill>
-                  <a:srgbClr val="F5F5F5"/>
+                  <a:srgbClr val="1F1B16"/>
                 </a:solidFill>
                 <a:latin typeface="JetBrains Mono"/>
               </a:rPr>
@@ -22416,7 +22416,7 @@
             <a:r>
               <a:rPr sz="1300" b="1" i="0">
                 <a:solidFill>
-                  <a:srgbClr val="F5F5F5"/>
+                  <a:srgbClr val="1F1B16"/>
                 </a:solidFill>
                 <a:latin typeface="Inter"/>
               </a:rPr>
@@ -22455,7 +22455,7 @@
             <a:r>
               <a:rPr sz="1050" b="0" i="0">
                 <a:solidFill>
-                  <a:srgbClr val="A0A0A0"/>
+                  <a:srgbClr val="5C544A"/>
                 </a:solidFill>
                 <a:latin typeface="Inter"/>
               </a:rPr>
@@ -22494,7 +22494,7 @@
             <a:r>
               <a:rPr sz="1000" b="0" i="1">
                 <a:solidFill>
-                  <a:srgbClr val="E5E5E5"/>
+                  <a:srgbClr val="3A332C"/>
                 </a:solidFill>
                 <a:latin typeface="Inter"/>
               </a:rPr>
@@ -22518,7 +22518,7 @@
             <a:avLst/>
           </a:prstGeom>
           <a:solidFill>
-            <a:srgbClr val="141414"/>
+            <a:srgbClr val="E5DDCE"/>
           </a:solidFill>
           <a:ln>
             <a:noFill/>
@@ -22562,7 +22562,7 @@
             <a:avLst/>
           </a:prstGeom>
           <a:solidFill>
-            <a:srgbClr val="2A2A2A"/>
+            <a:srgbClr val="C8BDA8"/>
           </a:solidFill>
           <a:ln>
             <a:noFill/>
@@ -22621,7 +22621,7 @@
             <a:r>
               <a:rPr sz="1800" b="1" i="0">
                 <a:solidFill>
-                  <a:srgbClr val="F5F5F5"/>
+                  <a:srgbClr val="1F1B16"/>
                 </a:solidFill>
                 <a:latin typeface="JetBrains Mono"/>
               </a:rPr>
@@ -22660,7 +22660,7 @@
             <a:r>
               <a:rPr sz="1300" b="1" i="0">
                 <a:solidFill>
-                  <a:srgbClr val="F5F5F5"/>
+                  <a:srgbClr val="1F1B16"/>
                 </a:solidFill>
                 <a:latin typeface="Inter"/>
               </a:rPr>
@@ -22699,7 +22699,7 @@
             <a:r>
               <a:rPr sz="1050" b="0" i="0">
                 <a:solidFill>
-                  <a:srgbClr val="A0A0A0"/>
+                  <a:srgbClr val="5C544A"/>
                 </a:solidFill>
                 <a:latin typeface="Inter"/>
               </a:rPr>
@@ -22738,7 +22738,7 @@
             <a:r>
               <a:rPr sz="1000" b="0" i="1">
                 <a:solidFill>
-                  <a:srgbClr val="E5E5E5"/>
+                  <a:srgbClr val="3A332C"/>
                 </a:solidFill>
                 <a:latin typeface="Inter"/>
               </a:rPr>
@@ -22780,7 +22780,7 @@
             <a:avLst/>
           </a:prstGeom>
           <a:solidFill>
-            <a:srgbClr val="0A0A0A"/>
+            <a:srgbClr val="F0EAE0"/>
           </a:solidFill>
           <a:ln>
             <a:noFill/>
@@ -22839,7 +22839,7 @@
             <a:r>
               <a:rPr sz="1100" b="1" i="0" spc="20">
                 <a:solidFill>
-                  <a:srgbClr val="F5F5F5"/>
+                  <a:srgbClr val="1F1B16"/>
                 </a:solidFill>
                 <a:latin typeface="Inter"/>
               </a:rPr>
@@ -22878,7 +22878,7 @@
             <a:r>
               <a:rPr sz="900" b="0" i="0" spc="200">
                 <a:solidFill>
-                  <a:srgbClr val="6B6B6B"/>
+                  <a:srgbClr val="8E867B"/>
                 </a:solidFill>
                 <a:latin typeface="Inter"/>
               </a:rPr>
@@ -22917,7 +22917,7 @@
             <a:r>
               <a:rPr sz="900" b="0" i="0" spc="80">
                 <a:solidFill>
-                  <a:srgbClr val="6B6B6B"/>
+                  <a:srgbClr val="8E867B"/>
                 </a:solidFill>
                 <a:latin typeface="Inter"/>
               </a:rPr>
@@ -22956,7 +22956,7 @@
             <a:r>
               <a:rPr sz="900" b="0" i="0" spc="50">
                 <a:solidFill>
-                  <a:srgbClr val="6B6B6B"/>
+                  <a:srgbClr val="8E867B"/>
                 </a:solidFill>
                 <a:latin typeface="JetBrains Mono"/>
               </a:rPr>
@@ -22980,7 +22980,7 @@
             <a:avLst/>
           </a:prstGeom>
           <a:solidFill>
-            <a:srgbClr val="2A2A2A"/>
+            <a:srgbClr val="C8BDA8"/>
           </a:solidFill>
           <a:ln>
             <a:noFill/>
@@ -23039,7 +23039,7 @@
             <a:r>
               <a:rPr sz="1000" b="0" i="0" spc="300">
                 <a:solidFill>
-                  <a:srgbClr val="6B6B6B"/>
+                  <a:srgbClr val="8E867B"/>
                 </a:solidFill>
                 <a:latin typeface="Inter"/>
               </a:rPr>
@@ -23078,7 +23078,7 @@
             <a:r>
               <a:rPr sz="3400" b="1" i="0">
                 <a:solidFill>
-                  <a:srgbClr val="F5F5F5"/>
+                  <a:srgbClr val="1F1B16"/>
                 </a:solidFill>
                 <a:latin typeface="Inter"/>
               </a:rPr>
@@ -23117,7 +23117,7 @@
             <a:r>
               <a:rPr sz="1400" b="0" i="0">
                 <a:solidFill>
-                  <a:srgbClr val="A0A0A0"/>
+                  <a:srgbClr val="5C544A"/>
                 </a:solidFill>
                 <a:latin typeface="Inter"/>
               </a:rPr>
@@ -23141,7 +23141,7 @@
             <a:avLst/>
           </a:prstGeom>
           <a:solidFill>
-            <a:srgbClr val="141414"/>
+            <a:srgbClr val="E5DDCE"/>
           </a:solidFill>
           <a:ln>
             <a:noFill/>
@@ -23185,7 +23185,7 @@
             <a:avLst/>
           </a:prstGeom>
           <a:solidFill>
-            <a:srgbClr val="2A2A2A"/>
+            <a:srgbClr val="C8BDA8"/>
           </a:solidFill>
           <a:ln>
             <a:noFill/>
@@ -23244,7 +23244,7 @@
             <a:r>
               <a:rPr sz="1000" b="1" i="0" spc="300">
                 <a:solidFill>
-                  <a:srgbClr val="6B6B6B"/>
+                  <a:srgbClr val="8E867B"/>
                 </a:solidFill>
                 <a:latin typeface="Inter"/>
               </a:rPr>
@@ -23283,7 +23283,7 @@
             <a:r>
               <a:rPr sz="1100" b="0" i="0">
                 <a:solidFill>
-                  <a:srgbClr val="F5F5F5"/>
+                  <a:srgbClr val="1F1B16"/>
                 </a:solidFill>
                 <a:latin typeface="Inter"/>
               </a:rPr>
@@ -23299,7 +23299,7 @@
             <a:r>
               <a:rPr sz="1100" b="0" i="0">
                 <a:solidFill>
-                  <a:srgbClr val="F5F5F5"/>
+                  <a:srgbClr val="1F1B16"/>
                 </a:solidFill>
                 <a:latin typeface="Inter"/>
               </a:rPr>
@@ -23315,7 +23315,7 @@
             <a:r>
               <a:rPr sz="1100" b="0" i="0">
                 <a:solidFill>
-                  <a:srgbClr val="F5F5F5"/>
+                  <a:srgbClr val="1F1B16"/>
                 </a:solidFill>
                 <a:latin typeface="Inter"/>
               </a:rPr>
@@ -23331,7 +23331,7 @@
             <a:r>
               <a:rPr sz="1100" b="0" i="0">
                 <a:solidFill>
-                  <a:srgbClr val="F5F5F5"/>
+                  <a:srgbClr val="1F1B16"/>
                 </a:solidFill>
                 <a:latin typeface="Inter"/>
               </a:rPr>
@@ -23347,7 +23347,7 @@
             <a:r>
               <a:rPr sz="1100" b="0" i="0">
                 <a:solidFill>
-                  <a:srgbClr val="F5F5F5"/>
+                  <a:srgbClr val="1F1B16"/>
                 </a:solidFill>
                 <a:latin typeface="Inter"/>
               </a:rPr>
@@ -23363,7 +23363,7 @@
             <a:r>
               <a:rPr sz="1100" b="0" i="0">
                 <a:solidFill>
-                  <a:srgbClr val="F5F5F5"/>
+                  <a:srgbClr val="1F1B16"/>
                 </a:solidFill>
                 <a:latin typeface="Inter"/>
               </a:rPr>
@@ -23387,7 +23387,7 @@
             <a:avLst/>
           </a:prstGeom>
           <a:solidFill>
-            <a:srgbClr val="141414"/>
+            <a:srgbClr val="E5DDCE"/>
           </a:solidFill>
           <a:ln>
             <a:noFill/>
@@ -23431,7 +23431,7 @@
             <a:avLst/>
           </a:prstGeom>
           <a:solidFill>
-            <a:srgbClr val="2A2A2A"/>
+            <a:srgbClr val="C8BDA8"/>
           </a:solidFill>
           <a:ln>
             <a:noFill/>
@@ -23490,7 +23490,7 @@
             <a:r>
               <a:rPr sz="1000" b="1" i="0" spc="300">
                 <a:solidFill>
-                  <a:srgbClr val="6B6B6B"/>
+                  <a:srgbClr val="8E867B"/>
                 </a:solidFill>
                 <a:latin typeface="Inter"/>
               </a:rPr>
@@ -23529,7 +23529,7 @@
             <a:r>
               <a:rPr sz="1100" b="0" i="0">
                 <a:solidFill>
-                  <a:srgbClr val="F5F5F5"/>
+                  <a:srgbClr val="1F1B16"/>
                 </a:solidFill>
                 <a:latin typeface="Inter"/>
               </a:rPr>
@@ -23545,7 +23545,7 @@
             <a:r>
               <a:rPr sz="1100" b="0" i="0">
                 <a:solidFill>
-                  <a:srgbClr val="F5F5F5"/>
+                  <a:srgbClr val="1F1B16"/>
                 </a:solidFill>
                 <a:latin typeface="Inter"/>
               </a:rPr>
@@ -23561,7 +23561,7 @@
             <a:r>
               <a:rPr sz="1100" b="0" i="0">
                 <a:solidFill>
-                  <a:srgbClr val="F5F5F5"/>
+                  <a:srgbClr val="1F1B16"/>
                 </a:solidFill>
                 <a:latin typeface="Inter"/>
               </a:rPr>
@@ -23577,7 +23577,7 @@
             <a:r>
               <a:rPr sz="1100" b="0" i="0">
                 <a:solidFill>
-                  <a:srgbClr val="F5F5F5"/>
+                  <a:srgbClr val="1F1B16"/>
                 </a:solidFill>
                 <a:latin typeface="Inter"/>
               </a:rPr>
@@ -23593,7 +23593,7 @@
             <a:r>
               <a:rPr sz="1100" b="0" i="0">
                 <a:solidFill>
-                  <a:srgbClr val="F5F5F5"/>
+                  <a:srgbClr val="1F1B16"/>
                 </a:solidFill>
                 <a:latin typeface="Inter"/>
               </a:rPr>
@@ -23609,7 +23609,7 @@
             <a:r>
               <a:rPr sz="1100" b="0" i="0">
                 <a:solidFill>
-                  <a:srgbClr val="F5F5F5"/>
+                  <a:srgbClr val="1F1B16"/>
                 </a:solidFill>
                 <a:latin typeface="Inter"/>
               </a:rPr>
@@ -23633,7 +23633,7 @@
             <a:avLst/>
           </a:prstGeom>
           <a:solidFill>
-            <a:srgbClr val="141414"/>
+            <a:srgbClr val="E5DDCE"/>
           </a:solidFill>
           <a:ln>
             <a:noFill/>
@@ -23677,7 +23677,7 @@
             <a:avLst/>
           </a:prstGeom>
           <a:solidFill>
-            <a:srgbClr val="2A2A2A"/>
+            <a:srgbClr val="C8BDA8"/>
           </a:solidFill>
           <a:ln>
             <a:noFill/>
@@ -23736,7 +23736,7 @@
             <a:r>
               <a:rPr sz="1000" b="1" i="0" spc="300">
                 <a:solidFill>
-                  <a:srgbClr val="6B6B6B"/>
+                  <a:srgbClr val="8E867B"/>
                 </a:solidFill>
                 <a:latin typeface="Inter"/>
               </a:rPr>
@@ -23775,7 +23775,7 @@
             <a:r>
               <a:rPr sz="1100" b="0" i="0">
                 <a:solidFill>
-                  <a:srgbClr val="F5F5F5"/>
+                  <a:srgbClr val="1F1B16"/>
                 </a:solidFill>
                 <a:latin typeface="Inter"/>
               </a:rPr>
@@ -23791,7 +23791,7 @@
             <a:r>
               <a:rPr sz="1100" b="0" i="0">
                 <a:solidFill>
-                  <a:srgbClr val="F5F5F5"/>
+                  <a:srgbClr val="1F1B16"/>
                 </a:solidFill>
                 <a:latin typeface="Inter"/>
               </a:rPr>
@@ -23807,7 +23807,7 @@
             <a:r>
               <a:rPr sz="1100" b="0" i="0">
                 <a:solidFill>
-                  <a:srgbClr val="F5F5F5"/>
+                  <a:srgbClr val="1F1B16"/>
                 </a:solidFill>
                 <a:latin typeface="Inter"/>
               </a:rPr>
@@ -23823,7 +23823,7 @@
             <a:r>
               <a:rPr sz="1100" b="0" i="0">
                 <a:solidFill>
-                  <a:srgbClr val="F5F5F5"/>
+                  <a:srgbClr val="1F1B16"/>
                 </a:solidFill>
                 <a:latin typeface="Inter"/>
               </a:rPr>
@@ -23839,7 +23839,7 @@
             <a:r>
               <a:rPr sz="1100" b="0" i="0">
                 <a:solidFill>
-                  <a:srgbClr val="F5F5F5"/>
+                  <a:srgbClr val="1F1B16"/>
                 </a:solidFill>
                 <a:latin typeface="Inter"/>
               </a:rPr>
@@ -23855,7 +23855,7 @@
             <a:r>
               <a:rPr sz="1100" b="0" i="0">
                 <a:solidFill>
-                  <a:srgbClr val="F5F5F5"/>
+                  <a:srgbClr val="1F1B16"/>
                 </a:solidFill>
                 <a:latin typeface="Inter"/>
               </a:rPr>
@@ -23879,7 +23879,7 @@
             <a:avLst/>
           </a:prstGeom>
           <a:solidFill>
-            <a:srgbClr val="141414"/>
+            <a:srgbClr val="E5DDCE"/>
           </a:solidFill>
           <a:ln>
             <a:noFill/>
@@ -23923,7 +23923,7 @@
             <a:avLst/>
           </a:prstGeom>
           <a:solidFill>
-            <a:srgbClr val="2A2A2A"/>
+            <a:srgbClr val="C8BDA8"/>
           </a:solidFill>
           <a:ln>
             <a:noFill/>
@@ -23982,7 +23982,7 @@
             <a:r>
               <a:rPr sz="1000" b="1" i="0" spc="300">
                 <a:solidFill>
-                  <a:srgbClr val="6B6B6B"/>
+                  <a:srgbClr val="8E867B"/>
                 </a:solidFill>
                 <a:latin typeface="Inter"/>
               </a:rPr>
@@ -24021,7 +24021,7 @@
             <a:r>
               <a:rPr sz="1100" b="0" i="0">
                 <a:solidFill>
-                  <a:srgbClr val="F5F5F5"/>
+                  <a:srgbClr val="1F1B16"/>
                 </a:solidFill>
                 <a:latin typeface="Inter"/>
               </a:rPr>
@@ -24037,7 +24037,7 @@
             <a:r>
               <a:rPr sz="1100" b="0" i="0">
                 <a:solidFill>
-                  <a:srgbClr val="F5F5F5"/>
+                  <a:srgbClr val="1F1B16"/>
                 </a:solidFill>
                 <a:latin typeface="Inter"/>
               </a:rPr>
@@ -24053,7 +24053,7 @@
             <a:r>
               <a:rPr sz="1100" b="0" i="0">
                 <a:solidFill>
-                  <a:srgbClr val="F5F5F5"/>
+                  <a:srgbClr val="1F1B16"/>
                 </a:solidFill>
                 <a:latin typeface="Inter"/>
               </a:rPr>
@@ -24069,7 +24069,7 @@
             <a:r>
               <a:rPr sz="1100" b="0" i="0">
                 <a:solidFill>
-                  <a:srgbClr val="F5F5F5"/>
+                  <a:srgbClr val="1F1B16"/>
                 </a:solidFill>
                 <a:latin typeface="Inter"/>
               </a:rPr>
@@ -24085,7 +24085,7 @@
             <a:r>
               <a:rPr sz="1100" b="0" i="0">
                 <a:solidFill>
-                  <a:srgbClr val="F5F5F5"/>
+                  <a:srgbClr val="1F1B16"/>
                 </a:solidFill>
                 <a:latin typeface="Inter"/>
               </a:rPr>
@@ -24101,7 +24101,7 @@
             <a:r>
               <a:rPr sz="1100" b="0" i="0">
                 <a:solidFill>
-                  <a:srgbClr val="F5F5F5"/>
+                  <a:srgbClr val="1F1B16"/>
                 </a:solidFill>
                 <a:latin typeface="Inter"/>
               </a:rPr>
@@ -24143,7 +24143,7 @@
             <a:avLst/>
           </a:prstGeom>
           <a:solidFill>
-            <a:srgbClr val="0A0A0A"/>
+            <a:srgbClr val="F0EAE0"/>
           </a:solidFill>
           <a:ln>
             <a:noFill/>
@@ -24202,7 +24202,7 @@
             <a:r>
               <a:rPr sz="1100" b="1" i="0" spc="20">
                 <a:solidFill>
-                  <a:srgbClr val="F5F5F5"/>
+                  <a:srgbClr val="1F1B16"/>
                 </a:solidFill>
                 <a:latin typeface="Inter"/>
               </a:rPr>
@@ -24241,7 +24241,7 @@
             <a:r>
               <a:rPr sz="900" b="0" i="0" spc="200">
                 <a:solidFill>
-                  <a:srgbClr val="6B6B6B"/>
+                  <a:srgbClr val="8E867B"/>
                 </a:solidFill>
                 <a:latin typeface="Inter"/>
               </a:rPr>
@@ -24280,7 +24280,7 @@
             <a:r>
               <a:rPr sz="900" b="0" i="0" spc="80">
                 <a:solidFill>
-                  <a:srgbClr val="6B6B6B"/>
+                  <a:srgbClr val="8E867B"/>
                 </a:solidFill>
                 <a:latin typeface="Inter"/>
               </a:rPr>
@@ -24319,7 +24319,7 @@
             <a:r>
               <a:rPr sz="900" b="0" i="0" spc="50">
                 <a:solidFill>
-                  <a:srgbClr val="6B6B6B"/>
+                  <a:srgbClr val="8E867B"/>
                 </a:solidFill>
                 <a:latin typeface="JetBrains Mono"/>
               </a:rPr>
@@ -24343,7 +24343,7 @@
             <a:avLst/>
           </a:prstGeom>
           <a:solidFill>
-            <a:srgbClr val="2A2A2A"/>
+            <a:srgbClr val="C8BDA8"/>
           </a:solidFill>
           <a:ln>
             <a:noFill/>
@@ -24402,7 +24402,7 @@
             <a:r>
               <a:rPr sz="1000" b="0" i="0" spc="300">
                 <a:solidFill>
-                  <a:srgbClr val="6B6B6B"/>
+                  <a:srgbClr val="8E867B"/>
                 </a:solidFill>
                 <a:latin typeface="Inter"/>
               </a:rPr>
@@ -24441,7 +24441,7 @@
             <a:r>
               <a:rPr sz="3400" b="1" i="0">
                 <a:solidFill>
-                  <a:srgbClr val="F5F5F5"/>
+                  <a:srgbClr val="1F1B16"/>
                 </a:solidFill>
                 <a:latin typeface="Inter"/>
               </a:rPr>
@@ -24480,7 +24480,7 @@
             <a:r>
               <a:rPr sz="1400" b="0" i="0">
                 <a:solidFill>
-                  <a:srgbClr val="A0A0A0"/>
+                  <a:srgbClr val="5C544A"/>
                 </a:solidFill>
                 <a:latin typeface="Inter"/>
               </a:rPr>
@@ -24519,7 +24519,7 @@
             <a:r>
               <a:rPr sz="1400" b="0" i="0">
                 <a:solidFill>
-                  <a:srgbClr val="6B6B6B"/>
+                  <a:srgbClr val="8E867B"/>
                 </a:solidFill>
                 <a:latin typeface="JetBrains Mono"/>
               </a:rPr>
@@ -24558,7 +24558,7 @@
             <a:r>
               <a:rPr sz="1200" b="1" i="0">
                 <a:solidFill>
-                  <a:srgbClr val="F5F5F5"/>
+                  <a:srgbClr val="1F1B16"/>
                 </a:solidFill>
                 <a:latin typeface="Inter"/>
               </a:rPr>
@@ -24597,7 +24597,7 @@
             <a:r>
               <a:rPr sz="1050" b="0" i="0">
                 <a:solidFill>
-                  <a:srgbClr val="A0A0A0"/>
+                  <a:srgbClr val="5C544A"/>
                 </a:solidFill>
                 <a:latin typeface="Inter"/>
               </a:rPr>
@@ -24636,7 +24636,7 @@
             <a:r>
               <a:rPr sz="1050" b="0" i="1">
                 <a:solidFill>
-                  <a:srgbClr val="E5E5E5"/>
+                  <a:srgbClr val="3A332C"/>
                 </a:solidFill>
                 <a:latin typeface="Inter"/>
               </a:rPr>
@@ -24660,7 +24660,7 @@
             <a:avLst/>
           </a:prstGeom>
           <a:solidFill>
-            <a:srgbClr val="2A2A2A"/>
+            <a:srgbClr val="C8BDA8"/>
           </a:solidFill>
           <a:ln>
             <a:noFill/>
@@ -24719,7 +24719,7 @@
             <a:r>
               <a:rPr sz="1400" b="0" i="0">
                 <a:solidFill>
-                  <a:srgbClr val="6B6B6B"/>
+                  <a:srgbClr val="8E867B"/>
                 </a:solidFill>
                 <a:latin typeface="JetBrains Mono"/>
               </a:rPr>
@@ -24758,7 +24758,7 @@
             <a:r>
               <a:rPr sz="1200" b="1" i="0">
                 <a:solidFill>
-                  <a:srgbClr val="F5F5F5"/>
+                  <a:srgbClr val="1F1B16"/>
                 </a:solidFill>
                 <a:latin typeface="Inter"/>
               </a:rPr>
@@ -24797,7 +24797,7 @@
             <a:r>
               <a:rPr sz="1050" b="0" i="0">
                 <a:solidFill>
-                  <a:srgbClr val="A0A0A0"/>
+                  <a:srgbClr val="5C544A"/>
                 </a:solidFill>
                 <a:latin typeface="Inter"/>
               </a:rPr>
@@ -24836,7 +24836,7 @@
             <a:r>
               <a:rPr sz="1050" b="0" i="1">
                 <a:solidFill>
-                  <a:srgbClr val="E5E5E5"/>
+                  <a:srgbClr val="3A332C"/>
                 </a:solidFill>
                 <a:latin typeface="Inter"/>
               </a:rPr>
@@ -24860,7 +24860,7 @@
             <a:avLst/>
           </a:prstGeom>
           <a:solidFill>
-            <a:srgbClr val="2A2A2A"/>
+            <a:srgbClr val="C8BDA8"/>
           </a:solidFill>
           <a:ln>
             <a:noFill/>
@@ -24919,7 +24919,7 @@
             <a:r>
               <a:rPr sz="1400" b="0" i="0">
                 <a:solidFill>
-                  <a:srgbClr val="6B6B6B"/>
+                  <a:srgbClr val="8E867B"/>
                 </a:solidFill>
                 <a:latin typeface="JetBrains Mono"/>
               </a:rPr>
@@ -24958,7 +24958,7 @@
             <a:r>
               <a:rPr sz="1200" b="1" i="0">
                 <a:solidFill>
-                  <a:srgbClr val="F5F5F5"/>
+                  <a:srgbClr val="1F1B16"/>
                 </a:solidFill>
                 <a:latin typeface="Inter"/>
               </a:rPr>
@@ -24997,7 +24997,7 @@
             <a:r>
               <a:rPr sz="1050" b="0" i="0">
                 <a:solidFill>
-                  <a:srgbClr val="A0A0A0"/>
+                  <a:srgbClr val="5C544A"/>
                 </a:solidFill>
                 <a:latin typeface="Inter"/>
               </a:rPr>
@@ -25036,7 +25036,7 @@
             <a:r>
               <a:rPr sz="1050" b="0" i="1">
                 <a:solidFill>
-                  <a:srgbClr val="E5E5E5"/>
+                  <a:srgbClr val="3A332C"/>
                 </a:solidFill>
                 <a:latin typeface="Inter"/>
               </a:rPr>
@@ -25060,7 +25060,7 @@
             <a:avLst/>
           </a:prstGeom>
           <a:solidFill>
-            <a:srgbClr val="2A2A2A"/>
+            <a:srgbClr val="C8BDA8"/>
           </a:solidFill>
           <a:ln>
             <a:noFill/>
@@ -25119,7 +25119,7 @@
             <a:r>
               <a:rPr sz="1400" b="0" i="0">
                 <a:solidFill>
-                  <a:srgbClr val="6B6B6B"/>
+                  <a:srgbClr val="8E867B"/>
                 </a:solidFill>
                 <a:latin typeface="JetBrains Mono"/>
               </a:rPr>
@@ -25158,7 +25158,7 @@
             <a:r>
               <a:rPr sz="1200" b="1" i="0">
                 <a:solidFill>
-                  <a:srgbClr val="F5F5F5"/>
+                  <a:srgbClr val="1F1B16"/>
                 </a:solidFill>
                 <a:latin typeface="Inter"/>
               </a:rPr>
@@ -25197,7 +25197,7 @@
             <a:r>
               <a:rPr sz="1050" b="0" i="0">
                 <a:solidFill>
-                  <a:srgbClr val="A0A0A0"/>
+                  <a:srgbClr val="5C544A"/>
                 </a:solidFill>
                 <a:latin typeface="Inter"/>
               </a:rPr>
@@ -25236,7 +25236,7 @@
             <a:r>
               <a:rPr sz="1050" b="0" i="1">
                 <a:solidFill>
-                  <a:srgbClr val="E5E5E5"/>
+                  <a:srgbClr val="3A332C"/>
                 </a:solidFill>
                 <a:latin typeface="Inter"/>
               </a:rPr>
@@ -25260,7 +25260,7 @@
             <a:avLst/>
           </a:prstGeom>
           <a:solidFill>
-            <a:srgbClr val="2A2A2A"/>
+            <a:srgbClr val="C8BDA8"/>
           </a:solidFill>
           <a:ln>
             <a:noFill/>
@@ -25319,7 +25319,7 @@
             <a:r>
               <a:rPr sz="1400" b="0" i="0">
                 <a:solidFill>
-                  <a:srgbClr val="6B6B6B"/>
+                  <a:srgbClr val="8E867B"/>
                 </a:solidFill>
                 <a:latin typeface="JetBrains Mono"/>
               </a:rPr>
@@ -25358,7 +25358,7 @@
             <a:r>
               <a:rPr sz="1200" b="1" i="0">
                 <a:solidFill>
-                  <a:srgbClr val="F5F5F5"/>
+                  <a:srgbClr val="1F1B16"/>
                 </a:solidFill>
                 <a:latin typeface="Inter"/>
               </a:rPr>
@@ -25397,7 +25397,7 @@
             <a:r>
               <a:rPr sz="1050" b="0" i="0">
                 <a:solidFill>
-                  <a:srgbClr val="A0A0A0"/>
+                  <a:srgbClr val="5C544A"/>
                 </a:solidFill>
                 <a:latin typeface="Inter"/>
               </a:rPr>
@@ -25436,7 +25436,7 @@
             <a:r>
               <a:rPr sz="1050" b="0" i="1">
                 <a:solidFill>
-                  <a:srgbClr val="E5E5E5"/>
+                  <a:srgbClr val="3A332C"/>
                 </a:solidFill>
                 <a:latin typeface="Inter"/>
               </a:rPr>
@@ -25460,7 +25460,7 @@
             <a:avLst/>
           </a:prstGeom>
           <a:solidFill>
-            <a:srgbClr val="2A2A2A"/>
+            <a:srgbClr val="C8BDA8"/>
           </a:solidFill>
           <a:ln>
             <a:noFill/>
@@ -25522,7 +25522,7 @@
             <a:avLst/>
           </a:prstGeom>
           <a:solidFill>
-            <a:srgbClr val="0A0A0A"/>
+            <a:srgbClr val="F0EAE0"/>
           </a:solidFill>
           <a:ln>
             <a:noFill/>
@@ -25581,7 +25581,7 @@
             <a:r>
               <a:rPr sz="1100" b="1" i="0" spc="20">
                 <a:solidFill>
-                  <a:srgbClr val="F5F5F5"/>
+                  <a:srgbClr val="1F1B16"/>
                 </a:solidFill>
                 <a:latin typeface="Inter"/>
               </a:rPr>
@@ -25620,7 +25620,7 @@
             <a:r>
               <a:rPr sz="900" b="0" i="0" spc="200">
                 <a:solidFill>
-                  <a:srgbClr val="6B6B6B"/>
+                  <a:srgbClr val="8E867B"/>
                 </a:solidFill>
                 <a:latin typeface="Inter"/>
               </a:rPr>
@@ -25659,7 +25659,7 @@
             <a:r>
               <a:rPr sz="900" b="0" i="0" spc="80">
                 <a:solidFill>
-                  <a:srgbClr val="6B6B6B"/>
+                  <a:srgbClr val="8E867B"/>
                 </a:solidFill>
                 <a:latin typeface="Inter"/>
               </a:rPr>
@@ -25698,7 +25698,7 @@
             <a:r>
               <a:rPr sz="900" b="0" i="0" spc="50">
                 <a:solidFill>
-                  <a:srgbClr val="6B6B6B"/>
+                  <a:srgbClr val="8E867B"/>
                 </a:solidFill>
                 <a:latin typeface="JetBrains Mono"/>
               </a:rPr>
@@ -25722,7 +25722,7 @@
             <a:avLst/>
           </a:prstGeom>
           <a:solidFill>
-            <a:srgbClr val="2A2A2A"/>
+            <a:srgbClr val="C8BDA8"/>
           </a:solidFill>
           <a:ln>
             <a:noFill/>
@@ -25781,7 +25781,7 @@
             <a:r>
               <a:rPr sz="1000" b="0" i="0" spc="300">
                 <a:solidFill>
-                  <a:srgbClr val="6B6B6B"/>
+                  <a:srgbClr val="8E867B"/>
                 </a:solidFill>
                 <a:latin typeface="Inter"/>
               </a:rPr>
@@ -25820,7 +25820,7 @@
             <a:r>
               <a:rPr sz="3400" b="1" i="0">
                 <a:solidFill>
-                  <a:srgbClr val="F5F5F5"/>
+                  <a:srgbClr val="1F1B16"/>
                 </a:solidFill>
                 <a:latin typeface="Inter"/>
               </a:rPr>
@@ -25859,7 +25859,7 @@
             <a:r>
               <a:rPr sz="1400" b="0" i="0">
                 <a:solidFill>
-                  <a:srgbClr val="A0A0A0"/>
+                  <a:srgbClr val="5C544A"/>
                 </a:solidFill>
                 <a:latin typeface="Inter"/>
               </a:rPr>
@@ -25883,7 +25883,7 @@
             <a:avLst/>
           </a:prstGeom>
           <a:solidFill>
-            <a:srgbClr val="141414"/>
+            <a:srgbClr val="E5DDCE"/>
           </a:solidFill>
           <a:ln>
             <a:noFill/>
@@ -25927,7 +25927,7 @@
             <a:avLst/>
           </a:prstGeom>
           <a:solidFill>
-            <a:srgbClr val="2A2A2A"/>
+            <a:srgbClr val="C8BDA8"/>
           </a:solidFill>
           <a:ln>
             <a:noFill/>
@@ -25986,7 +25986,7 @@
             <a:r>
               <a:rPr sz="1000" b="1" i="0" spc="300">
                 <a:solidFill>
-                  <a:srgbClr val="6B6B6B"/>
+                  <a:srgbClr val="8E867B"/>
                 </a:solidFill>
                 <a:latin typeface="Inter"/>
               </a:rPr>
@@ -26025,7 +26025,7 @@
             <a:r>
               <a:rPr sz="1100" b="1" i="0">
                 <a:solidFill>
-                  <a:srgbClr val="F5F5F5"/>
+                  <a:srgbClr val="1F1B16"/>
                 </a:solidFill>
                 <a:latin typeface="Inter"/>
               </a:rPr>
@@ -26064,7 +26064,7 @@
             <a:r>
               <a:rPr sz="1050" b="0" i="0">
                 <a:solidFill>
-                  <a:srgbClr val="A0A0A0"/>
+                  <a:srgbClr val="5C544A"/>
                 </a:solidFill>
                 <a:latin typeface="Inter"/>
               </a:rPr>
@@ -26103,7 +26103,7 @@
             <a:r>
               <a:rPr sz="1100" b="1" i="0">
                 <a:solidFill>
-                  <a:srgbClr val="F5F5F5"/>
+                  <a:srgbClr val="1F1B16"/>
                 </a:solidFill>
                 <a:latin typeface="Inter"/>
               </a:rPr>
@@ -26142,7 +26142,7 @@
             <a:r>
               <a:rPr sz="1050" b="0" i="0">
                 <a:solidFill>
-                  <a:srgbClr val="A0A0A0"/>
+                  <a:srgbClr val="5C544A"/>
                 </a:solidFill>
                 <a:latin typeface="Inter"/>
               </a:rPr>
@@ -26181,7 +26181,7 @@
             <a:r>
               <a:rPr sz="1100" b="1" i="0">
                 <a:solidFill>
-                  <a:srgbClr val="F5F5F5"/>
+                  <a:srgbClr val="1F1B16"/>
                 </a:solidFill>
                 <a:latin typeface="Inter"/>
               </a:rPr>
@@ -26220,7 +26220,7 @@
             <a:r>
               <a:rPr sz="1050" b="0" i="0">
                 <a:solidFill>
-                  <a:srgbClr val="A0A0A0"/>
+                  <a:srgbClr val="5C544A"/>
                 </a:solidFill>
                 <a:latin typeface="Inter"/>
               </a:rPr>
@@ -26259,7 +26259,7 @@
             <a:r>
               <a:rPr sz="1100" b="1" i="0">
                 <a:solidFill>
-                  <a:srgbClr val="F5F5F5"/>
+                  <a:srgbClr val="1F1B16"/>
                 </a:solidFill>
                 <a:latin typeface="Inter"/>
               </a:rPr>
@@ -26298,7 +26298,7 @@
             <a:r>
               <a:rPr sz="1050" b="0" i="0">
                 <a:solidFill>
-                  <a:srgbClr val="A0A0A0"/>
+                  <a:srgbClr val="5C544A"/>
                 </a:solidFill>
                 <a:latin typeface="Inter"/>
               </a:rPr>
@@ -26337,7 +26337,7 @@
             <a:r>
               <a:rPr sz="1100" b="1" i="0">
                 <a:solidFill>
-                  <a:srgbClr val="F5F5F5"/>
+                  <a:srgbClr val="1F1B16"/>
                 </a:solidFill>
                 <a:latin typeface="Inter"/>
               </a:rPr>
@@ -26376,7 +26376,7 @@
             <a:r>
               <a:rPr sz="1050" b="0" i="0">
                 <a:solidFill>
-                  <a:srgbClr val="A0A0A0"/>
+                  <a:srgbClr val="5C544A"/>
                 </a:solidFill>
                 <a:latin typeface="Inter"/>
               </a:rPr>
@@ -26400,7 +26400,7 @@
             <a:avLst/>
           </a:prstGeom>
           <a:solidFill>
-            <a:srgbClr val="141414"/>
+            <a:srgbClr val="E5DDCE"/>
           </a:solidFill>
           <a:ln>
             <a:noFill/>
@@ -26444,7 +26444,7 @@
             <a:avLst/>
           </a:prstGeom>
           <a:solidFill>
-            <a:srgbClr val="2A2A2A"/>
+            <a:srgbClr val="C8BDA8"/>
           </a:solidFill>
           <a:ln>
             <a:noFill/>
@@ -26503,7 +26503,7 @@
             <a:r>
               <a:rPr sz="1000" b="1" i="0" spc="300">
                 <a:solidFill>
-                  <a:srgbClr val="6B6B6B"/>
+                  <a:srgbClr val="8E867B"/>
                 </a:solidFill>
                 <a:latin typeface="Inter"/>
               </a:rPr>
@@ -26542,7 +26542,7 @@
             <a:r>
               <a:rPr sz="1100" b="1" i="0">
                 <a:solidFill>
-                  <a:srgbClr val="F5F5F5"/>
+                  <a:srgbClr val="1F1B16"/>
                 </a:solidFill>
                 <a:latin typeface="JetBrains Mono"/>
               </a:rPr>
@@ -26581,7 +26581,7 @@
             <a:r>
               <a:rPr sz="1050" b="0" i="0">
                 <a:solidFill>
-                  <a:srgbClr val="A0A0A0"/>
+                  <a:srgbClr val="5C544A"/>
                 </a:solidFill>
                 <a:latin typeface="Inter"/>
               </a:rPr>
@@ -26597,7 +26597,7 @@
             <a:r>
               <a:rPr sz="1050" b="0" i="0">
                 <a:solidFill>
-                  <a:srgbClr val="A0A0A0"/>
+                  <a:srgbClr val="5C544A"/>
                 </a:solidFill>
                 <a:latin typeface="Inter"/>
               </a:rPr>
@@ -26613,7 +26613,7 @@
             <a:r>
               <a:rPr sz="1050" b="0" i="0">
                 <a:solidFill>
-                  <a:srgbClr val="A0A0A0"/>
+                  <a:srgbClr val="5C544A"/>
                 </a:solidFill>
                 <a:latin typeface="Inter"/>
               </a:rPr>
@@ -26652,7 +26652,7 @@
             <a:r>
               <a:rPr sz="1100" b="1" i="0">
                 <a:solidFill>
-                  <a:srgbClr val="F5F5F5"/>
+                  <a:srgbClr val="1F1B16"/>
                 </a:solidFill>
                 <a:latin typeface="JetBrains Mono"/>
               </a:rPr>
@@ -26691,7 +26691,7 @@
             <a:r>
               <a:rPr sz="1050" b="0" i="0">
                 <a:solidFill>
-                  <a:srgbClr val="A0A0A0"/>
+                  <a:srgbClr val="5C544A"/>
                 </a:solidFill>
                 <a:latin typeface="Inter"/>
               </a:rPr>
@@ -26707,7 +26707,7 @@
             <a:r>
               <a:rPr sz="1050" b="0" i="0">
                 <a:solidFill>
-                  <a:srgbClr val="A0A0A0"/>
+                  <a:srgbClr val="5C544A"/>
                 </a:solidFill>
                 <a:latin typeface="Inter"/>
               </a:rPr>
@@ -26723,7 +26723,7 @@
             <a:r>
               <a:rPr sz="1050" b="0" i="0">
                 <a:solidFill>
-                  <a:srgbClr val="A0A0A0"/>
+                  <a:srgbClr val="5C544A"/>
                 </a:solidFill>
                 <a:latin typeface="Inter"/>
               </a:rPr>
@@ -26762,7 +26762,7 @@
             <a:r>
               <a:rPr sz="1100" b="1" i="0">
                 <a:solidFill>
-                  <a:srgbClr val="F5F5F5"/>
+                  <a:srgbClr val="1F1B16"/>
                 </a:solidFill>
                 <a:latin typeface="JetBrains Mono"/>
               </a:rPr>
@@ -26801,7 +26801,7 @@
             <a:r>
               <a:rPr sz="1050" b="0" i="0">
                 <a:solidFill>
-                  <a:srgbClr val="A0A0A0"/>
+                  <a:srgbClr val="5C544A"/>
                 </a:solidFill>
                 <a:latin typeface="Inter"/>
               </a:rPr>
@@ -26817,7 +26817,7 @@
             <a:r>
               <a:rPr sz="1050" b="0" i="0">
                 <a:solidFill>
-                  <a:srgbClr val="A0A0A0"/>
+                  <a:srgbClr val="5C544A"/>
                 </a:solidFill>
                 <a:latin typeface="Inter"/>
               </a:rPr>
@@ -26833,7 +26833,7 @@
             <a:r>
               <a:rPr sz="1050" b="0" i="0">
                 <a:solidFill>
-                  <a:srgbClr val="A0A0A0"/>
+                  <a:srgbClr val="5C544A"/>
                 </a:solidFill>
                 <a:latin typeface="Inter"/>
               </a:rPr>
@@ -26875,7 +26875,7 @@
             <a:avLst/>
           </a:prstGeom>
           <a:solidFill>
-            <a:srgbClr val="0A0A0A"/>
+            <a:srgbClr val="F0EAE0"/>
           </a:solidFill>
           <a:ln>
             <a:noFill/>
@@ -26934,7 +26934,7 @@
             <a:r>
               <a:rPr sz="1100" b="1" i="0" spc="20">
                 <a:solidFill>
-                  <a:srgbClr val="F5F5F5"/>
+                  <a:srgbClr val="1F1B16"/>
                 </a:solidFill>
                 <a:latin typeface="Inter"/>
               </a:rPr>
@@ -26973,7 +26973,7 @@
             <a:r>
               <a:rPr sz="900" b="0" i="0" spc="200">
                 <a:solidFill>
-                  <a:srgbClr val="6B6B6B"/>
+                  <a:srgbClr val="8E867B"/>
                 </a:solidFill>
                 <a:latin typeface="Inter"/>
               </a:rPr>
@@ -27012,7 +27012,7 @@
             <a:r>
               <a:rPr sz="900" b="0" i="0" spc="80">
                 <a:solidFill>
-                  <a:srgbClr val="6B6B6B"/>
+                  <a:srgbClr val="8E867B"/>
                 </a:solidFill>
                 <a:latin typeface="Inter"/>
               </a:rPr>
@@ -27051,7 +27051,7 @@
             <a:r>
               <a:rPr sz="900" b="0" i="0" spc="50">
                 <a:solidFill>
-                  <a:srgbClr val="6B6B6B"/>
+                  <a:srgbClr val="8E867B"/>
                 </a:solidFill>
                 <a:latin typeface="JetBrains Mono"/>
               </a:rPr>
@@ -27075,7 +27075,7 @@
             <a:avLst/>
           </a:prstGeom>
           <a:solidFill>
-            <a:srgbClr val="2A2A2A"/>
+            <a:srgbClr val="C8BDA8"/>
           </a:solidFill>
           <a:ln>
             <a:noFill/>
@@ -27134,7 +27134,7 @@
             <a:r>
               <a:rPr sz="1000" b="0" i="0" spc="300">
                 <a:solidFill>
-                  <a:srgbClr val="6B6B6B"/>
+                  <a:srgbClr val="8E867B"/>
                 </a:solidFill>
                 <a:latin typeface="Inter"/>
               </a:rPr>
@@ -27173,7 +27173,7 @@
             <a:r>
               <a:rPr sz="3400" b="1" i="0">
                 <a:solidFill>
-                  <a:srgbClr val="F5F5F5"/>
+                  <a:srgbClr val="1F1B16"/>
                 </a:solidFill>
                 <a:latin typeface="Inter"/>
               </a:rPr>
@@ -27212,7 +27212,7 @@
             <a:r>
               <a:rPr sz="1400" b="0" i="0">
                 <a:solidFill>
-                  <a:srgbClr val="A0A0A0"/>
+                  <a:srgbClr val="5C544A"/>
                 </a:solidFill>
                 <a:latin typeface="Inter"/>
               </a:rPr>
@@ -27236,7 +27236,7 @@
             <a:avLst/>
           </a:prstGeom>
           <a:solidFill>
-            <a:srgbClr val="141414"/>
+            <a:srgbClr val="E5DDCE"/>
           </a:solidFill>
           <a:ln>
             <a:noFill/>
@@ -27280,7 +27280,7 @@
             <a:avLst/>
           </a:prstGeom>
           <a:solidFill>
-            <a:srgbClr val="2A2A2A"/>
+            <a:srgbClr val="C8BDA8"/>
           </a:solidFill>
           <a:ln>
             <a:noFill/>
@@ -27339,7 +27339,7 @@
             <a:r>
               <a:rPr sz="1000" b="1" i="0" spc="300">
                 <a:solidFill>
-                  <a:srgbClr val="6B6B6B"/>
+                  <a:srgbClr val="8E867B"/>
                 </a:solidFill>
                 <a:latin typeface="Inter"/>
               </a:rPr>
@@ -27378,7 +27378,7 @@
             <a:r>
               <a:rPr sz="1100" b="0" i="0">
                 <a:solidFill>
-                  <a:srgbClr val="F5F5F5"/>
+                  <a:srgbClr val="1F1B16"/>
                 </a:solidFill>
                 <a:latin typeface="Inter"/>
               </a:rPr>
@@ -27394,7 +27394,7 @@
             <a:r>
               <a:rPr sz="1100" b="0" i="0">
                 <a:solidFill>
-                  <a:srgbClr val="F5F5F5"/>
+                  <a:srgbClr val="1F1B16"/>
                 </a:solidFill>
                 <a:latin typeface="Inter"/>
               </a:rPr>
@@ -27410,7 +27410,7 @@
             <a:r>
               <a:rPr sz="1100" b="0" i="0">
                 <a:solidFill>
-                  <a:srgbClr val="F5F5F5"/>
+                  <a:srgbClr val="1F1B16"/>
                 </a:solidFill>
                 <a:latin typeface="Inter"/>
               </a:rPr>
@@ -27426,7 +27426,7 @@
             <a:r>
               <a:rPr sz="1100" b="0" i="0">
                 <a:solidFill>
-                  <a:srgbClr val="F5F5F5"/>
+                  <a:srgbClr val="1F1B16"/>
                 </a:solidFill>
                 <a:latin typeface="Inter"/>
               </a:rPr>
@@ -27442,7 +27442,7 @@
             <a:r>
               <a:rPr sz="1100" b="0" i="0">
                 <a:solidFill>
-                  <a:srgbClr val="F5F5F5"/>
+                  <a:srgbClr val="1F1B16"/>
                 </a:solidFill>
                 <a:latin typeface="Inter"/>
               </a:rPr>
@@ -27458,7 +27458,7 @@
             <a:r>
               <a:rPr sz="1100" b="0" i="0">
                 <a:solidFill>
-                  <a:srgbClr val="F5F5F5"/>
+                  <a:srgbClr val="1F1B16"/>
                 </a:solidFill>
                 <a:latin typeface="Inter"/>
               </a:rPr>
@@ -27482,7 +27482,7 @@
             <a:avLst/>
           </a:prstGeom>
           <a:solidFill>
-            <a:srgbClr val="141414"/>
+            <a:srgbClr val="E5DDCE"/>
           </a:solidFill>
           <a:ln>
             <a:noFill/>
@@ -27526,7 +27526,7 @@
             <a:avLst/>
           </a:prstGeom>
           <a:solidFill>
-            <a:srgbClr val="2A2A2A"/>
+            <a:srgbClr val="C8BDA8"/>
           </a:solidFill>
           <a:ln>
             <a:noFill/>
@@ -27585,7 +27585,7 @@
             <a:r>
               <a:rPr sz="1000" b="1" i="0" spc="300">
                 <a:solidFill>
-                  <a:srgbClr val="6B6B6B"/>
+                  <a:srgbClr val="8E867B"/>
                 </a:solidFill>
                 <a:latin typeface="Inter"/>
               </a:rPr>
@@ -27624,7 +27624,7 @@
             <a:r>
               <a:rPr sz="1100" b="0" i="0">
                 <a:solidFill>
-                  <a:srgbClr val="F5F5F5"/>
+                  <a:srgbClr val="1F1B16"/>
                 </a:solidFill>
                 <a:latin typeface="Inter"/>
               </a:rPr>
@@ -27640,7 +27640,7 @@
             <a:r>
               <a:rPr sz="1100" b="0" i="0">
                 <a:solidFill>
-                  <a:srgbClr val="F5F5F5"/>
+                  <a:srgbClr val="1F1B16"/>
                 </a:solidFill>
                 <a:latin typeface="Inter"/>
               </a:rPr>
@@ -27656,7 +27656,7 @@
             <a:r>
               <a:rPr sz="1100" b="0" i="0">
                 <a:solidFill>
-                  <a:srgbClr val="F5F5F5"/>
+                  <a:srgbClr val="1F1B16"/>
                 </a:solidFill>
                 <a:latin typeface="Inter"/>
               </a:rPr>
@@ -27672,7 +27672,7 @@
             <a:r>
               <a:rPr sz="1100" b="0" i="0">
                 <a:solidFill>
-                  <a:srgbClr val="F5F5F5"/>
+                  <a:srgbClr val="1F1B16"/>
                 </a:solidFill>
                 <a:latin typeface="Inter"/>
               </a:rPr>
@@ -27696,7 +27696,7 @@
             <a:avLst/>
           </a:prstGeom>
           <a:solidFill>
-            <a:srgbClr val="141414"/>
+            <a:srgbClr val="E5DDCE"/>
           </a:solidFill>
           <a:ln>
             <a:noFill/>
@@ -27740,7 +27740,7 @@
             <a:avLst/>
           </a:prstGeom>
           <a:solidFill>
-            <a:srgbClr val="2A2A2A"/>
+            <a:srgbClr val="C8BDA8"/>
           </a:solidFill>
           <a:ln>
             <a:noFill/>
@@ -27799,7 +27799,7 @@
             <a:r>
               <a:rPr sz="1000" b="1" i="0" spc="300">
                 <a:solidFill>
-                  <a:srgbClr val="6B6B6B"/>
+                  <a:srgbClr val="8E867B"/>
                 </a:solidFill>
                 <a:latin typeface="Inter"/>
               </a:rPr>
@@ -27838,7 +27838,7 @@
             <a:r>
               <a:rPr sz="1100" b="0" i="0">
                 <a:solidFill>
-                  <a:srgbClr val="F5F5F5"/>
+                  <a:srgbClr val="1F1B16"/>
                 </a:solidFill>
                 <a:latin typeface="Inter"/>
               </a:rPr>
@@ -27854,7 +27854,7 @@
             <a:r>
               <a:rPr sz="1100" b="0" i="0">
                 <a:solidFill>
-                  <a:srgbClr val="F5F5F5"/>
+                  <a:srgbClr val="1F1B16"/>
                 </a:solidFill>
                 <a:latin typeface="Inter"/>
               </a:rPr>
@@ -27870,7 +27870,7 @@
             <a:r>
               <a:rPr sz="1100" b="0" i="0">
                 <a:solidFill>
-                  <a:srgbClr val="F5F5F5"/>
+                  <a:srgbClr val="1F1B16"/>
                 </a:solidFill>
                 <a:latin typeface="Inter"/>
               </a:rPr>
@@ -27886,7 +27886,7 @@
             <a:r>
               <a:rPr sz="1100" b="0" i="0">
                 <a:solidFill>
-                  <a:srgbClr val="F5F5F5"/>
+                  <a:srgbClr val="1F1B16"/>
                 </a:solidFill>
                 <a:latin typeface="Inter"/>
               </a:rPr>
@@ -27902,7 +27902,7 @@
             <a:r>
               <a:rPr sz="1100" b="0" i="0">
                 <a:solidFill>
-                  <a:srgbClr val="F5F5F5"/>
+                  <a:srgbClr val="1F1B16"/>
                 </a:solidFill>
                 <a:latin typeface="Inter"/>
               </a:rPr>
@@ -27926,7 +27926,7 @@
             <a:avLst/>
           </a:prstGeom>
           <a:solidFill>
-            <a:srgbClr val="141414"/>
+            <a:srgbClr val="E5DDCE"/>
           </a:solidFill>
           <a:ln>
             <a:noFill/>
@@ -27970,7 +27970,7 @@
             <a:avLst/>
           </a:prstGeom>
           <a:solidFill>
-            <a:srgbClr val="2A2A2A"/>
+            <a:srgbClr val="C8BDA8"/>
           </a:solidFill>
           <a:ln>
             <a:noFill/>
@@ -28029,7 +28029,7 @@
             <a:r>
               <a:rPr sz="1000" b="1" i="0" spc="300">
                 <a:solidFill>
-                  <a:srgbClr val="6B6B6B"/>
+                  <a:srgbClr val="8E867B"/>
                 </a:solidFill>
                 <a:latin typeface="Inter"/>
               </a:rPr>
@@ -28068,7 +28068,7 @@
             <a:r>
               <a:rPr sz="1100" b="0" i="0">
                 <a:solidFill>
-                  <a:srgbClr val="F5F5F5"/>
+                  <a:srgbClr val="1F1B16"/>
                 </a:solidFill>
                 <a:latin typeface="Inter"/>
               </a:rPr>
@@ -28084,7 +28084,7 @@
             <a:r>
               <a:rPr sz="1100" b="0" i="0">
                 <a:solidFill>
-                  <a:srgbClr val="F5F5F5"/>
+                  <a:srgbClr val="1F1B16"/>
                 </a:solidFill>
                 <a:latin typeface="Inter"/>
               </a:rPr>
@@ -28100,7 +28100,7 @@
             <a:r>
               <a:rPr sz="1100" b="0" i="0">
                 <a:solidFill>
-                  <a:srgbClr val="F5F5F5"/>
+                  <a:srgbClr val="1F1B16"/>
                 </a:solidFill>
                 <a:latin typeface="Inter"/>
               </a:rPr>
@@ -28116,7 +28116,7 @@
             <a:r>
               <a:rPr sz="1100" b="0" i="0">
                 <a:solidFill>
-                  <a:srgbClr val="F5F5F5"/>
+                  <a:srgbClr val="1F1B16"/>
                 </a:solidFill>
                 <a:latin typeface="Inter"/>
               </a:rPr>
@@ -28132,7 +28132,7 @@
             <a:r>
               <a:rPr sz="1100" b="0" i="0">
                 <a:solidFill>
-                  <a:srgbClr val="F5F5F5"/>
+                  <a:srgbClr val="1F1B16"/>
                 </a:solidFill>
                 <a:latin typeface="Inter"/>
               </a:rPr>

--- a/decks/Cursor_Enterprise_Disco_Challenge.pptx
+++ b/decks/Cursor_Enterprise_Disco_Challenge.pptx
@@ -29,6 +29,7 @@
     <p:sldId id="277" r:id="rId28"/>
     <p:sldId id="278" r:id="rId29"/>
     <p:sldId id="279" r:id="rId30"/>
+    <p:sldId id="280" r:id="rId31"/>
   </p:sldIdLst>
   <p:sldSz cx="12191695" cy="6858000" type="screen4x3"/>
   <p:notesSz cx="6858000" cy="9144000"/>
@@ -3724,7 +3725,7 @@
                 </a:solidFill>
                 <a:latin typeface="JetBrains Mono"/>
               </a:rPr>
-              <a:t>01 / 24</a:t>
+              <a:t>01 / 25</a:t>
             </a:r>
           </a:p>
         </p:txBody>
@@ -4101,7 +4102,7 @@
                 </a:solidFill>
                 <a:latin typeface="JetBrains Mono"/>
               </a:rPr>
-              <a:t>10 / 24</a:t>
+              <a:t>10 / 25</a:t>
             </a:r>
           </a:p>
         </p:txBody>
@@ -4319,7 +4320,7 @@
                 </a:solidFill>
                 <a:latin typeface="JetBrains Mono"/>
               </a:rPr>
-              <a:t>11 / 24</a:t>
+              <a:t>11 / 25</a:t>
             </a:r>
           </a:p>
         </p:txBody>
@@ -5664,7 +5665,7 @@
                 </a:solidFill>
                 <a:latin typeface="JetBrains Mono"/>
               </a:rPr>
-              <a:t>12 / 24</a:t>
+              <a:t>12 / 25</a:t>
             </a:r>
           </a:p>
         </p:txBody>
@@ -6848,7 +6849,7 @@
                 </a:solidFill>
                 <a:latin typeface="JetBrains Mono"/>
               </a:rPr>
-              <a:t>13 / 24</a:t>
+              <a:t>13 / 25</a:t>
             </a:r>
           </a:p>
         </p:txBody>
@@ -7432,7 +7433,7 @@
                 </a:solidFill>
                 <a:latin typeface="JetBrains Mono"/>
               </a:rPr>
-              <a:t>14 / 24</a:t>
+              <a:t>14 / 25</a:t>
             </a:r>
           </a:p>
         </p:txBody>
@@ -8611,7 +8612,7 @@
                 </a:solidFill>
                 <a:latin typeface="JetBrains Mono"/>
               </a:rPr>
-              <a:t>15 / 24</a:t>
+              <a:t>15 / 25</a:t>
             </a:r>
           </a:p>
         </p:txBody>
@@ -9590,7 +9591,7 @@
                 </a:solidFill>
                 <a:latin typeface="JetBrains Mono"/>
               </a:rPr>
-              <a:t>16 / 24</a:t>
+              <a:t>16 / 25</a:t>
             </a:r>
           </a:p>
         </p:txBody>
@@ -10711,7 +10712,7 @@
                 </a:solidFill>
                 <a:latin typeface="Inter"/>
               </a:rPr>
-              <a:t>PART 2  ·  SECURITY · PRIVACY MODE</a:t>
+              <a:t>PART 2  ·  VISION · TRUELL</a:t>
             </a:r>
           </a:p>
         </p:txBody>
@@ -10789,7 +10790,7 @@
                 </a:solidFill>
                 <a:latin typeface="JetBrains Mono"/>
               </a:rPr>
-              <a:t>17 / 24</a:t>
+              <a:t>17 / 25</a:t>
             </a:r>
           </a:p>
         </p:txBody>
@@ -10872,7 +10873,7 @@
                 </a:solidFill>
                 <a:latin typeface="Inter"/>
               </a:rPr>
-              <a:t>MINUTE 13 — I RAISE IT MYSELF</a:t>
+              <a:t>WHY THIS MATTERS BEYOND FEATURES</a:t>
             </a:r>
           </a:p>
         </p:txBody>
@@ -10911,7 +10912,7 @@
                 </a:solidFill>
                 <a:latin typeface="Inter"/>
               </a:rPr>
-              <a:t>The topic is already with them. We resolve it.</a:t>
+              <a:t>Michael Truell's vision for Cursor.</a:t>
             </a:r>
           </a:p>
         </p:txBody>
@@ -10950,138 +10951,81 @@
                 </a:solidFill>
                 <a:latin typeface="Inter"/>
               </a:rPr>
-              <a:t>31 Pro users in mixed Privacy Mode = real existing risk. Here's how Cursor resolves it.</a:t>
-            </a:r>
-          </a:p>
-        </p:txBody>
-      </p:sp>
-      <p:sp>
-        <p:nvSpPr>
-          <p:cNvPr id="11" name="TextBox 10"/>
-          <p:cNvSpPr txBox="1"/>
-          <p:nvPr/>
-        </p:nvSpPr>
-        <p:spPr>
-          <a:xfrm>
-            <a:off x="502920" y="3246120"/>
-            <a:ext cx="640080" cy="457200"/>
-          </a:xfrm>
-          <a:prstGeom prst="rect">
-            <a:avLst/>
-          </a:prstGeom>
-          <a:noFill/>
-        </p:spPr>
-        <p:txBody>
-          <a:bodyPr wrap="square" lIns="0" rIns="0" tIns="0" bIns="0" anchor="t">
-            <a:spAutoFit/>
-          </a:bodyPr>
-          <a:lstStyle/>
-          <a:p>
-            <a:pPr algn="l">
-              <a:lnSpc>
-                <a:spcPct val="115000"/>
-              </a:lnSpc>
-            </a:pPr>
-            <a:r>
-              <a:rPr sz="1500" b="0" i="0">
-                <a:solidFill>
-                  <a:srgbClr val="8E867B"/>
-                </a:solidFill>
-                <a:latin typeface="JetBrains Mono"/>
-              </a:rPr>
-              <a:t>01</a:t>
-            </a:r>
-          </a:p>
-        </p:txBody>
-      </p:sp>
-      <p:sp>
-        <p:nvSpPr>
-          <p:cNvPr id="12" name="TextBox 11"/>
-          <p:cNvSpPr txBox="1"/>
-          <p:nvPr/>
-        </p:nvSpPr>
-        <p:spPr>
-          <a:xfrm>
-            <a:off x="1280160" y="3246120"/>
-            <a:ext cx="3200400" cy="457200"/>
-          </a:xfrm>
-          <a:prstGeom prst="rect">
-            <a:avLst/>
-          </a:prstGeom>
-          <a:noFill/>
-        </p:spPr>
-        <p:txBody>
-          <a:bodyPr wrap="square" lIns="0" rIns="0" tIns="0" bIns="0" anchor="t">
-            <a:spAutoFit/>
-          </a:bodyPr>
-          <a:lstStyle/>
-          <a:p>
-            <a:pPr algn="l">
-              <a:lnSpc>
-                <a:spcPct val="115000"/>
-              </a:lnSpc>
-            </a:pPr>
-            <a:r>
-              <a:rPr sz="1350" b="1" i="0">
-                <a:solidFill>
-                  <a:srgbClr val="1F1B16"/>
-                </a:solidFill>
-                <a:latin typeface="Inter"/>
-              </a:rPr>
-              <a:t>Code not retained</a:t>
-            </a:r>
-          </a:p>
-        </p:txBody>
-      </p:sp>
-      <p:sp>
-        <p:nvSpPr>
-          <p:cNvPr id="13" name="TextBox 12"/>
-          <p:cNvSpPr txBox="1"/>
-          <p:nvPr/>
-        </p:nvSpPr>
-        <p:spPr>
-          <a:xfrm>
-            <a:off x="4754880" y="3246120"/>
-            <a:ext cx="6949440" cy="640080"/>
-          </a:xfrm>
-          <a:prstGeom prst="rect">
-            <a:avLst/>
-          </a:prstGeom>
-          <a:noFill/>
-        </p:spPr>
-        <p:txBody>
-          <a:bodyPr wrap="square" lIns="0" rIns="0" tIns="0" bIns="0" anchor="t">
-            <a:spAutoFit/>
-          </a:bodyPr>
-          <a:lstStyle/>
-          <a:p>
-            <a:pPr algn="l">
-              <a:lnSpc>
-                <a:spcPct val="140000"/>
-              </a:lnSpc>
-            </a:pPr>
-            <a:r>
-              <a:rPr sz="1150" b="0" i="0">
+              <a:t>Software development is shifting from typing characters to expressing intent.</a:t>
+            </a:r>
+          </a:p>
+          <a:p>
+            <a:pPr algn="l">
+              <a:lnSpc>
+                <a:spcPct val="135000"/>
+              </a:lnSpc>
+            </a:pPr>
+            <a:r>
+              <a:rPr sz="1400" b="0" i="0">
                 <a:solidFill>
                   <a:srgbClr val="5C544A"/>
                 </a:solidFill>
                 <a:latin typeface="Inter"/>
               </a:rPr>
-              <a:t>Customer code is not stored or retained — contractual, not a toggle.</a:t>
-            </a:r>
-          </a:p>
-        </p:txBody>
-      </p:sp>
-      <p:sp>
-        <p:nvSpPr>
-          <p:cNvPr id="14" name="Rectangle 13"/>
+              <a:t>The editor becomes the place where that conversation happens.</a:t>
+            </a:r>
+          </a:p>
+        </p:txBody>
+      </p:sp>
+      <p:sp>
+        <p:nvSpPr>
+          <p:cNvPr id="11" name="Rectangle 10"/>
           <p:cNvSpPr/>
           <p:nvPr/>
         </p:nvSpPr>
         <p:spPr>
           <a:xfrm>
-            <a:off x="502920" y="3840480"/>
-            <a:ext cx="11201400" cy="6350"/>
+            <a:off x="502920" y="3383280"/>
+            <a:ext cx="6949440" cy="3017520"/>
+          </a:xfrm>
+          <a:prstGeom prst="rect">
+            <a:avLst/>
+          </a:prstGeom>
+          <a:solidFill>
+            <a:srgbClr val="E5DDCE"/>
+          </a:solidFill>
+          <a:ln>
+            <a:noFill/>
+          </a:ln>
+          <a:effectLst/>
+        </p:spPr>
+        <p:style>
+          <a:lnRef idx="1">
+            <a:schemeClr val="accent1"/>
+          </a:lnRef>
+          <a:fillRef idx="3">
+            <a:schemeClr val="accent1"/>
+          </a:fillRef>
+          <a:effectRef idx="2">
+            <a:schemeClr val="accent1"/>
+          </a:effectRef>
+          <a:fontRef idx="minor">
+            <a:schemeClr val="lt1"/>
+          </a:fontRef>
+        </p:style>
+        <p:txBody>
+          <a:bodyPr rtlCol="0" anchor="ctr"/>
+          <a:lstStyle/>
+          <a:p>
+            <a:pPr algn="ctr"/>
+          </a:p>
+        </p:txBody>
+      </p:sp>
+      <p:sp>
+        <p:nvSpPr>
+          <p:cNvPr id="12" name="Rectangle 11"/>
+          <p:cNvSpPr/>
+          <p:nvPr/>
+        </p:nvSpPr>
+        <p:spPr>
+          <a:xfrm>
+            <a:off x="502920" y="3383280"/>
+            <a:ext cx="6949440" cy="6350"/>
           </a:xfrm>
           <a:prstGeom prst="rect">
             <a:avLst/>
@@ -11118,14 +11062,124 @@
       </p:sp>
       <p:sp>
         <p:nvSpPr>
+          <p:cNvPr id="13" name="TextBox 12"/>
+          <p:cNvSpPr txBox="1"/>
+          <p:nvPr/>
+        </p:nvSpPr>
+        <p:spPr>
+          <a:xfrm>
+            <a:off x="822960" y="3520440"/>
+            <a:ext cx="457200" cy="365760"/>
+          </a:xfrm>
+          <a:prstGeom prst="rect">
+            <a:avLst/>
+          </a:prstGeom>
+          <a:noFill/>
+        </p:spPr>
+        <p:txBody>
+          <a:bodyPr wrap="square" lIns="0" rIns="0" tIns="0" bIns="0" anchor="t">
+            <a:spAutoFit/>
+          </a:bodyPr>
+          <a:lstStyle/>
+          <a:p>
+            <a:pPr algn="l">
+              <a:lnSpc>
+                <a:spcPct val="115000"/>
+              </a:lnSpc>
+            </a:pPr>
+            <a:r>
+              <a:rPr sz="4400" b="0" i="0">
+                <a:solidFill>
+                  <a:srgbClr val="8E867B"/>
+                </a:solidFill>
+                <a:latin typeface="Georgia"/>
+              </a:rPr>
+              <a:t>“</a:t>
+            </a:r>
+          </a:p>
+        </p:txBody>
+      </p:sp>
+      <p:sp>
+        <p:nvSpPr>
+          <p:cNvPr id="14" name="TextBox 13"/>
+          <p:cNvSpPr txBox="1"/>
+          <p:nvPr/>
+        </p:nvSpPr>
+        <p:spPr>
+          <a:xfrm>
+            <a:off x="1234440" y="3657600"/>
+            <a:ext cx="6035040" cy="2468880"/>
+          </a:xfrm>
+          <a:prstGeom prst="rect">
+            <a:avLst/>
+          </a:prstGeom>
+          <a:noFill/>
+        </p:spPr>
+        <p:txBody>
+          <a:bodyPr wrap="square" lIns="0" rIns="0" tIns="0" bIns="0" anchor="t">
+            <a:spAutoFit/>
+          </a:bodyPr>
+          <a:lstStyle/>
+          <a:p>
+            <a:pPr algn="l">
+              <a:lnSpc>
+                <a:spcPct val="155000"/>
+              </a:lnSpc>
+            </a:pPr>
+            <a:r>
+              <a:rPr sz="1400" b="0" i="1">
+                <a:solidFill>
+                  <a:srgbClr val="1F1B16"/>
+                </a:solidFill>
+                <a:latin typeface="Inter"/>
+              </a:rPr>
+              <a:t>We're building toward a ‘human-AI programmer’ — one entity, combining engineer judgment with AI execution.</a:t>
+            </a:r>
+          </a:p>
+          <a:p>
+            <a:pPr algn="l">
+              <a:lnSpc>
+                <a:spcPct val="155000"/>
+              </a:lnSpc>
+            </a:pPr>
+            <a:r>
+              <a:rPr sz="1400" b="0" i="1">
+                <a:solidFill>
+                  <a:srgbClr val="1F1B16"/>
+                </a:solidFill>
+                <a:latin typeface="Inter"/>
+              </a:rPr>
+              <a:t/>
+            </a:r>
+          </a:p>
+          <a:p>
+            <a:pPr algn="l">
+              <a:lnSpc>
+                <a:spcPct val="155000"/>
+              </a:lnSpc>
+            </a:pPr>
+            <a:r>
+              <a:rPr sz="1400" b="0" i="1">
+                <a:solidFill>
+                  <a:srgbClr val="1F1B16"/>
+                </a:solidFill>
+                <a:latin typeface="Inter"/>
+              </a:rPr>
+              <a:t>Senior judgment gets more valuable, not less. The editor becomes the system where engineering judgment scales.</a:t>
+            </a:r>
+          </a:p>
+        </p:txBody>
+      </p:sp>
+      <p:sp>
+        <p:nvSpPr>
           <p:cNvPr id="15" name="TextBox 14"/>
           <p:cNvSpPr txBox="1"/>
           <p:nvPr/>
         </p:nvSpPr>
         <p:spPr>
           <a:xfrm>
-            <a:off x="502920" y="3867912"/>
-            <a:ext cx="640080" cy="457200"/>
+            <a:off x="1234440" y="5989320"/>
+            <a:ext cx="6035040" cy="365760"/>
           </a:xfrm>
           <a:prstGeom prst="rect">
             <a:avLst/>
@@ -11144,105 +11198,71 @@
               </a:lnSpc>
             </a:pPr>
             <a:r>
-              <a:rPr sz="1500" b="0" i="0">
+              <a:rPr sz="1050" b="0" i="0" spc="100">
                 <a:solidFill>
                   <a:srgbClr val="8E867B"/>
                 </a:solidFill>
-                <a:latin typeface="JetBrains Mono"/>
-              </a:rPr>
-              <a:t>02</a:t>
-            </a:r>
-          </a:p>
-        </p:txBody>
-      </p:sp>
-      <p:sp>
-        <p:nvSpPr>
-          <p:cNvPr id="16" name="TextBox 15"/>
-          <p:cNvSpPr txBox="1"/>
-          <p:nvPr/>
-        </p:nvSpPr>
-        <p:spPr>
-          <a:xfrm>
-            <a:off x="1280160" y="3867912"/>
-            <a:ext cx="3200400" cy="457200"/>
-          </a:xfrm>
-          <a:prstGeom prst="rect">
-            <a:avLst/>
-          </a:prstGeom>
-          <a:noFill/>
-        </p:spPr>
-        <p:txBody>
-          <a:bodyPr wrap="square" lIns="0" rIns="0" tIns="0" bIns="0" anchor="t">
-            <a:spAutoFit/>
-          </a:bodyPr>
-          <a:lstStyle/>
-          <a:p>
-            <a:pPr algn="l">
-              <a:lnSpc>
-                <a:spcPct val="115000"/>
-              </a:lnSpc>
-            </a:pPr>
-            <a:r>
-              <a:rPr sz="1350" b="1" i="0">
-                <a:solidFill>
-                  <a:srgbClr val="1F1B16"/>
-                </a:solidFill>
-                <a:latin typeface="Inter"/>
-              </a:rPr>
-              <a:t>No training</a:t>
-            </a:r>
-          </a:p>
-        </p:txBody>
-      </p:sp>
-      <p:sp>
-        <p:nvSpPr>
-          <p:cNvPr id="17" name="TextBox 16"/>
-          <p:cNvSpPr txBox="1"/>
-          <p:nvPr/>
-        </p:nvSpPr>
-        <p:spPr>
-          <a:xfrm>
-            <a:off x="4754880" y="3867912"/>
-            <a:ext cx="6949440" cy="640080"/>
-          </a:xfrm>
-          <a:prstGeom prst="rect">
-            <a:avLst/>
-          </a:prstGeom>
-          <a:noFill/>
-        </p:spPr>
-        <p:txBody>
-          <a:bodyPr wrap="square" lIns="0" rIns="0" tIns="0" bIns="0" anchor="t">
-            <a:spAutoFit/>
-          </a:bodyPr>
-          <a:lstStyle/>
-          <a:p>
-            <a:pPr algn="l">
-              <a:lnSpc>
-                <a:spcPct val="140000"/>
-              </a:lnSpc>
-            </a:pPr>
-            <a:r>
-              <a:rPr sz="1150" b="0" i="0">
-                <a:solidFill>
-                  <a:srgbClr val="5C544A"/>
-                </a:solidFill>
-                <a:latin typeface="Inter"/>
-              </a:rPr>
-              <a:t>Code is not used to train models — neither ours, nor third-party providers'.</a:t>
-            </a:r>
-          </a:p>
-        </p:txBody>
-      </p:sp>
-      <p:sp>
-        <p:nvSpPr>
-          <p:cNvPr id="18" name="Rectangle 17"/>
+                <a:latin typeface="Inter"/>
+              </a:rPr>
+              <a:t>Michael Truell  ·  CEO &amp; co-founder, Cursor</a:t>
+            </a:r>
+          </a:p>
+        </p:txBody>
+      </p:sp>
+      <p:sp>
+        <p:nvSpPr>
+          <p:cNvPr id="16" name="Rectangle 15"/>
           <p:cNvSpPr/>
           <p:nvPr/>
         </p:nvSpPr>
         <p:spPr>
           <a:xfrm>
-            <a:off x="502920" y="4462272"/>
-            <a:ext cx="11201400" cy="6350"/>
+            <a:off x="7635240" y="3383280"/>
+            <a:ext cx="4069080" cy="3017520"/>
+          </a:xfrm>
+          <a:prstGeom prst="rect">
+            <a:avLst/>
+          </a:prstGeom>
+          <a:solidFill>
+            <a:srgbClr val="DAD0BE"/>
+          </a:solidFill>
+          <a:ln>
+            <a:noFill/>
+          </a:ln>
+          <a:effectLst/>
+        </p:spPr>
+        <p:style>
+          <a:lnRef idx="1">
+            <a:schemeClr val="accent1"/>
+          </a:lnRef>
+          <a:fillRef idx="3">
+            <a:schemeClr val="accent1"/>
+          </a:fillRef>
+          <a:effectRef idx="2">
+            <a:schemeClr val="accent1"/>
+          </a:effectRef>
+          <a:fontRef idx="minor">
+            <a:schemeClr val="lt1"/>
+          </a:fontRef>
+        </p:style>
+        <p:txBody>
+          <a:bodyPr rtlCol="0" anchor="ctr"/>
+          <a:lstStyle/>
+          <a:p>
+            <a:pPr algn="ctr"/>
+          </a:p>
+        </p:txBody>
+      </p:sp>
+      <p:sp>
+        <p:nvSpPr>
+          <p:cNvPr id="17" name="Rectangle 16"/>
+          <p:cNvSpPr/>
+          <p:nvPr/>
+        </p:nvSpPr>
+        <p:spPr>
+          <a:xfrm>
+            <a:off x="7635240" y="3383280"/>
+            <a:ext cx="4069080" cy="6350"/>
           </a:xfrm>
           <a:prstGeom prst="rect">
             <a:avLst/>
@@ -11279,14 +11299,156 @@
       </p:sp>
       <p:sp>
         <p:nvSpPr>
+          <p:cNvPr id="18" name="TextBox 17"/>
+          <p:cNvSpPr txBox="1"/>
+          <p:nvPr/>
+        </p:nvSpPr>
+        <p:spPr>
+          <a:xfrm>
+            <a:off x="7909560" y="3520440"/>
+            <a:ext cx="3657600" cy="365760"/>
+          </a:xfrm>
+          <a:prstGeom prst="rect">
+            <a:avLst/>
+          </a:prstGeom>
+          <a:noFill/>
+        </p:spPr>
+        <p:txBody>
+          <a:bodyPr wrap="square" lIns="0" rIns="0" tIns="0" bIns="0" anchor="t">
+            <a:spAutoFit/>
+          </a:bodyPr>
+          <a:lstStyle/>
+          <a:p>
+            <a:pPr algn="l">
+              <a:lnSpc>
+                <a:spcPct val="115000"/>
+              </a:lnSpc>
+            </a:pPr>
+            <a:r>
+              <a:rPr sz="1000" b="1" i="0" spc="300">
+                <a:solidFill>
+                  <a:srgbClr val="8E867B"/>
+                </a:solidFill>
+                <a:latin typeface="Inter"/>
+              </a:rPr>
+              <a:t>WHAT THIS MEANS FOR FIGMA</a:t>
+            </a:r>
+          </a:p>
+        </p:txBody>
+      </p:sp>
+      <p:sp>
+        <p:nvSpPr>
           <p:cNvPr id="19" name="TextBox 18"/>
           <p:cNvSpPr txBox="1"/>
           <p:nvPr/>
         </p:nvSpPr>
         <p:spPr>
           <a:xfrm>
-            <a:off x="502920" y="4489704"/>
-            <a:ext cx="640080" cy="457200"/>
+            <a:off x="7909560" y="3886200"/>
+            <a:ext cx="3657600" cy="2468880"/>
+          </a:xfrm>
+          <a:prstGeom prst="rect">
+            <a:avLst/>
+          </a:prstGeom>
+          <a:noFill/>
+        </p:spPr>
+        <p:txBody>
+          <a:bodyPr wrap="square" lIns="0" rIns="0" tIns="0" bIns="0" anchor="t">
+            <a:spAutoFit/>
+          </a:bodyPr>
+          <a:lstStyle/>
+          <a:p>
+            <a:pPr algn="l">
+              <a:lnSpc>
+                <a:spcPct val="155000"/>
+              </a:lnSpc>
+            </a:pPr>
+            <a:r>
+              <a:rPr sz="1150" b="0" i="0">
+                <a:solidFill>
+                  <a:srgbClr val="1F1B16"/>
+                </a:solidFill>
+                <a:latin typeface="Inter"/>
+              </a:rPr>
+              <a:t>The bet isn’t ‘20% faster typing.’</a:t>
+            </a:r>
+          </a:p>
+          <a:p>
+            <a:pPr algn="l">
+              <a:lnSpc>
+                <a:spcPct val="155000"/>
+              </a:lnSpc>
+            </a:pPr>
+            <a:r>
+              <a:rPr sz="1150" b="0" i="0">
+                <a:solidFill>
+                  <a:srgbClr val="1F1B16"/>
+                </a:solidFill>
+                <a:latin typeface="Inter"/>
+              </a:rPr>
+              <a:t/>
+            </a:r>
+          </a:p>
+          <a:p>
+            <a:pPr algn="l">
+              <a:lnSpc>
+                <a:spcPct val="155000"/>
+              </a:lnSpc>
+            </a:pPr>
+            <a:r>
+              <a:rPr sz="1150" b="0" i="0">
+                <a:solidFill>
+                  <a:srgbClr val="1F1B16"/>
+                </a:solidFill>
+                <a:latin typeface="Inter"/>
+              </a:rPr>
+              <a:t>It’s that a single senior engineer’s leverage becomes 3–5× what it is today — and the orgs that get there first compound the advantage every quarter.</a:t>
+            </a:r>
+          </a:p>
+          <a:p>
+            <a:pPr algn="l">
+              <a:lnSpc>
+                <a:spcPct val="155000"/>
+              </a:lnSpc>
+            </a:pPr>
+            <a:r>
+              <a:rPr sz="1150" b="0" i="0">
+                <a:solidFill>
+                  <a:srgbClr val="1F1B16"/>
+                </a:solidFill>
+                <a:latin typeface="Inter"/>
+              </a:rPr>
+              <a:t/>
+            </a:r>
+          </a:p>
+          <a:p>
+            <a:pPr algn="l">
+              <a:lnSpc>
+                <a:spcPct val="155000"/>
+              </a:lnSpc>
+            </a:pPr>
+            <a:r>
+              <a:rPr sz="1150" b="0" i="0">
+                <a:solidFill>
+                  <a:srgbClr val="1F1B16"/>
+                </a:solidFill>
+                <a:latin typeface="Inter"/>
+              </a:rPr>
+              <a:t>For 650 engineers on a complex codebase, that’s the line the conversation should be on — not features.</a:t>
+            </a:r>
+          </a:p>
+        </p:txBody>
+      </p:sp>
+      <p:sp>
+        <p:nvSpPr>
+          <p:cNvPr id="20" name="TextBox 19"/>
+          <p:cNvSpPr txBox="1"/>
+          <p:nvPr/>
+        </p:nvSpPr>
+        <p:spPr>
+          <a:xfrm>
+            <a:off x="502920" y="6263640"/>
+            <a:ext cx="10972800" cy="274320"/>
           </a:xfrm>
           <a:prstGeom prst="rect">
             <a:avLst/>
@@ -11305,458 +11467,14 @@
               </a:lnSpc>
             </a:pPr>
             <a:r>
-              <a:rPr sz="1500" b="0" i="0">
-                <a:solidFill>
-                  <a:srgbClr val="8E867B"/>
-                </a:solidFill>
-                <a:latin typeface="JetBrains Mono"/>
-              </a:rPr>
-              <a:t>03</a:t>
-            </a:r>
-          </a:p>
-        </p:txBody>
-      </p:sp>
-      <p:sp>
-        <p:nvSpPr>
-          <p:cNvPr id="20" name="TextBox 19"/>
-          <p:cNvSpPr txBox="1"/>
-          <p:nvPr/>
-        </p:nvSpPr>
-        <p:spPr>
-          <a:xfrm>
-            <a:off x="1280160" y="4489704"/>
-            <a:ext cx="3200400" cy="457200"/>
-          </a:xfrm>
-          <a:prstGeom prst="rect">
-            <a:avLst/>
-          </a:prstGeom>
-          <a:noFill/>
-        </p:spPr>
-        <p:txBody>
-          <a:bodyPr wrap="square" lIns="0" rIns="0" tIns="0" bIns="0" anchor="t">
-            <a:spAutoFit/>
-          </a:bodyPr>
-          <a:lstStyle/>
-          <a:p>
-            <a:pPr algn="l">
-              <a:lnSpc>
-                <a:spcPct val="115000"/>
-              </a:lnSpc>
-            </a:pPr>
-            <a:r>
-              <a:rPr sz="1350" b="1" i="0">
-                <a:solidFill>
-                  <a:srgbClr val="1F1B16"/>
-                </a:solidFill>
-                <a:latin typeface="Inter"/>
-              </a:rPr>
-              <a:t>Ephemeral requests</a:t>
-            </a:r>
-          </a:p>
-        </p:txBody>
-      </p:sp>
-      <p:sp>
-        <p:nvSpPr>
-          <p:cNvPr id="21" name="TextBox 20"/>
-          <p:cNvSpPr txBox="1"/>
-          <p:nvPr/>
-        </p:nvSpPr>
-        <p:spPr>
-          <a:xfrm>
-            <a:off x="4754880" y="4489704"/>
-            <a:ext cx="6949440" cy="640080"/>
-          </a:xfrm>
-          <a:prstGeom prst="rect">
-            <a:avLst/>
-          </a:prstGeom>
-          <a:noFill/>
-        </p:spPr>
-        <p:txBody>
-          <a:bodyPr wrap="square" lIns="0" rIns="0" tIns="0" bIns="0" anchor="t">
-            <a:spAutoFit/>
-          </a:bodyPr>
-          <a:lstStyle/>
-          <a:p>
-            <a:pPr algn="l">
-              <a:lnSpc>
-                <a:spcPct val="140000"/>
-              </a:lnSpc>
-            </a:pPr>
-            <a:r>
-              <a:rPr sz="1150" b="0" i="0">
-                <a:solidFill>
-                  <a:srgbClr val="5C544A"/>
-                </a:solidFill>
-                <a:latin typeface="Inter"/>
-              </a:rPr>
-              <a:t>Requests are isolated and ephemeral — no persistent prompt logs.</a:t>
-            </a:r>
-          </a:p>
-        </p:txBody>
-      </p:sp>
-      <p:sp>
-        <p:nvSpPr>
-          <p:cNvPr id="22" name="Rectangle 21"/>
-          <p:cNvSpPr/>
-          <p:nvPr/>
-        </p:nvSpPr>
-        <p:spPr>
-          <a:xfrm>
-            <a:off x="502920" y="5084064"/>
-            <a:ext cx="11201400" cy="6350"/>
-          </a:xfrm>
-          <a:prstGeom prst="rect">
-            <a:avLst/>
-          </a:prstGeom>
-          <a:solidFill>
-            <a:srgbClr val="C8BDA8"/>
-          </a:solidFill>
-          <a:ln>
-            <a:noFill/>
-          </a:ln>
-          <a:effectLst/>
-        </p:spPr>
-        <p:style>
-          <a:lnRef idx="1">
-            <a:schemeClr val="accent1"/>
-          </a:lnRef>
-          <a:fillRef idx="3">
-            <a:schemeClr val="accent1"/>
-          </a:fillRef>
-          <a:effectRef idx="2">
-            <a:schemeClr val="accent1"/>
-          </a:effectRef>
-          <a:fontRef idx="minor">
-            <a:schemeClr val="lt1"/>
-          </a:fontRef>
-        </p:style>
-        <p:txBody>
-          <a:bodyPr rtlCol="0" anchor="ctr"/>
-          <a:lstStyle/>
-          <a:p>
-            <a:pPr algn="ctr"/>
-          </a:p>
-        </p:txBody>
-      </p:sp>
-      <p:sp>
-        <p:nvSpPr>
-          <p:cNvPr id="23" name="TextBox 22"/>
-          <p:cNvSpPr txBox="1"/>
-          <p:nvPr/>
-        </p:nvSpPr>
-        <p:spPr>
-          <a:xfrm>
-            <a:off x="502920" y="5111496"/>
-            <a:ext cx="640080" cy="457200"/>
-          </a:xfrm>
-          <a:prstGeom prst="rect">
-            <a:avLst/>
-          </a:prstGeom>
-          <a:noFill/>
-        </p:spPr>
-        <p:txBody>
-          <a:bodyPr wrap="square" lIns="0" rIns="0" tIns="0" bIns="0" anchor="t">
-            <a:spAutoFit/>
-          </a:bodyPr>
-          <a:lstStyle/>
-          <a:p>
-            <a:pPr algn="l">
-              <a:lnSpc>
-                <a:spcPct val="115000"/>
-              </a:lnSpc>
-            </a:pPr>
-            <a:r>
-              <a:rPr sz="1500" b="0" i="0">
-                <a:solidFill>
-                  <a:srgbClr val="8E867B"/>
-                </a:solidFill>
-                <a:latin typeface="JetBrains Mono"/>
-              </a:rPr>
-              <a:t>04</a:t>
-            </a:r>
-          </a:p>
-        </p:txBody>
-      </p:sp>
-      <p:sp>
-        <p:nvSpPr>
-          <p:cNvPr id="24" name="TextBox 23"/>
-          <p:cNvSpPr txBox="1"/>
-          <p:nvPr/>
-        </p:nvSpPr>
-        <p:spPr>
-          <a:xfrm>
-            <a:off x="1280160" y="5111496"/>
-            <a:ext cx="3200400" cy="457200"/>
-          </a:xfrm>
-          <a:prstGeom prst="rect">
-            <a:avLst/>
-          </a:prstGeom>
-          <a:noFill/>
-        </p:spPr>
-        <p:txBody>
-          <a:bodyPr wrap="square" lIns="0" rIns="0" tIns="0" bIns="0" anchor="t">
-            <a:spAutoFit/>
-          </a:bodyPr>
-          <a:lstStyle/>
-          <a:p>
-            <a:pPr algn="l">
-              <a:lnSpc>
-                <a:spcPct val="115000"/>
-              </a:lnSpc>
-            </a:pPr>
-            <a:r>
-              <a:rPr sz="1350" b="1" i="0">
-                <a:solidFill>
-                  <a:srgbClr val="1F1B16"/>
-                </a:solidFill>
-                <a:latin typeface="Inter"/>
-              </a:rPr>
-              <a:t>Enterprise readiness</a:t>
-            </a:r>
-          </a:p>
-        </p:txBody>
-      </p:sp>
-      <p:sp>
-        <p:nvSpPr>
-          <p:cNvPr id="25" name="TextBox 24"/>
-          <p:cNvSpPr txBox="1"/>
-          <p:nvPr/>
-        </p:nvSpPr>
-        <p:spPr>
-          <a:xfrm>
-            <a:off x="4754880" y="5111496"/>
-            <a:ext cx="6949440" cy="640080"/>
-          </a:xfrm>
-          <a:prstGeom prst="rect">
-            <a:avLst/>
-          </a:prstGeom>
-          <a:noFill/>
-        </p:spPr>
-        <p:txBody>
-          <a:bodyPr wrap="square" lIns="0" rIns="0" tIns="0" bIns="0" anchor="t">
-            <a:spAutoFit/>
-          </a:bodyPr>
-          <a:lstStyle/>
-          <a:p>
-            <a:pPr algn="l">
-              <a:lnSpc>
-                <a:spcPct val="140000"/>
-              </a:lnSpc>
-            </a:pPr>
-            <a:r>
-              <a:rPr sz="1150" b="0" i="0">
-                <a:solidFill>
-                  <a:srgbClr val="5C544A"/>
-                </a:solidFill>
-                <a:latin typeface="Inter"/>
-              </a:rPr>
-              <a:t>SOC 2 · admin controls · visibility · SSO. Security ↔ security call within 7 days.</a:t>
-            </a:r>
-          </a:p>
-        </p:txBody>
-      </p:sp>
-      <p:sp>
-        <p:nvSpPr>
-          <p:cNvPr id="26" name="Rectangle 25"/>
-          <p:cNvSpPr/>
-          <p:nvPr/>
-        </p:nvSpPr>
-        <p:spPr>
-          <a:xfrm>
-            <a:off x="502920" y="5705856"/>
-            <a:ext cx="11201400" cy="6350"/>
-          </a:xfrm>
-          <a:prstGeom prst="rect">
-            <a:avLst/>
-          </a:prstGeom>
-          <a:solidFill>
-            <a:srgbClr val="C8BDA8"/>
-          </a:solidFill>
-          <a:ln>
-            <a:noFill/>
-          </a:ln>
-          <a:effectLst/>
-        </p:spPr>
-        <p:style>
-          <a:lnRef idx="1">
-            <a:schemeClr val="accent1"/>
-          </a:lnRef>
-          <a:fillRef idx="3">
-            <a:schemeClr val="accent1"/>
-          </a:fillRef>
-          <a:effectRef idx="2">
-            <a:schemeClr val="accent1"/>
-          </a:effectRef>
-          <a:fontRef idx="minor">
-            <a:schemeClr val="lt1"/>
-          </a:fontRef>
-        </p:style>
-        <p:txBody>
-          <a:bodyPr rtlCol="0" anchor="ctr"/>
-          <a:lstStyle/>
-          <a:p>
-            <a:pPr algn="ctr"/>
-          </a:p>
-        </p:txBody>
-      </p:sp>
-      <p:sp>
-        <p:nvSpPr>
-          <p:cNvPr id="27" name="TextBox 26"/>
-          <p:cNvSpPr txBox="1"/>
-          <p:nvPr/>
-        </p:nvSpPr>
-        <p:spPr>
-          <a:xfrm>
-            <a:off x="502920" y="5733288"/>
-            <a:ext cx="640080" cy="457200"/>
-          </a:xfrm>
-          <a:prstGeom prst="rect">
-            <a:avLst/>
-          </a:prstGeom>
-          <a:noFill/>
-        </p:spPr>
-        <p:txBody>
-          <a:bodyPr wrap="square" lIns="0" rIns="0" tIns="0" bIns="0" anchor="t">
-            <a:spAutoFit/>
-          </a:bodyPr>
-          <a:lstStyle/>
-          <a:p>
-            <a:pPr algn="l">
-              <a:lnSpc>
-                <a:spcPct val="115000"/>
-              </a:lnSpc>
-            </a:pPr>
-            <a:r>
-              <a:rPr sz="1500" b="0" i="0">
-                <a:solidFill>
-                  <a:srgbClr val="8E867B"/>
-                </a:solidFill>
-                <a:latin typeface="JetBrains Mono"/>
-              </a:rPr>
-              <a:t>05</a:t>
-            </a:r>
-          </a:p>
-        </p:txBody>
-      </p:sp>
-      <p:sp>
-        <p:nvSpPr>
-          <p:cNvPr id="28" name="TextBox 27"/>
-          <p:cNvSpPr txBox="1"/>
-          <p:nvPr/>
-        </p:nvSpPr>
-        <p:spPr>
-          <a:xfrm>
-            <a:off x="1280160" y="5733288"/>
-            <a:ext cx="3200400" cy="457200"/>
-          </a:xfrm>
-          <a:prstGeom prst="rect">
-            <a:avLst/>
-          </a:prstGeom>
-          <a:noFill/>
-        </p:spPr>
-        <p:txBody>
-          <a:bodyPr wrap="square" lIns="0" rIns="0" tIns="0" bIns="0" anchor="t">
-            <a:spAutoFit/>
-          </a:bodyPr>
-          <a:lstStyle/>
-          <a:p>
-            <a:pPr algn="l">
-              <a:lnSpc>
-                <a:spcPct val="115000"/>
-              </a:lnSpc>
-            </a:pPr>
-            <a:r>
-              <a:rPr sz="1350" b="1" i="0">
-                <a:solidFill>
-                  <a:srgbClr val="1F1B16"/>
-                </a:solidFill>
-                <a:latin typeface="Inter"/>
-              </a:rPr>
-              <a:t>Shadow → sanctioned</a:t>
-            </a:r>
-          </a:p>
-        </p:txBody>
-      </p:sp>
-      <p:sp>
-        <p:nvSpPr>
-          <p:cNvPr id="29" name="TextBox 28"/>
-          <p:cNvSpPr txBox="1"/>
-          <p:nvPr/>
-        </p:nvSpPr>
-        <p:spPr>
-          <a:xfrm>
-            <a:off x="4754880" y="5733288"/>
-            <a:ext cx="6949440" cy="640080"/>
-          </a:xfrm>
-          <a:prstGeom prst="rect">
-            <a:avLst/>
-          </a:prstGeom>
-          <a:noFill/>
-        </p:spPr>
-        <p:txBody>
-          <a:bodyPr wrap="square" lIns="0" rIns="0" tIns="0" bIns="0" anchor="t">
-            <a:spAutoFit/>
-          </a:bodyPr>
-          <a:lstStyle/>
-          <a:p>
-            <a:pPr algn="l">
-              <a:lnSpc>
-                <a:spcPct val="140000"/>
-              </a:lnSpc>
-            </a:pPr>
-            <a:r>
-              <a:rPr sz="1150" b="0" i="0">
-                <a:solidFill>
-                  <a:srgbClr val="5C544A"/>
-                </a:solidFill>
-                <a:latin typeface="Inter"/>
-              </a:rPr>
-              <a:t>The 31 current Pro users can switch to mandated Privacy Mode in &lt; 1 day.</a:t>
-            </a:r>
-          </a:p>
-        </p:txBody>
-      </p:sp>
-      <p:sp>
-        <p:nvSpPr>
-          <p:cNvPr id="30" name="Rectangle 29"/>
-          <p:cNvSpPr/>
-          <p:nvPr/>
-        </p:nvSpPr>
-        <p:spPr>
-          <a:xfrm>
-            <a:off x="502920" y="6327648"/>
-            <a:ext cx="11201400" cy="6350"/>
-          </a:xfrm>
-          <a:prstGeom prst="rect">
-            <a:avLst/>
-          </a:prstGeom>
-          <a:solidFill>
-            <a:srgbClr val="C8BDA8"/>
-          </a:solidFill>
-          <a:ln>
-            <a:noFill/>
-          </a:ln>
-          <a:effectLst/>
-        </p:spPr>
-        <p:style>
-          <a:lnRef idx="1">
-            <a:schemeClr val="accent1"/>
-          </a:lnRef>
-          <a:fillRef idx="3">
-            <a:schemeClr val="accent1"/>
-          </a:fillRef>
-          <a:effectRef idx="2">
-            <a:schemeClr val="accent1"/>
-          </a:effectRef>
-          <a:fontRef idx="minor">
-            <a:schemeClr val="lt1"/>
-          </a:fontRef>
-        </p:style>
-        <p:txBody>
-          <a:bodyPr rtlCol="0" anchor="ctr"/>
-          <a:lstStyle/>
-          <a:p>
-            <a:pPr algn="ctr"/>
+              <a:rPr sz="1050" b="0" i="1" spc="20">
+                <a:solidFill>
+                  <a:srgbClr val="3A332C"/>
+                </a:solidFill>
+                <a:latin typeface="Inter"/>
+              </a:rPr>
+              <a:t>WHAT TO SAY  —  “The outcome we’re betting on isn’t faster typing. It’s that senior judgment compounds at 3–5× leverage. We want Figma on that curve, not behind it.”</a:t>
+            </a:r>
           </a:p>
         </p:txBody>
       </p:sp>
@@ -11895,7 +11613,7 @@
                 </a:solidFill>
                 <a:latin typeface="Inter"/>
               </a:rPr>
-              <a:t>PART 2  ·  DISCO · CLOSE</a:t>
+              <a:t>PART 2  ·  SECURITY · PRIVACY MODE</a:t>
             </a:r>
           </a:p>
         </p:txBody>
@@ -11973,7 +11691,7 @@
                 </a:solidFill>
                 <a:latin typeface="JetBrains Mono"/>
               </a:rPr>
-              <a:t>18 / 24</a:t>
+              <a:t>18 / 25</a:t>
             </a:r>
           </a:p>
         </p:txBody>
@@ -12056,7 +11774,7 @@
                 </a:solidFill>
                 <a:latin typeface="Inter"/>
               </a:rPr>
-              <a:t>MINUTE 17 — THE EXIT</a:t>
+              <a:t>MINUTE 13 — I RAISE IT MYSELF</a:t>
             </a:r>
           </a:p>
         </p:txBody>
@@ -12095,7 +11813,7 @@
                 </a:solidFill>
                 <a:latin typeface="Inter"/>
               </a:rPr>
-              <a:t>The exercise goal: a specific follow-up.</a:t>
+              <a:t>The topic is already with them. We resolve it.</a:t>
             </a:r>
           </a:p>
         </p:txBody>
@@ -12134,64 +11852,137 @@
                 </a:solidFill>
                 <a:latin typeface="Inter"/>
               </a:rPr>
-              <a:t>Not a pilot. Not a 'let's reconnect.' A named meeting, dated, with a purpose.</a:t>
-            </a:r>
-          </a:p>
-        </p:txBody>
-      </p:sp>
-      <p:sp>
-        <p:nvSpPr>
-          <p:cNvPr id="11" name="Rectangle 10"/>
+              <a:t>31 Pro users in mixed Privacy Mode = real existing risk. Here's how Cursor resolves it.</a:t>
+            </a:r>
+          </a:p>
+        </p:txBody>
+      </p:sp>
+      <p:sp>
+        <p:nvSpPr>
+          <p:cNvPr id="11" name="TextBox 10"/>
+          <p:cNvSpPr txBox="1"/>
+          <p:nvPr/>
+        </p:nvSpPr>
+        <p:spPr>
+          <a:xfrm>
+            <a:off x="502920" y="3246120"/>
+            <a:ext cx="640080" cy="457200"/>
+          </a:xfrm>
+          <a:prstGeom prst="rect">
+            <a:avLst/>
+          </a:prstGeom>
+          <a:noFill/>
+        </p:spPr>
+        <p:txBody>
+          <a:bodyPr wrap="square" lIns="0" rIns="0" tIns="0" bIns="0" anchor="t">
+            <a:spAutoFit/>
+          </a:bodyPr>
+          <a:lstStyle/>
+          <a:p>
+            <a:pPr algn="l">
+              <a:lnSpc>
+                <a:spcPct val="115000"/>
+              </a:lnSpc>
+            </a:pPr>
+            <a:r>
+              <a:rPr sz="1500" b="0" i="0">
+                <a:solidFill>
+                  <a:srgbClr val="8E867B"/>
+                </a:solidFill>
+                <a:latin typeface="JetBrains Mono"/>
+              </a:rPr>
+              <a:t>01</a:t>
+            </a:r>
+          </a:p>
+        </p:txBody>
+      </p:sp>
+      <p:sp>
+        <p:nvSpPr>
+          <p:cNvPr id="12" name="TextBox 11"/>
+          <p:cNvSpPr txBox="1"/>
+          <p:nvPr/>
+        </p:nvSpPr>
+        <p:spPr>
+          <a:xfrm>
+            <a:off x="1280160" y="3246120"/>
+            <a:ext cx="3200400" cy="457200"/>
+          </a:xfrm>
+          <a:prstGeom prst="rect">
+            <a:avLst/>
+          </a:prstGeom>
+          <a:noFill/>
+        </p:spPr>
+        <p:txBody>
+          <a:bodyPr wrap="square" lIns="0" rIns="0" tIns="0" bIns="0" anchor="t">
+            <a:spAutoFit/>
+          </a:bodyPr>
+          <a:lstStyle/>
+          <a:p>
+            <a:pPr algn="l">
+              <a:lnSpc>
+                <a:spcPct val="115000"/>
+              </a:lnSpc>
+            </a:pPr>
+            <a:r>
+              <a:rPr sz="1350" b="1" i="0">
+                <a:solidFill>
+                  <a:srgbClr val="1F1B16"/>
+                </a:solidFill>
+                <a:latin typeface="Inter"/>
+              </a:rPr>
+              <a:t>Code not retained</a:t>
+            </a:r>
+          </a:p>
+        </p:txBody>
+      </p:sp>
+      <p:sp>
+        <p:nvSpPr>
+          <p:cNvPr id="13" name="TextBox 12"/>
+          <p:cNvSpPr txBox="1"/>
+          <p:nvPr/>
+        </p:nvSpPr>
+        <p:spPr>
+          <a:xfrm>
+            <a:off x="4754880" y="3246120"/>
+            <a:ext cx="6949440" cy="640080"/>
+          </a:xfrm>
+          <a:prstGeom prst="rect">
+            <a:avLst/>
+          </a:prstGeom>
+          <a:noFill/>
+        </p:spPr>
+        <p:txBody>
+          <a:bodyPr wrap="square" lIns="0" rIns="0" tIns="0" bIns="0" anchor="t">
+            <a:spAutoFit/>
+          </a:bodyPr>
+          <a:lstStyle/>
+          <a:p>
+            <a:pPr algn="l">
+              <a:lnSpc>
+                <a:spcPct val="140000"/>
+              </a:lnSpc>
+            </a:pPr>
+            <a:r>
+              <a:rPr sz="1150" b="0" i="0">
+                <a:solidFill>
+                  <a:srgbClr val="5C544A"/>
+                </a:solidFill>
+                <a:latin typeface="Inter"/>
+              </a:rPr>
+              <a:t>Customer code is not stored or retained — contractual, not a toggle.</a:t>
+            </a:r>
+          </a:p>
+        </p:txBody>
+      </p:sp>
+      <p:sp>
+        <p:nvSpPr>
+          <p:cNvPr id="14" name="Rectangle 13"/>
           <p:cNvSpPr/>
           <p:nvPr/>
         </p:nvSpPr>
         <p:spPr>
           <a:xfrm>
-            <a:off x="502920" y="3246120"/>
-            <a:ext cx="11201400" cy="2377440"/>
-          </a:xfrm>
-          <a:prstGeom prst="rect">
-            <a:avLst/>
-          </a:prstGeom>
-          <a:solidFill>
-            <a:srgbClr val="E5DDCE"/>
-          </a:solidFill>
-          <a:ln>
-            <a:noFill/>
-          </a:ln>
-          <a:effectLst/>
-        </p:spPr>
-        <p:style>
-          <a:lnRef idx="1">
-            <a:schemeClr val="accent1"/>
-          </a:lnRef>
-          <a:fillRef idx="3">
-            <a:schemeClr val="accent1"/>
-          </a:fillRef>
-          <a:effectRef idx="2">
-            <a:schemeClr val="accent1"/>
-          </a:effectRef>
-          <a:fontRef idx="minor">
-            <a:schemeClr val="lt1"/>
-          </a:fontRef>
-        </p:style>
-        <p:txBody>
-          <a:bodyPr rtlCol="0" anchor="ctr"/>
-          <a:lstStyle/>
-          <a:p>
-            <a:pPr algn="ctr"/>
-          </a:p>
-        </p:txBody>
-      </p:sp>
-      <p:sp>
-        <p:nvSpPr>
-          <p:cNvPr id="12" name="Rectangle 11"/>
-          <p:cNvSpPr/>
-          <p:nvPr/>
-        </p:nvSpPr>
-        <p:spPr>
-          <a:xfrm>
-            <a:off x="502920" y="3246120"/>
+            <a:off x="502920" y="3840480"/>
             <a:ext cx="11201400" cy="6350"/>
           </a:xfrm>
           <a:prstGeom prst="rect">
@@ -12229,14 +12020,14 @@
       </p:sp>
       <p:sp>
         <p:nvSpPr>
-          <p:cNvPr id="13" name="TextBox 12"/>
-          <p:cNvSpPr txBox="1"/>
-          <p:nvPr/>
-        </p:nvSpPr>
-        <p:spPr>
-          <a:xfrm>
-            <a:off x="777240" y="3429000"/>
-            <a:ext cx="10058400" cy="365760"/>
+          <p:cNvPr id="15" name="TextBox 14"/>
+          <p:cNvSpPr txBox="1"/>
+          <p:nvPr/>
+        </p:nvSpPr>
+        <p:spPr>
+          <a:xfrm>
+            <a:off x="502920" y="3867912"/>
+            <a:ext cx="640080" cy="457200"/>
           </a:xfrm>
           <a:prstGeom prst="rect">
             <a:avLst/>
@@ -12255,121 +12046,310 @@
               </a:lnSpc>
             </a:pPr>
             <a:r>
-              <a:rPr sz="1000" b="1" i="0" spc="300">
+              <a:rPr sz="1500" b="0" i="0">
                 <a:solidFill>
                   <a:srgbClr val="8E867B"/>
                 </a:solidFill>
-                <a:latin typeface="Inter"/>
-              </a:rPr>
-              <a:t>PROPOSED FOLLOW-UP</a:t>
-            </a:r>
-          </a:p>
-        </p:txBody>
-      </p:sp>
-      <p:sp>
-        <p:nvSpPr>
-          <p:cNvPr id="14" name="TextBox 13"/>
-          <p:cNvSpPr txBox="1"/>
-          <p:nvPr/>
-        </p:nvSpPr>
-        <p:spPr>
-          <a:xfrm>
-            <a:off x="777240" y="3794760"/>
-            <a:ext cx="10515600" cy="640080"/>
-          </a:xfrm>
-          <a:prstGeom prst="rect">
-            <a:avLst/>
-          </a:prstGeom>
-          <a:noFill/>
-        </p:spPr>
-        <p:txBody>
-          <a:bodyPr wrap="square" lIns="0" rIns="0" tIns="0" bIns="0" anchor="t">
-            <a:spAutoFit/>
-          </a:bodyPr>
-          <a:lstStyle/>
-          <a:p>
-            <a:pPr algn="l">
-              <a:lnSpc>
-                <a:spcPct val="130000"/>
-              </a:lnSpc>
-            </a:pPr>
-            <a:r>
-              <a:rPr sz="1700" b="1" i="0">
+                <a:latin typeface="JetBrains Mono"/>
+              </a:rPr>
+              <a:t>02</a:t>
+            </a:r>
+          </a:p>
+        </p:txBody>
+      </p:sp>
+      <p:sp>
+        <p:nvSpPr>
+          <p:cNvPr id="16" name="TextBox 15"/>
+          <p:cNvSpPr txBox="1"/>
+          <p:nvPr/>
+        </p:nvSpPr>
+        <p:spPr>
+          <a:xfrm>
+            <a:off x="1280160" y="3867912"/>
+            <a:ext cx="3200400" cy="457200"/>
+          </a:xfrm>
+          <a:prstGeom prst="rect">
+            <a:avLst/>
+          </a:prstGeom>
+          <a:noFill/>
+        </p:spPr>
+        <p:txBody>
+          <a:bodyPr wrap="square" lIns="0" rIns="0" tIns="0" bIns="0" anchor="t">
+            <a:spAutoFit/>
+          </a:bodyPr>
+          <a:lstStyle/>
+          <a:p>
+            <a:pPr algn="l">
+              <a:lnSpc>
+                <a:spcPct val="115000"/>
+              </a:lnSpc>
+            </a:pPr>
+            <a:r>
+              <a:rPr sz="1350" b="1" i="0">
                 <a:solidFill>
                   <a:srgbClr val="1F1B16"/>
                 </a:solidFill>
                 <a:latin typeface="Inter"/>
               </a:rPr>
-              <a:t>60 minutes, within 10 days — Cursor SE + Cursor Security ↔ Figma DevEx + AppSec.</a:t>
-            </a:r>
-          </a:p>
-        </p:txBody>
-      </p:sp>
-      <p:sp>
-        <p:nvSpPr>
-          <p:cNvPr id="15" name="TextBox 14"/>
-          <p:cNvSpPr txBox="1"/>
-          <p:nvPr/>
-        </p:nvSpPr>
-        <p:spPr>
-          <a:xfrm>
-            <a:off x="777240" y="4572000"/>
-            <a:ext cx="10515600" cy="1097280"/>
-          </a:xfrm>
-          <a:prstGeom prst="rect">
-            <a:avLst/>
-          </a:prstGeom>
-          <a:noFill/>
-        </p:spPr>
-        <p:txBody>
-          <a:bodyPr wrap="square" lIns="0" rIns="0" tIns="0" bIns="0" anchor="t">
-            <a:spAutoFit/>
-          </a:bodyPr>
-          <a:lstStyle/>
-          <a:p>
-            <a:pPr algn="l">
-              <a:lnSpc>
-                <a:spcPct val="155000"/>
-              </a:lnSpc>
-            </a:pPr>
-            <a:r>
-              <a:rPr sz="1200" b="0" i="0">
+              <a:t>No training</a:t>
+            </a:r>
+          </a:p>
+        </p:txBody>
+      </p:sp>
+      <p:sp>
+        <p:nvSpPr>
+          <p:cNvPr id="17" name="TextBox 16"/>
+          <p:cNvSpPr txBox="1"/>
+          <p:nvPr/>
+        </p:nvSpPr>
+        <p:spPr>
+          <a:xfrm>
+            <a:off x="4754880" y="3867912"/>
+            <a:ext cx="6949440" cy="640080"/>
+          </a:xfrm>
+          <a:prstGeom prst="rect">
+            <a:avLst/>
+          </a:prstGeom>
+          <a:noFill/>
+        </p:spPr>
+        <p:txBody>
+          <a:bodyPr wrap="square" lIns="0" rIns="0" tIns="0" bIns="0" anchor="t">
+            <a:spAutoFit/>
+          </a:bodyPr>
+          <a:lstStyle/>
+          <a:p>
+            <a:pPr algn="l">
+              <a:lnSpc>
+                <a:spcPct val="140000"/>
+              </a:lnSpc>
+            </a:pPr>
+            <a:r>
+              <a:rPr sz="1150" b="0" i="0">
                 <a:solidFill>
                   <a:srgbClr val="5C544A"/>
                 </a:solidFill>
                 <a:latin typeface="Inter"/>
               </a:rPr>
-              <a:t>Purpose: (1) technical scoping of a 20–30-engineer POC on a named repo, pre-defined metrics,</a:t>
-            </a:r>
-          </a:p>
-          <a:p>
-            <a:pPr algn="l">
-              <a:lnSpc>
-                <a:spcPct val="155000"/>
-              </a:lnSpc>
-            </a:pPr>
-            <a:r>
-              <a:rPr sz="1200" b="0" i="0">
+              <a:t>Code is not used to train models — neither ours, nor third-party providers'.</a:t>
+            </a:r>
+          </a:p>
+        </p:txBody>
+      </p:sp>
+      <p:sp>
+        <p:nvSpPr>
+          <p:cNvPr id="18" name="Rectangle 17"/>
+          <p:cNvSpPr/>
+          <p:nvPr/>
+        </p:nvSpPr>
+        <p:spPr>
+          <a:xfrm>
+            <a:off x="502920" y="4462272"/>
+            <a:ext cx="11201400" cy="6350"/>
+          </a:xfrm>
+          <a:prstGeom prst="rect">
+            <a:avLst/>
+          </a:prstGeom>
+          <a:solidFill>
+            <a:srgbClr val="C8BDA8"/>
+          </a:solidFill>
+          <a:ln>
+            <a:noFill/>
+          </a:ln>
+          <a:effectLst/>
+        </p:spPr>
+        <p:style>
+          <a:lnRef idx="1">
+            <a:schemeClr val="accent1"/>
+          </a:lnRef>
+          <a:fillRef idx="3">
+            <a:schemeClr val="accent1"/>
+          </a:fillRef>
+          <a:effectRef idx="2">
+            <a:schemeClr val="accent1"/>
+          </a:effectRef>
+          <a:fontRef idx="minor">
+            <a:schemeClr val="lt1"/>
+          </a:fontRef>
+        </p:style>
+        <p:txBody>
+          <a:bodyPr rtlCol="0" anchor="ctr"/>
+          <a:lstStyle/>
+          <a:p>
+            <a:pPr algn="ctr"/>
+          </a:p>
+        </p:txBody>
+      </p:sp>
+      <p:sp>
+        <p:nvSpPr>
+          <p:cNvPr id="19" name="TextBox 18"/>
+          <p:cNvSpPr txBox="1"/>
+          <p:nvPr/>
+        </p:nvSpPr>
+        <p:spPr>
+          <a:xfrm>
+            <a:off x="502920" y="4489704"/>
+            <a:ext cx="640080" cy="457200"/>
+          </a:xfrm>
+          <a:prstGeom prst="rect">
+            <a:avLst/>
+          </a:prstGeom>
+          <a:noFill/>
+        </p:spPr>
+        <p:txBody>
+          <a:bodyPr wrap="square" lIns="0" rIns="0" tIns="0" bIns="0" anchor="t">
+            <a:spAutoFit/>
+          </a:bodyPr>
+          <a:lstStyle/>
+          <a:p>
+            <a:pPr algn="l">
+              <a:lnSpc>
+                <a:spcPct val="115000"/>
+              </a:lnSpc>
+            </a:pPr>
+            <a:r>
+              <a:rPr sz="1500" b="0" i="0">
+                <a:solidFill>
+                  <a:srgbClr val="8E867B"/>
+                </a:solidFill>
+                <a:latin typeface="JetBrains Mono"/>
+              </a:rPr>
+              <a:t>03</a:t>
+            </a:r>
+          </a:p>
+        </p:txBody>
+      </p:sp>
+      <p:sp>
+        <p:nvSpPr>
+          <p:cNvPr id="20" name="TextBox 19"/>
+          <p:cNvSpPr txBox="1"/>
+          <p:nvPr/>
+        </p:nvSpPr>
+        <p:spPr>
+          <a:xfrm>
+            <a:off x="1280160" y="4489704"/>
+            <a:ext cx="3200400" cy="457200"/>
+          </a:xfrm>
+          <a:prstGeom prst="rect">
+            <a:avLst/>
+          </a:prstGeom>
+          <a:noFill/>
+        </p:spPr>
+        <p:txBody>
+          <a:bodyPr wrap="square" lIns="0" rIns="0" tIns="0" bIns="0" anchor="t">
+            <a:spAutoFit/>
+          </a:bodyPr>
+          <a:lstStyle/>
+          <a:p>
+            <a:pPr algn="l">
+              <a:lnSpc>
+                <a:spcPct val="115000"/>
+              </a:lnSpc>
+            </a:pPr>
+            <a:r>
+              <a:rPr sz="1350" b="1" i="0">
+                <a:solidFill>
+                  <a:srgbClr val="1F1B16"/>
+                </a:solidFill>
+                <a:latin typeface="Inter"/>
+              </a:rPr>
+              <a:t>Ephemeral requests</a:t>
+            </a:r>
+          </a:p>
+        </p:txBody>
+      </p:sp>
+      <p:sp>
+        <p:nvSpPr>
+          <p:cNvPr id="21" name="TextBox 20"/>
+          <p:cNvSpPr txBox="1"/>
+          <p:nvPr/>
+        </p:nvSpPr>
+        <p:spPr>
+          <a:xfrm>
+            <a:off x="4754880" y="4489704"/>
+            <a:ext cx="6949440" cy="640080"/>
+          </a:xfrm>
+          <a:prstGeom prst="rect">
+            <a:avLst/>
+          </a:prstGeom>
+          <a:noFill/>
+        </p:spPr>
+        <p:txBody>
+          <a:bodyPr wrap="square" lIns="0" rIns="0" tIns="0" bIns="0" anchor="t">
+            <a:spAutoFit/>
+          </a:bodyPr>
+          <a:lstStyle/>
+          <a:p>
+            <a:pPr algn="l">
+              <a:lnSpc>
+                <a:spcPct val="140000"/>
+              </a:lnSpc>
+            </a:pPr>
+            <a:r>
+              <a:rPr sz="1150" b="0" i="0">
                 <a:solidFill>
                   <a:srgbClr val="5C544A"/>
                 </a:solidFill>
                 <a:latin typeface="Inter"/>
               </a:rPr>
-              <a:t>Privacy Mode mandated; (2) parallel security review (SIG, pentest, architecture, DPA sent D-7).</a:t>
-            </a:r>
-          </a:p>
-        </p:txBody>
-      </p:sp>
-      <p:sp>
-        <p:nvSpPr>
-          <p:cNvPr id="16" name="TextBox 15"/>
-          <p:cNvSpPr txBox="1"/>
-          <p:nvPr/>
-        </p:nvSpPr>
-        <p:spPr>
-          <a:xfrm>
-            <a:off x="502920" y="5897880"/>
-            <a:ext cx="11201400" cy="457200"/>
+              <a:t>Requests are isolated and ephemeral — no persistent prompt logs.</a:t>
+            </a:r>
+          </a:p>
+        </p:txBody>
+      </p:sp>
+      <p:sp>
+        <p:nvSpPr>
+          <p:cNvPr id="22" name="Rectangle 21"/>
+          <p:cNvSpPr/>
+          <p:nvPr/>
+        </p:nvSpPr>
+        <p:spPr>
+          <a:xfrm>
+            <a:off x="502920" y="5084064"/>
+            <a:ext cx="11201400" cy="6350"/>
+          </a:xfrm>
+          <a:prstGeom prst="rect">
+            <a:avLst/>
+          </a:prstGeom>
+          <a:solidFill>
+            <a:srgbClr val="C8BDA8"/>
+          </a:solidFill>
+          <a:ln>
+            <a:noFill/>
+          </a:ln>
+          <a:effectLst/>
+        </p:spPr>
+        <p:style>
+          <a:lnRef idx="1">
+            <a:schemeClr val="accent1"/>
+          </a:lnRef>
+          <a:fillRef idx="3">
+            <a:schemeClr val="accent1"/>
+          </a:fillRef>
+          <a:effectRef idx="2">
+            <a:schemeClr val="accent1"/>
+          </a:effectRef>
+          <a:fontRef idx="minor">
+            <a:schemeClr val="lt1"/>
+          </a:fontRef>
+        </p:style>
+        <p:txBody>
+          <a:bodyPr rtlCol="0" anchor="ctr"/>
+          <a:lstStyle/>
+          <a:p>
+            <a:pPr algn="ctr"/>
+          </a:p>
+        </p:txBody>
+      </p:sp>
+      <p:sp>
+        <p:nvSpPr>
+          <p:cNvPr id="23" name="TextBox 22"/>
+          <p:cNvSpPr txBox="1"/>
+          <p:nvPr/>
+        </p:nvSpPr>
+        <p:spPr>
+          <a:xfrm>
+            <a:off x="502920" y="5111496"/>
+            <a:ext cx="640080" cy="457200"/>
           </a:xfrm>
           <a:prstGeom prst="rect">
             <a:avLst/>
@@ -12388,27 +12368,66 @@
               </a:lnSpc>
             </a:pPr>
             <a:r>
-              <a:rPr sz="1000" b="1" i="0" spc="300">
+              <a:rPr sz="1500" b="0" i="0">
                 <a:solidFill>
                   <a:srgbClr val="8E867B"/>
                 </a:solidFill>
-                <a:latin typeface="Inter"/>
-              </a:rPr>
-              <a:t>WHAT TO SAY</a:t>
-            </a:r>
-          </a:p>
-        </p:txBody>
-      </p:sp>
-      <p:sp>
-        <p:nvSpPr>
-          <p:cNvPr id="17" name="TextBox 16"/>
-          <p:cNvSpPr txBox="1"/>
-          <p:nvPr/>
-        </p:nvSpPr>
-        <p:spPr>
-          <a:xfrm>
-            <a:off x="502920" y="6217920"/>
-            <a:ext cx="11201400" cy="365760"/>
+                <a:latin typeface="JetBrains Mono"/>
+              </a:rPr>
+              <a:t>04</a:t>
+            </a:r>
+          </a:p>
+        </p:txBody>
+      </p:sp>
+      <p:sp>
+        <p:nvSpPr>
+          <p:cNvPr id="24" name="TextBox 23"/>
+          <p:cNvSpPr txBox="1"/>
+          <p:nvPr/>
+        </p:nvSpPr>
+        <p:spPr>
+          <a:xfrm>
+            <a:off x="1280160" y="5111496"/>
+            <a:ext cx="3200400" cy="457200"/>
+          </a:xfrm>
+          <a:prstGeom prst="rect">
+            <a:avLst/>
+          </a:prstGeom>
+          <a:noFill/>
+        </p:spPr>
+        <p:txBody>
+          <a:bodyPr wrap="square" lIns="0" rIns="0" tIns="0" bIns="0" anchor="t">
+            <a:spAutoFit/>
+          </a:bodyPr>
+          <a:lstStyle/>
+          <a:p>
+            <a:pPr algn="l">
+              <a:lnSpc>
+                <a:spcPct val="115000"/>
+              </a:lnSpc>
+            </a:pPr>
+            <a:r>
+              <a:rPr sz="1350" b="1" i="0">
+                <a:solidFill>
+                  <a:srgbClr val="1F1B16"/>
+                </a:solidFill>
+                <a:latin typeface="Inter"/>
+              </a:rPr>
+              <a:t>Enterprise readiness</a:t>
+            </a:r>
+          </a:p>
+        </p:txBody>
+      </p:sp>
+      <p:sp>
+        <p:nvSpPr>
+          <p:cNvPr id="25" name="TextBox 24"/>
+          <p:cNvSpPr txBox="1"/>
+          <p:nvPr/>
+        </p:nvSpPr>
+        <p:spPr>
+          <a:xfrm>
+            <a:off x="4754880" y="5111496"/>
+            <a:ext cx="6949440" cy="640080"/>
           </a:xfrm>
           <a:prstGeom prst="rect">
             <a:avLst/>
@@ -12427,14 +12446,219 @@
               </a:lnSpc>
             </a:pPr>
             <a:r>
-              <a:rPr sz="1200" b="0" i="1">
-                <a:solidFill>
-                  <a:srgbClr val="3A332C"/>
-                </a:solidFill>
-                <a:latin typeface="Inter"/>
-              </a:rPr>
-              <a:t>"Marcel, is it worth blocking 60 minutes within 10 days — you + security + our counterparts? I'll send you a draft agenda today."</a:t>
-            </a:r>
+              <a:rPr sz="1150" b="0" i="0">
+                <a:solidFill>
+                  <a:srgbClr val="5C544A"/>
+                </a:solidFill>
+                <a:latin typeface="Inter"/>
+              </a:rPr>
+              <a:t>SOC 2 · admin controls · visibility · SSO. Security ↔ security call within 7 days.</a:t>
+            </a:r>
+          </a:p>
+        </p:txBody>
+      </p:sp>
+      <p:sp>
+        <p:nvSpPr>
+          <p:cNvPr id="26" name="Rectangle 25"/>
+          <p:cNvSpPr/>
+          <p:nvPr/>
+        </p:nvSpPr>
+        <p:spPr>
+          <a:xfrm>
+            <a:off x="502920" y="5705856"/>
+            <a:ext cx="11201400" cy="6350"/>
+          </a:xfrm>
+          <a:prstGeom prst="rect">
+            <a:avLst/>
+          </a:prstGeom>
+          <a:solidFill>
+            <a:srgbClr val="C8BDA8"/>
+          </a:solidFill>
+          <a:ln>
+            <a:noFill/>
+          </a:ln>
+          <a:effectLst/>
+        </p:spPr>
+        <p:style>
+          <a:lnRef idx="1">
+            <a:schemeClr val="accent1"/>
+          </a:lnRef>
+          <a:fillRef idx="3">
+            <a:schemeClr val="accent1"/>
+          </a:fillRef>
+          <a:effectRef idx="2">
+            <a:schemeClr val="accent1"/>
+          </a:effectRef>
+          <a:fontRef idx="minor">
+            <a:schemeClr val="lt1"/>
+          </a:fontRef>
+        </p:style>
+        <p:txBody>
+          <a:bodyPr rtlCol="0" anchor="ctr"/>
+          <a:lstStyle/>
+          <a:p>
+            <a:pPr algn="ctr"/>
+          </a:p>
+        </p:txBody>
+      </p:sp>
+      <p:sp>
+        <p:nvSpPr>
+          <p:cNvPr id="27" name="TextBox 26"/>
+          <p:cNvSpPr txBox="1"/>
+          <p:nvPr/>
+        </p:nvSpPr>
+        <p:spPr>
+          <a:xfrm>
+            <a:off x="502920" y="5733288"/>
+            <a:ext cx="640080" cy="457200"/>
+          </a:xfrm>
+          <a:prstGeom prst="rect">
+            <a:avLst/>
+          </a:prstGeom>
+          <a:noFill/>
+        </p:spPr>
+        <p:txBody>
+          <a:bodyPr wrap="square" lIns="0" rIns="0" tIns="0" bIns="0" anchor="t">
+            <a:spAutoFit/>
+          </a:bodyPr>
+          <a:lstStyle/>
+          <a:p>
+            <a:pPr algn="l">
+              <a:lnSpc>
+                <a:spcPct val="115000"/>
+              </a:lnSpc>
+            </a:pPr>
+            <a:r>
+              <a:rPr sz="1500" b="0" i="0">
+                <a:solidFill>
+                  <a:srgbClr val="8E867B"/>
+                </a:solidFill>
+                <a:latin typeface="JetBrains Mono"/>
+              </a:rPr>
+              <a:t>05</a:t>
+            </a:r>
+          </a:p>
+        </p:txBody>
+      </p:sp>
+      <p:sp>
+        <p:nvSpPr>
+          <p:cNvPr id="28" name="TextBox 27"/>
+          <p:cNvSpPr txBox="1"/>
+          <p:nvPr/>
+        </p:nvSpPr>
+        <p:spPr>
+          <a:xfrm>
+            <a:off x="1280160" y="5733288"/>
+            <a:ext cx="3200400" cy="457200"/>
+          </a:xfrm>
+          <a:prstGeom prst="rect">
+            <a:avLst/>
+          </a:prstGeom>
+          <a:noFill/>
+        </p:spPr>
+        <p:txBody>
+          <a:bodyPr wrap="square" lIns="0" rIns="0" tIns="0" bIns="0" anchor="t">
+            <a:spAutoFit/>
+          </a:bodyPr>
+          <a:lstStyle/>
+          <a:p>
+            <a:pPr algn="l">
+              <a:lnSpc>
+                <a:spcPct val="115000"/>
+              </a:lnSpc>
+            </a:pPr>
+            <a:r>
+              <a:rPr sz="1350" b="1" i="0">
+                <a:solidFill>
+                  <a:srgbClr val="1F1B16"/>
+                </a:solidFill>
+                <a:latin typeface="Inter"/>
+              </a:rPr>
+              <a:t>Shadow → sanctioned</a:t>
+            </a:r>
+          </a:p>
+        </p:txBody>
+      </p:sp>
+      <p:sp>
+        <p:nvSpPr>
+          <p:cNvPr id="29" name="TextBox 28"/>
+          <p:cNvSpPr txBox="1"/>
+          <p:nvPr/>
+        </p:nvSpPr>
+        <p:spPr>
+          <a:xfrm>
+            <a:off x="4754880" y="5733288"/>
+            <a:ext cx="6949440" cy="640080"/>
+          </a:xfrm>
+          <a:prstGeom prst="rect">
+            <a:avLst/>
+          </a:prstGeom>
+          <a:noFill/>
+        </p:spPr>
+        <p:txBody>
+          <a:bodyPr wrap="square" lIns="0" rIns="0" tIns="0" bIns="0" anchor="t">
+            <a:spAutoFit/>
+          </a:bodyPr>
+          <a:lstStyle/>
+          <a:p>
+            <a:pPr algn="l">
+              <a:lnSpc>
+                <a:spcPct val="140000"/>
+              </a:lnSpc>
+            </a:pPr>
+            <a:r>
+              <a:rPr sz="1150" b="0" i="0">
+                <a:solidFill>
+                  <a:srgbClr val="5C544A"/>
+                </a:solidFill>
+                <a:latin typeface="Inter"/>
+              </a:rPr>
+              <a:t>The 31 current Pro users can switch to mandated Privacy Mode in &lt; 1 day.</a:t>
+            </a:r>
+          </a:p>
+        </p:txBody>
+      </p:sp>
+      <p:sp>
+        <p:nvSpPr>
+          <p:cNvPr id="30" name="Rectangle 29"/>
+          <p:cNvSpPr/>
+          <p:nvPr/>
+        </p:nvSpPr>
+        <p:spPr>
+          <a:xfrm>
+            <a:off x="502920" y="6327648"/>
+            <a:ext cx="11201400" cy="6350"/>
+          </a:xfrm>
+          <a:prstGeom prst="rect">
+            <a:avLst/>
+          </a:prstGeom>
+          <a:solidFill>
+            <a:srgbClr val="C8BDA8"/>
+          </a:solidFill>
+          <a:ln>
+            <a:noFill/>
+          </a:ln>
+          <a:effectLst/>
+        </p:spPr>
+        <p:style>
+          <a:lnRef idx="1">
+            <a:schemeClr val="accent1"/>
+          </a:lnRef>
+          <a:fillRef idx="3">
+            <a:schemeClr val="accent1"/>
+          </a:fillRef>
+          <a:effectRef idx="2">
+            <a:schemeClr val="accent1"/>
+          </a:effectRef>
+          <a:fontRef idx="minor">
+            <a:schemeClr val="lt1"/>
+          </a:fontRef>
+        </p:style>
+        <p:txBody>
+          <a:bodyPr rtlCol="0" anchor="ctr"/>
+          <a:lstStyle/>
+          <a:p>
+            <a:pPr algn="ctr"/>
           </a:p>
         </p:txBody>
       </p:sp>
@@ -12502,14 +12726,331 @@
       </p:sp>
       <p:sp>
         <p:nvSpPr>
-          <p:cNvPr id="3" name="Rectangle 2"/>
+          <p:cNvPr id="3" name="TextBox 2"/>
+          <p:cNvSpPr txBox="1"/>
+          <p:nvPr/>
+        </p:nvSpPr>
+        <p:spPr>
+          <a:xfrm>
+            <a:off x="502920" y="320040"/>
+            <a:ext cx="2743200" cy="365760"/>
+          </a:xfrm>
+          <a:prstGeom prst="rect">
+            <a:avLst/>
+          </a:prstGeom>
+          <a:noFill/>
+        </p:spPr>
+        <p:txBody>
+          <a:bodyPr wrap="square" lIns="0" rIns="0" tIns="0" bIns="0" anchor="t">
+            <a:spAutoFit/>
+          </a:bodyPr>
+          <a:lstStyle/>
+          <a:p>
+            <a:pPr algn="l">
+              <a:lnSpc>
+                <a:spcPct val="115000"/>
+              </a:lnSpc>
+            </a:pPr>
+            <a:r>
+              <a:rPr sz="1100" b="1" i="0" spc="20">
+                <a:solidFill>
+                  <a:srgbClr val="1F1B16"/>
+                </a:solidFill>
+                <a:latin typeface="Inter"/>
+              </a:rPr>
+              <a:t>● cursor</a:t>
+            </a:r>
+          </a:p>
+        </p:txBody>
+      </p:sp>
+      <p:sp>
+        <p:nvSpPr>
+          <p:cNvPr id="4" name="TextBox 3"/>
+          <p:cNvSpPr txBox="1"/>
+          <p:nvPr/>
+        </p:nvSpPr>
+        <p:spPr>
+          <a:xfrm>
+            <a:off x="6400800" y="320040"/>
+            <a:ext cx="5303520" cy="365760"/>
+          </a:xfrm>
+          <a:prstGeom prst="rect">
+            <a:avLst/>
+          </a:prstGeom>
+          <a:noFill/>
+        </p:spPr>
+        <p:txBody>
+          <a:bodyPr wrap="square" lIns="0" rIns="0" tIns="0" bIns="0" anchor="t">
+            <a:spAutoFit/>
+          </a:bodyPr>
+          <a:lstStyle/>
+          <a:p>
+            <a:pPr algn="r">
+              <a:lnSpc>
+                <a:spcPct val="115000"/>
+              </a:lnSpc>
+            </a:pPr>
+            <a:r>
+              <a:rPr sz="900" b="0" i="0" spc="200">
+                <a:solidFill>
+                  <a:srgbClr val="8E867B"/>
+                </a:solidFill>
+                <a:latin typeface="Inter"/>
+              </a:rPr>
+              <a:t>PART 2  ·  DISCO · CLOSE</a:t>
+            </a:r>
+          </a:p>
+        </p:txBody>
+      </p:sp>
+      <p:sp>
+        <p:nvSpPr>
+          <p:cNvPr id="5" name="TextBox 4"/>
+          <p:cNvSpPr txBox="1"/>
+          <p:nvPr/>
+        </p:nvSpPr>
+        <p:spPr>
+          <a:xfrm>
+            <a:off x="502920" y="6446520"/>
+            <a:ext cx="5943600" cy="274320"/>
+          </a:xfrm>
+          <a:prstGeom prst="rect">
+            <a:avLst/>
+          </a:prstGeom>
+          <a:noFill/>
+        </p:spPr>
+        <p:txBody>
+          <a:bodyPr wrap="square" lIns="0" rIns="0" tIns="0" bIns="0" anchor="t">
+            <a:spAutoFit/>
+          </a:bodyPr>
+          <a:lstStyle/>
+          <a:p>
+            <a:pPr algn="l">
+              <a:lnSpc>
+                <a:spcPct val="115000"/>
+              </a:lnSpc>
+            </a:pPr>
+            <a:r>
+              <a:rPr sz="900" b="0" i="0" spc="80">
+                <a:solidFill>
+                  <a:srgbClr val="8E867B"/>
+                </a:solidFill>
+                <a:latin typeface="Inter"/>
+              </a:rPr>
+              <a:t>Cursor Enterprise — PG + Disco Challenge  ·  Prep deck</a:t>
+            </a:r>
+          </a:p>
+        </p:txBody>
+      </p:sp>
+      <p:sp>
+        <p:nvSpPr>
+          <p:cNvPr id="6" name="TextBox 5"/>
+          <p:cNvSpPr txBox="1"/>
+          <p:nvPr/>
+        </p:nvSpPr>
+        <p:spPr>
+          <a:xfrm>
+            <a:off x="10515600" y="6446520"/>
+            <a:ext cx="1188720" cy="274320"/>
+          </a:xfrm>
+          <a:prstGeom prst="rect">
+            <a:avLst/>
+          </a:prstGeom>
+          <a:noFill/>
+        </p:spPr>
+        <p:txBody>
+          <a:bodyPr wrap="square" lIns="0" rIns="0" tIns="0" bIns="0" anchor="t">
+            <a:spAutoFit/>
+          </a:bodyPr>
+          <a:lstStyle/>
+          <a:p>
+            <a:pPr algn="r">
+              <a:lnSpc>
+                <a:spcPct val="115000"/>
+              </a:lnSpc>
+            </a:pPr>
+            <a:r>
+              <a:rPr sz="900" b="0" i="0" spc="50">
+                <a:solidFill>
+                  <a:srgbClr val="8E867B"/>
+                </a:solidFill>
+                <a:latin typeface="JetBrains Mono"/>
+              </a:rPr>
+              <a:t>19 / 25</a:t>
+            </a:r>
+          </a:p>
+        </p:txBody>
+      </p:sp>
+      <p:sp>
+        <p:nvSpPr>
+          <p:cNvPr id="7" name="Rectangle 6"/>
           <p:cNvSpPr/>
           <p:nvPr/>
         </p:nvSpPr>
         <p:spPr>
           <a:xfrm>
-            <a:off x="7498079" y="0"/>
-            <a:ext cx="4690872" cy="6858000"/>
+            <a:off x="502920" y="777240"/>
+            <a:ext cx="11201400" cy="6350"/>
+          </a:xfrm>
+          <a:prstGeom prst="rect">
+            <a:avLst/>
+          </a:prstGeom>
+          <a:solidFill>
+            <a:srgbClr val="C8BDA8"/>
+          </a:solidFill>
+          <a:ln>
+            <a:noFill/>
+          </a:ln>
+          <a:effectLst/>
+        </p:spPr>
+        <p:style>
+          <a:lnRef idx="1">
+            <a:schemeClr val="accent1"/>
+          </a:lnRef>
+          <a:fillRef idx="3">
+            <a:schemeClr val="accent1"/>
+          </a:fillRef>
+          <a:effectRef idx="2">
+            <a:schemeClr val="accent1"/>
+          </a:effectRef>
+          <a:fontRef idx="minor">
+            <a:schemeClr val="lt1"/>
+          </a:fontRef>
+        </p:style>
+        <p:txBody>
+          <a:bodyPr rtlCol="0" anchor="ctr"/>
+          <a:lstStyle/>
+          <a:p>
+            <a:pPr algn="ctr"/>
+          </a:p>
+        </p:txBody>
+      </p:sp>
+      <p:sp>
+        <p:nvSpPr>
+          <p:cNvPr id="8" name="TextBox 7"/>
+          <p:cNvSpPr txBox="1"/>
+          <p:nvPr/>
+        </p:nvSpPr>
+        <p:spPr>
+          <a:xfrm>
+            <a:off x="502920" y="1143000"/>
+            <a:ext cx="9144000" cy="365760"/>
+          </a:xfrm>
+          <a:prstGeom prst="rect">
+            <a:avLst/>
+          </a:prstGeom>
+          <a:noFill/>
+        </p:spPr>
+        <p:txBody>
+          <a:bodyPr wrap="square" lIns="0" rIns="0" tIns="0" bIns="0" anchor="t">
+            <a:spAutoFit/>
+          </a:bodyPr>
+          <a:lstStyle/>
+          <a:p>
+            <a:pPr algn="l">
+              <a:lnSpc>
+                <a:spcPct val="115000"/>
+              </a:lnSpc>
+            </a:pPr>
+            <a:r>
+              <a:rPr sz="1000" b="0" i="0" spc="300">
+                <a:solidFill>
+                  <a:srgbClr val="8E867B"/>
+                </a:solidFill>
+                <a:latin typeface="Inter"/>
+              </a:rPr>
+              <a:t>MINUTE 17 — THE EXIT</a:t>
+            </a:r>
+          </a:p>
+        </p:txBody>
+      </p:sp>
+      <p:sp>
+        <p:nvSpPr>
+          <p:cNvPr id="9" name="TextBox 8"/>
+          <p:cNvSpPr txBox="1"/>
+          <p:nvPr/>
+        </p:nvSpPr>
+        <p:spPr>
+          <a:xfrm>
+            <a:off x="502920" y="1508760"/>
+            <a:ext cx="10972800" cy="1097280"/>
+          </a:xfrm>
+          <a:prstGeom prst="rect">
+            <a:avLst/>
+          </a:prstGeom>
+          <a:noFill/>
+        </p:spPr>
+        <p:txBody>
+          <a:bodyPr wrap="square" lIns="0" rIns="0" tIns="0" bIns="0" anchor="t">
+            <a:spAutoFit/>
+          </a:bodyPr>
+          <a:lstStyle/>
+          <a:p>
+            <a:pPr algn="l">
+              <a:lnSpc>
+                <a:spcPct val="105000"/>
+              </a:lnSpc>
+            </a:pPr>
+            <a:r>
+              <a:rPr sz="3400" b="1" i="0">
+                <a:solidFill>
+                  <a:srgbClr val="1F1B16"/>
+                </a:solidFill>
+                <a:latin typeface="Inter"/>
+              </a:rPr>
+              <a:t>The exercise goal: a specific follow-up.</a:t>
+            </a:r>
+          </a:p>
+        </p:txBody>
+      </p:sp>
+      <p:sp>
+        <p:nvSpPr>
+          <p:cNvPr id="10" name="TextBox 9"/>
+          <p:cNvSpPr txBox="1"/>
+          <p:nvPr/>
+        </p:nvSpPr>
+        <p:spPr>
+          <a:xfrm>
+            <a:off x="502920" y="2606040"/>
+            <a:ext cx="10972800" cy="822960"/>
+          </a:xfrm>
+          <a:prstGeom prst="rect">
+            <a:avLst/>
+          </a:prstGeom>
+          <a:noFill/>
+        </p:spPr>
+        <p:txBody>
+          <a:bodyPr wrap="square" lIns="0" rIns="0" tIns="0" bIns="0" anchor="t">
+            <a:spAutoFit/>
+          </a:bodyPr>
+          <a:lstStyle/>
+          <a:p>
+            <a:pPr algn="l">
+              <a:lnSpc>
+                <a:spcPct val="135000"/>
+              </a:lnSpc>
+            </a:pPr>
+            <a:r>
+              <a:rPr sz="1400" b="0" i="0">
+                <a:solidFill>
+                  <a:srgbClr val="5C544A"/>
+                </a:solidFill>
+                <a:latin typeface="Inter"/>
+              </a:rPr>
+              <a:t>Not a pilot. Not a 'let's reconnect.' A named meeting, dated, with a purpose.</a:t>
+            </a:r>
+          </a:p>
+        </p:txBody>
+      </p:sp>
+      <p:sp>
+        <p:nvSpPr>
+          <p:cNvPr id="11" name="Rectangle 10"/>
+          <p:cNvSpPr/>
+          <p:nvPr/>
+        </p:nvSpPr>
+        <p:spPr>
+          <a:xfrm>
+            <a:off x="502920" y="3246120"/>
+            <a:ext cx="11201400" cy="2377440"/>
           </a:xfrm>
           <a:prstGeom prst="rect">
             <a:avLst/>
@@ -12546,14 +13087,14 @@
       </p:sp>
       <p:sp>
         <p:nvSpPr>
-          <p:cNvPr id="4" name="Rectangle 3"/>
+          <p:cNvPr id="12" name="Rectangle 11"/>
           <p:cNvSpPr/>
           <p:nvPr/>
         </p:nvSpPr>
         <p:spPr>
           <a:xfrm>
-            <a:off x="7498079" y="0"/>
-            <a:ext cx="6350" cy="6858000"/>
+            <a:off x="502920" y="3246120"/>
+            <a:ext cx="11201400" cy="6350"/>
           </a:xfrm>
           <a:prstGeom prst="rect">
             <a:avLst/>
@@ -12590,14 +13131,14 @@
       </p:sp>
       <p:sp>
         <p:nvSpPr>
-          <p:cNvPr id="5" name="TextBox 4"/>
-          <p:cNvSpPr txBox="1"/>
-          <p:nvPr/>
-        </p:nvSpPr>
-        <p:spPr>
-          <a:xfrm>
-            <a:off x="502920" y="502920"/>
-            <a:ext cx="2743200" cy="365760"/>
+          <p:cNvPr id="13" name="TextBox 12"/>
+          <p:cNvSpPr txBox="1"/>
+          <p:nvPr/>
+        </p:nvSpPr>
+        <p:spPr>
+          <a:xfrm>
+            <a:off x="777240" y="3429000"/>
+            <a:ext cx="10058400" cy="365760"/>
           </a:xfrm>
           <a:prstGeom prst="rect">
             <a:avLst/>
@@ -12616,27 +13157,121 @@
               </a:lnSpc>
             </a:pPr>
             <a:r>
-              <a:rPr sz="1200" b="1" i="0" spc="20">
+              <a:rPr sz="1000" b="1" i="0" spc="300">
+                <a:solidFill>
+                  <a:srgbClr val="8E867B"/>
+                </a:solidFill>
+                <a:latin typeface="Inter"/>
+              </a:rPr>
+              <a:t>PROPOSED FOLLOW-UP</a:t>
+            </a:r>
+          </a:p>
+        </p:txBody>
+      </p:sp>
+      <p:sp>
+        <p:nvSpPr>
+          <p:cNvPr id="14" name="TextBox 13"/>
+          <p:cNvSpPr txBox="1"/>
+          <p:nvPr/>
+        </p:nvSpPr>
+        <p:spPr>
+          <a:xfrm>
+            <a:off x="777240" y="3794760"/>
+            <a:ext cx="10515600" cy="640080"/>
+          </a:xfrm>
+          <a:prstGeom prst="rect">
+            <a:avLst/>
+          </a:prstGeom>
+          <a:noFill/>
+        </p:spPr>
+        <p:txBody>
+          <a:bodyPr wrap="square" lIns="0" rIns="0" tIns="0" bIns="0" anchor="t">
+            <a:spAutoFit/>
+          </a:bodyPr>
+          <a:lstStyle/>
+          <a:p>
+            <a:pPr algn="l">
+              <a:lnSpc>
+                <a:spcPct val="130000"/>
+              </a:lnSpc>
+            </a:pPr>
+            <a:r>
+              <a:rPr sz="1700" b="1" i="0">
                 <a:solidFill>
                   <a:srgbClr val="1F1B16"/>
                 </a:solidFill>
                 <a:latin typeface="Inter"/>
               </a:rPr>
-              <a:t>● cursor</a:t>
-            </a:r>
-          </a:p>
-        </p:txBody>
-      </p:sp>
-      <p:sp>
-        <p:nvSpPr>
-          <p:cNvPr id="6" name="TextBox 5"/>
-          <p:cNvSpPr txBox="1"/>
-          <p:nvPr/>
-        </p:nvSpPr>
-        <p:spPr>
-          <a:xfrm>
-            <a:off x="502920" y="2103120"/>
-            <a:ext cx="7315200" cy="457200"/>
+              <a:t>60 minutes, within 10 days — Cursor SE + Cursor Security ↔ Figma DevEx + AppSec.</a:t>
+            </a:r>
+          </a:p>
+        </p:txBody>
+      </p:sp>
+      <p:sp>
+        <p:nvSpPr>
+          <p:cNvPr id="15" name="TextBox 14"/>
+          <p:cNvSpPr txBox="1"/>
+          <p:nvPr/>
+        </p:nvSpPr>
+        <p:spPr>
+          <a:xfrm>
+            <a:off x="777240" y="4572000"/>
+            <a:ext cx="10515600" cy="1097280"/>
+          </a:xfrm>
+          <a:prstGeom prst="rect">
+            <a:avLst/>
+          </a:prstGeom>
+          <a:noFill/>
+        </p:spPr>
+        <p:txBody>
+          <a:bodyPr wrap="square" lIns="0" rIns="0" tIns="0" bIns="0" anchor="t">
+            <a:spAutoFit/>
+          </a:bodyPr>
+          <a:lstStyle/>
+          <a:p>
+            <a:pPr algn="l">
+              <a:lnSpc>
+                <a:spcPct val="155000"/>
+              </a:lnSpc>
+            </a:pPr>
+            <a:r>
+              <a:rPr sz="1200" b="0" i="0">
+                <a:solidFill>
+                  <a:srgbClr val="5C544A"/>
+                </a:solidFill>
+                <a:latin typeface="Inter"/>
+              </a:rPr>
+              <a:t>Purpose: (1) technical scoping of a 20–30-engineer POC on a named repo, pre-defined metrics,</a:t>
+            </a:r>
+          </a:p>
+          <a:p>
+            <a:pPr algn="l">
+              <a:lnSpc>
+                <a:spcPct val="155000"/>
+              </a:lnSpc>
+            </a:pPr>
+            <a:r>
+              <a:rPr sz="1200" b="0" i="0">
+                <a:solidFill>
+                  <a:srgbClr val="5C544A"/>
+                </a:solidFill>
+                <a:latin typeface="Inter"/>
+              </a:rPr>
+              <a:t>Privacy Mode mandated; (2) parallel security review (SIG, pentest, architecture, DPA sent D-7).</a:t>
+            </a:r>
+          </a:p>
+        </p:txBody>
+      </p:sp>
+      <p:sp>
+        <p:nvSpPr>
+          <p:cNvPr id="16" name="TextBox 15"/>
+          <p:cNvSpPr txBox="1"/>
+          <p:nvPr/>
+        </p:nvSpPr>
+        <p:spPr>
+          <a:xfrm>
+            <a:off x="502920" y="5897880"/>
+            <a:ext cx="11201400" cy="457200"/>
           </a:xfrm>
           <a:prstGeom prst="rect">
             <a:avLst/>
@@ -12655,162 +13290,52 @@
               </a:lnSpc>
             </a:pPr>
             <a:r>
-              <a:rPr sz="1100" b="0" i="0" spc="400">
+              <a:rPr sz="1000" b="1" i="0" spc="300">
                 <a:solidFill>
                   <a:srgbClr val="8E867B"/>
                 </a:solidFill>
                 <a:latin typeface="Inter"/>
               </a:rPr>
-              <a:t>PART 3 · REFLECTION &amp; DEBRIEF</a:t>
-            </a:r>
-          </a:p>
-        </p:txBody>
-      </p:sp>
-      <p:sp>
-        <p:nvSpPr>
-          <p:cNvPr id="7" name="TextBox 6"/>
-          <p:cNvSpPr txBox="1"/>
-          <p:nvPr/>
-        </p:nvSpPr>
-        <p:spPr>
-          <a:xfrm>
-            <a:off x="502920" y="2514600"/>
-            <a:ext cx="7772400" cy="2377440"/>
-          </a:xfrm>
-          <a:prstGeom prst="rect">
-            <a:avLst/>
-          </a:prstGeom>
-          <a:noFill/>
-        </p:spPr>
-        <p:txBody>
-          <a:bodyPr wrap="square" lIns="0" rIns="0" tIns="0" bIns="0" anchor="t">
-            <a:spAutoFit/>
-          </a:bodyPr>
-          <a:lstStyle/>
-          <a:p>
-            <a:pPr algn="l">
-              <a:lnSpc>
-                <a:spcPct val="102000"/>
-              </a:lnSpc>
-            </a:pPr>
-            <a:r>
-              <a:rPr sz="5000" b="1" i="0">
-                <a:solidFill>
-                  <a:srgbClr val="1F1B16"/>
-                </a:solidFill>
-                <a:latin typeface="Inter"/>
-              </a:rPr>
-              <a:t>10 minutes.</a:t>
-            </a:r>
-          </a:p>
-          <a:p>
-            <a:pPr algn="l">
-              <a:lnSpc>
-                <a:spcPct val="102000"/>
-              </a:lnSpc>
-            </a:pPr>
-            <a:r>
-              <a:rPr sz="5000" b="1" i="0">
-                <a:solidFill>
-                  <a:srgbClr val="1F1B16"/>
-                </a:solidFill>
-                <a:latin typeface="Inter"/>
-              </a:rPr>
-              <a:t>Structured thinking.</a:t>
-            </a:r>
-          </a:p>
-        </p:txBody>
-      </p:sp>
-      <p:sp>
-        <p:nvSpPr>
-          <p:cNvPr id="8" name="TextBox 7"/>
-          <p:cNvSpPr txBox="1"/>
-          <p:nvPr/>
-        </p:nvSpPr>
-        <p:spPr>
-          <a:xfrm>
-            <a:off x="502920" y="4663440"/>
-            <a:ext cx="6858000" cy="1371600"/>
-          </a:xfrm>
-          <a:prstGeom prst="rect">
-            <a:avLst/>
-          </a:prstGeom>
-          <a:noFill/>
-        </p:spPr>
-        <p:txBody>
-          <a:bodyPr wrap="square" lIns="0" rIns="0" tIns="0" bIns="0" anchor="t">
-            <a:spAutoFit/>
-          </a:bodyPr>
-          <a:lstStyle/>
-          <a:p>
-            <a:pPr algn="l">
-              <a:lnSpc>
-                <a:spcPct val="145000"/>
-              </a:lnSpc>
-            </a:pPr>
-            <a:r>
-              <a:rPr sz="1500" b="0" i="1">
-                <a:solidFill>
-                  <a:srgbClr val="5C544A"/>
-                </a:solidFill>
-                <a:latin typeface="Inter"/>
-              </a:rPr>
-              <a:t>2–3 silent minutes to gather. Then: top insights · deal hypothesis ·</a:t>
-            </a:r>
-          </a:p>
-          <a:p>
-            <a:pPr algn="l">
-              <a:lnSpc>
-                <a:spcPct val="145000"/>
-              </a:lnSpc>
-            </a:pPr>
-            <a:r>
-              <a:rPr sz="1500" b="0" i="1">
-                <a:solidFill>
-                  <a:srgbClr val="5C544A"/>
-                </a:solidFill>
-                <a:latin typeface="Inter"/>
-              </a:rPr>
-              <a:t>strategic questions · risks · self-assessment.</a:t>
-            </a:r>
-          </a:p>
-        </p:txBody>
-      </p:sp>
-      <p:sp>
-        <p:nvSpPr>
-          <p:cNvPr id="9" name="TextBox 8"/>
-          <p:cNvSpPr txBox="1"/>
-          <p:nvPr/>
-        </p:nvSpPr>
-        <p:spPr>
-          <a:xfrm>
-            <a:off x="10515600" y="6446520"/>
-            <a:ext cx="1188720" cy="274320"/>
-          </a:xfrm>
-          <a:prstGeom prst="rect">
-            <a:avLst/>
-          </a:prstGeom>
-          <a:noFill/>
-        </p:spPr>
-        <p:txBody>
-          <a:bodyPr wrap="square" lIns="0" rIns="0" tIns="0" bIns="0" anchor="t">
-            <a:spAutoFit/>
-          </a:bodyPr>
-          <a:lstStyle/>
-          <a:p>
-            <a:pPr algn="r">
-              <a:lnSpc>
-                <a:spcPct val="115000"/>
-              </a:lnSpc>
-            </a:pPr>
-            <a:r>
-              <a:rPr sz="900" b="0" i="0">
-                <a:solidFill>
-                  <a:srgbClr val="8E867B"/>
-                </a:solidFill>
-                <a:latin typeface="JetBrains Mono"/>
-              </a:rPr>
-              <a:t>19 / 24</a:t>
+              <a:t>WHAT TO SAY</a:t>
+            </a:r>
+          </a:p>
+        </p:txBody>
+      </p:sp>
+      <p:sp>
+        <p:nvSpPr>
+          <p:cNvPr id="17" name="TextBox 16"/>
+          <p:cNvSpPr txBox="1"/>
+          <p:nvPr/>
+        </p:nvSpPr>
+        <p:spPr>
+          <a:xfrm>
+            <a:off x="502920" y="6217920"/>
+            <a:ext cx="11201400" cy="365760"/>
+          </a:xfrm>
+          <a:prstGeom prst="rect">
+            <a:avLst/>
+          </a:prstGeom>
+          <a:noFill/>
+        </p:spPr>
+        <p:txBody>
+          <a:bodyPr wrap="square" lIns="0" rIns="0" tIns="0" bIns="0" anchor="t">
+            <a:spAutoFit/>
+          </a:bodyPr>
+          <a:lstStyle/>
+          <a:p>
+            <a:pPr algn="l">
+              <a:lnSpc>
+                <a:spcPct val="140000"/>
+              </a:lnSpc>
+            </a:pPr>
+            <a:r>
+              <a:rPr sz="1200" b="0" i="1">
+                <a:solidFill>
+                  <a:srgbClr val="3A332C"/>
+                </a:solidFill>
+                <a:latin typeface="Inter"/>
+              </a:rPr>
+              <a:t>"Marcel, is it worth blocking 60 minutes within 10 days — you + security + our counterparts? I'll send you a draft agenda today."</a:t>
             </a:r>
           </a:p>
         </p:txBody>
@@ -13028,7 +13553,7 @@
                 </a:solidFill>
                 <a:latin typeface="JetBrains Mono"/>
               </a:rPr>
-              <a:t>02 / 24</a:t>
+              <a:t>02 / 25</a:t>
             </a:r>
           </a:p>
         </p:txBody>
@@ -13990,170 +14515,58 @@
       </p:sp>
       <p:sp>
         <p:nvSpPr>
-          <p:cNvPr id="3" name="TextBox 2"/>
-          <p:cNvSpPr txBox="1"/>
-          <p:nvPr/>
-        </p:nvSpPr>
-        <p:spPr>
-          <a:xfrm>
-            <a:off x="502920" y="320040"/>
-            <a:ext cx="2743200" cy="365760"/>
-          </a:xfrm>
-          <a:prstGeom prst="rect">
-            <a:avLst/>
-          </a:prstGeom>
-          <a:noFill/>
-        </p:spPr>
-        <p:txBody>
-          <a:bodyPr wrap="square" lIns="0" rIns="0" tIns="0" bIns="0" anchor="t">
-            <a:spAutoFit/>
-          </a:bodyPr>
-          <a:lstStyle/>
-          <a:p>
-            <a:pPr algn="l">
-              <a:lnSpc>
-                <a:spcPct val="115000"/>
-              </a:lnSpc>
-            </a:pPr>
-            <a:r>
-              <a:rPr sz="1100" b="1" i="0" spc="20">
-                <a:solidFill>
-                  <a:srgbClr val="1F1B16"/>
-                </a:solidFill>
-                <a:latin typeface="Inter"/>
-              </a:rPr>
-              <a:t>● cursor</a:t>
-            </a:r>
-          </a:p>
-        </p:txBody>
-      </p:sp>
-      <p:sp>
-        <p:nvSpPr>
-          <p:cNvPr id="4" name="TextBox 3"/>
-          <p:cNvSpPr txBox="1"/>
-          <p:nvPr/>
-        </p:nvSpPr>
-        <p:spPr>
-          <a:xfrm>
-            <a:off x="6400800" y="320040"/>
-            <a:ext cx="5303520" cy="365760"/>
-          </a:xfrm>
-          <a:prstGeom prst="rect">
-            <a:avLst/>
-          </a:prstGeom>
-          <a:noFill/>
-        </p:spPr>
-        <p:txBody>
-          <a:bodyPr wrap="square" lIns="0" rIns="0" tIns="0" bIns="0" anchor="t">
-            <a:spAutoFit/>
-          </a:bodyPr>
-          <a:lstStyle/>
-          <a:p>
-            <a:pPr algn="r">
-              <a:lnSpc>
-                <a:spcPct val="115000"/>
-              </a:lnSpc>
-            </a:pPr>
-            <a:r>
-              <a:rPr sz="900" b="0" i="0" spc="200">
-                <a:solidFill>
-                  <a:srgbClr val="8E867B"/>
-                </a:solidFill>
-                <a:latin typeface="Inter"/>
-              </a:rPr>
-              <a:t>PART 3  ·  DEBRIEF · INSIGHTS</a:t>
-            </a:r>
-          </a:p>
-        </p:txBody>
-      </p:sp>
-      <p:sp>
-        <p:nvSpPr>
-          <p:cNvPr id="5" name="TextBox 4"/>
-          <p:cNvSpPr txBox="1"/>
-          <p:nvPr/>
-        </p:nvSpPr>
-        <p:spPr>
-          <a:xfrm>
-            <a:off x="502920" y="6446520"/>
-            <a:ext cx="5943600" cy="274320"/>
-          </a:xfrm>
-          <a:prstGeom prst="rect">
-            <a:avLst/>
-          </a:prstGeom>
-          <a:noFill/>
-        </p:spPr>
-        <p:txBody>
-          <a:bodyPr wrap="square" lIns="0" rIns="0" tIns="0" bIns="0" anchor="t">
-            <a:spAutoFit/>
-          </a:bodyPr>
-          <a:lstStyle/>
-          <a:p>
-            <a:pPr algn="l">
-              <a:lnSpc>
-                <a:spcPct val="115000"/>
-              </a:lnSpc>
-            </a:pPr>
-            <a:r>
-              <a:rPr sz="900" b="0" i="0" spc="80">
-                <a:solidFill>
-                  <a:srgbClr val="8E867B"/>
-                </a:solidFill>
-                <a:latin typeface="Inter"/>
-              </a:rPr>
-              <a:t>Cursor Enterprise — PG + Disco Challenge  ·  Prep deck</a:t>
-            </a:r>
-          </a:p>
-        </p:txBody>
-      </p:sp>
-      <p:sp>
-        <p:nvSpPr>
-          <p:cNvPr id="6" name="TextBox 5"/>
-          <p:cNvSpPr txBox="1"/>
-          <p:nvPr/>
-        </p:nvSpPr>
-        <p:spPr>
-          <a:xfrm>
-            <a:off x="10515600" y="6446520"/>
-            <a:ext cx="1188720" cy="274320"/>
-          </a:xfrm>
-          <a:prstGeom prst="rect">
-            <a:avLst/>
-          </a:prstGeom>
-          <a:noFill/>
-        </p:spPr>
-        <p:txBody>
-          <a:bodyPr wrap="square" lIns="0" rIns="0" tIns="0" bIns="0" anchor="t">
-            <a:spAutoFit/>
-          </a:bodyPr>
-          <a:lstStyle/>
-          <a:p>
-            <a:pPr algn="r">
-              <a:lnSpc>
-                <a:spcPct val="115000"/>
-              </a:lnSpc>
-            </a:pPr>
-            <a:r>
-              <a:rPr sz="900" b="0" i="0" spc="50">
-                <a:solidFill>
-                  <a:srgbClr val="8E867B"/>
-                </a:solidFill>
-                <a:latin typeface="JetBrains Mono"/>
-              </a:rPr>
-              <a:t>20 / 24</a:t>
-            </a:r>
-          </a:p>
-        </p:txBody>
-      </p:sp>
-      <p:sp>
-        <p:nvSpPr>
-          <p:cNvPr id="7" name="Rectangle 6"/>
+          <p:cNvPr id="3" name="Rectangle 2"/>
           <p:cNvSpPr/>
           <p:nvPr/>
         </p:nvSpPr>
         <p:spPr>
           <a:xfrm>
-            <a:off x="502920" y="777240"/>
-            <a:ext cx="11201400" cy="6350"/>
+            <a:off x="7498079" y="0"/>
+            <a:ext cx="4690872" cy="6858000"/>
+          </a:xfrm>
+          <a:prstGeom prst="rect">
+            <a:avLst/>
+          </a:prstGeom>
+          <a:solidFill>
+            <a:srgbClr val="E5DDCE"/>
+          </a:solidFill>
+          <a:ln>
+            <a:noFill/>
+          </a:ln>
+          <a:effectLst/>
+        </p:spPr>
+        <p:style>
+          <a:lnRef idx="1">
+            <a:schemeClr val="accent1"/>
+          </a:lnRef>
+          <a:fillRef idx="3">
+            <a:schemeClr val="accent1"/>
+          </a:fillRef>
+          <a:effectRef idx="2">
+            <a:schemeClr val="accent1"/>
+          </a:effectRef>
+          <a:fontRef idx="minor">
+            <a:schemeClr val="lt1"/>
+          </a:fontRef>
+        </p:style>
+        <p:txBody>
+          <a:bodyPr rtlCol="0" anchor="ctr"/>
+          <a:lstStyle/>
+          <a:p>
+            <a:pPr algn="ctr"/>
+          </a:p>
+        </p:txBody>
+      </p:sp>
+      <p:sp>
+        <p:nvSpPr>
+          <p:cNvPr id="4" name="Rectangle 3"/>
+          <p:cNvSpPr/>
+          <p:nvPr/>
+        </p:nvSpPr>
+        <p:spPr>
+          <a:xfrm>
+            <a:off x="7498079" y="0"/>
+            <a:ext cx="6350" cy="6858000"/>
           </a:xfrm>
           <a:prstGeom prst="rect">
             <a:avLst/>
@@ -14190,733 +14603,227 @@
       </p:sp>
       <p:sp>
         <p:nvSpPr>
+          <p:cNvPr id="5" name="TextBox 4"/>
+          <p:cNvSpPr txBox="1"/>
+          <p:nvPr/>
+        </p:nvSpPr>
+        <p:spPr>
+          <a:xfrm>
+            <a:off x="502920" y="502920"/>
+            <a:ext cx="2743200" cy="365760"/>
+          </a:xfrm>
+          <a:prstGeom prst="rect">
+            <a:avLst/>
+          </a:prstGeom>
+          <a:noFill/>
+        </p:spPr>
+        <p:txBody>
+          <a:bodyPr wrap="square" lIns="0" rIns="0" tIns="0" bIns="0" anchor="t">
+            <a:spAutoFit/>
+          </a:bodyPr>
+          <a:lstStyle/>
+          <a:p>
+            <a:pPr algn="l">
+              <a:lnSpc>
+                <a:spcPct val="115000"/>
+              </a:lnSpc>
+            </a:pPr>
+            <a:r>
+              <a:rPr sz="1200" b="1" i="0" spc="20">
+                <a:solidFill>
+                  <a:srgbClr val="1F1B16"/>
+                </a:solidFill>
+                <a:latin typeface="Inter"/>
+              </a:rPr>
+              <a:t>● cursor</a:t>
+            </a:r>
+          </a:p>
+        </p:txBody>
+      </p:sp>
+      <p:sp>
+        <p:nvSpPr>
+          <p:cNvPr id="6" name="TextBox 5"/>
+          <p:cNvSpPr txBox="1"/>
+          <p:nvPr/>
+        </p:nvSpPr>
+        <p:spPr>
+          <a:xfrm>
+            <a:off x="502920" y="2103120"/>
+            <a:ext cx="7315200" cy="457200"/>
+          </a:xfrm>
+          <a:prstGeom prst="rect">
+            <a:avLst/>
+          </a:prstGeom>
+          <a:noFill/>
+        </p:spPr>
+        <p:txBody>
+          <a:bodyPr wrap="square" lIns="0" rIns="0" tIns="0" bIns="0" anchor="t">
+            <a:spAutoFit/>
+          </a:bodyPr>
+          <a:lstStyle/>
+          <a:p>
+            <a:pPr algn="l">
+              <a:lnSpc>
+                <a:spcPct val="115000"/>
+              </a:lnSpc>
+            </a:pPr>
+            <a:r>
+              <a:rPr sz="1100" b="0" i="0" spc="400">
+                <a:solidFill>
+                  <a:srgbClr val="8E867B"/>
+                </a:solidFill>
+                <a:latin typeface="Inter"/>
+              </a:rPr>
+              <a:t>PART 3 · REFLECTION &amp; DEBRIEF</a:t>
+            </a:r>
+          </a:p>
+        </p:txBody>
+      </p:sp>
+      <p:sp>
+        <p:nvSpPr>
+          <p:cNvPr id="7" name="TextBox 6"/>
+          <p:cNvSpPr txBox="1"/>
+          <p:nvPr/>
+        </p:nvSpPr>
+        <p:spPr>
+          <a:xfrm>
+            <a:off x="502920" y="2514600"/>
+            <a:ext cx="7772400" cy="2377440"/>
+          </a:xfrm>
+          <a:prstGeom prst="rect">
+            <a:avLst/>
+          </a:prstGeom>
+          <a:noFill/>
+        </p:spPr>
+        <p:txBody>
+          <a:bodyPr wrap="square" lIns="0" rIns="0" tIns="0" bIns="0" anchor="t">
+            <a:spAutoFit/>
+          </a:bodyPr>
+          <a:lstStyle/>
+          <a:p>
+            <a:pPr algn="l">
+              <a:lnSpc>
+                <a:spcPct val="102000"/>
+              </a:lnSpc>
+            </a:pPr>
+            <a:r>
+              <a:rPr sz="5000" b="1" i="0">
+                <a:solidFill>
+                  <a:srgbClr val="1F1B16"/>
+                </a:solidFill>
+                <a:latin typeface="Inter"/>
+              </a:rPr>
+              <a:t>10 minutes.</a:t>
+            </a:r>
+          </a:p>
+          <a:p>
+            <a:pPr algn="l">
+              <a:lnSpc>
+                <a:spcPct val="102000"/>
+              </a:lnSpc>
+            </a:pPr>
+            <a:r>
+              <a:rPr sz="5000" b="1" i="0">
+                <a:solidFill>
+                  <a:srgbClr val="1F1B16"/>
+                </a:solidFill>
+                <a:latin typeface="Inter"/>
+              </a:rPr>
+              <a:t>Structured thinking.</a:t>
+            </a:r>
+          </a:p>
+        </p:txBody>
+      </p:sp>
+      <p:sp>
+        <p:nvSpPr>
           <p:cNvPr id="8" name="TextBox 7"/>
           <p:cNvSpPr txBox="1"/>
           <p:nvPr/>
         </p:nvSpPr>
         <p:spPr>
           <a:xfrm>
-            <a:off x="502920" y="1143000"/>
-            <a:ext cx="9144000" cy="365760"/>
-          </a:xfrm>
-          <a:prstGeom prst="rect">
-            <a:avLst/>
-          </a:prstGeom>
-          <a:noFill/>
-        </p:spPr>
-        <p:txBody>
-          <a:bodyPr wrap="square" lIns="0" rIns="0" tIns="0" bIns="0" anchor="t">
-            <a:spAutoFit/>
-          </a:bodyPr>
-          <a:lstStyle/>
-          <a:p>
-            <a:pPr algn="l">
+            <a:off x="502920" y="4663440"/>
+            <a:ext cx="6858000" cy="1371600"/>
+          </a:xfrm>
+          <a:prstGeom prst="rect">
+            <a:avLst/>
+          </a:prstGeom>
+          <a:noFill/>
+        </p:spPr>
+        <p:txBody>
+          <a:bodyPr wrap="square" lIns="0" rIns="0" tIns="0" bIns="0" anchor="t">
+            <a:spAutoFit/>
+          </a:bodyPr>
+          <a:lstStyle/>
+          <a:p>
+            <a:pPr algn="l">
+              <a:lnSpc>
+                <a:spcPct val="145000"/>
+              </a:lnSpc>
+            </a:pPr>
+            <a:r>
+              <a:rPr sz="1500" b="0" i="1">
+                <a:solidFill>
+                  <a:srgbClr val="5C544A"/>
+                </a:solidFill>
+                <a:latin typeface="Inter"/>
+              </a:rPr>
+              <a:t>2–3 silent minutes to gather. Then: top insights · deal hypothesis ·</a:t>
+            </a:r>
+          </a:p>
+          <a:p>
+            <a:pPr algn="l">
+              <a:lnSpc>
+                <a:spcPct val="145000"/>
+              </a:lnSpc>
+            </a:pPr>
+            <a:r>
+              <a:rPr sz="1500" b="0" i="1">
+                <a:solidFill>
+                  <a:srgbClr val="5C544A"/>
+                </a:solidFill>
+                <a:latin typeface="Inter"/>
+              </a:rPr>
+              <a:t>strategic questions · risks · self-assessment.</a:t>
+            </a:r>
+          </a:p>
+        </p:txBody>
+      </p:sp>
+      <p:sp>
+        <p:nvSpPr>
+          <p:cNvPr id="9" name="TextBox 8"/>
+          <p:cNvSpPr txBox="1"/>
+          <p:nvPr/>
+        </p:nvSpPr>
+        <p:spPr>
+          <a:xfrm>
+            <a:off x="10515600" y="6446520"/>
+            <a:ext cx="1188720" cy="274320"/>
+          </a:xfrm>
+          <a:prstGeom prst="rect">
+            <a:avLst/>
+          </a:prstGeom>
+          <a:noFill/>
+        </p:spPr>
+        <p:txBody>
+          <a:bodyPr wrap="square" lIns="0" rIns="0" tIns="0" bIns="0" anchor="t">
+            <a:spAutoFit/>
+          </a:bodyPr>
+          <a:lstStyle/>
+          <a:p>
+            <a:pPr algn="r">
               <a:lnSpc>
                 <a:spcPct val="115000"/>
               </a:lnSpc>
             </a:pPr>
             <a:r>
-              <a:rPr sz="1000" b="0" i="0" spc="300">
+              <a:rPr sz="900" b="0" i="0">
                 <a:solidFill>
                   <a:srgbClr val="8E867B"/>
                 </a:solidFill>
-                <a:latin typeface="Inter"/>
-              </a:rPr>
-              <a:t>TO FILL IN DURING THE 2 SILENT MINUTES</a:t>
-            </a:r>
-          </a:p>
-        </p:txBody>
-      </p:sp>
-      <p:sp>
-        <p:nvSpPr>
-          <p:cNvPr id="9" name="TextBox 8"/>
-          <p:cNvSpPr txBox="1"/>
-          <p:nvPr/>
-        </p:nvSpPr>
-        <p:spPr>
-          <a:xfrm>
-            <a:off x="502920" y="1508760"/>
-            <a:ext cx="10972800" cy="1097280"/>
-          </a:xfrm>
-          <a:prstGeom prst="rect">
-            <a:avLst/>
-          </a:prstGeom>
-          <a:noFill/>
-        </p:spPr>
-        <p:txBody>
-          <a:bodyPr wrap="square" lIns="0" rIns="0" tIns="0" bIns="0" anchor="t">
-            <a:spAutoFit/>
-          </a:bodyPr>
-          <a:lstStyle/>
-          <a:p>
-            <a:pPr algn="l">
-              <a:lnSpc>
-                <a:spcPct val="105000"/>
-              </a:lnSpc>
-            </a:pPr>
-            <a:r>
-              <a:rPr sz="3400" b="1" i="0">
-                <a:solidFill>
-                  <a:srgbClr val="1F1B16"/>
-                </a:solidFill>
-                <a:latin typeface="Inter"/>
-              </a:rPr>
-              <a:t>Top 3–5 insights + deal hypothesis.</a:t>
-            </a:r>
-          </a:p>
-        </p:txBody>
-      </p:sp>
-      <p:sp>
-        <p:nvSpPr>
-          <p:cNvPr id="10" name="TextBox 9"/>
-          <p:cNvSpPr txBox="1"/>
-          <p:nvPr/>
-        </p:nvSpPr>
-        <p:spPr>
-          <a:xfrm>
-            <a:off x="502920" y="2606040"/>
-            <a:ext cx="10972800" cy="822960"/>
-          </a:xfrm>
-          <a:prstGeom prst="rect">
-            <a:avLst/>
-          </a:prstGeom>
-          <a:noFill/>
-        </p:spPr>
-        <p:txBody>
-          <a:bodyPr wrap="square" lIns="0" rIns="0" tIns="0" bIns="0" anchor="t">
-            <a:spAutoFit/>
-          </a:bodyPr>
-          <a:lstStyle/>
-          <a:p>
-            <a:pPr algn="l">
-              <a:lnSpc>
-                <a:spcPct val="135000"/>
-              </a:lnSpc>
-            </a:pPr>
-            <a:r>
-              <a:rPr sz="1400" b="0" i="0">
-                <a:solidFill>
-                  <a:srgbClr val="5C544A"/>
-                </a:solidFill>
-                <a:latin typeface="Inter"/>
-              </a:rPr>
-              <a:t>Format: one insight = one observed fact from discovery + what it triggers.</a:t>
-            </a:r>
-          </a:p>
-        </p:txBody>
-      </p:sp>
-      <p:sp>
-        <p:nvSpPr>
-          <p:cNvPr id="11" name="Rectangle 10"/>
-          <p:cNvSpPr/>
-          <p:nvPr/>
-        </p:nvSpPr>
-        <p:spPr>
-          <a:xfrm>
-            <a:off x="502920" y="3246120"/>
-            <a:ext cx="6949440" cy="3200400"/>
-          </a:xfrm>
-          <a:prstGeom prst="rect">
-            <a:avLst/>
-          </a:prstGeom>
-          <a:solidFill>
-            <a:srgbClr val="E5DDCE"/>
-          </a:solidFill>
-          <a:ln>
-            <a:noFill/>
-          </a:ln>
-          <a:effectLst/>
-        </p:spPr>
-        <p:style>
-          <a:lnRef idx="1">
-            <a:schemeClr val="accent1"/>
-          </a:lnRef>
-          <a:fillRef idx="3">
-            <a:schemeClr val="accent1"/>
-          </a:fillRef>
-          <a:effectRef idx="2">
-            <a:schemeClr val="accent1"/>
-          </a:effectRef>
-          <a:fontRef idx="minor">
-            <a:schemeClr val="lt1"/>
-          </a:fontRef>
-        </p:style>
-        <p:txBody>
-          <a:bodyPr rtlCol="0" anchor="ctr"/>
-          <a:lstStyle/>
-          <a:p>
-            <a:pPr algn="ctr"/>
-          </a:p>
-        </p:txBody>
-      </p:sp>
-      <p:sp>
-        <p:nvSpPr>
-          <p:cNvPr id="12" name="Rectangle 11"/>
-          <p:cNvSpPr/>
-          <p:nvPr/>
-        </p:nvSpPr>
-        <p:spPr>
-          <a:xfrm>
-            <a:off x="502920" y="3246120"/>
-            <a:ext cx="6949440" cy="6350"/>
-          </a:xfrm>
-          <a:prstGeom prst="rect">
-            <a:avLst/>
-          </a:prstGeom>
-          <a:solidFill>
-            <a:srgbClr val="C8BDA8"/>
-          </a:solidFill>
-          <a:ln>
-            <a:noFill/>
-          </a:ln>
-          <a:effectLst/>
-        </p:spPr>
-        <p:style>
-          <a:lnRef idx="1">
-            <a:schemeClr val="accent1"/>
-          </a:lnRef>
-          <a:fillRef idx="3">
-            <a:schemeClr val="accent1"/>
-          </a:fillRef>
-          <a:effectRef idx="2">
-            <a:schemeClr val="accent1"/>
-          </a:effectRef>
-          <a:fontRef idx="minor">
-            <a:schemeClr val="lt1"/>
-          </a:fontRef>
-        </p:style>
-        <p:txBody>
-          <a:bodyPr rtlCol="0" anchor="ctr"/>
-          <a:lstStyle/>
-          <a:p>
-            <a:pPr algn="ctr"/>
-          </a:p>
-        </p:txBody>
-      </p:sp>
-      <p:sp>
-        <p:nvSpPr>
-          <p:cNvPr id="13" name="TextBox 12"/>
-          <p:cNvSpPr txBox="1"/>
-          <p:nvPr/>
-        </p:nvSpPr>
-        <p:spPr>
-          <a:xfrm>
-            <a:off x="777240" y="3383280"/>
-            <a:ext cx="6400800" cy="365760"/>
-          </a:xfrm>
-          <a:prstGeom prst="rect">
-            <a:avLst/>
-          </a:prstGeom>
-          <a:noFill/>
-        </p:spPr>
-        <p:txBody>
-          <a:bodyPr wrap="square" lIns="0" rIns="0" tIns="0" bIns="0" anchor="t">
-            <a:spAutoFit/>
-          </a:bodyPr>
-          <a:lstStyle/>
-          <a:p>
-            <a:pPr algn="l">
-              <a:lnSpc>
-                <a:spcPct val="115000"/>
-              </a:lnSpc>
-            </a:pPr>
-            <a:r>
-              <a:rPr sz="1000" b="1" i="0" spc="300">
-                <a:solidFill>
-                  <a:srgbClr val="8E867B"/>
-                </a:solidFill>
-                <a:latin typeface="Inter"/>
-              </a:rPr>
-              <a:t>TOP INSIGHTS (formulate live)</a:t>
-            </a:r>
-          </a:p>
-        </p:txBody>
-      </p:sp>
-      <p:sp>
-        <p:nvSpPr>
-          <p:cNvPr id="14" name="TextBox 13"/>
-          <p:cNvSpPr txBox="1"/>
-          <p:nvPr/>
-        </p:nvSpPr>
-        <p:spPr>
-          <a:xfrm>
-            <a:off x="777240" y="3794760"/>
-            <a:ext cx="6400800" cy="457200"/>
-          </a:xfrm>
-          <a:prstGeom prst="rect">
-            <a:avLst/>
-          </a:prstGeom>
-          <a:noFill/>
-        </p:spPr>
-        <p:txBody>
-          <a:bodyPr wrap="square" lIns="0" rIns="0" tIns="0" bIns="0" anchor="t">
-            <a:spAutoFit/>
-          </a:bodyPr>
-          <a:lstStyle/>
-          <a:p>
-            <a:pPr algn="l">
-              <a:lnSpc>
-                <a:spcPct val="140000"/>
-              </a:lnSpc>
-            </a:pPr>
-            <a:r>
-              <a:rPr sz="1150" b="0" i="0">
-                <a:solidFill>
-                  <a:srgbClr val="1F1B16"/>
-                </a:solidFill>
-                <a:latin typeface="Inter"/>
-              </a:rPr>
-              <a:t>1. Does Marcel know about the 31? → if yes, potential champion; if no, visibility gap.</a:t>
-            </a:r>
-          </a:p>
-        </p:txBody>
-      </p:sp>
-      <p:sp>
-        <p:nvSpPr>
-          <p:cNvPr id="15" name="TextBox 14"/>
-          <p:cNvSpPr txBox="1"/>
-          <p:nvPr/>
-        </p:nvSpPr>
-        <p:spPr>
-          <a:xfrm>
-            <a:off x="777240" y="4297680"/>
-            <a:ext cx="6400800" cy="457200"/>
-          </a:xfrm>
-          <a:prstGeom prst="rect">
-            <a:avLst/>
-          </a:prstGeom>
-          <a:noFill/>
-        </p:spPr>
-        <p:txBody>
-          <a:bodyPr wrap="square" lIns="0" rIns="0" tIns="0" bIns="0" anchor="t">
-            <a:spAutoFit/>
-          </a:bodyPr>
-          <a:lstStyle/>
-          <a:p>
-            <a:pPr algn="l">
-              <a:lnSpc>
-                <a:spcPct val="140000"/>
-              </a:lnSpc>
-            </a:pPr>
-            <a:r>
-              <a:rPr sz="1150" b="0" i="0">
-                <a:solidFill>
-                  <a:srgbClr val="1F1B16"/>
-                </a:solidFill>
-                <a:latin typeface="Inter"/>
-              </a:rPr>
-              <a:t>2. Claude Code = real eval or scouting? → real urgency or parked.</a:t>
-            </a:r>
-          </a:p>
-        </p:txBody>
-      </p:sp>
-      <p:sp>
-        <p:nvSpPr>
-          <p:cNvPr id="16" name="TextBox 15"/>
-          <p:cNvSpPr txBox="1"/>
-          <p:nvPr/>
-        </p:nvSpPr>
-        <p:spPr>
-          <a:xfrm>
-            <a:off x="777240" y="4800600"/>
-            <a:ext cx="6400800" cy="457200"/>
-          </a:xfrm>
-          <a:prstGeom prst="rect">
-            <a:avLst/>
-          </a:prstGeom>
-          <a:noFill/>
-        </p:spPr>
-        <p:txBody>
-          <a:bodyPr wrap="square" lIns="0" rIns="0" tIns="0" bIns="0" anchor="t">
-            <a:spAutoFit/>
-          </a:bodyPr>
-          <a:lstStyle/>
-          <a:p>
-            <a:pPr algn="l">
-              <a:lnSpc>
-                <a:spcPct val="140000"/>
-              </a:lnSpc>
-            </a:pPr>
-            <a:r>
-              <a:rPr sz="1150" b="0" i="0">
-                <a:solidFill>
-                  <a:srgbClr val="1F1B16"/>
-                </a:solidFill>
-                <a:latin typeface="Inter"/>
-              </a:rPr>
-              <a:t>3. Senior IC opt-out on Copilot? → proof of quality gap, not tool absence.</a:t>
-            </a:r>
-          </a:p>
-        </p:txBody>
-      </p:sp>
-      <p:sp>
-        <p:nvSpPr>
-          <p:cNvPr id="17" name="TextBox 16"/>
-          <p:cNvSpPr txBox="1"/>
-          <p:nvPr/>
-        </p:nvSpPr>
-        <p:spPr>
-          <a:xfrm>
-            <a:off x="777240" y="5303520"/>
-            <a:ext cx="6400800" cy="457200"/>
-          </a:xfrm>
-          <a:prstGeom prst="rect">
-            <a:avLst/>
-          </a:prstGeom>
-          <a:noFill/>
-        </p:spPr>
-        <p:txBody>
-          <a:bodyPr wrap="square" lIns="0" rIns="0" tIns="0" bIns="0" anchor="t">
-            <a:spAutoFit/>
-          </a:bodyPr>
-          <a:lstStyle/>
-          <a:p>
-            <a:pPr algn="l">
-              <a:lnSpc>
-                <a:spcPct val="140000"/>
-              </a:lnSpc>
-            </a:pPr>
-            <a:r>
-              <a:rPr sz="1150" b="0" i="0">
-                <a:solidFill>
-                  <a:srgbClr val="1F1B16"/>
-                </a:solidFill>
-                <a:latin typeface="Inter"/>
-              </a:rPr>
-              <a:t>4. Security posture: blocking or facilitating? → deal velocity.</a:t>
-            </a:r>
-          </a:p>
-        </p:txBody>
-      </p:sp>
-      <p:sp>
-        <p:nvSpPr>
-          <p:cNvPr id="18" name="TextBox 17"/>
-          <p:cNvSpPr txBox="1"/>
-          <p:nvPr/>
-        </p:nvSpPr>
-        <p:spPr>
-          <a:xfrm>
-            <a:off x="777240" y="5806440"/>
-            <a:ext cx="6400800" cy="457200"/>
-          </a:xfrm>
-          <a:prstGeom prst="rect">
-            <a:avLst/>
-          </a:prstGeom>
-          <a:noFill/>
-        </p:spPr>
-        <p:txBody>
-          <a:bodyPr wrap="square" lIns="0" rIns="0" tIns="0" bIns="0" anchor="t">
-            <a:spAutoFit/>
-          </a:bodyPr>
-          <a:lstStyle/>
-          <a:p>
-            <a:pPr algn="l">
-              <a:lnSpc>
-                <a:spcPct val="140000"/>
-              </a:lnSpc>
-            </a:pPr>
-            <a:r>
-              <a:rPr sz="1150" b="0" i="0">
-                <a:solidFill>
-                  <a:srgbClr val="1F1B16"/>
-                </a:solidFill>
-                <a:latin typeface="Inter"/>
-              </a:rPr>
-              <a:t>5. Pre-allocated budget? → 3-month vs 9-month signature delay.</a:t>
-            </a:r>
-          </a:p>
-        </p:txBody>
-      </p:sp>
-      <p:sp>
-        <p:nvSpPr>
-          <p:cNvPr id="19" name="Rectangle 18"/>
-          <p:cNvSpPr/>
-          <p:nvPr/>
-        </p:nvSpPr>
-        <p:spPr>
-          <a:xfrm>
-            <a:off x="7635240" y="3246120"/>
-            <a:ext cx="4069080" cy="3200400"/>
-          </a:xfrm>
-          <a:prstGeom prst="rect">
-            <a:avLst/>
-          </a:prstGeom>
-          <a:solidFill>
-            <a:srgbClr val="DAD0BE"/>
-          </a:solidFill>
-          <a:ln>
-            <a:noFill/>
-          </a:ln>
-          <a:effectLst/>
-        </p:spPr>
-        <p:style>
-          <a:lnRef idx="1">
-            <a:schemeClr val="accent1"/>
-          </a:lnRef>
-          <a:fillRef idx="3">
-            <a:schemeClr val="accent1"/>
-          </a:fillRef>
-          <a:effectRef idx="2">
-            <a:schemeClr val="accent1"/>
-          </a:effectRef>
-          <a:fontRef idx="minor">
-            <a:schemeClr val="lt1"/>
-          </a:fontRef>
-        </p:style>
-        <p:txBody>
-          <a:bodyPr rtlCol="0" anchor="ctr"/>
-          <a:lstStyle/>
-          <a:p>
-            <a:pPr algn="ctr"/>
-          </a:p>
-        </p:txBody>
-      </p:sp>
-      <p:sp>
-        <p:nvSpPr>
-          <p:cNvPr id="20" name="Rectangle 19"/>
-          <p:cNvSpPr/>
-          <p:nvPr/>
-        </p:nvSpPr>
-        <p:spPr>
-          <a:xfrm>
-            <a:off x="7635240" y="3246120"/>
-            <a:ext cx="4069080" cy="6350"/>
-          </a:xfrm>
-          <a:prstGeom prst="rect">
-            <a:avLst/>
-          </a:prstGeom>
-          <a:solidFill>
-            <a:srgbClr val="C8BDA8"/>
-          </a:solidFill>
-          <a:ln>
-            <a:noFill/>
-          </a:ln>
-          <a:effectLst/>
-        </p:spPr>
-        <p:style>
-          <a:lnRef idx="1">
-            <a:schemeClr val="accent1"/>
-          </a:lnRef>
-          <a:fillRef idx="3">
-            <a:schemeClr val="accent1"/>
-          </a:fillRef>
-          <a:effectRef idx="2">
-            <a:schemeClr val="accent1"/>
-          </a:effectRef>
-          <a:fontRef idx="minor">
-            <a:schemeClr val="lt1"/>
-          </a:fontRef>
-        </p:style>
-        <p:txBody>
-          <a:bodyPr rtlCol="0" anchor="ctr"/>
-          <a:lstStyle/>
-          <a:p>
-            <a:pPr algn="ctr"/>
-          </a:p>
-        </p:txBody>
-      </p:sp>
-      <p:sp>
-        <p:nvSpPr>
-          <p:cNvPr id="21" name="TextBox 20"/>
-          <p:cNvSpPr txBox="1"/>
-          <p:nvPr/>
-        </p:nvSpPr>
-        <p:spPr>
-          <a:xfrm>
-            <a:off x="7909560" y="3383280"/>
-            <a:ext cx="3657600" cy="365760"/>
-          </a:xfrm>
-          <a:prstGeom prst="rect">
-            <a:avLst/>
-          </a:prstGeom>
-          <a:noFill/>
-        </p:spPr>
-        <p:txBody>
-          <a:bodyPr wrap="square" lIns="0" rIns="0" tIns="0" bIns="0" anchor="t">
-            <a:spAutoFit/>
-          </a:bodyPr>
-          <a:lstStyle/>
-          <a:p>
-            <a:pPr algn="l">
-              <a:lnSpc>
-                <a:spcPct val="115000"/>
-              </a:lnSpc>
-            </a:pPr>
-            <a:r>
-              <a:rPr sz="1000" b="1" i="0" spc="300">
-                <a:solidFill>
-                  <a:srgbClr val="8E867B"/>
-                </a:solidFill>
-                <a:latin typeface="Inter"/>
-              </a:rPr>
-              <a:t>DEAL HYPOTHESIS</a:t>
-            </a:r>
-          </a:p>
-        </p:txBody>
-      </p:sp>
-      <p:sp>
-        <p:nvSpPr>
-          <p:cNvPr id="22" name="TextBox 21"/>
-          <p:cNvSpPr txBox="1"/>
-          <p:nvPr/>
-        </p:nvSpPr>
-        <p:spPr>
-          <a:xfrm>
-            <a:off x="7909560" y="3749039"/>
-            <a:ext cx="3657600" cy="2377440"/>
-          </a:xfrm>
-          <a:prstGeom prst="rect">
-            <a:avLst/>
-          </a:prstGeom>
-          <a:noFill/>
-        </p:spPr>
-        <p:txBody>
-          <a:bodyPr wrap="square" lIns="0" rIns="0" tIns="0" bIns="0" anchor="t">
-            <a:spAutoFit/>
-          </a:bodyPr>
-          <a:lstStyle/>
-          <a:p>
-            <a:pPr algn="l">
-              <a:lnSpc>
-                <a:spcPct val="150000"/>
-              </a:lnSpc>
-            </a:pPr>
-            <a:r>
-              <a:rPr sz="1100" b="0" i="0">
-                <a:solidFill>
-                  <a:srgbClr val="1F1B16"/>
-                </a:solidFill>
-                <a:latin typeface="Inter"/>
-              </a:rPr>
-              <a:t>Typical setup:</a:t>
-            </a:r>
-          </a:p>
-          <a:p>
-            <a:pPr algn="l">
-              <a:lnSpc>
-                <a:spcPct val="150000"/>
-              </a:lnSpc>
-            </a:pPr>
-            <a:r>
-              <a:rPr sz="1100" b="0" i="0">
-                <a:solidFill>
-                  <a:srgbClr val="1F1B16"/>
-                </a:solidFill>
-                <a:latin typeface="Inter"/>
-              </a:rPr>
-              <a:t>• Medium urgency (Claude Code</a:t>
-            </a:r>
-          </a:p>
-          <a:p>
-            <a:pPr algn="l">
-              <a:lnSpc>
-                <a:spcPct val="150000"/>
-              </a:lnSpc>
-            </a:pPr>
-            <a:r>
-              <a:rPr sz="1100" b="0" i="0">
-                <a:solidFill>
-                  <a:srgbClr val="1F1B16"/>
-                </a:solidFill>
-                <a:latin typeface="Inter"/>
-              </a:rPr>
-              <a:t>   is in eval, not decision)</a:t>
-            </a:r>
-          </a:p>
-          <a:p>
-            <a:pPr algn="l">
-              <a:lnSpc>
-                <a:spcPct val="150000"/>
-              </a:lnSpc>
-            </a:pPr>
-            <a:r>
-              <a:rPr sz="1100" b="0" i="0">
-                <a:solidFill>
-                  <a:srgbClr val="1F1B16"/>
-                </a:solidFill>
-                <a:latin typeface="Inter"/>
-              </a:rPr>
-              <a:t>• Champion TBD (Marcel? or a</a:t>
-            </a:r>
-          </a:p>
-          <a:p>
-            <a:pPr algn="l">
-              <a:lnSpc>
-                <a:spcPct val="150000"/>
-              </a:lnSpc>
-            </a:pPr>
-            <a:r>
-              <a:rPr sz="1100" b="0" i="0">
-                <a:solidFill>
-                  <a:srgbClr val="1F1B16"/>
-                </a:solidFill>
-                <a:latin typeface="Inter"/>
-              </a:rPr>
-              <a:t>   staff IC among the 31 Pro?)</a:t>
-            </a:r>
-          </a:p>
-          <a:p>
-            <a:pPr algn="l">
-              <a:lnSpc>
-                <a:spcPct val="150000"/>
-              </a:lnSpc>
-            </a:pPr>
-            <a:r>
-              <a:rPr sz="1100" b="0" i="0">
-                <a:solidFill>
-                  <a:srgbClr val="1F1B16"/>
-                </a:solidFill>
-                <a:latin typeface="Inter"/>
-              </a:rPr>
-              <a:t>• Security = real variable</a:t>
-            </a:r>
-          </a:p>
-          <a:p>
-            <a:pPr algn="l">
-              <a:lnSpc>
-                <a:spcPct val="150000"/>
-              </a:lnSpc>
-            </a:pPr>
-            <a:r>
-              <a:rPr sz="1100" b="0" i="0">
-                <a:solidFill>
-                  <a:srgbClr val="1F1B16"/>
-                </a:solidFill>
-                <a:latin typeface="Inter"/>
-              </a:rPr>
-              <a:t>   (deal-maker or deal-killer)</a:t>
-            </a:r>
-          </a:p>
-          <a:p>
-            <a:pPr algn="l">
-              <a:lnSpc>
-                <a:spcPct val="150000"/>
-              </a:lnSpc>
-            </a:pPr>
-            <a:r>
-              <a:rPr sz="1100" b="0" i="0">
-                <a:solidFill>
-                  <a:srgbClr val="1F1B16"/>
-                </a:solidFill>
-                <a:latin typeface="Inter"/>
-              </a:rPr>
-              <a:t>• Realistic deal: 60-day POC,</a:t>
-            </a:r>
-          </a:p>
-          <a:p>
-            <a:pPr algn="l">
-              <a:lnSpc>
-                <a:spcPct val="150000"/>
-              </a:lnSpc>
-            </a:pPr>
-            <a:r>
-              <a:rPr sz="1100" b="0" i="0">
-                <a:solidFill>
-                  <a:srgbClr val="1F1B16"/>
-                </a:solidFill>
-                <a:latin typeface="Inter"/>
-              </a:rPr>
-              <a:t>   500–650 seats at 6–9 months.</a:t>
+                <a:latin typeface="JetBrains Mono"/>
+              </a:rPr>
+              <a:t>20 / 25</a:t>
             </a:r>
           </a:p>
         </p:txBody>
@@ -15056,7 +14963,7 @@
                 </a:solidFill>
                 <a:latin typeface="Inter"/>
               </a:rPr>
-              <a:t>PART 3  ·  DEBRIEF · STRATEGIC QUESTIONS</a:t>
+              <a:t>PART 3  ·  DEBRIEF · INSIGHTS</a:t>
             </a:r>
           </a:p>
         </p:txBody>
@@ -15134,7 +15041,7 @@
                 </a:solidFill>
                 <a:latin typeface="JetBrains Mono"/>
               </a:rPr>
-              <a:t>21 / 24</a:t>
+              <a:t>21 / 25</a:t>
             </a:r>
           </a:p>
         </p:txBody>
@@ -15217,7 +15124,7 @@
                 </a:solidFill>
                 <a:latin typeface="Inter"/>
               </a:rPr>
-              <a:t>THE 4 QUESTIONS FROM THE PROMPT</a:t>
+              <a:t>TO FILL IN DURING THE 2 SILENT MINUTES</a:t>
             </a:r>
           </a:p>
         </p:txBody>
@@ -15256,7 +15163,7 @@
                 </a:solidFill>
                 <a:latin typeface="Inter"/>
               </a:rPr>
-              <a:t>Pre-prepared answers — to reformulate live.</a:t>
+              <a:t>Top 3–5 insights + deal hypothesis.</a:t>
             </a:r>
           </a:p>
         </p:txBody>
@@ -15295,138 +15202,65 @@
                 </a:solidFill>
                 <a:latin typeface="Inter"/>
               </a:rPr>
-              <a:t>Don't recite. Reformulate with what you heard in discovery.</a:t>
-            </a:r>
-          </a:p>
-        </p:txBody>
-      </p:sp>
-      <p:sp>
-        <p:nvSpPr>
-          <p:cNvPr id="11" name="TextBox 10"/>
-          <p:cNvSpPr txBox="1"/>
-          <p:nvPr/>
-        </p:nvSpPr>
-        <p:spPr>
-          <a:xfrm>
-            <a:off x="502920" y="3200400"/>
-            <a:ext cx="274320" cy="365760"/>
-          </a:xfrm>
-          <a:prstGeom prst="rect">
-            <a:avLst/>
-          </a:prstGeom>
-          <a:noFill/>
-        </p:spPr>
-        <p:txBody>
-          <a:bodyPr wrap="square" lIns="0" rIns="0" tIns="0" bIns="0" anchor="t">
-            <a:spAutoFit/>
-          </a:bodyPr>
-          <a:lstStyle/>
-          <a:p>
-            <a:pPr algn="l">
-              <a:lnSpc>
-                <a:spcPct val="115000"/>
-              </a:lnSpc>
-            </a:pPr>
-            <a:r>
-              <a:rPr sz="1400" b="0" i="0">
-                <a:solidFill>
-                  <a:srgbClr val="8E867B"/>
-                </a:solidFill>
-                <a:latin typeface="Inter"/>
-              </a:rPr>
-              <a:t>→</a:t>
-            </a:r>
-          </a:p>
-        </p:txBody>
-      </p:sp>
-      <p:sp>
-        <p:nvSpPr>
-          <p:cNvPr id="12" name="TextBox 11"/>
-          <p:cNvSpPr txBox="1"/>
-          <p:nvPr/>
-        </p:nvSpPr>
-        <p:spPr>
-          <a:xfrm>
-            <a:off x="868680" y="3200400"/>
-            <a:ext cx="10789920" cy="365760"/>
-          </a:xfrm>
-          <a:prstGeom prst="rect">
-            <a:avLst/>
-          </a:prstGeom>
-          <a:noFill/>
-        </p:spPr>
-        <p:txBody>
-          <a:bodyPr wrap="square" lIns="0" rIns="0" tIns="0" bIns="0" anchor="t">
-            <a:spAutoFit/>
-          </a:bodyPr>
-          <a:lstStyle/>
-          <a:p>
-            <a:pPr algn="l">
-              <a:lnSpc>
-                <a:spcPct val="115000"/>
-              </a:lnSpc>
-            </a:pPr>
-            <a:r>
-              <a:rPr sz="1250" b="1" i="0">
-                <a:solidFill>
-                  <a:srgbClr val="1F1B16"/>
-                </a:solidFill>
-                <a:latin typeface="Inter"/>
-              </a:rPr>
-              <a:t>Why does Figma need an AI coding solution — Cursor or not?</a:t>
-            </a:r>
-          </a:p>
-        </p:txBody>
-      </p:sp>
-      <p:sp>
-        <p:nvSpPr>
-          <p:cNvPr id="13" name="TextBox 12"/>
-          <p:cNvSpPr txBox="1"/>
-          <p:nvPr/>
-        </p:nvSpPr>
-        <p:spPr>
-          <a:xfrm>
-            <a:off x="868680" y="3566160"/>
-            <a:ext cx="10789920" cy="457200"/>
-          </a:xfrm>
-          <a:prstGeom prst="rect">
-            <a:avLst/>
-          </a:prstGeom>
-          <a:noFill/>
-        </p:spPr>
-        <p:txBody>
-          <a:bodyPr wrap="square" lIns="0" rIns="0" tIns="0" bIns="0" anchor="t">
-            <a:spAutoFit/>
-          </a:bodyPr>
-          <a:lstStyle/>
-          <a:p>
-            <a:pPr algn="l">
-              <a:lnSpc>
-                <a:spcPct val="140000"/>
-              </a:lnSpc>
-            </a:pPr>
-            <a:r>
-              <a:rPr sz="1100" b="0" i="0">
-                <a:solidFill>
-                  <a:srgbClr val="5C544A"/>
-                </a:solidFill>
-                <a:latin typeface="Inter"/>
-              </a:rPr>
-              <a:t>650 engineers on C++/WASM + Rust + TS = high-complexity work. Without a structured AI lever, senior talent looks for productivity elsewhere (internal or external).</a:t>
-            </a:r>
-          </a:p>
-        </p:txBody>
-      </p:sp>
-      <p:sp>
-        <p:nvSpPr>
-          <p:cNvPr id="14" name="Rectangle 13"/>
+              <a:t>Format: one insight = one observed fact from discovery + what it triggers.</a:t>
+            </a:r>
+          </a:p>
+        </p:txBody>
+      </p:sp>
+      <p:sp>
+        <p:nvSpPr>
+          <p:cNvPr id="11" name="Rectangle 10"/>
           <p:cNvSpPr/>
           <p:nvPr/>
         </p:nvSpPr>
         <p:spPr>
           <a:xfrm>
-            <a:off x="502920" y="4041648"/>
-            <a:ext cx="11201400" cy="6350"/>
+            <a:off x="502920" y="3246120"/>
+            <a:ext cx="6949440" cy="3200400"/>
+          </a:xfrm>
+          <a:prstGeom prst="rect">
+            <a:avLst/>
+          </a:prstGeom>
+          <a:solidFill>
+            <a:srgbClr val="E5DDCE"/>
+          </a:solidFill>
+          <a:ln>
+            <a:noFill/>
+          </a:ln>
+          <a:effectLst/>
+        </p:spPr>
+        <p:style>
+          <a:lnRef idx="1">
+            <a:schemeClr val="accent1"/>
+          </a:lnRef>
+          <a:fillRef idx="3">
+            <a:schemeClr val="accent1"/>
+          </a:fillRef>
+          <a:effectRef idx="2">
+            <a:schemeClr val="accent1"/>
+          </a:effectRef>
+          <a:fontRef idx="minor">
+            <a:schemeClr val="lt1"/>
+          </a:fontRef>
+        </p:style>
+        <p:txBody>
+          <a:bodyPr rtlCol="0" anchor="ctr"/>
+          <a:lstStyle/>
+          <a:p>
+            <a:pPr algn="ctr"/>
+          </a:p>
+        </p:txBody>
+      </p:sp>
+      <p:sp>
+        <p:nvSpPr>
+          <p:cNvPr id="12" name="Rectangle 11"/>
+          <p:cNvSpPr/>
+          <p:nvPr/>
+        </p:nvSpPr>
+        <p:spPr>
+          <a:xfrm>
+            <a:off x="502920" y="3246120"/>
+            <a:ext cx="6949440" cy="6350"/>
           </a:xfrm>
           <a:prstGeom prst="rect">
             <a:avLst/>
@@ -15463,39 +15297,117 @@
       </p:sp>
       <p:sp>
         <p:nvSpPr>
+          <p:cNvPr id="13" name="TextBox 12"/>
+          <p:cNvSpPr txBox="1"/>
+          <p:nvPr/>
+        </p:nvSpPr>
+        <p:spPr>
+          <a:xfrm>
+            <a:off x="777240" y="3383280"/>
+            <a:ext cx="6400800" cy="365760"/>
+          </a:xfrm>
+          <a:prstGeom prst="rect">
+            <a:avLst/>
+          </a:prstGeom>
+          <a:noFill/>
+        </p:spPr>
+        <p:txBody>
+          <a:bodyPr wrap="square" lIns="0" rIns="0" tIns="0" bIns="0" anchor="t">
+            <a:spAutoFit/>
+          </a:bodyPr>
+          <a:lstStyle/>
+          <a:p>
+            <a:pPr algn="l">
+              <a:lnSpc>
+                <a:spcPct val="115000"/>
+              </a:lnSpc>
+            </a:pPr>
+            <a:r>
+              <a:rPr sz="1000" b="1" i="0" spc="300">
+                <a:solidFill>
+                  <a:srgbClr val="8E867B"/>
+                </a:solidFill>
+                <a:latin typeface="Inter"/>
+              </a:rPr>
+              <a:t>TOP INSIGHTS (formulate live)</a:t>
+            </a:r>
+          </a:p>
+        </p:txBody>
+      </p:sp>
+      <p:sp>
+        <p:nvSpPr>
+          <p:cNvPr id="14" name="TextBox 13"/>
+          <p:cNvSpPr txBox="1"/>
+          <p:nvPr/>
+        </p:nvSpPr>
+        <p:spPr>
+          <a:xfrm>
+            <a:off x="777240" y="3794760"/>
+            <a:ext cx="6400800" cy="457200"/>
+          </a:xfrm>
+          <a:prstGeom prst="rect">
+            <a:avLst/>
+          </a:prstGeom>
+          <a:noFill/>
+        </p:spPr>
+        <p:txBody>
+          <a:bodyPr wrap="square" lIns="0" rIns="0" tIns="0" bIns="0" anchor="t">
+            <a:spAutoFit/>
+          </a:bodyPr>
+          <a:lstStyle/>
+          <a:p>
+            <a:pPr algn="l">
+              <a:lnSpc>
+                <a:spcPct val="140000"/>
+              </a:lnSpc>
+            </a:pPr>
+            <a:r>
+              <a:rPr sz="1150" b="0" i="0">
+                <a:solidFill>
+                  <a:srgbClr val="1F1B16"/>
+                </a:solidFill>
+                <a:latin typeface="Inter"/>
+              </a:rPr>
+              <a:t>1. Does Marcel know about the 31? → if yes, potential champion; if no, visibility gap.</a:t>
+            </a:r>
+          </a:p>
+        </p:txBody>
+      </p:sp>
+      <p:sp>
+        <p:nvSpPr>
           <p:cNvPr id="15" name="TextBox 14"/>
           <p:cNvSpPr txBox="1"/>
           <p:nvPr/>
         </p:nvSpPr>
         <p:spPr>
           <a:xfrm>
-            <a:off x="502920" y="4041648"/>
-            <a:ext cx="274320" cy="365760"/>
-          </a:xfrm>
-          <a:prstGeom prst="rect">
-            <a:avLst/>
-          </a:prstGeom>
-          <a:noFill/>
-        </p:spPr>
-        <p:txBody>
-          <a:bodyPr wrap="square" lIns="0" rIns="0" tIns="0" bIns="0" anchor="t">
-            <a:spAutoFit/>
-          </a:bodyPr>
-          <a:lstStyle/>
-          <a:p>
-            <a:pPr algn="l">
-              <a:lnSpc>
-                <a:spcPct val="115000"/>
-              </a:lnSpc>
-            </a:pPr>
-            <a:r>
-              <a:rPr sz="1400" b="0" i="0">
-                <a:solidFill>
-                  <a:srgbClr val="8E867B"/>
-                </a:solidFill>
-                <a:latin typeface="Inter"/>
-              </a:rPr>
-              <a:t>→</a:t>
+            <a:off x="777240" y="4297680"/>
+            <a:ext cx="6400800" cy="457200"/>
+          </a:xfrm>
+          <a:prstGeom prst="rect">
+            <a:avLst/>
+          </a:prstGeom>
+          <a:noFill/>
+        </p:spPr>
+        <p:txBody>
+          <a:bodyPr wrap="square" lIns="0" rIns="0" tIns="0" bIns="0" anchor="t">
+            <a:spAutoFit/>
+          </a:bodyPr>
+          <a:lstStyle/>
+          <a:p>
+            <a:pPr algn="l">
+              <a:lnSpc>
+                <a:spcPct val="140000"/>
+              </a:lnSpc>
+            </a:pPr>
+            <a:r>
+              <a:rPr sz="1150" b="0" i="0">
+                <a:solidFill>
+                  <a:srgbClr val="1F1B16"/>
+                </a:solidFill>
+                <a:latin typeface="Inter"/>
+              </a:rPr>
+              <a:t>2. Claude Code = real eval or scouting? → real urgency or parked.</a:t>
             </a:r>
           </a:p>
         </p:txBody>
@@ -15508,33 +15420,33 @@
         </p:nvSpPr>
         <p:spPr>
           <a:xfrm>
-            <a:off x="868680" y="4041648"/>
-            <a:ext cx="10789920" cy="365760"/>
-          </a:xfrm>
-          <a:prstGeom prst="rect">
-            <a:avLst/>
-          </a:prstGeom>
-          <a:noFill/>
-        </p:spPr>
-        <p:txBody>
-          <a:bodyPr wrap="square" lIns="0" rIns="0" tIns="0" bIns="0" anchor="t">
-            <a:spAutoFit/>
-          </a:bodyPr>
-          <a:lstStyle/>
-          <a:p>
-            <a:pPr algn="l">
-              <a:lnSpc>
-                <a:spcPct val="115000"/>
-              </a:lnSpc>
-            </a:pPr>
-            <a:r>
-              <a:rPr sz="1250" b="1" i="0">
+            <a:off x="777240" y="4800600"/>
+            <a:ext cx="6400800" cy="457200"/>
+          </a:xfrm>
+          <a:prstGeom prst="rect">
+            <a:avLst/>
+          </a:prstGeom>
+          <a:noFill/>
+        </p:spPr>
+        <p:txBody>
+          <a:bodyPr wrap="square" lIns="0" rIns="0" tIns="0" bIns="0" anchor="t">
+            <a:spAutoFit/>
+          </a:bodyPr>
+          <a:lstStyle/>
+          <a:p>
+            <a:pPr algn="l">
+              <a:lnSpc>
+                <a:spcPct val="140000"/>
+              </a:lnSpc>
+            </a:pPr>
+            <a:r>
+              <a:rPr sz="1150" b="0" i="0">
                 <a:solidFill>
                   <a:srgbClr val="1F1B16"/>
                 </a:solidFill>
                 <a:latin typeface="Inter"/>
               </a:rPr>
-              <a:t>What happens if they do nothing for 3–6 months?</a:t>
+              <a:t>3. Senior IC opt-out on Copilot? → proof of quality gap, not tool absence.</a:t>
             </a:r>
           </a:p>
         </p:txBody>
@@ -15547,8 +15459,8 @@
         </p:nvSpPr>
         <p:spPr>
           <a:xfrm>
-            <a:off x="868680" y="4407408"/>
-            <a:ext cx="10789920" cy="457200"/>
+            <a:off x="777240" y="5303520"/>
+            <a:ext cx="6400800" cy="457200"/>
           </a:xfrm>
           <a:prstGeom prst="rect">
             <a:avLst/>
@@ -15567,27 +15479,110 @@
               </a:lnSpc>
             </a:pPr>
             <a:r>
-              <a:rPr sz="1100" b="0" i="0">
-                <a:solidFill>
-                  <a:srgbClr val="5C544A"/>
-                </a:solidFill>
-                <a:latin typeface="Inter"/>
-              </a:rPr>
-              <a:t>Shadow Cursor grows from 31 to 100+. Claude Code may roll out without governance. The cost isn't the tool — it's uncontrolled security + patterns locked on Copilot.</a:t>
-            </a:r>
-          </a:p>
-        </p:txBody>
-      </p:sp>
-      <p:sp>
-        <p:nvSpPr>
-          <p:cNvPr id="18" name="Rectangle 17"/>
+              <a:rPr sz="1150" b="0" i="0">
+                <a:solidFill>
+                  <a:srgbClr val="1F1B16"/>
+                </a:solidFill>
+                <a:latin typeface="Inter"/>
+              </a:rPr>
+              <a:t>4. Security posture: blocking or facilitating? → deal velocity.</a:t>
+            </a:r>
+          </a:p>
+        </p:txBody>
+      </p:sp>
+      <p:sp>
+        <p:nvSpPr>
+          <p:cNvPr id="18" name="TextBox 17"/>
+          <p:cNvSpPr txBox="1"/>
+          <p:nvPr/>
+        </p:nvSpPr>
+        <p:spPr>
+          <a:xfrm>
+            <a:off x="777240" y="5806440"/>
+            <a:ext cx="6400800" cy="457200"/>
+          </a:xfrm>
+          <a:prstGeom prst="rect">
+            <a:avLst/>
+          </a:prstGeom>
+          <a:noFill/>
+        </p:spPr>
+        <p:txBody>
+          <a:bodyPr wrap="square" lIns="0" rIns="0" tIns="0" bIns="0" anchor="t">
+            <a:spAutoFit/>
+          </a:bodyPr>
+          <a:lstStyle/>
+          <a:p>
+            <a:pPr algn="l">
+              <a:lnSpc>
+                <a:spcPct val="140000"/>
+              </a:lnSpc>
+            </a:pPr>
+            <a:r>
+              <a:rPr sz="1150" b="0" i="0">
+                <a:solidFill>
+                  <a:srgbClr val="1F1B16"/>
+                </a:solidFill>
+                <a:latin typeface="Inter"/>
+              </a:rPr>
+              <a:t>5. Pre-allocated budget? → 3-month vs 9-month signature delay.</a:t>
+            </a:r>
+          </a:p>
+        </p:txBody>
+      </p:sp>
+      <p:sp>
+        <p:nvSpPr>
+          <p:cNvPr id="19" name="Rectangle 18"/>
           <p:cNvSpPr/>
           <p:nvPr/>
         </p:nvSpPr>
         <p:spPr>
           <a:xfrm>
-            <a:off x="502920" y="4882896"/>
-            <a:ext cx="11201400" cy="6350"/>
+            <a:off x="7635240" y="3246120"/>
+            <a:ext cx="4069080" cy="3200400"/>
+          </a:xfrm>
+          <a:prstGeom prst="rect">
+            <a:avLst/>
+          </a:prstGeom>
+          <a:solidFill>
+            <a:srgbClr val="DAD0BE"/>
+          </a:solidFill>
+          <a:ln>
+            <a:noFill/>
+          </a:ln>
+          <a:effectLst/>
+        </p:spPr>
+        <p:style>
+          <a:lnRef idx="1">
+            <a:schemeClr val="accent1"/>
+          </a:lnRef>
+          <a:fillRef idx="3">
+            <a:schemeClr val="accent1"/>
+          </a:fillRef>
+          <a:effectRef idx="2">
+            <a:schemeClr val="accent1"/>
+          </a:effectRef>
+          <a:fontRef idx="minor">
+            <a:schemeClr val="lt1"/>
+          </a:fontRef>
+        </p:style>
+        <p:txBody>
+          <a:bodyPr rtlCol="0" anchor="ctr"/>
+          <a:lstStyle/>
+          <a:p>
+            <a:pPr algn="ctr"/>
+          </a:p>
+        </p:txBody>
+      </p:sp>
+      <p:sp>
+        <p:nvSpPr>
+          <p:cNvPr id="20" name="Rectangle 19"/>
+          <p:cNvSpPr/>
+          <p:nvPr/>
+        </p:nvSpPr>
+        <p:spPr>
+          <a:xfrm>
+            <a:off x="7635240" y="3246120"/>
+            <a:ext cx="4069080" cy="6350"/>
           </a:xfrm>
           <a:prstGeom prst="rect">
             <a:avLst/>
@@ -15624,14 +15619,14 @@
       </p:sp>
       <p:sp>
         <p:nvSpPr>
-          <p:cNvPr id="19" name="TextBox 18"/>
-          <p:cNvSpPr txBox="1"/>
-          <p:nvPr/>
-        </p:nvSpPr>
-        <p:spPr>
-          <a:xfrm>
-            <a:off x="502920" y="4882896"/>
-            <a:ext cx="274320" cy="365760"/>
+          <p:cNvPr id="21" name="TextBox 20"/>
+          <p:cNvSpPr txBox="1"/>
+          <p:nvPr/>
+        </p:nvSpPr>
+        <p:spPr>
+          <a:xfrm>
+            <a:off x="7909560" y="3383280"/>
+            <a:ext cx="3657600" cy="365760"/>
           </a:xfrm>
           <a:prstGeom prst="rect">
             <a:avLst/>
@@ -15650,297 +15645,181 @@
               </a:lnSpc>
             </a:pPr>
             <a:r>
-              <a:rPr sz="1400" b="0" i="0">
+              <a:rPr sz="1000" b="1" i="0" spc="300">
                 <a:solidFill>
                   <a:srgbClr val="8E867B"/>
                 </a:solidFill>
                 <a:latin typeface="Inter"/>
               </a:rPr>
-              <a:t>→</a:t>
-            </a:r>
-          </a:p>
-        </p:txBody>
-      </p:sp>
-      <p:sp>
-        <p:nvSpPr>
-          <p:cNvPr id="20" name="TextBox 19"/>
-          <p:cNvSpPr txBox="1"/>
-          <p:nvPr/>
-        </p:nvSpPr>
-        <p:spPr>
-          <a:xfrm>
-            <a:off x="868680" y="4882896"/>
-            <a:ext cx="10789920" cy="365760"/>
-          </a:xfrm>
-          <a:prstGeom prst="rect">
-            <a:avLst/>
-          </a:prstGeom>
-          <a:noFill/>
-        </p:spPr>
-        <p:txBody>
-          <a:bodyPr wrap="square" lIns="0" rIns="0" tIns="0" bIns="0" anchor="t">
-            <a:spAutoFit/>
-          </a:bodyPr>
-          <a:lstStyle/>
-          <a:p>
-            <a:pPr algn="l">
-              <a:lnSpc>
-                <a:spcPct val="115000"/>
-              </a:lnSpc>
-            </a:pPr>
-            <a:r>
-              <a:rPr sz="1250" b="1" i="0">
+              <a:t>DEAL HYPOTHESIS</a:t>
+            </a:r>
+          </a:p>
+        </p:txBody>
+      </p:sp>
+      <p:sp>
+        <p:nvSpPr>
+          <p:cNvPr id="22" name="TextBox 21"/>
+          <p:cNvSpPr txBox="1"/>
+          <p:nvPr/>
+        </p:nvSpPr>
+        <p:spPr>
+          <a:xfrm>
+            <a:off x="7909560" y="3749039"/>
+            <a:ext cx="3657600" cy="2377440"/>
+          </a:xfrm>
+          <a:prstGeom prst="rect">
+            <a:avLst/>
+          </a:prstGeom>
+          <a:noFill/>
+        </p:spPr>
+        <p:txBody>
+          <a:bodyPr wrap="square" lIns="0" rIns="0" tIns="0" bIns="0" anchor="t">
+            <a:spAutoFit/>
+          </a:bodyPr>
+          <a:lstStyle/>
+          <a:p>
+            <a:pPr algn="l">
+              <a:lnSpc>
+                <a:spcPct val="150000"/>
+              </a:lnSpc>
+            </a:pPr>
+            <a:r>
+              <a:rPr sz="1100" b="0" i="0">
                 <a:solidFill>
                   <a:srgbClr val="1F1B16"/>
                 </a:solidFill>
                 <a:latin typeface="Inter"/>
               </a:rPr>
-              <a:t>Is there a credible champion? Evidence?</a:t>
-            </a:r>
-          </a:p>
-        </p:txBody>
-      </p:sp>
-      <p:sp>
-        <p:nvSpPr>
-          <p:cNvPr id="21" name="TextBox 20"/>
-          <p:cNvSpPr txBox="1"/>
-          <p:nvPr/>
-        </p:nvSpPr>
-        <p:spPr>
-          <a:xfrm>
-            <a:off x="868680" y="5248656"/>
-            <a:ext cx="10789920" cy="457200"/>
-          </a:xfrm>
-          <a:prstGeom prst="rect">
-            <a:avLst/>
-          </a:prstGeom>
-          <a:noFill/>
-        </p:spPr>
-        <p:txBody>
-          <a:bodyPr wrap="square" lIns="0" rIns="0" tIns="0" bIns="0" anchor="t">
-            <a:spAutoFit/>
-          </a:bodyPr>
-          <a:lstStyle/>
-          <a:p>
-            <a:pPr algn="l">
-              <a:lnSpc>
-                <a:spcPct val="140000"/>
+              <a:t>Typical setup:</a:t>
+            </a:r>
+          </a:p>
+          <a:p>
+            <a:pPr algn="l">
+              <a:lnSpc>
+                <a:spcPct val="150000"/>
               </a:lnSpc>
             </a:pPr>
             <a:r>
               <a:rPr sz="1100" b="0" i="0">
                 <a:solidFill>
-                  <a:srgbClr val="5C544A"/>
-                </a:solidFill>
-                <a:latin typeface="Inter"/>
-              </a:rPr>
-              <a:t>To test: does Marcel know about the 31? Is a staff IC among them identifiable? Champion = someone who defends the deal when we're not in the room.</a:t>
-            </a:r>
-          </a:p>
-        </p:txBody>
-      </p:sp>
-      <p:sp>
-        <p:nvSpPr>
-          <p:cNvPr id="22" name="Rectangle 21"/>
-          <p:cNvSpPr/>
-          <p:nvPr/>
-        </p:nvSpPr>
-        <p:spPr>
-          <a:xfrm>
-            <a:off x="502920" y="5724144"/>
-            <a:ext cx="11201400" cy="6350"/>
-          </a:xfrm>
-          <a:prstGeom prst="rect">
-            <a:avLst/>
-          </a:prstGeom>
-          <a:solidFill>
-            <a:srgbClr val="C8BDA8"/>
-          </a:solidFill>
-          <a:ln>
-            <a:noFill/>
-          </a:ln>
-          <a:effectLst/>
-        </p:spPr>
-        <p:style>
-          <a:lnRef idx="1">
-            <a:schemeClr val="accent1"/>
-          </a:lnRef>
-          <a:fillRef idx="3">
-            <a:schemeClr val="accent1"/>
-          </a:fillRef>
-          <a:effectRef idx="2">
-            <a:schemeClr val="accent1"/>
-          </a:effectRef>
-          <a:fontRef idx="minor">
-            <a:schemeClr val="lt1"/>
-          </a:fontRef>
-        </p:style>
-        <p:txBody>
-          <a:bodyPr rtlCol="0" anchor="ctr"/>
-          <a:lstStyle/>
-          <a:p>
-            <a:pPr algn="ctr"/>
-          </a:p>
-        </p:txBody>
-      </p:sp>
-      <p:sp>
-        <p:nvSpPr>
-          <p:cNvPr id="23" name="TextBox 22"/>
-          <p:cNvSpPr txBox="1"/>
-          <p:nvPr/>
-        </p:nvSpPr>
-        <p:spPr>
-          <a:xfrm>
-            <a:off x="502920" y="5724144"/>
-            <a:ext cx="274320" cy="365760"/>
-          </a:xfrm>
-          <a:prstGeom prst="rect">
-            <a:avLst/>
-          </a:prstGeom>
-          <a:noFill/>
-        </p:spPr>
-        <p:txBody>
-          <a:bodyPr wrap="square" lIns="0" rIns="0" tIns="0" bIns="0" anchor="t">
-            <a:spAutoFit/>
-          </a:bodyPr>
-          <a:lstStyle/>
-          <a:p>
-            <a:pPr algn="l">
-              <a:lnSpc>
-                <a:spcPct val="115000"/>
-              </a:lnSpc>
-            </a:pPr>
-            <a:r>
-              <a:rPr sz="1400" b="0" i="0">
-                <a:solidFill>
-                  <a:srgbClr val="8E867B"/>
-                </a:solidFill>
-                <a:latin typeface="Inter"/>
-              </a:rPr>
-              <a:t>→</a:t>
-            </a:r>
-          </a:p>
-        </p:txBody>
-      </p:sp>
-      <p:sp>
-        <p:nvSpPr>
-          <p:cNvPr id="24" name="TextBox 23"/>
-          <p:cNvSpPr txBox="1"/>
-          <p:nvPr/>
-        </p:nvSpPr>
-        <p:spPr>
-          <a:xfrm>
-            <a:off x="868680" y="5724144"/>
-            <a:ext cx="10789920" cy="365760"/>
-          </a:xfrm>
-          <a:prstGeom prst="rect">
-            <a:avLst/>
-          </a:prstGeom>
-          <a:noFill/>
-        </p:spPr>
-        <p:txBody>
-          <a:bodyPr wrap="square" lIns="0" rIns="0" tIns="0" bIns="0" anchor="t">
-            <a:spAutoFit/>
-          </a:bodyPr>
-          <a:lstStyle/>
-          <a:p>
-            <a:pPr algn="l">
-              <a:lnSpc>
-                <a:spcPct val="115000"/>
-              </a:lnSpc>
-            </a:pPr>
-            <a:r>
-              <a:rPr sz="1250" b="1" i="0">
-                <a:solidFill>
                   <a:srgbClr val="1F1B16"/>
                 </a:solidFill>
                 <a:latin typeface="Inter"/>
               </a:rPr>
-              <a:t>How is Cursor uniquely positioned?</a:t>
-            </a:r>
-          </a:p>
-        </p:txBody>
-      </p:sp>
-      <p:sp>
-        <p:nvSpPr>
-          <p:cNvPr id="25" name="TextBox 24"/>
-          <p:cNvSpPr txBox="1"/>
-          <p:nvPr/>
-        </p:nvSpPr>
-        <p:spPr>
-          <a:xfrm>
-            <a:off x="868680" y="6089904"/>
-            <a:ext cx="10789920" cy="457200"/>
-          </a:xfrm>
-          <a:prstGeom prst="rect">
-            <a:avLst/>
-          </a:prstGeom>
-          <a:noFill/>
-        </p:spPr>
-        <p:txBody>
-          <a:bodyPr wrap="square" lIns="0" rIns="0" tIns="0" bIns="0" anchor="t">
-            <a:spAutoFit/>
-          </a:bodyPr>
-          <a:lstStyle/>
-          <a:p>
-            <a:pPr algn="l">
-              <a:lnSpc>
-                <a:spcPct val="140000"/>
+              <a:t>• Medium urgency (Claude Code</a:t>
+            </a:r>
+          </a:p>
+          <a:p>
+            <a:pPr algn="l">
+              <a:lnSpc>
+                <a:spcPct val="150000"/>
               </a:lnSpc>
             </a:pPr>
             <a:r>
               <a:rPr sz="1100" b="0" i="0">
                 <a:solidFill>
-                  <a:srgbClr val="5C544A"/>
-                </a:solidFill>
-                <a:latin typeface="Inter"/>
-              </a:rPr>
-              <a:t>VS Code fork (drop-in for 85% of the team) + model neutrality (vs Claude Code) + large codebase performance (vs Copilot) + Privacy Mode (vs current shadow usage).</a:t>
-            </a:r>
-          </a:p>
-        </p:txBody>
-      </p:sp>
-      <p:sp>
-        <p:nvSpPr>
-          <p:cNvPr id="26" name="Rectangle 25"/>
-          <p:cNvSpPr/>
-          <p:nvPr/>
-        </p:nvSpPr>
-        <p:spPr>
-          <a:xfrm>
-            <a:off x="502920" y="6565392"/>
-            <a:ext cx="11201400" cy="6350"/>
-          </a:xfrm>
-          <a:prstGeom prst="rect">
-            <a:avLst/>
-          </a:prstGeom>
-          <a:solidFill>
-            <a:srgbClr val="C8BDA8"/>
-          </a:solidFill>
-          <a:ln>
-            <a:noFill/>
-          </a:ln>
-          <a:effectLst/>
-        </p:spPr>
-        <p:style>
-          <a:lnRef idx="1">
-            <a:schemeClr val="accent1"/>
-          </a:lnRef>
-          <a:fillRef idx="3">
-            <a:schemeClr val="accent1"/>
-          </a:fillRef>
-          <a:effectRef idx="2">
-            <a:schemeClr val="accent1"/>
-          </a:effectRef>
-          <a:fontRef idx="minor">
-            <a:schemeClr val="lt1"/>
-          </a:fontRef>
-        </p:style>
-        <p:txBody>
-          <a:bodyPr rtlCol="0" anchor="ctr"/>
-          <a:lstStyle/>
-          <a:p>
-            <a:pPr algn="ctr"/>
+                  <a:srgbClr val="1F1B16"/>
+                </a:solidFill>
+                <a:latin typeface="Inter"/>
+              </a:rPr>
+              <a:t>   is in eval, not decision)</a:t>
+            </a:r>
+          </a:p>
+          <a:p>
+            <a:pPr algn="l">
+              <a:lnSpc>
+                <a:spcPct val="150000"/>
+              </a:lnSpc>
+            </a:pPr>
+            <a:r>
+              <a:rPr sz="1100" b="0" i="0">
+                <a:solidFill>
+                  <a:srgbClr val="1F1B16"/>
+                </a:solidFill>
+                <a:latin typeface="Inter"/>
+              </a:rPr>
+              <a:t>• Champion TBD (Marcel? or a</a:t>
+            </a:r>
+          </a:p>
+          <a:p>
+            <a:pPr algn="l">
+              <a:lnSpc>
+                <a:spcPct val="150000"/>
+              </a:lnSpc>
+            </a:pPr>
+            <a:r>
+              <a:rPr sz="1100" b="0" i="0">
+                <a:solidFill>
+                  <a:srgbClr val="1F1B16"/>
+                </a:solidFill>
+                <a:latin typeface="Inter"/>
+              </a:rPr>
+              <a:t>   staff IC among the 31 Pro?)</a:t>
+            </a:r>
+          </a:p>
+          <a:p>
+            <a:pPr algn="l">
+              <a:lnSpc>
+                <a:spcPct val="150000"/>
+              </a:lnSpc>
+            </a:pPr>
+            <a:r>
+              <a:rPr sz="1100" b="0" i="0">
+                <a:solidFill>
+                  <a:srgbClr val="1F1B16"/>
+                </a:solidFill>
+                <a:latin typeface="Inter"/>
+              </a:rPr>
+              <a:t>• Security = real variable</a:t>
+            </a:r>
+          </a:p>
+          <a:p>
+            <a:pPr algn="l">
+              <a:lnSpc>
+                <a:spcPct val="150000"/>
+              </a:lnSpc>
+            </a:pPr>
+            <a:r>
+              <a:rPr sz="1100" b="0" i="0">
+                <a:solidFill>
+                  <a:srgbClr val="1F1B16"/>
+                </a:solidFill>
+                <a:latin typeface="Inter"/>
+              </a:rPr>
+              <a:t>   (deal-maker or deal-killer)</a:t>
+            </a:r>
+          </a:p>
+          <a:p>
+            <a:pPr algn="l">
+              <a:lnSpc>
+                <a:spcPct val="150000"/>
+              </a:lnSpc>
+            </a:pPr>
+            <a:r>
+              <a:rPr sz="1100" b="0" i="0">
+                <a:solidFill>
+                  <a:srgbClr val="1F1B16"/>
+                </a:solidFill>
+                <a:latin typeface="Inter"/>
+              </a:rPr>
+              <a:t>• Realistic deal: 60-day POC,</a:t>
+            </a:r>
+          </a:p>
+          <a:p>
+            <a:pPr algn="l">
+              <a:lnSpc>
+                <a:spcPct val="150000"/>
+              </a:lnSpc>
+            </a:pPr>
+            <a:r>
+              <a:rPr sz="1100" b="0" i="0">
+                <a:solidFill>
+                  <a:srgbClr val="1F1B16"/>
+                </a:solidFill>
+                <a:latin typeface="Inter"/>
+              </a:rPr>
+              <a:t>   500–650 seats at 6–9 months.</a:t>
+            </a:r>
           </a:p>
         </p:txBody>
       </p:sp>
@@ -16079,7 +15958,7 @@
                 </a:solidFill>
                 <a:latin typeface="Inter"/>
               </a:rPr>
-              <a:t>PART 3  ·  DEBRIEF · RISKS + SELF-ASSESS</a:t>
+              <a:t>PART 3  ·  DEBRIEF · STRATEGIC QUESTIONS</a:t>
             </a:r>
           </a:p>
         </p:txBody>
@@ -16157,7 +16036,7 @@
                 </a:solidFill>
                 <a:latin typeface="JetBrains Mono"/>
               </a:rPr>
-              <a:t>22 / 24</a:t>
+              <a:t>22 / 25</a:t>
             </a:r>
           </a:p>
         </p:txBody>
@@ -16240,7 +16119,7 @@
                 </a:solidFill>
                 <a:latin typeface="Inter"/>
               </a:rPr>
-              <a:t>ANTICIPATE, THEN SELF-CRITIQUE</a:t>
+              <a:t>THE 4 QUESTIONS FROM THE PROMPT</a:t>
             </a:r>
           </a:p>
         </p:txBody>
@@ -16279,7 +16158,7 @@
                 </a:solidFill>
                 <a:latin typeface="Inter"/>
               </a:rPr>
-              <a:t>Expected risks + what I would change.</a:t>
+              <a:t>Pre-prepared answers — to reformulate live.</a:t>
             </a:r>
           </a:p>
         </p:txBody>
@@ -16318,65 +16197,138 @@
                 </a:solidFill>
                 <a:latin typeface="Inter"/>
               </a:rPr>
-              <a:t>Self-aware &gt; overconfident. Name the fragilities before they're called out.</a:t>
-            </a:r>
-          </a:p>
-        </p:txBody>
-      </p:sp>
-      <p:sp>
-        <p:nvSpPr>
-          <p:cNvPr id="11" name="Rectangle 10"/>
+              <a:t>Don't recite. Reformulate with what you heard in discovery.</a:t>
+            </a:r>
+          </a:p>
+        </p:txBody>
+      </p:sp>
+      <p:sp>
+        <p:nvSpPr>
+          <p:cNvPr id="11" name="TextBox 10"/>
+          <p:cNvSpPr txBox="1"/>
+          <p:nvPr/>
+        </p:nvSpPr>
+        <p:spPr>
+          <a:xfrm>
+            <a:off x="502920" y="3200400"/>
+            <a:ext cx="274320" cy="365760"/>
+          </a:xfrm>
+          <a:prstGeom prst="rect">
+            <a:avLst/>
+          </a:prstGeom>
+          <a:noFill/>
+        </p:spPr>
+        <p:txBody>
+          <a:bodyPr wrap="square" lIns="0" rIns="0" tIns="0" bIns="0" anchor="t">
+            <a:spAutoFit/>
+          </a:bodyPr>
+          <a:lstStyle/>
+          <a:p>
+            <a:pPr algn="l">
+              <a:lnSpc>
+                <a:spcPct val="115000"/>
+              </a:lnSpc>
+            </a:pPr>
+            <a:r>
+              <a:rPr sz="1400" b="0" i="0">
+                <a:solidFill>
+                  <a:srgbClr val="8E867B"/>
+                </a:solidFill>
+                <a:latin typeface="Inter"/>
+              </a:rPr>
+              <a:t>→</a:t>
+            </a:r>
+          </a:p>
+        </p:txBody>
+      </p:sp>
+      <p:sp>
+        <p:nvSpPr>
+          <p:cNvPr id="12" name="TextBox 11"/>
+          <p:cNvSpPr txBox="1"/>
+          <p:nvPr/>
+        </p:nvSpPr>
+        <p:spPr>
+          <a:xfrm>
+            <a:off x="868680" y="3200400"/>
+            <a:ext cx="10789920" cy="365760"/>
+          </a:xfrm>
+          <a:prstGeom prst="rect">
+            <a:avLst/>
+          </a:prstGeom>
+          <a:noFill/>
+        </p:spPr>
+        <p:txBody>
+          <a:bodyPr wrap="square" lIns="0" rIns="0" tIns="0" bIns="0" anchor="t">
+            <a:spAutoFit/>
+          </a:bodyPr>
+          <a:lstStyle/>
+          <a:p>
+            <a:pPr algn="l">
+              <a:lnSpc>
+                <a:spcPct val="115000"/>
+              </a:lnSpc>
+            </a:pPr>
+            <a:r>
+              <a:rPr sz="1250" b="1" i="0">
+                <a:solidFill>
+                  <a:srgbClr val="1F1B16"/>
+                </a:solidFill>
+                <a:latin typeface="Inter"/>
+              </a:rPr>
+              <a:t>Why does Figma need an AI coding solution — Cursor or not?</a:t>
+            </a:r>
+          </a:p>
+        </p:txBody>
+      </p:sp>
+      <p:sp>
+        <p:nvSpPr>
+          <p:cNvPr id="13" name="TextBox 12"/>
+          <p:cNvSpPr txBox="1"/>
+          <p:nvPr/>
+        </p:nvSpPr>
+        <p:spPr>
+          <a:xfrm>
+            <a:off x="868680" y="3566160"/>
+            <a:ext cx="10789920" cy="457200"/>
+          </a:xfrm>
+          <a:prstGeom prst="rect">
+            <a:avLst/>
+          </a:prstGeom>
+          <a:noFill/>
+        </p:spPr>
+        <p:txBody>
+          <a:bodyPr wrap="square" lIns="0" rIns="0" tIns="0" bIns="0" anchor="t">
+            <a:spAutoFit/>
+          </a:bodyPr>
+          <a:lstStyle/>
+          <a:p>
+            <a:pPr algn="l">
+              <a:lnSpc>
+                <a:spcPct val="140000"/>
+              </a:lnSpc>
+            </a:pPr>
+            <a:r>
+              <a:rPr sz="1100" b="0" i="0">
+                <a:solidFill>
+                  <a:srgbClr val="5C544A"/>
+                </a:solidFill>
+                <a:latin typeface="Inter"/>
+              </a:rPr>
+              <a:t>650 engineers on C++/WASM + Rust + TS = high-complexity work. Without a structured AI lever, senior talent looks for productivity elsewhere (internal or external).</a:t>
+            </a:r>
+          </a:p>
+        </p:txBody>
+      </p:sp>
+      <p:sp>
+        <p:nvSpPr>
+          <p:cNvPr id="14" name="Rectangle 13"/>
           <p:cNvSpPr/>
           <p:nvPr/>
         </p:nvSpPr>
         <p:spPr>
           <a:xfrm>
-            <a:off x="502920" y="3246120"/>
-            <a:ext cx="5577840" cy="3200400"/>
-          </a:xfrm>
-          <a:prstGeom prst="rect">
-            <a:avLst/>
-          </a:prstGeom>
-          <a:solidFill>
-            <a:srgbClr val="E5DDCE"/>
-          </a:solidFill>
-          <a:ln>
-            <a:noFill/>
-          </a:ln>
-          <a:effectLst/>
-        </p:spPr>
-        <p:style>
-          <a:lnRef idx="1">
-            <a:schemeClr val="accent1"/>
-          </a:lnRef>
-          <a:fillRef idx="3">
-            <a:schemeClr val="accent1"/>
-          </a:fillRef>
-          <a:effectRef idx="2">
-            <a:schemeClr val="accent1"/>
-          </a:effectRef>
-          <a:fontRef idx="minor">
-            <a:schemeClr val="lt1"/>
-          </a:fontRef>
-        </p:style>
-        <p:txBody>
-          <a:bodyPr rtlCol="0" anchor="ctr"/>
-          <a:lstStyle/>
-          <a:p>
-            <a:pPr algn="ctr"/>
-          </a:p>
-        </p:txBody>
-      </p:sp>
-      <p:sp>
-        <p:nvSpPr>
-          <p:cNvPr id="12" name="Rectangle 11"/>
-          <p:cNvSpPr/>
-          <p:nvPr/>
-        </p:nvSpPr>
-        <p:spPr>
-          <a:xfrm>
-            <a:off x="502920" y="3246120"/>
-            <a:ext cx="5577840" cy="6350"/>
+            <a:off x="502920" y="4041648"/>
+            <a:ext cx="11201400" cy="6350"/>
           </a:xfrm>
           <a:prstGeom prst="rect">
             <a:avLst/>
@@ -16413,14 +16365,14 @@
       </p:sp>
       <p:sp>
         <p:nvSpPr>
-          <p:cNvPr id="13" name="TextBox 12"/>
-          <p:cNvSpPr txBox="1"/>
-          <p:nvPr/>
-        </p:nvSpPr>
-        <p:spPr>
-          <a:xfrm>
-            <a:off x="777240" y="3383280"/>
-            <a:ext cx="5029200" cy="365760"/>
+          <p:cNvPr id="15" name="TextBox 14"/>
+          <p:cNvSpPr txBox="1"/>
+          <p:nvPr/>
+        </p:nvSpPr>
+        <p:spPr>
+          <a:xfrm>
+            <a:off x="502920" y="4041648"/>
+            <a:ext cx="274320" cy="365760"/>
           </a:xfrm>
           <a:prstGeom prst="rect">
             <a:avLst/>
@@ -16439,27 +16391,27 @@
               </a:lnSpc>
             </a:pPr>
             <a:r>
-              <a:rPr sz="1000" b="1" i="0" spc="300">
+              <a:rPr sz="1400" b="0" i="0">
                 <a:solidFill>
                   <a:srgbClr val="8E867B"/>
                 </a:solidFill>
                 <a:latin typeface="Inter"/>
               </a:rPr>
-              <a:t>ANTICIPATED DEAL RISKS</a:t>
-            </a:r>
-          </a:p>
-        </p:txBody>
-      </p:sp>
-      <p:sp>
-        <p:nvSpPr>
-          <p:cNvPr id="14" name="TextBox 13"/>
-          <p:cNvSpPr txBox="1"/>
-          <p:nvPr/>
-        </p:nvSpPr>
-        <p:spPr>
-          <a:xfrm>
-            <a:off x="777240" y="3794760"/>
-            <a:ext cx="1828800" cy="365760"/>
+              <a:t>→</a:t>
+            </a:r>
+          </a:p>
+        </p:txBody>
+      </p:sp>
+      <p:sp>
+        <p:nvSpPr>
+          <p:cNvPr id="16" name="TextBox 15"/>
+          <p:cNvSpPr txBox="1"/>
+          <p:nvPr/>
+        </p:nvSpPr>
+        <p:spPr>
+          <a:xfrm>
+            <a:off x="868680" y="4041648"/>
+            <a:ext cx="10789920" cy="365760"/>
           </a:xfrm>
           <a:prstGeom prst="rect">
             <a:avLst/>
@@ -16478,422 +16430,66 @@
               </a:lnSpc>
             </a:pPr>
             <a:r>
-              <a:rPr sz="1100" b="1" i="0">
+              <a:rPr sz="1250" b="1" i="0">
                 <a:solidFill>
                   <a:srgbClr val="1F1B16"/>
                 </a:solidFill>
                 <a:latin typeface="Inter"/>
               </a:rPr>
-              <a:t>Claude Code competition</a:t>
-            </a:r>
-          </a:p>
-        </p:txBody>
-      </p:sp>
-      <p:sp>
-        <p:nvSpPr>
-          <p:cNvPr id="15" name="TextBox 14"/>
-          <p:cNvSpPr txBox="1"/>
-          <p:nvPr/>
-        </p:nvSpPr>
-        <p:spPr>
-          <a:xfrm>
-            <a:off x="2651760" y="3794760"/>
-            <a:ext cx="3291840" cy="640080"/>
-          </a:xfrm>
-          <a:prstGeom prst="rect">
-            <a:avLst/>
-          </a:prstGeom>
-          <a:noFill/>
-        </p:spPr>
-        <p:txBody>
-          <a:bodyPr wrap="square" lIns="0" rIns="0" tIns="0" bIns="0" anchor="t">
-            <a:spAutoFit/>
-          </a:bodyPr>
-          <a:lstStyle/>
-          <a:p>
-            <a:pPr algn="l">
-              <a:lnSpc>
-                <a:spcPct val="130000"/>
-              </a:lnSpc>
-            </a:pPr>
-            <a:r>
-              <a:rPr sz="1050" b="0" i="0">
+              <a:t>What happens if they do nothing for 3–6 months?</a:t>
+            </a:r>
+          </a:p>
+        </p:txBody>
+      </p:sp>
+      <p:sp>
+        <p:nvSpPr>
+          <p:cNvPr id="17" name="TextBox 16"/>
+          <p:cNvSpPr txBox="1"/>
+          <p:nvPr/>
+        </p:nvSpPr>
+        <p:spPr>
+          <a:xfrm>
+            <a:off x="868680" y="4407408"/>
+            <a:ext cx="10789920" cy="457200"/>
+          </a:xfrm>
+          <a:prstGeom prst="rect">
+            <a:avLst/>
+          </a:prstGeom>
+          <a:noFill/>
+        </p:spPr>
+        <p:txBody>
+          <a:bodyPr wrap="square" lIns="0" rIns="0" tIns="0" bIns="0" anchor="t">
+            <a:spAutoFit/>
+          </a:bodyPr>
+          <a:lstStyle/>
+          <a:p>
+            <a:pPr algn="l">
+              <a:lnSpc>
+                <a:spcPct val="140000"/>
+              </a:lnSpc>
+            </a:pPr>
+            <a:r>
+              <a:rPr sz="1100" b="0" i="0">
                 <a:solidFill>
                   <a:srgbClr val="5C544A"/>
                 </a:solidFill>
                 <a:latin typeface="Inter"/>
               </a:rPr>
-              <a:t>Eval may conclude 'good enough' before we ship our POC.</a:t>
-            </a:r>
-          </a:p>
-        </p:txBody>
-      </p:sp>
-      <p:sp>
-        <p:nvSpPr>
-          <p:cNvPr id="16" name="TextBox 15"/>
-          <p:cNvSpPr txBox="1"/>
-          <p:nvPr/>
-        </p:nvSpPr>
-        <p:spPr>
-          <a:xfrm>
-            <a:off x="777240" y="4297680"/>
-            <a:ext cx="1828800" cy="365760"/>
-          </a:xfrm>
-          <a:prstGeom prst="rect">
-            <a:avLst/>
-          </a:prstGeom>
-          <a:noFill/>
-        </p:spPr>
-        <p:txBody>
-          <a:bodyPr wrap="square" lIns="0" rIns="0" tIns="0" bIns="0" anchor="t">
-            <a:spAutoFit/>
-          </a:bodyPr>
-          <a:lstStyle/>
-          <a:p>
-            <a:pPr algn="l">
-              <a:lnSpc>
-                <a:spcPct val="115000"/>
-              </a:lnSpc>
-            </a:pPr>
-            <a:r>
-              <a:rPr sz="1100" b="1" i="0">
-                <a:solidFill>
-                  <a:srgbClr val="1F1B16"/>
-                </a:solidFill>
-                <a:latin typeface="Inter"/>
-              </a:rPr>
-              <a:t>Security as blocker</a:t>
-            </a:r>
-          </a:p>
-        </p:txBody>
-      </p:sp>
-      <p:sp>
-        <p:nvSpPr>
-          <p:cNvPr id="17" name="TextBox 16"/>
-          <p:cNvSpPr txBox="1"/>
-          <p:nvPr/>
-        </p:nvSpPr>
-        <p:spPr>
-          <a:xfrm>
-            <a:off x="2651760" y="4297680"/>
-            <a:ext cx="3291840" cy="640080"/>
-          </a:xfrm>
-          <a:prstGeom prst="rect">
-            <a:avLst/>
-          </a:prstGeom>
-          <a:noFill/>
-        </p:spPr>
-        <p:txBody>
-          <a:bodyPr wrap="square" lIns="0" rIns="0" tIns="0" bIns="0" anchor="t">
-            <a:spAutoFit/>
-          </a:bodyPr>
-          <a:lstStyle/>
-          <a:p>
-            <a:pPr algn="l">
-              <a:lnSpc>
-                <a:spcPct val="130000"/>
-              </a:lnSpc>
-            </a:pPr>
-            <a:r>
-              <a:rPr sz="1050" b="0" i="0">
-                <a:solidFill>
-                  <a:srgbClr val="5C544A"/>
-                </a:solidFill>
-                <a:latin typeface="Inter"/>
-              </a:rPr>
-              <a:t>If AppSec isn't addressed D0, pilot slips 3 months.</a:t>
-            </a:r>
-          </a:p>
-        </p:txBody>
-      </p:sp>
-      <p:sp>
-        <p:nvSpPr>
-          <p:cNvPr id="18" name="TextBox 17"/>
-          <p:cNvSpPr txBox="1"/>
-          <p:nvPr/>
-        </p:nvSpPr>
-        <p:spPr>
-          <a:xfrm>
-            <a:off x="777240" y="4800600"/>
-            <a:ext cx="1828800" cy="365760"/>
-          </a:xfrm>
-          <a:prstGeom prst="rect">
-            <a:avLst/>
-          </a:prstGeom>
-          <a:noFill/>
-        </p:spPr>
-        <p:txBody>
-          <a:bodyPr wrap="square" lIns="0" rIns="0" tIns="0" bIns="0" anchor="t">
-            <a:spAutoFit/>
-          </a:bodyPr>
-          <a:lstStyle/>
-          <a:p>
-            <a:pPr algn="l">
-              <a:lnSpc>
-                <a:spcPct val="115000"/>
-              </a:lnSpc>
-            </a:pPr>
-            <a:r>
-              <a:rPr sz="1100" b="1" i="0">
-                <a:solidFill>
-                  <a:srgbClr val="1F1B16"/>
-                </a:solidFill>
-                <a:latin typeface="Inter"/>
-              </a:rPr>
-              <a:t>Internal politics</a:t>
-            </a:r>
-          </a:p>
-        </p:txBody>
-      </p:sp>
-      <p:sp>
-        <p:nvSpPr>
-          <p:cNvPr id="19" name="TextBox 18"/>
-          <p:cNvSpPr txBox="1"/>
-          <p:nvPr/>
-        </p:nvSpPr>
-        <p:spPr>
-          <a:xfrm>
-            <a:off x="2651760" y="4800600"/>
-            <a:ext cx="3291840" cy="640080"/>
-          </a:xfrm>
-          <a:prstGeom prst="rect">
-            <a:avLst/>
-          </a:prstGeom>
-          <a:noFill/>
-        </p:spPr>
-        <p:txBody>
-          <a:bodyPr wrap="square" lIns="0" rIns="0" tIns="0" bIns="0" anchor="t">
-            <a:spAutoFit/>
-          </a:bodyPr>
-          <a:lstStyle/>
-          <a:p>
-            <a:pPr algn="l">
-              <a:lnSpc>
-                <a:spcPct val="130000"/>
-              </a:lnSpc>
-            </a:pPr>
-            <a:r>
-              <a:rPr sz="1050" b="0" i="0">
-                <a:solidFill>
-                  <a:srgbClr val="5C544A"/>
-                </a:solidFill>
-                <a:latin typeface="Inter"/>
-              </a:rPr>
-              <a:t>Copilot has an internal sponsor — switch read as a failure.</a:t>
-            </a:r>
-          </a:p>
-        </p:txBody>
-      </p:sp>
-      <p:sp>
-        <p:nvSpPr>
-          <p:cNvPr id="20" name="TextBox 19"/>
-          <p:cNvSpPr txBox="1"/>
-          <p:nvPr/>
-        </p:nvSpPr>
-        <p:spPr>
-          <a:xfrm>
-            <a:off x="777240" y="5303520"/>
-            <a:ext cx="1828800" cy="365760"/>
-          </a:xfrm>
-          <a:prstGeom prst="rect">
-            <a:avLst/>
-          </a:prstGeom>
-          <a:noFill/>
-        </p:spPr>
-        <p:txBody>
-          <a:bodyPr wrap="square" lIns="0" rIns="0" tIns="0" bIns="0" anchor="t">
-            <a:spAutoFit/>
-          </a:bodyPr>
-          <a:lstStyle/>
-          <a:p>
-            <a:pPr algn="l">
-              <a:lnSpc>
-                <a:spcPct val="115000"/>
-              </a:lnSpc>
-            </a:pPr>
-            <a:r>
-              <a:rPr sz="1100" b="1" i="0">
-                <a:solidFill>
-                  <a:srgbClr val="1F1B16"/>
-                </a:solidFill>
-                <a:latin typeface="Inter"/>
-              </a:rPr>
-              <a:t>Tool sprawl</a:t>
-            </a:r>
-          </a:p>
-        </p:txBody>
-      </p:sp>
-      <p:sp>
-        <p:nvSpPr>
-          <p:cNvPr id="21" name="TextBox 20"/>
-          <p:cNvSpPr txBox="1"/>
-          <p:nvPr/>
-        </p:nvSpPr>
-        <p:spPr>
-          <a:xfrm>
-            <a:off x="2651760" y="5303520"/>
-            <a:ext cx="3291840" cy="640080"/>
-          </a:xfrm>
-          <a:prstGeom prst="rect">
-            <a:avLst/>
-          </a:prstGeom>
-          <a:noFill/>
-        </p:spPr>
-        <p:txBody>
-          <a:bodyPr wrap="square" lIns="0" rIns="0" tIns="0" bIns="0" anchor="t">
-            <a:spAutoFit/>
-          </a:bodyPr>
-          <a:lstStyle/>
-          <a:p>
-            <a:pPr algn="l">
-              <a:lnSpc>
-                <a:spcPct val="130000"/>
-              </a:lnSpc>
-            </a:pPr>
-            <a:r>
-              <a:rPr sz="1050" b="0" i="0">
-                <a:solidFill>
-                  <a:srgbClr val="5C544A"/>
-                </a:solidFill>
-                <a:latin typeface="Inter"/>
-              </a:rPr>
-              <a:t>Cursor + Copilot + Claude Code in parallel = no one decides.</a:t>
-            </a:r>
-          </a:p>
-        </p:txBody>
-      </p:sp>
-      <p:sp>
-        <p:nvSpPr>
-          <p:cNvPr id="22" name="TextBox 21"/>
-          <p:cNvSpPr txBox="1"/>
-          <p:nvPr/>
-        </p:nvSpPr>
-        <p:spPr>
-          <a:xfrm>
-            <a:off x="777240" y="5806440"/>
-            <a:ext cx="1828800" cy="365760"/>
-          </a:xfrm>
-          <a:prstGeom prst="rect">
-            <a:avLst/>
-          </a:prstGeom>
-          <a:noFill/>
-        </p:spPr>
-        <p:txBody>
-          <a:bodyPr wrap="square" lIns="0" rIns="0" tIns="0" bIns="0" anchor="t">
-            <a:spAutoFit/>
-          </a:bodyPr>
-          <a:lstStyle/>
-          <a:p>
-            <a:pPr algn="l">
-              <a:lnSpc>
-                <a:spcPct val="115000"/>
-              </a:lnSpc>
-            </a:pPr>
-            <a:r>
-              <a:rPr sz="1100" b="1" i="0">
-                <a:solidFill>
-                  <a:srgbClr val="1F1B16"/>
-                </a:solidFill>
-                <a:latin typeface="Inter"/>
-              </a:rPr>
-              <a:t>Procurement</a:t>
-            </a:r>
-          </a:p>
-        </p:txBody>
-      </p:sp>
-      <p:sp>
-        <p:nvSpPr>
-          <p:cNvPr id="23" name="TextBox 22"/>
-          <p:cNvSpPr txBox="1"/>
-          <p:nvPr/>
-        </p:nvSpPr>
-        <p:spPr>
-          <a:xfrm>
-            <a:off x="2651760" y="5806440"/>
-            <a:ext cx="3291840" cy="640080"/>
-          </a:xfrm>
-          <a:prstGeom prst="rect">
-            <a:avLst/>
-          </a:prstGeom>
-          <a:noFill/>
-        </p:spPr>
-        <p:txBody>
-          <a:bodyPr wrap="square" lIns="0" rIns="0" tIns="0" bIns="0" anchor="t">
-            <a:spAutoFit/>
-          </a:bodyPr>
-          <a:lstStyle/>
-          <a:p>
-            <a:pPr algn="l">
-              <a:lnSpc>
-                <a:spcPct val="130000"/>
-              </a:lnSpc>
-            </a:pPr>
-            <a:r>
-              <a:rPr sz="1050" b="0" i="0">
-                <a:solidFill>
-                  <a:srgbClr val="5C544A"/>
-                </a:solidFill>
-                <a:latin typeface="Inter"/>
-              </a:rPr>
-              <a:t>Vendor risk review + DPA = 60–90 days, non-compressible.</a:t>
-            </a:r>
-          </a:p>
-        </p:txBody>
-      </p:sp>
-      <p:sp>
-        <p:nvSpPr>
-          <p:cNvPr id="24" name="Rectangle 23"/>
+              <a:t>Shadow Cursor grows from 31 to 100+. Claude Code may roll out without governance. The cost isn't the tool — it's uncontrolled security + patterns locked on Copilot.</a:t>
+            </a:r>
+          </a:p>
+        </p:txBody>
+      </p:sp>
+      <p:sp>
+        <p:nvSpPr>
+          <p:cNvPr id="18" name="Rectangle 17"/>
           <p:cNvSpPr/>
           <p:nvPr/>
         </p:nvSpPr>
         <p:spPr>
           <a:xfrm>
-            <a:off x="6263640" y="3246120"/>
-            <a:ext cx="5440680" cy="3200400"/>
-          </a:xfrm>
-          <a:prstGeom prst="rect">
-            <a:avLst/>
-          </a:prstGeom>
-          <a:solidFill>
-            <a:srgbClr val="DAD0BE"/>
-          </a:solidFill>
-          <a:ln>
-            <a:noFill/>
-          </a:ln>
-          <a:effectLst/>
-        </p:spPr>
-        <p:style>
-          <a:lnRef idx="1">
-            <a:schemeClr val="accent1"/>
-          </a:lnRef>
-          <a:fillRef idx="3">
-            <a:schemeClr val="accent1"/>
-          </a:fillRef>
-          <a:effectRef idx="2">
-            <a:schemeClr val="accent1"/>
-          </a:effectRef>
-          <a:fontRef idx="minor">
-            <a:schemeClr val="lt1"/>
-          </a:fontRef>
-        </p:style>
-        <p:txBody>
-          <a:bodyPr rtlCol="0" anchor="ctr"/>
-          <a:lstStyle/>
-          <a:p>
-            <a:pPr algn="ctr"/>
-          </a:p>
-        </p:txBody>
-      </p:sp>
-      <p:sp>
-        <p:nvSpPr>
-          <p:cNvPr id="25" name="Rectangle 24"/>
-          <p:cNvSpPr/>
-          <p:nvPr/>
-        </p:nvSpPr>
-        <p:spPr>
-          <a:xfrm>
-            <a:off x="6263640" y="3246120"/>
-            <a:ext cx="5440680" cy="6350"/>
+            <a:off x="502920" y="4882896"/>
+            <a:ext cx="11201400" cy="6350"/>
           </a:xfrm>
           <a:prstGeom prst="rect">
             <a:avLst/>
@@ -16930,14 +16526,14 @@
       </p:sp>
       <p:sp>
         <p:nvSpPr>
-          <p:cNvPr id="26" name="TextBox 25"/>
-          <p:cNvSpPr txBox="1"/>
-          <p:nvPr/>
-        </p:nvSpPr>
-        <p:spPr>
-          <a:xfrm>
-            <a:off x="6537960" y="3383280"/>
-            <a:ext cx="5029200" cy="365760"/>
+          <p:cNvPr id="19" name="TextBox 18"/>
+          <p:cNvSpPr txBox="1"/>
+          <p:nvPr/>
+        </p:nvSpPr>
+        <p:spPr>
+          <a:xfrm>
+            <a:off x="502920" y="4882896"/>
+            <a:ext cx="274320" cy="365760"/>
           </a:xfrm>
           <a:prstGeom prst="rect">
             <a:avLst/>
@@ -16956,27 +16552,27 @@
               </a:lnSpc>
             </a:pPr>
             <a:r>
-              <a:rPr sz="1000" b="1" i="0" spc="300">
+              <a:rPr sz="1400" b="0" i="0">
                 <a:solidFill>
                   <a:srgbClr val="8E867B"/>
                 </a:solidFill>
                 <a:latin typeface="Inter"/>
               </a:rPr>
-              <a:t>SELF-ASSESSMENT (template)</a:t>
-            </a:r>
-          </a:p>
-        </p:txBody>
-      </p:sp>
-      <p:sp>
-        <p:nvSpPr>
-          <p:cNvPr id="27" name="TextBox 26"/>
-          <p:cNvSpPr txBox="1"/>
-          <p:nvPr/>
-        </p:nvSpPr>
-        <p:spPr>
-          <a:xfrm>
-            <a:off x="6537960" y="3794760"/>
-            <a:ext cx="5029200" cy="365760"/>
+              <a:t>→</a:t>
+            </a:r>
+          </a:p>
+        </p:txBody>
+      </p:sp>
+      <p:sp>
+        <p:nvSpPr>
+          <p:cNvPr id="20" name="TextBox 19"/>
+          <p:cNvSpPr txBox="1"/>
+          <p:nvPr/>
+        </p:nvSpPr>
+        <p:spPr>
+          <a:xfrm>
+            <a:off x="868680" y="4882896"/>
+            <a:ext cx="10789920" cy="365760"/>
           </a:xfrm>
           <a:prstGeom prst="rect">
             <a:avLst/>
@@ -16995,27 +16591,27 @@
               </a:lnSpc>
             </a:pPr>
             <a:r>
-              <a:rPr sz="1150" b="1" i="0">
+              <a:rPr sz="1250" b="1" i="0">
                 <a:solidFill>
                   <a:srgbClr val="1F1B16"/>
                 </a:solidFill>
                 <a:latin typeface="Inter"/>
               </a:rPr>
-              <a:t>What worked</a:t>
-            </a:r>
-          </a:p>
-        </p:txBody>
-      </p:sp>
-      <p:sp>
-        <p:nvSpPr>
-          <p:cNvPr id="28" name="TextBox 27"/>
-          <p:cNvSpPr txBox="1"/>
-          <p:nvPr/>
-        </p:nvSpPr>
-        <p:spPr>
-          <a:xfrm>
-            <a:off x="6537960" y="4114800"/>
-            <a:ext cx="5029200" cy="640080"/>
+              <a:t>Is there a credible champion? Evidence?</a:t>
+            </a:r>
+          </a:p>
+        </p:txBody>
+      </p:sp>
+      <p:sp>
+        <p:nvSpPr>
+          <p:cNvPr id="21" name="TextBox 20"/>
+          <p:cNvSpPr txBox="1"/>
+          <p:nvPr/>
+        </p:nvSpPr>
+        <p:spPr>
+          <a:xfrm>
+            <a:off x="868680" y="5248656"/>
+            <a:ext cx="10789920" cy="457200"/>
           </a:xfrm>
           <a:prstGeom prst="rect">
             <a:avLst/>
@@ -17034,15 +16630,160 @@
               </a:lnSpc>
             </a:pPr>
             <a:r>
-              <a:rPr sz="1050" b="0" i="0">
+              <a:rPr sz="1100" b="0" i="0">
                 <a:solidFill>
                   <a:srgbClr val="5C544A"/>
                 </a:solidFill>
                 <a:latin typeface="Inter"/>
               </a:rPr>
-              <a:t>Opening on the 31 Pro = proof of prep.</a:t>
-            </a:r>
-          </a:p>
+              <a:t>To test: does Marcel know about the 31? Is a staff IC among them identifiable? Champion = someone who defends the deal when we're not in the room.</a:t>
+            </a:r>
+          </a:p>
+        </p:txBody>
+      </p:sp>
+      <p:sp>
+        <p:nvSpPr>
+          <p:cNvPr id="22" name="Rectangle 21"/>
+          <p:cNvSpPr/>
+          <p:nvPr/>
+        </p:nvSpPr>
+        <p:spPr>
+          <a:xfrm>
+            <a:off x="502920" y="5724144"/>
+            <a:ext cx="11201400" cy="6350"/>
+          </a:xfrm>
+          <a:prstGeom prst="rect">
+            <a:avLst/>
+          </a:prstGeom>
+          <a:solidFill>
+            <a:srgbClr val="C8BDA8"/>
+          </a:solidFill>
+          <a:ln>
+            <a:noFill/>
+          </a:ln>
+          <a:effectLst/>
+        </p:spPr>
+        <p:style>
+          <a:lnRef idx="1">
+            <a:schemeClr val="accent1"/>
+          </a:lnRef>
+          <a:fillRef idx="3">
+            <a:schemeClr val="accent1"/>
+          </a:fillRef>
+          <a:effectRef idx="2">
+            <a:schemeClr val="accent1"/>
+          </a:effectRef>
+          <a:fontRef idx="minor">
+            <a:schemeClr val="lt1"/>
+          </a:fontRef>
+        </p:style>
+        <p:txBody>
+          <a:bodyPr rtlCol="0" anchor="ctr"/>
+          <a:lstStyle/>
+          <a:p>
+            <a:pPr algn="ctr"/>
+          </a:p>
+        </p:txBody>
+      </p:sp>
+      <p:sp>
+        <p:nvSpPr>
+          <p:cNvPr id="23" name="TextBox 22"/>
+          <p:cNvSpPr txBox="1"/>
+          <p:nvPr/>
+        </p:nvSpPr>
+        <p:spPr>
+          <a:xfrm>
+            <a:off x="502920" y="5724144"/>
+            <a:ext cx="274320" cy="365760"/>
+          </a:xfrm>
+          <a:prstGeom prst="rect">
+            <a:avLst/>
+          </a:prstGeom>
+          <a:noFill/>
+        </p:spPr>
+        <p:txBody>
+          <a:bodyPr wrap="square" lIns="0" rIns="0" tIns="0" bIns="0" anchor="t">
+            <a:spAutoFit/>
+          </a:bodyPr>
+          <a:lstStyle/>
+          <a:p>
+            <a:pPr algn="l">
+              <a:lnSpc>
+                <a:spcPct val="115000"/>
+              </a:lnSpc>
+            </a:pPr>
+            <a:r>
+              <a:rPr sz="1400" b="0" i="0">
+                <a:solidFill>
+                  <a:srgbClr val="8E867B"/>
+                </a:solidFill>
+                <a:latin typeface="Inter"/>
+              </a:rPr>
+              <a:t>→</a:t>
+            </a:r>
+          </a:p>
+        </p:txBody>
+      </p:sp>
+      <p:sp>
+        <p:nvSpPr>
+          <p:cNvPr id="24" name="TextBox 23"/>
+          <p:cNvSpPr txBox="1"/>
+          <p:nvPr/>
+        </p:nvSpPr>
+        <p:spPr>
+          <a:xfrm>
+            <a:off x="868680" y="5724144"/>
+            <a:ext cx="10789920" cy="365760"/>
+          </a:xfrm>
+          <a:prstGeom prst="rect">
+            <a:avLst/>
+          </a:prstGeom>
+          <a:noFill/>
+        </p:spPr>
+        <p:txBody>
+          <a:bodyPr wrap="square" lIns="0" rIns="0" tIns="0" bIns="0" anchor="t">
+            <a:spAutoFit/>
+          </a:bodyPr>
+          <a:lstStyle/>
+          <a:p>
+            <a:pPr algn="l">
+              <a:lnSpc>
+                <a:spcPct val="115000"/>
+              </a:lnSpc>
+            </a:pPr>
+            <a:r>
+              <a:rPr sz="1250" b="1" i="0">
+                <a:solidFill>
+                  <a:srgbClr val="1F1B16"/>
+                </a:solidFill>
+                <a:latin typeface="Inter"/>
+              </a:rPr>
+              <a:t>How is Cursor uniquely positioned?</a:t>
+            </a:r>
+          </a:p>
+        </p:txBody>
+      </p:sp>
+      <p:sp>
+        <p:nvSpPr>
+          <p:cNvPr id="25" name="TextBox 24"/>
+          <p:cNvSpPr txBox="1"/>
+          <p:nvPr/>
+        </p:nvSpPr>
+        <p:spPr>
+          <a:xfrm>
+            <a:off x="868680" y="6089904"/>
+            <a:ext cx="10789920" cy="457200"/>
+          </a:xfrm>
+          <a:prstGeom prst="rect">
+            <a:avLst/>
+          </a:prstGeom>
+          <a:noFill/>
+        </p:spPr>
+        <p:txBody>
+          <a:bodyPr wrap="square" lIns="0" rIns="0" tIns="0" bIns="0" anchor="t">
+            <a:spAutoFit/>
+          </a:bodyPr>
+          <a:lstStyle/>
           <a:p>
             <a:pPr algn="l">
               <a:lnSpc>
@@ -17050,202 +16791,58 @@
               </a:lnSpc>
             </a:pPr>
             <a:r>
-              <a:rPr sz="1050" b="0" i="0">
+              <a:rPr sz="1100" b="0" i="0">
                 <a:solidFill>
                   <a:srgbClr val="5C544A"/>
                 </a:solidFill>
                 <a:latin typeface="Inter"/>
               </a:rPr>
-              <a:t>Letting Marcel articulate 'why now'.</a:t>
-            </a:r>
-          </a:p>
-        </p:txBody>
-      </p:sp>
-      <p:sp>
-        <p:nvSpPr>
-          <p:cNvPr id="29" name="TextBox 28"/>
-          <p:cNvSpPr txBox="1"/>
-          <p:nvPr/>
-        </p:nvSpPr>
-        <p:spPr>
-          <a:xfrm>
-            <a:off x="6537960" y="4663440"/>
-            <a:ext cx="5029200" cy="365760"/>
-          </a:xfrm>
-          <a:prstGeom prst="rect">
-            <a:avLst/>
-          </a:prstGeom>
-          <a:noFill/>
-        </p:spPr>
-        <p:txBody>
-          <a:bodyPr wrap="square" lIns="0" rIns="0" tIns="0" bIns="0" anchor="t">
-            <a:spAutoFit/>
-          </a:bodyPr>
-          <a:lstStyle/>
-          <a:p>
-            <a:pPr algn="l">
-              <a:lnSpc>
-                <a:spcPct val="115000"/>
-              </a:lnSpc>
-            </a:pPr>
-            <a:r>
-              <a:rPr sz="1150" b="1" i="0">
-                <a:solidFill>
-                  <a:srgbClr val="1F1B16"/>
-                </a:solidFill>
-                <a:latin typeface="Inter"/>
-              </a:rPr>
-              <a:t>What I'd change</a:t>
-            </a:r>
-          </a:p>
-        </p:txBody>
-      </p:sp>
-      <p:sp>
-        <p:nvSpPr>
-          <p:cNvPr id="30" name="TextBox 29"/>
-          <p:cNvSpPr txBox="1"/>
-          <p:nvPr/>
-        </p:nvSpPr>
-        <p:spPr>
-          <a:xfrm>
-            <a:off x="6537960" y="4983480"/>
-            <a:ext cx="5029200" cy="640080"/>
-          </a:xfrm>
-          <a:prstGeom prst="rect">
-            <a:avLst/>
-          </a:prstGeom>
-          <a:noFill/>
-        </p:spPr>
-        <p:txBody>
-          <a:bodyPr wrap="square" lIns="0" rIns="0" tIns="0" bIns="0" anchor="t">
-            <a:spAutoFit/>
-          </a:bodyPr>
-          <a:lstStyle/>
-          <a:p>
-            <a:pPr algn="l">
-              <a:lnSpc>
-                <a:spcPct val="140000"/>
-              </a:lnSpc>
-            </a:pPr>
-            <a:r>
-              <a:rPr sz="1050" b="0" i="0">
-                <a:solidFill>
-                  <a:srgbClr val="5C544A"/>
-                </a:solidFill>
-                <a:latin typeface="Inter"/>
-              </a:rPr>
-              <a:t>More time on concrete use cases (refactors vs review).</a:t>
-            </a:r>
-          </a:p>
-          <a:p>
-            <a:pPr algn="l">
-              <a:lnSpc>
-                <a:spcPct val="140000"/>
-              </a:lnSpc>
-            </a:pPr>
-            <a:r>
-              <a:rPr sz="1050" b="0" i="0">
-                <a:solidFill>
-                  <a:srgbClr val="5C544A"/>
-                </a:solidFill>
-                <a:latin typeface="Inter"/>
-              </a:rPr>
-              <a:t>Push earlier on budget.</a:t>
-            </a:r>
-          </a:p>
-        </p:txBody>
-      </p:sp>
-      <p:sp>
-        <p:nvSpPr>
-          <p:cNvPr id="31" name="TextBox 30"/>
-          <p:cNvSpPr txBox="1"/>
-          <p:nvPr/>
-        </p:nvSpPr>
-        <p:spPr>
-          <a:xfrm>
-            <a:off x="6537960" y="5532120"/>
-            <a:ext cx="5029200" cy="365760"/>
-          </a:xfrm>
-          <a:prstGeom prst="rect">
-            <a:avLst/>
-          </a:prstGeom>
-          <a:noFill/>
-        </p:spPr>
-        <p:txBody>
-          <a:bodyPr wrap="square" lIns="0" rIns="0" tIns="0" bIns="0" anchor="t">
-            <a:spAutoFit/>
-          </a:bodyPr>
-          <a:lstStyle/>
-          <a:p>
-            <a:pPr algn="l">
-              <a:lnSpc>
-                <a:spcPct val="115000"/>
-              </a:lnSpc>
-            </a:pPr>
-            <a:r>
-              <a:rPr sz="1150" b="1" i="0">
-                <a:solidFill>
-                  <a:srgbClr val="1F1B16"/>
-                </a:solidFill>
-                <a:latin typeface="Inter"/>
-              </a:rPr>
-              <a:t>Greenfield → disco</a:t>
-            </a:r>
-          </a:p>
-        </p:txBody>
-      </p:sp>
-      <p:sp>
-        <p:nvSpPr>
-          <p:cNvPr id="32" name="TextBox 31"/>
-          <p:cNvSpPr txBox="1"/>
-          <p:nvPr/>
-        </p:nvSpPr>
-        <p:spPr>
-          <a:xfrm>
-            <a:off x="6537960" y="5852160"/>
-            <a:ext cx="5029200" cy="640080"/>
-          </a:xfrm>
-          <a:prstGeom prst="rect">
-            <a:avLst/>
-          </a:prstGeom>
-          <a:noFill/>
-        </p:spPr>
-        <p:txBody>
-          <a:bodyPr wrap="square" lIns="0" rIns="0" tIns="0" bIns="0" anchor="t">
-            <a:spAutoFit/>
-          </a:bodyPr>
-          <a:lstStyle/>
-          <a:p>
-            <a:pPr algn="l">
-              <a:lnSpc>
-                <a:spcPct val="140000"/>
-              </a:lnSpc>
-            </a:pPr>
-            <a:r>
-              <a:rPr sz="1050" b="0" i="0">
-                <a:solidFill>
-                  <a:srgbClr val="5C544A"/>
-                </a:solidFill>
-                <a:latin typeface="Inter"/>
-              </a:rPr>
-              <a:t>Account thesis fuels targeted questions.</a:t>
-            </a:r>
-          </a:p>
-          <a:p>
-            <a:pPr algn="l">
-              <a:lnSpc>
-                <a:spcPct val="140000"/>
-              </a:lnSpc>
-            </a:pPr>
-            <a:r>
-              <a:rPr sz="1050" b="0" i="0">
-                <a:solidFill>
-                  <a:srgbClr val="5C544A"/>
-                </a:solidFill>
-                <a:latin typeface="Inter"/>
-              </a:rPr>
-              <a:t>Known facts = wedges, not accessories.</a:t>
-            </a:r>
+              <a:t>VS Code fork (drop-in for 85% of the team) + model neutrality (vs Claude Code) + large codebase performance (vs Copilot) + Privacy Mode (vs current shadow usage).</a:t>
+            </a:r>
+          </a:p>
+        </p:txBody>
+      </p:sp>
+      <p:sp>
+        <p:nvSpPr>
+          <p:cNvPr id="26" name="Rectangle 25"/>
+          <p:cNvSpPr/>
+          <p:nvPr/>
+        </p:nvSpPr>
+        <p:spPr>
+          <a:xfrm>
+            <a:off x="502920" y="6565392"/>
+            <a:ext cx="11201400" cy="6350"/>
+          </a:xfrm>
+          <a:prstGeom prst="rect">
+            <a:avLst/>
+          </a:prstGeom>
+          <a:solidFill>
+            <a:srgbClr val="C8BDA8"/>
+          </a:solidFill>
+          <a:ln>
+            <a:noFill/>
+          </a:ln>
+          <a:effectLst/>
+        </p:spPr>
+        <p:style>
+          <a:lnRef idx="1">
+            <a:schemeClr val="accent1"/>
+          </a:lnRef>
+          <a:fillRef idx="3">
+            <a:schemeClr val="accent1"/>
+          </a:fillRef>
+          <a:effectRef idx="2">
+            <a:schemeClr val="accent1"/>
+          </a:effectRef>
+          <a:fontRef idx="minor">
+            <a:schemeClr val="lt1"/>
+          </a:fontRef>
+        </p:style>
+        <p:txBody>
+          <a:bodyPr rtlCol="0" anchor="ctr"/>
+          <a:lstStyle/>
+          <a:p>
+            <a:pPr algn="ctr"/>
           </a:p>
         </p:txBody>
       </p:sp>
@@ -17384,7 +16981,7 @@
                 </a:solidFill>
                 <a:latin typeface="Inter"/>
               </a:rPr>
-              <a:t>PART 2  ·  ANTI-BLANK · KEY PHRASES</a:t>
+              <a:t>PART 3  ·  DEBRIEF · RISKS + SELF-ASSESS</a:t>
             </a:r>
           </a:p>
         </p:txBody>
@@ -17462,7 +17059,7 @@
                 </a:solidFill>
                 <a:latin typeface="JetBrains Mono"/>
               </a:rPr>
-              <a:t>23 / 24</a:t>
+              <a:t>23 / 25</a:t>
             </a:r>
           </a:p>
         </p:txBody>
@@ -17545,7 +17142,7 @@
                 </a:solidFill>
                 <a:latin typeface="Inter"/>
               </a:rPr>
-              <a:t>WHEN YOU LOSE THE THREAD</a:t>
+              <a:t>ANTICIPATE, THEN SELF-CRITIQUE</a:t>
             </a:r>
           </a:p>
         </p:txBody>
@@ -17584,7 +17181,7 @@
                 </a:solidFill>
                 <a:latin typeface="Inter"/>
               </a:rPr>
-              <a:t>6 phrases to use word-for-word.</a:t>
+              <a:t>Expected risks + what I would change.</a:t>
             </a:r>
           </a:p>
         </p:txBody>
@@ -17623,21 +17220,109 @@
                 </a:solidFill>
                 <a:latin typeface="Inter"/>
               </a:rPr>
-              <a:t>Take the wheel back without pitching. Keep executive presence under pressure.</a:t>
-            </a:r>
-          </a:p>
-        </p:txBody>
-      </p:sp>
-      <p:sp>
-        <p:nvSpPr>
-          <p:cNvPr id="11" name="TextBox 10"/>
-          <p:cNvSpPr txBox="1"/>
+              <a:t>Self-aware &gt; overconfident. Name the fragilities before they're called out.</a:t>
+            </a:r>
+          </a:p>
+        </p:txBody>
+      </p:sp>
+      <p:sp>
+        <p:nvSpPr>
+          <p:cNvPr id="11" name="Rectangle 10"/>
+          <p:cNvSpPr/>
           <p:nvPr/>
         </p:nvSpPr>
         <p:spPr>
           <a:xfrm>
             <a:off x="502920" y="3246120"/>
-            <a:ext cx="5349240" cy="365760"/>
+            <a:ext cx="5577840" cy="3200400"/>
+          </a:xfrm>
+          <a:prstGeom prst="rect">
+            <a:avLst/>
+          </a:prstGeom>
+          <a:solidFill>
+            <a:srgbClr val="E5DDCE"/>
+          </a:solidFill>
+          <a:ln>
+            <a:noFill/>
+          </a:ln>
+          <a:effectLst/>
+        </p:spPr>
+        <p:style>
+          <a:lnRef idx="1">
+            <a:schemeClr val="accent1"/>
+          </a:lnRef>
+          <a:fillRef idx="3">
+            <a:schemeClr val="accent1"/>
+          </a:fillRef>
+          <a:effectRef idx="2">
+            <a:schemeClr val="accent1"/>
+          </a:effectRef>
+          <a:fontRef idx="minor">
+            <a:schemeClr val="lt1"/>
+          </a:fontRef>
+        </p:style>
+        <p:txBody>
+          <a:bodyPr rtlCol="0" anchor="ctr"/>
+          <a:lstStyle/>
+          <a:p>
+            <a:pPr algn="ctr"/>
+          </a:p>
+        </p:txBody>
+      </p:sp>
+      <p:sp>
+        <p:nvSpPr>
+          <p:cNvPr id="12" name="Rectangle 11"/>
+          <p:cNvSpPr/>
+          <p:nvPr/>
+        </p:nvSpPr>
+        <p:spPr>
+          <a:xfrm>
+            <a:off x="502920" y="3246120"/>
+            <a:ext cx="5577840" cy="6350"/>
+          </a:xfrm>
+          <a:prstGeom prst="rect">
+            <a:avLst/>
+          </a:prstGeom>
+          <a:solidFill>
+            <a:srgbClr val="C8BDA8"/>
+          </a:solidFill>
+          <a:ln>
+            <a:noFill/>
+          </a:ln>
+          <a:effectLst/>
+        </p:spPr>
+        <p:style>
+          <a:lnRef idx="1">
+            <a:schemeClr val="accent1"/>
+          </a:lnRef>
+          <a:fillRef idx="3">
+            <a:schemeClr val="accent1"/>
+          </a:fillRef>
+          <a:effectRef idx="2">
+            <a:schemeClr val="accent1"/>
+          </a:effectRef>
+          <a:fontRef idx="minor">
+            <a:schemeClr val="lt1"/>
+          </a:fontRef>
+        </p:style>
+        <p:txBody>
+          <a:bodyPr rtlCol="0" anchor="ctr"/>
+          <a:lstStyle/>
+          <a:p>
+            <a:pPr algn="ctr"/>
+          </a:p>
+        </p:txBody>
+      </p:sp>
+      <p:sp>
+        <p:nvSpPr>
+          <p:cNvPr id="13" name="TextBox 12"/>
+          <p:cNvSpPr txBox="1"/>
+          <p:nvPr/>
+        </p:nvSpPr>
+        <p:spPr>
+          <a:xfrm>
+            <a:off x="777240" y="3383280"/>
+            <a:ext cx="5029200" cy="365760"/>
           </a:xfrm>
           <a:prstGeom prst="rect">
             <a:avLst/>
@@ -17656,27 +17341,583 @@
               </a:lnSpc>
             </a:pPr>
             <a:r>
-              <a:rPr sz="1000" b="1" i="0" spc="200">
+              <a:rPr sz="1000" b="1" i="0" spc="300">
                 <a:solidFill>
                   <a:srgbClr val="8E867B"/>
                 </a:solidFill>
                 <a:latin typeface="Inter"/>
               </a:rPr>
-              <a:t>IF SILENCE DRAGS</a:t>
-            </a:r>
-          </a:p>
-        </p:txBody>
-      </p:sp>
-      <p:sp>
-        <p:nvSpPr>
-          <p:cNvPr id="12" name="TextBox 11"/>
-          <p:cNvSpPr txBox="1"/>
-          <p:nvPr/>
-        </p:nvSpPr>
-        <p:spPr>
-          <a:xfrm>
-            <a:off x="502920" y="3538728"/>
-            <a:ext cx="5349240" cy="640080"/>
+              <a:t>ANTICIPATED DEAL RISKS</a:t>
+            </a:r>
+          </a:p>
+        </p:txBody>
+      </p:sp>
+      <p:sp>
+        <p:nvSpPr>
+          <p:cNvPr id="14" name="TextBox 13"/>
+          <p:cNvSpPr txBox="1"/>
+          <p:nvPr/>
+        </p:nvSpPr>
+        <p:spPr>
+          <a:xfrm>
+            <a:off x="777240" y="3794760"/>
+            <a:ext cx="1828800" cy="365760"/>
+          </a:xfrm>
+          <a:prstGeom prst="rect">
+            <a:avLst/>
+          </a:prstGeom>
+          <a:noFill/>
+        </p:spPr>
+        <p:txBody>
+          <a:bodyPr wrap="square" lIns="0" rIns="0" tIns="0" bIns="0" anchor="t">
+            <a:spAutoFit/>
+          </a:bodyPr>
+          <a:lstStyle/>
+          <a:p>
+            <a:pPr algn="l">
+              <a:lnSpc>
+                <a:spcPct val="115000"/>
+              </a:lnSpc>
+            </a:pPr>
+            <a:r>
+              <a:rPr sz="1100" b="1" i="0">
+                <a:solidFill>
+                  <a:srgbClr val="1F1B16"/>
+                </a:solidFill>
+                <a:latin typeface="Inter"/>
+              </a:rPr>
+              <a:t>Claude Code competition</a:t>
+            </a:r>
+          </a:p>
+        </p:txBody>
+      </p:sp>
+      <p:sp>
+        <p:nvSpPr>
+          <p:cNvPr id="15" name="TextBox 14"/>
+          <p:cNvSpPr txBox="1"/>
+          <p:nvPr/>
+        </p:nvSpPr>
+        <p:spPr>
+          <a:xfrm>
+            <a:off x="2651760" y="3794760"/>
+            <a:ext cx="3291840" cy="640080"/>
+          </a:xfrm>
+          <a:prstGeom prst="rect">
+            <a:avLst/>
+          </a:prstGeom>
+          <a:noFill/>
+        </p:spPr>
+        <p:txBody>
+          <a:bodyPr wrap="square" lIns="0" rIns="0" tIns="0" bIns="0" anchor="t">
+            <a:spAutoFit/>
+          </a:bodyPr>
+          <a:lstStyle/>
+          <a:p>
+            <a:pPr algn="l">
+              <a:lnSpc>
+                <a:spcPct val="130000"/>
+              </a:lnSpc>
+            </a:pPr>
+            <a:r>
+              <a:rPr sz="1050" b="0" i="0">
+                <a:solidFill>
+                  <a:srgbClr val="5C544A"/>
+                </a:solidFill>
+                <a:latin typeface="Inter"/>
+              </a:rPr>
+              <a:t>Eval may conclude 'good enough' before we ship our POC.</a:t>
+            </a:r>
+          </a:p>
+        </p:txBody>
+      </p:sp>
+      <p:sp>
+        <p:nvSpPr>
+          <p:cNvPr id="16" name="TextBox 15"/>
+          <p:cNvSpPr txBox="1"/>
+          <p:nvPr/>
+        </p:nvSpPr>
+        <p:spPr>
+          <a:xfrm>
+            <a:off x="777240" y="4297680"/>
+            <a:ext cx="1828800" cy="365760"/>
+          </a:xfrm>
+          <a:prstGeom prst="rect">
+            <a:avLst/>
+          </a:prstGeom>
+          <a:noFill/>
+        </p:spPr>
+        <p:txBody>
+          <a:bodyPr wrap="square" lIns="0" rIns="0" tIns="0" bIns="0" anchor="t">
+            <a:spAutoFit/>
+          </a:bodyPr>
+          <a:lstStyle/>
+          <a:p>
+            <a:pPr algn="l">
+              <a:lnSpc>
+                <a:spcPct val="115000"/>
+              </a:lnSpc>
+            </a:pPr>
+            <a:r>
+              <a:rPr sz="1100" b="1" i="0">
+                <a:solidFill>
+                  <a:srgbClr val="1F1B16"/>
+                </a:solidFill>
+                <a:latin typeface="Inter"/>
+              </a:rPr>
+              <a:t>Security as blocker</a:t>
+            </a:r>
+          </a:p>
+        </p:txBody>
+      </p:sp>
+      <p:sp>
+        <p:nvSpPr>
+          <p:cNvPr id="17" name="TextBox 16"/>
+          <p:cNvSpPr txBox="1"/>
+          <p:nvPr/>
+        </p:nvSpPr>
+        <p:spPr>
+          <a:xfrm>
+            <a:off x="2651760" y="4297680"/>
+            <a:ext cx="3291840" cy="640080"/>
+          </a:xfrm>
+          <a:prstGeom prst="rect">
+            <a:avLst/>
+          </a:prstGeom>
+          <a:noFill/>
+        </p:spPr>
+        <p:txBody>
+          <a:bodyPr wrap="square" lIns="0" rIns="0" tIns="0" bIns="0" anchor="t">
+            <a:spAutoFit/>
+          </a:bodyPr>
+          <a:lstStyle/>
+          <a:p>
+            <a:pPr algn="l">
+              <a:lnSpc>
+                <a:spcPct val="130000"/>
+              </a:lnSpc>
+            </a:pPr>
+            <a:r>
+              <a:rPr sz="1050" b="0" i="0">
+                <a:solidFill>
+                  <a:srgbClr val="5C544A"/>
+                </a:solidFill>
+                <a:latin typeface="Inter"/>
+              </a:rPr>
+              <a:t>If AppSec isn't addressed D0, pilot slips 3 months.</a:t>
+            </a:r>
+          </a:p>
+        </p:txBody>
+      </p:sp>
+      <p:sp>
+        <p:nvSpPr>
+          <p:cNvPr id="18" name="TextBox 17"/>
+          <p:cNvSpPr txBox="1"/>
+          <p:nvPr/>
+        </p:nvSpPr>
+        <p:spPr>
+          <a:xfrm>
+            <a:off x="777240" y="4800600"/>
+            <a:ext cx="1828800" cy="365760"/>
+          </a:xfrm>
+          <a:prstGeom prst="rect">
+            <a:avLst/>
+          </a:prstGeom>
+          <a:noFill/>
+        </p:spPr>
+        <p:txBody>
+          <a:bodyPr wrap="square" lIns="0" rIns="0" tIns="0" bIns="0" anchor="t">
+            <a:spAutoFit/>
+          </a:bodyPr>
+          <a:lstStyle/>
+          <a:p>
+            <a:pPr algn="l">
+              <a:lnSpc>
+                <a:spcPct val="115000"/>
+              </a:lnSpc>
+            </a:pPr>
+            <a:r>
+              <a:rPr sz="1100" b="1" i="0">
+                <a:solidFill>
+                  <a:srgbClr val="1F1B16"/>
+                </a:solidFill>
+                <a:latin typeface="Inter"/>
+              </a:rPr>
+              <a:t>Internal politics</a:t>
+            </a:r>
+          </a:p>
+        </p:txBody>
+      </p:sp>
+      <p:sp>
+        <p:nvSpPr>
+          <p:cNvPr id="19" name="TextBox 18"/>
+          <p:cNvSpPr txBox="1"/>
+          <p:nvPr/>
+        </p:nvSpPr>
+        <p:spPr>
+          <a:xfrm>
+            <a:off x="2651760" y="4800600"/>
+            <a:ext cx="3291840" cy="640080"/>
+          </a:xfrm>
+          <a:prstGeom prst="rect">
+            <a:avLst/>
+          </a:prstGeom>
+          <a:noFill/>
+        </p:spPr>
+        <p:txBody>
+          <a:bodyPr wrap="square" lIns="0" rIns="0" tIns="0" bIns="0" anchor="t">
+            <a:spAutoFit/>
+          </a:bodyPr>
+          <a:lstStyle/>
+          <a:p>
+            <a:pPr algn="l">
+              <a:lnSpc>
+                <a:spcPct val="130000"/>
+              </a:lnSpc>
+            </a:pPr>
+            <a:r>
+              <a:rPr sz="1050" b="0" i="0">
+                <a:solidFill>
+                  <a:srgbClr val="5C544A"/>
+                </a:solidFill>
+                <a:latin typeface="Inter"/>
+              </a:rPr>
+              <a:t>Copilot has an internal sponsor — switch read as a failure.</a:t>
+            </a:r>
+          </a:p>
+        </p:txBody>
+      </p:sp>
+      <p:sp>
+        <p:nvSpPr>
+          <p:cNvPr id="20" name="TextBox 19"/>
+          <p:cNvSpPr txBox="1"/>
+          <p:nvPr/>
+        </p:nvSpPr>
+        <p:spPr>
+          <a:xfrm>
+            <a:off x="777240" y="5303520"/>
+            <a:ext cx="1828800" cy="365760"/>
+          </a:xfrm>
+          <a:prstGeom prst="rect">
+            <a:avLst/>
+          </a:prstGeom>
+          <a:noFill/>
+        </p:spPr>
+        <p:txBody>
+          <a:bodyPr wrap="square" lIns="0" rIns="0" tIns="0" bIns="0" anchor="t">
+            <a:spAutoFit/>
+          </a:bodyPr>
+          <a:lstStyle/>
+          <a:p>
+            <a:pPr algn="l">
+              <a:lnSpc>
+                <a:spcPct val="115000"/>
+              </a:lnSpc>
+            </a:pPr>
+            <a:r>
+              <a:rPr sz="1100" b="1" i="0">
+                <a:solidFill>
+                  <a:srgbClr val="1F1B16"/>
+                </a:solidFill>
+                <a:latin typeface="Inter"/>
+              </a:rPr>
+              <a:t>Tool sprawl</a:t>
+            </a:r>
+          </a:p>
+        </p:txBody>
+      </p:sp>
+      <p:sp>
+        <p:nvSpPr>
+          <p:cNvPr id="21" name="TextBox 20"/>
+          <p:cNvSpPr txBox="1"/>
+          <p:nvPr/>
+        </p:nvSpPr>
+        <p:spPr>
+          <a:xfrm>
+            <a:off x="2651760" y="5303520"/>
+            <a:ext cx="3291840" cy="640080"/>
+          </a:xfrm>
+          <a:prstGeom prst="rect">
+            <a:avLst/>
+          </a:prstGeom>
+          <a:noFill/>
+        </p:spPr>
+        <p:txBody>
+          <a:bodyPr wrap="square" lIns="0" rIns="0" tIns="0" bIns="0" anchor="t">
+            <a:spAutoFit/>
+          </a:bodyPr>
+          <a:lstStyle/>
+          <a:p>
+            <a:pPr algn="l">
+              <a:lnSpc>
+                <a:spcPct val="130000"/>
+              </a:lnSpc>
+            </a:pPr>
+            <a:r>
+              <a:rPr sz="1050" b="0" i="0">
+                <a:solidFill>
+                  <a:srgbClr val="5C544A"/>
+                </a:solidFill>
+                <a:latin typeface="Inter"/>
+              </a:rPr>
+              <a:t>Cursor + Copilot + Claude Code in parallel = no one decides.</a:t>
+            </a:r>
+          </a:p>
+        </p:txBody>
+      </p:sp>
+      <p:sp>
+        <p:nvSpPr>
+          <p:cNvPr id="22" name="TextBox 21"/>
+          <p:cNvSpPr txBox="1"/>
+          <p:nvPr/>
+        </p:nvSpPr>
+        <p:spPr>
+          <a:xfrm>
+            <a:off x="777240" y="5806440"/>
+            <a:ext cx="1828800" cy="365760"/>
+          </a:xfrm>
+          <a:prstGeom prst="rect">
+            <a:avLst/>
+          </a:prstGeom>
+          <a:noFill/>
+        </p:spPr>
+        <p:txBody>
+          <a:bodyPr wrap="square" lIns="0" rIns="0" tIns="0" bIns="0" anchor="t">
+            <a:spAutoFit/>
+          </a:bodyPr>
+          <a:lstStyle/>
+          <a:p>
+            <a:pPr algn="l">
+              <a:lnSpc>
+                <a:spcPct val="115000"/>
+              </a:lnSpc>
+            </a:pPr>
+            <a:r>
+              <a:rPr sz="1100" b="1" i="0">
+                <a:solidFill>
+                  <a:srgbClr val="1F1B16"/>
+                </a:solidFill>
+                <a:latin typeface="Inter"/>
+              </a:rPr>
+              <a:t>Procurement</a:t>
+            </a:r>
+          </a:p>
+        </p:txBody>
+      </p:sp>
+      <p:sp>
+        <p:nvSpPr>
+          <p:cNvPr id="23" name="TextBox 22"/>
+          <p:cNvSpPr txBox="1"/>
+          <p:nvPr/>
+        </p:nvSpPr>
+        <p:spPr>
+          <a:xfrm>
+            <a:off x="2651760" y="5806440"/>
+            <a:ext cx="3291840" cy="640080"/>
+          </a:xfrm>
+          <a:prstGeom prst="rect">
+            <a:avLst/>
+          </a:prstGeom>
+          <a:noFill/>
+        </p:spPr>
+        <p:txBody>
+          <a:bodyPr wrap="square" lIns="0" rIns="0" tIns="0" bIns="0" anchor="t">
+            <a:spAutoFit/>
+          </a:bodyPr>
+          <a:lstStyle/>
+          <a:p>
+            <a:pPr algn="l">
+              <a:lnSpc>
+                <a:spcPct val="130000"/>
+              </a:lnSpc>
+            </a:pPr>
+            <a:r>
+              <a:rPr sz="1050" b="0" i="0">
+                <a:solidFill>
+                  <a:srgbClr val="5C544A"/>
+                </a:solidFill>
+                <a:latin typeface="Inter"/>
+              </a:rPr>
+              <a:t>Vendor risk review + DPA = 60–90 days, non-compressible.</a:t>
+            </a:r>
+          </a:p>
+        </p:txBody>
+      </p:sp>
+      <p:sp>
+        <p:nvSpPr>
+          <p:cNvPr id="24" name="Rectangle 23"/>
+          <p:cNvSpPr/>
+          <p:nvPr/>
+        </p:nvSpPr>
+        <p:spPr>
+          <a:xfrm>
+            <a:off x="6263640" y="3246120"/>
+            <a:ext cx="5440680" cy="3200400"/>
+          </a:xfrm>
+          <a:prstGeom prst="rect">
+            <a:avLst/>
+          </a:prstGeom>
+          <a:solidFill>
+            <a:srgbClr val="DAD0BE"/>
+          </a:solidFill>
+          <a:ln>
+            <a:noFill/>
+          </a:ln>
+          <a:effectLst/>
+        </p:spPr>
+        <p:style>
+          <a:lnRef idx="1">
+            <a:schemeClr val="accent1"/>
+          </a:lnRef>
+          <a:fillRef idx="3">
+            <a:schemeClr val="accent1"/>
+          </a:fillRef>
+          <a:effectRef idx="2">
+            <a:schemeClr val="accent1"/>
+          </a:effectRef>
+          <a:fontRef idx="minor">
+            <a:schemeClr val="lt1"/>
+          </a:fontRef>
+        </p:style>
+        <p:txBody>
+          <a:bodyPr rtlCol="0" anchor="ctr"/>
+          <a:lstStyle/>
+          <a:p>
+            <a:pPr algn="ctr"/>
+          </a:p>
+        </p:txBody>
+      </p:sp>
+      <p:sp>
+        <p:nvSpPr>
+          <p:cNvPr id="25" name="Rectangle 24"/>
+          <p:cNvSpPr/>
+          <p:nvPr/>
+        </p:nvSpPr>
+        <p:spPr>
+          <a:xfrm>
+            <a:off x="6263640" y="3246120"/>
+            <a:ext cx="5440680" cy="6350"/>
+          </a:xfrm>
+          <a:prstGeom prst="rect">
+            <a:avLst/>
+          </a:prstGeom>
+          <a:solidFill>
+            <a:srgbClr val="C8BDA8"/>
+          </a:solidFill>
+          <a:ln>
+            <a:noFill/>
+          </a:ln>
+          <a:effectLst/>
+        </p:spPr>
+        <p:style>
+          <a:lnRef idx="1">
+            <a:schemeClr val="accent1"/>
+          </a:lnRef>
+          <a:fillRef idx="3">
+            <a:schemeClr val="accent1"/>
+          </a:fillRef>
+          <a:effectRef idx="2">
+            <a:schemeClr val="accent1"/>
+          </a:effectRef>
+          <a:fontRef idx="minor">
+            <a:schemeClr val="lt1"/>
+          </a:fontRef>
+        </p:style>
+        <p:txBody>
+          <a:bodyPr rtlCol="0" anchor="ctr"/>
+          <a:lstStyle/>
+          <a:p>
+            <a:pPr algn="ctr"/>
+          </a:p>
+        </p:txBody>
+      </p:sp>
+      <p:sp>
+        <p:nvSpPr>
+          <p:cNvPr id="26" name="TextBox 25"/>
+          <p:cNvSpPr txBox="1"/>
+          <p:nvPr/>
+        </p:nvSpPr>
+        <p:spPr>
+          <a:xfrm>
+            <a:off x="6537960" y="3383280"/>
+            <a:ext cx="5029200" cy="365760"/>
+          </a:xfrm>
+          <a:prstGeom prst="rect">
+            <a:avLst/>
+          </a:prstGeom>
+          <a:noFill/>
+        </p:spPr>
+        <p:txBody>
+          <a:bodyPr wrap="square" lIns="0" rIns="0" tIns="0" bIns="0" anchor="t">
+            <a:spAutoFit/>
+          </a:bodyPr>
+          <a:lstStyle/>
+          <a:p>
+            <a:pPr algn="l">
+              <a:lnSpc>
+                <a:spcPct val="115000"/>
+              </a:lnSpc>
+            </a:pPr>
+            <a:r>
+              <a:rPr sz="1000" b="1" i="0" spc="300">
+                <a:solidFill>
+                  <a:srgbClr val="8E867B"/>
+                </a:solidFill>
+                <a:latin typeface="Inter"/>
+              </a:rPr>
+              <a:t>SELF-ASSESSMENT (template)</a:t>
+            </a:r>
+          </a:p>
+        </p:txBody>
+      </p:sp>
+      <p:sp>
+        <p:nvSpPr>
+          <p:cNvPr id="27" name="TextBox 26"/>
+          <p:cNvSpPr txBox="1"/>
+          <p:nvPr/>
+        </p:nvSpPr>
+        <p:spPr>
+          <a:xfrm>
+            <a:off x="6537960" y="3794760"/>
+            <a:ext cx="5029200" cy="365760"/>
+          </a:xfrm>
+          <a:prstGeom prst="rect">
+            <a:avLst/>
+          </a:prstGeom>
+          <a:noFill/>
+        </p:spPr>
+        <p:txBody>
+          <a:bodyPr wrap="square" lIns="0" rIns="0" tIns="0" bIns="0" anchor="t">
+            <a:spAutoFit/>
+          </a:bodyPr>
+          <a:lstStyle/>
+          <a:p>
+            <a:pPr algn="l">
+              <a:lnSpc>
+                <a:spcPct val="115000"/>
+              </a:lnSpc>
+            </a:pPr>
+            <a:r>
+              <a:rPr sz="1150" b="1" i="0">
+                <a:solidFill>
+                  <a:srgbClr val="1F1B16"/>
+                </a:solidFill>
+                <a:latin typeface="Inter"/>
+              </a:rPr>
+              <a:t>What worked</a:t>
+            </a:r>
+          </a:p>
+        </p:txBody>
+      </p:sp>
+      <p:sp>
+        <p:nvSpPr>
+          <p:cNvPr id="28" name="TextBox 27"/>
+          <p:cNvSpPr txBox="1"/>
+          <p:nvPr/>
+        </p:nvSpPr>
+        <p:spPr>
+          <a:xfrm>
+            <a:off x="6537960" y="4114800"/>
+            <a:ext cx="5029200" cy="640080"/>
           </a:xfrm>
           <a:prstGeom prst="rect">
             <a:avLst/>
@@ -17695,27 +17936,43 @@
               </a:lnSpc>
             </a:pPr>
             <a:r>
-              <a:rPr sz="1200" b="0" i="1">
-                <a:solidFill>
-                  <a:srgbClr val="3A332C"/>
-                </a:solidFill>
-                <a:latin typeface="Inter"/>
-              </a:rPr>
-              <a:t>"I'd rather give you the time — this is your conversation."</a:t>
-            </a:r>
-          </a:p>
-        </p:txBody>
-      </p:sp>
-      <p:sp>
-        <p:nvSpPr>
-          <p:cNvPr id="13" name="TextBox 12"/>
-          <p:cNvSpPr txBox="1"/>
-          <p:nvPr/>
-        </p:nvSpPr>
-        <p:spPr>
-          <a:xfrm>
-            <a:off x="6355080" y="3246120"/>
-            <a:ext cx="5349240" cy="365760"/>
+              <a:rPr sz="1050" b="0" i="0">
+                <a:solidFill>
+                  <a:srgbClr val="5C544A"/>
+                </a:solidFill>
+                <a:latin typeface="Inter"/>
+              </a:rPr>
+              <a:t>Opening on the 31 Pro = proof of prep.</a:t>
+            </a:r>
+          </a:p>
+          <a:p>
+            <a:pPr algn="l">
+              <a:lnSpc>
+                <a:spcPct val="140000"/>
+              </a:lnSpc>
+            </a:pPr>
+            <a:r>
+              <a:rPr sz="1050" b="0" i="0">
+                <a:solidFill>
+                  <a:srgbClr val="5C544A"/>
+                </a:solidFill>
+                <a:latin typeface="Inter"/>
+              </a:rPr>
+              <a:t>Letting Marcel articulate 'why now'.</a:t>
+            </a:r>
+          </a:p>
+        </p:txBody>
+      </p:sp>
+      <p:sp>
+        <p:nvSpPr>
+          <p:cNvPr id="29" name="TextBox 28"/>
+          <p:cNvSpPr txBox="1"/>
+          <p:nvPr/>
+        </p:nvSpPr>
+        <p:spPr>
+          <a:xfrm>
+            <a:off x="6537960" y="4663440"/>
+            <a:ext cx="5029200" cy="365760"/>
           </a:xfrm>
           <a:prstGeom prst="rect">
             <a:avLst/>
@@ -17734,27 +17991,27 @@
               </a:lnSpc>
             </a:pPr>
             <a:r>
-              <a:rPr sz="1000" b="1" i="0" spc="200">
-                <a:solidFill>
-                  <a:srgbClr val="8E867B"/>
-                </a:solidFill>
-                <a:latin typeface="Inter"/>
-              </a:rPr>
-              <a:t>IF CURSOR GETS HIT</a:t>
-            </a:r>
-          </a:p>
-        </p:txBody>
-      </p:sp>
-      <p:sp>
-        <p:nvSpPr>
-          <p:cNvPr id="14" name="TextBox 13"/>
-          <p:cNvSpPr txBox="1"/>
-          <p:nvPr/>
-        </p:nvSpPr>
-        <p:spPr>
-          <a:xfrm>
-            <a:off x="6355080" y="3538728"/>
-            <a:ext cx="5349240" cy="640080"/>
+              <a:rPr sz="1150" b="1" i="0">
+                <a:solidFill>
+                  <a:srgbClr val="1F1B16"/>
+                </a:solidFill>
+                <a:latin typeface="Inter"/>
+              </a:rPr>
+              <a:t>What I'd change</a:t>
+            </a:r>
+          </a:p>
+        </p:txBody>
+      </p:sp>
+      <p:sp>
+        <p:nvSpPr>
+          <p:cNvPr id="30" name="TextBox 29"/>
+          <p:cNvSpPr txBox="1"/>
+          <p:nvPr/>
+        </p:nvSpPr>
+        <p:spPr>
+          <a:xfrm>
+            <a:off x="6537960" y="4983480"/>
+            <a:ext cx="5029200" cy="640080"/>
           </a:xfrm>
           <a:prstGeom prst="rect">
             <a:avLst/>
@@ -17773,27 +18030,43 @@
               </a:lnSpc>
             </a:pPr>
             <a:r>
-              <a:rPr sz="1200" b="0" i="1">
-                <a:solidFill>
-                  <a:srgbClr val="3A332C"/>
-                </a:solidFill>
-                <a:latin typeface="Inter"/>
-              </a:rPr>
-              <a:t>"Fair feedback — here's what we do well, here's where we're not the best."</a:t>
-            </a:r>
-          </a:p>
-        </p:txBody>
-      </p:sp>
-      <p:sp>
-        <p:nvSpPr>
-          <p:cNvPr id="15" name="TextBox 14"/>
-          <p:cNvSpPr txBox="1"/>
-          <p:nvPr/>
-        </p:nvSpPr>
-        <p:spPr>
-          <a:xfrm>
-            <a:off x="502920" y="4251960"/>
-            <a:ext cx="5349240" cy="365760"/>
+              <a:rPr sz="1050" b="0" i="0">
+                <a:solidFill>
+                  <a:srgbClr val="5C544A"/>
+                </a:solidFill>
+                <a:latin typeface="Inter"/>
+              </a:rPr>
+              <a:t>More time on concrete use cases (refactors vs review).</a:t>
+            </a:r>
+          </a:p>
+          <a:p>
+            <a:pPr algn="l">
+              <a:lnSpc>
+                <a:spcPct val="140000"/>
+              </a:lnSpc>
+            </a:pPr>
+            <a:r>
+              <a:rPr sz="1050" b="0" i="0">
+                <a:solidFill>
+                  <a:srgbClr val="5C544A"/>
+                </a:solidFill>
+                <a:latin typeface="Inter"/>
+              </a:rPr>
+              <a:t>Push earlier on budget.</a:t>
+            </a:r>
+          </a:p>
+        </p:txBody>
+      </p:sp>
+      <p:sp>
+        <p:nvSpPr>
+          <p:cNvPr id="31" name="TextBox 30"/>
+          <p:cNvSpPr txBox="1"/>
+          <p:nvPr/>
+        </p:nvSpPr>
+        <p:spPr>
+          <a:xfrm>
+            <a:off x="6537960" y="5532120"/>
+            <a:ext cx="5029200" cy="365760"/>
           </a:xfrm>
           <a:prstGeom prst="rect">
             <a:avLst/>
@@ -17812,27 +18085,27 @@
               </a:lnSpc>
             </a:pPr>
             <a:r>
-              <a:rPr sz="1000" b="1" i="0" spc="200">
-                <a:solidFill>
-                  <a:srgbClr val="8E867B"/>
-                </a:solidFill>
-                <a:latin typeface="Inter"/>
-              </a:rPr>
-              <a:t>IF ASKED A NUMBER YOU DON'T KNOW</a:t>
-            </a:r>
-          </a:p>
-        </p:txBody>
-      </p:sp>
-      <p:sp>
-        <p:nvSpPr>
-          <p:cNvPr id="16" name="TextBox 15"/>
-          <p:cNvSpPr txBox="1"/>
-          <p:nvPr/>
-        </p:nvSpPr>
-        <p:spPr>
-          <a:xfrm>
-            <a:off x="502920" y="4544568"/>
-            <a:ext cx="5349240" cy="640080"/>
+              <a:rPr sz="1150" b="1" i="0">
+                <a:solidFill>
+                  <a:srgbClr val="1F1B16"/>
+                </a:solidFill>
+                <a:latin typeface="Inter"/>
+              </a:rPr>
+              <a:t>Greenfield → disco</a:t>
+            </a:r>
+          </a:p>
+        </p:txBody>
+      </p:sp>
+      <p:sp>
+        <p:nvSpPr>
+          <p:cNvPr id="32" name="TextBox 31"/>
+          <p:cNvSpPr txBox="1"/>
+          <p:nvPr/>
+        </p:nvSpPr>
+        <p:spPr>
+          <a:xfrm>
+            <a:off x="6537960" y="5852160"/>
+            <a:ext cx="5029200" cy="640080"/>
           </a:xfrm>
           <a:prstGeom prst="rect">
             <a:avLst/>
@@ -17851,77 +18124,15 @@
               </a:lnSpc>
             </a:pPr>
             <a:r>
-              <a:rPr sz="1200" b="0" i="1">
-                <a:solidFill>
-                  <a:srgbClr val="3A332C"/>
-                </a:solidFill>
-                <a:latin typeface="Inter"/>
-              </a:rPr>
-              <a:t>"I don't want to make one up — I'll get back to you with the real answer today."</a:t>
-            </a:r>
-          </a:p>
-        </p:txBody>
-      </p:sp>
-      <p:sp>
-        <p:nvSpPr>
-          <p:cNvPr id="17" name="TextBox 16"/>
-          <p:cNvSpPr txBox="1"/>
-          <p:nvPr/>
-        </p:nvSpPr>
-        <p:spPr>
-          <a:xfrm>
-            <a:off x="6355080" y="4251960"/>
-            <a:ext cx="5349240" cy="365760"/>
-          </a:xfrm>
-          <a:prstGeom prst="rect">
-            <a:avLst/>
-          </a:prstGeom>
-          <a:noFill/>
-        </p:spPr>
-        <p:txBody>
-          <a:bodyPr wrap="square" lIns="0" rIns="0" tIns="0" bIns="0" anchor="t">
-            <a:spAutoFit/>
-          </a:bodyPr>
-          <a:lstStyle/>
-          <a:p>
-            <a:pPr algn="l">
-              <a:lnSpc>
-                <a:spcPct val="115000"/>
-              </a:lnSpc>
-            </a:pPr>
-            <a:r>
-              <a:rPr sz="1000" b="1" i="0" spc="200">
-                <a:solidFill>
-                  <a:srgbClr val="8E867B"/>
-                </a:solidFill>
-                <a:latin typeface="Inter"/>
-              </a:rPr>
-              <a:t>TO PRESSURE-TEST</a:t>
-            </a:r>
-          </a:p>
-        </p:txBody>
-      </p:sp>
-      <p:sp>
-        <p:nvSpPr>
-          <p:cNvPr id="18" name="TextBox 17"/>
-          <p:cNvSpPr txBox="1"/>
-          <p:nvPr/>
-        </p:nvSpPr>
-        <p:spPr>
-          <a:xfrm>
-            <a:off x="6355080" y="4544568"/>
-            <a:ext cx="5349240" cy="640080"/>
-          </a:xfrm>
-          <a:prstGeom prst="rect">
-            <a:avLst/>
-          </a:prstGeom>
-          <a:noFill/>
-        </p:spPr>
-        <p:txBody>
-          <a:bodyPr wrap="square" lIns="0" rIns="0" tIns="0" bIns="0" anchor="t">
-            <a:spAutoFit/>
-          </a:bodyPr>
-          <a:lstStyle/>
+              <a:rPr sz="1050" b="0" i="0">
+                <a:solidFill>
+                  <a:srgbClr val="5C544A"/>
+                </a:solidFill>
+                <a:latin typeface="Inter"/>
+              </a:rPr>
+              <a:t>Account thesis fuels targeted questions.</a:t>
+            </a:r>
+          </a:p>
           <a:p>
             <a:pPr algn="l">
               <a:lnSpc>
@@ -17929,169 +18140,13 @@
               </a:lnSpc>
             </a:pPr>
             <a:r>
-              <a:rPr sz="1200" b="0" i="1">
-                <a:solidFill>
-                  <a:srgbClr val="3A332C"/>
-                </a:solidFill>
-                <a:latin typeface="Inter"/>
-              </a:rPr>
-              <a:t>"What would need to be true for this to be a no?"</a:t>
-            </a:r>
-          </a:p>
-        </p:txBody>
-      </p:sp>
-      <p:sp>
-        <p:nvSpPr>
-          <p:cNvPr id="19" name="TextBox 18"/>
-          <p:cNvSpPr txBox="1"/>
-          <p:nvPr/>
-        </p:nvSpPr>
-        <p:spPr>
-          <a:xfrm>
-            <a:off x="502920" y="5257800"/>
-            <a:ext cx="5349240" cy="365760"/>
-          </a:xfrm>
-          <a:prstGeom prst="rect">
-            <a:avLst/>
-          </a:prstGeom>
-          <a:noFill/>
-        </p:spPr>
-        <p:txBody>
-          <a:bodyPr wrap="square" lIns="0" rIns="0" tIns="0" bIns="0" anchor="t">
-            <a:spAutoFit/>
-          </a:bodyPr>
-          <a:lstStyle/>
-          <a:p>
-            <a:pPr algn="l">
-              <a:lnSpc>
-                <a:spcPct val="115000"/>
-              </a:lnSpc>
-            </a:pPr>
-            <a:r>
-              <a:rPr sz="1000" b="1" i="0" spc="200">
-                <a:solidFill>
-                  <a:srgbClr val="8E867B"/>
-                </a:solidFill>
-                <a:latin typeface="Inter"/>
-              </a:rPr>
-              <a:t>TO PIVOT TO SECURITY</a:t>
-            </a:r>
-          </a:p>
-        </p:txBody>
-      </p:sp>
-      <p:sp>
-        <p:nvSpPr>
-          <p:cNvPr id="20" name="TextBox 19"/>
-          <p:cNvSpPr txBox="1"/>
-          <p:nvPr/>
-        </p:nvSpPr>
-        <p:spPr>
-          <a:xfrm>
-            <a:off x="502920" y="5550408"/>
-            <a:ext cx="5349240" cy="640080"/>
-          </a:xfrm>
-          <a:prstGeom prst="rect">
-            <a:avLst/>
-          </a:prstGeom>
-          <a:noFill/>
-        </p:spPr>
-        <p:txBody>
-          <a:bodyPr wrap="square" lIns="0" rIns="0" tIns="0" bIns="0" anchor="t">
-            <a:spAutoFit/>
-          </a:bodyPr>
-          <a:lstStyle/>
-          <a:p>
-            <a:pPr algn="l">
-              <a:lnSpc>
-                <a:spcPct val="140000"/>
-              </a:lnSpc>
-            </a:pPr>
-            <a:r>
-              <a:rPr sz="1200" b="0" i="1">
-                <a:solidFill>
-                  <a:srgbClr val="3A332C"/>
-                </a:solidFill>
-                <a:latin typeface="Inter"/>
-              </a:rPr>
-              <a:t>"Before we go further, I want to open security — that's where this gets real."</a:t>
-            </a:r>
-          </a:p>
-        </p:txBody>
-      </p:sp>
-      <p:sp>
-        <p:nvSpPr>
-          <p:cNvPr id="21" name="TextBox 20"/>
-          <p:cNvSpPr txBox="1"/>
-          <p:nvPr/>
-        </p:nvSpPr>
-        <p:spPr>
-          <a:xfrm>
-            <a:off x="6355080" y="5257800"/>
-            <a:ext cx="5349240" cy="365760"/>
-          </a:xfrm>
-          <a:prstGeom prst="rect">
-            <a:avLst/>
-          </a:prstGeom>
-          <a:noFill/>
-        </p:spPr>
-        <p:txBody>
-          <a:bodyPr wrap="square" lIns="0" rIns="0" tIns="0" bIns="0" anchor="t">
-            <a:spAutoFit/>
-          </a:bodyPr>
-          <a:lstStyle/>
-          <a:p>
-            <a:pPr algn="l">
-              <a:lnSpc>
-                <a:spcPct val="115000"/>
-              </a:lnSpc>
-            </a:pPr>
-            <a:r>
-              <a:rPr sz="1000" b="1" i="0" spc="200">
-                <a:solidFill>
-                  <a:srgbClr val="8E867B"/>
-                </a:solidFill>
-                <a:latin typeface="Inter"/>
-              </a:rPr>
-              <a:t>TO CLOSE</a:t>
-            </a:r>
-          </a:p>
-        </p:txBody>
-      </p:sp>
-      <p:sp>
-        <p:nvSpPr>
-          <p:cNvPr id="22" name="TextBox 21"/>
-          <p:cNvSpPr txBox="1"/>
-          <p:nvPr/>
-        </p:nvSpPr>
-        <p:spPr>
-          <a:xfrm>
-            <a:off x="6355080" y="5550408"/>
-            <a:ext cx="5349240" cy="640080"/>
-          </a:xfrm>
-          <a:prstGeom prst="rect">
-            <a:avLst/>
-          </a:prstGeom>
-          <a:noFill/>
-        </p:spPr>
-        <p:txBody>
-          <a:bodyPr wrap="square" lIns="0" rIns="0" tIns="0" bIns="0" anchor="t">
-            <a:spAutoFit/>
-          </a:bodyPr>
-          <a:lstStyle/>
-          <a:p>
-            <a:pPr algn="l">
-              <a:lnSpc>
-                <a:spcPct val="140000"/>
-              </a:lnSpc>
-            </a:pPr>
-            <a:r>
-              <a:rPr sz="1200" b="0" i="1">
-                <a:solidFill>
-                  <a:srgbClr val="3A332C"/>
-                </a:solidFill>
-                <a:latin typeface="Inter"/>
-              </a:rPr>
-              <a:t>"One question before we book the follow-up: what should I have asked?"</a:t>
+              <a:rPr sz="1050" b="0" i="0">
+                <a:solidFill>
+                  <a:srgbClr val="5C544A"/>
+                </a:solidFill>
+                <a:latin typeface="Inter"/>
+              </a:rPr>
+              <a:t>Known facts = wedges, not accessories.</a:t>
             </a:r>
           </a:p>
         </p:txBody>
@@ -18231,7 +18286,7 @@
                 </a:solidFill>
                 <a:latin typeface="Inter"/>
               </a:rPr>
-              <a:t>META · CANDIDATE-ONLY</a:t>
+              <a:t>PART 2  ·  ANTI-BLANK · KEY PHRASES</a:t>
             </a:r>
           </a:p>
         </p:txBody>
@@ -18309,7 +18364,854 @@
                 </a:solidFill>
                 <a:latin typeface="JetBrains Mono"/>
               </a:rPr>
-              <a:t>24 / 24</a:t>
+              <a:t>24 / 25</a:t>
+            </a:r>
+          </a:p>
+        </p:txBody>
+      </p:sp>
+      <p:sp>
+        <p:nvSpPr>
+          <p:cNvPr id="7" name="Rectangle 6"/>
+          <p:cNvSpPr/>
+          <p:nvPr/>
+        </p:nvSpPr>
+        <p:spPr>
+          <a:xfrm>
+            <a:off x="502920" y="777240"/>
+            <a:ext cx="11201400" cy="6350"/>
+          </a:xfrm>
+          <a:prstGeom prst="rect">
+            <a:avLst/>
+          </a:prstGeom>
+          <a:solidFill>
+            <a:srgbClr val="C8BDA8"/>
+          </a:solidFill>
+          <a:ln>
+            <a:noFill/>
+          </a:ln>
+          <a:effectLst/>
+        </p:spPr>
+        <p:style>
+          <a:lnRef idx="1">
+            <a:schemeClr val="accent1"/>
+          </a:lnRef>
+          <a:fillRef idx="3">
+            <a:schemeClr val="accent1"/>
+          </a:fillRef>
+          <a:effectRef idx="2">
+            <a:schemeClr val="accent1"/>
+          </a:effectRef>
+          <a:fontRef idx="minor">
+            <a:schemeClr val="lt1"/>
+          </a:fontRef>
+        </p:style>
+        <p:txBody>
+          <a:bodyPr rtlCol="0" anchor="ctr"/>
+          <a:lstStyle/>
+          <a:p>
+            <a:pPr algn="ctr"/>
+          </a:p>
+        </p:txBody>
+      </p:sp>
+      <p:sp>
+        <p:nvSpPr>
+          <p:cNvPr id="8" name="TextBox 7"/>
+          <p:cNvSpPr txBox="1"/>
+          <p:nvPr/>
+        </p:nvSpPr>
+        <p:spPr>
+          <a:xfrm>
+            <a:off x="502920" y="1143000"/>
+            <a:ext cx="9144000" cy="365760"/>
+          </a:xfrm>
+          <a:prstGeom prst="rect">
+            <a:avLst/>
+          </a:prstGeom>
+          <a:noFill/>
+        </p:spPr>
+        <p:txBody>
+          <a:bodyPr wrap="square" lIns="0" rIns="0" tIns="0" bIns="0" anchor="t">
+            <a:spAutoFit/>
+          </a:bodyPr>
+          <a:lstStyle/>
+          <a:p>
+            <a:pPr algn="l">
+              <a:lnSpc>
+                <a:spcPct val="115000"/>
+              </a:lnSpc>
+            </a:pPr>
+            <a:r>
+              <a:rPr sz="1000" b="0" i="0" spc="300">
+                <a:solidFill>
+                  <a:srgbClr val="8E867B"/>
+                </a:solidFill>
+                <a:latin typeface="Inter"/>
+              </a:rPr>
+              <a:t>WHEN YOU LOSE THE THREAD</a:t>
+            </a:r>
+          </a:p>
+        </p:txBody>
+      </p:sp>
+      <p:sp>
+        <p:nvSpPr>
+          <p:cNvPr id="9" name="TextBox 8"/>
+          <p:cNvSpPr txBox="1"/>
+          <p:nvPr/>
+        </p:nvSpPr>
+        <p:spPr>
+          <a:xfrm>
+            <a:off x="502920" y="1508760"/>
+            <a:ext cx="10972800" cy="1097280"/>
+          </a:xfrm>
+          <a:prstGeom prst="rect">
+            <a:avLst/>
+          </a:prstGeom>
+          <a:noFill/>
+        </p:spPr>
+        <p:txBody>
+          <a:bodyPr wrap="square" lIns="0" rIns="0" tIns="0" bIns="0" anchor="t">
+            <a:spAutoFit/>
+          </a:bodyPr>
+          <a:lstStyle/>
+          <a:p>
+            <a:pPr algn="l">
+              <a:lnSpc>
+                <a:spcPct val="105000"/>
+              </a:lnSpc>
+            </a:pPr>
+            <a:r>
+              <a:rPr sz="3400" b="1" i="0">
+                <a:solidFill>
+                  <a:srgbClr val="1F1B16"/>
+                </a:solidFill>
+                <a:latin typeface="Inter"/>
+              </a:rPr>
+              <a:t>6 phrases to use word-for-word.</a:t>
+            </a:r>
+          </a:p>
+        </p:txBody>
+      </p:sp>
+      <p:sp>
+        <p:nvSpPr>
+          <p:cNvPr id="10" name="TextBox 9"/>
+          <p:cNvSpPr txBox="1"/>
+          <p:nvPr/>
+        </p:nvSpPr>
+        <p:spPr>
+          <a:xfrm>
+            <a:off x="502920" y="2606040"/>
+            <a:ext cx="10972800" cy="822960"/>
+          </a:xfrm>
+          <a:prstGeom prst="rect">
+            <a:avLst/>
+          </a:prstGeom>
+          <a:noFill/>
+        </p:spPr>
+        <p:txBody>
+          <a:bodyPr wrap="square" lIns="0" rIns="0" tIns="0" bIns="0" anchor="t">
+            <a:spAutoFit/>
+          </a:bodyPr>
+          <a:lstStyle/>
+          <a:p>
+            <a:pPr algn="l">
+              <a:lnSpc>
+                <a:spcPct val="135000"/>
+              </a:lnSpc>
+            </a:pPr>
+            <a:r>
+              <a:rPr sz="1400" b="0" i="0">
+                <a:solidFill>
+                  <a:srgbClr val="5C544A"/>
+                </a:solidFill>
+                <a:latin typeface="Inter"/>
+              </a:rPr>
+              <a:t>Take the wheel back without pitching. Keep executive presence under pressure.</a:t>
+            </a:r>
+          </a:p>
+        </p:txBody>
+      </p:sp>
+      <p:sp>
+        <p:nvSpPr>
+          <p:cNvPr id="11" name="TextBox 10"/>
+          <p:cNvSpPr txBox="1"/>
+          <p:nvPr/>
+        </p:nvSpPr>
+        <p:spPr>
+          <a:xfrm>
+            <a:off x="502920" y="3246120"/>
+            <a:ext cx="5349240" cy="365760"/>
+          </a:xfrm>
+          <a:prstGeom prst="rect">
+            <a:avLst/>
+          </a:prstGeom>
+          <a:noFill/>
+        </p:spPr>
+        <p:txBody>
+          <a:bodyPr wrap="square" lIns="0" rIns="0" tIns="0" bIns="0" anchor="t">
+            <a:spAutoFit/>
+          </a:bodyPr>
+          <a:lstStyle/>
+          <a:p>
+            <a:pPr algn="l">
+              <a:lnSpc>
+                <a:spcPct val="115000"/>
+              </a:lnSpc>
+            </a:pPr>
+            <a:r>
+              <a:rPr sz="1000" b="1" i="0" spc="200">
+                <a:solidFill>
+                  <a:srgbClr val="8E867B"/>
+                </a:solidFill>
+                <a:latin typeface="Inter"/>
+              </a:rPr>
+              <a:t>IF SILENCE DRAGS</a:t>
+            </a:r>
+          </a:p>
+        </p:txBody>
+      </p:sp>
+      <p:sp>
+        <p:nvSpPr>
+          <p:cNvPr id="12" name="TextBox 11"/>
+          <p:cNvSpPr txBox="1"/>
+          <p:nvPr/>
+        </p:nvSpPr>
+        <p:spPr>
+          <a:xfrm>
+            <a:off x="502920" y="3538728"/>
+            <a:ext cx="5349240" cy="640080"/>
+          </a:xfrm>
+          <a:prstGeom prst="rect">
+            <a:avLst/>
+          </a:prstGeom>
+          <a:noFill/>
+        </p:spPr>
+        <p:txBody>
+          <a:bodyPr wrap="square" lIns="0" rIns="0" tIns="0" bIns="0" anchor="t">
+            <a:spAutoFit/>
+          </a:bodyPr>
+          <a:lstStyle/>
+          <a:p>
+            <a:pPr algn="l">
+              <a:lnSpc>
+                <a:spcPct val="140000"/>
+              </a:lnSpc>
+            </a:pPr>
+            <a:r>
+              <a:rPr sz="1200" b="0" i="1">
+                <a:solidFill>
+                  <a:srgbClr val="3A332C"/>
+                </a:solidFill>
+                <a:latin typeface="Inter"/>
+              </a:rPr>
+              <a:t>"I'd rather give you the time — this is your conversation."</a:t>
+            </a:r>
+          </a:p>
+        </p:txBody>
+      </p:sp>
+      <p:sp>
+        <p:nvSpPr>
+          <p:cNvPr id="13" name="TextBox 12"/>
+          <p:cNvSpPr txBox="1"/>
+          <p:nvPr/>
+        </p:nvSpPr>
+        <p:spPr>
+          <a:xfrm>
+            <a:off x="6355080" y="3246120"/>
+            <a:ext cx="5349240" cy="365760"/>
+          </a:xfrm>
+          <a:prstGeom prst="rect">
+            <a:avLst/>
+          </a:prstGeom>
+          <a:noFill/>
+        </p:spPr>
+        <p:txBody>
+          <a:bodyPr wrap="square" lIns="0" rIns="0" tIns="0" bIns="0" anchor="t">
+            <a:spAutoFit/>
+          </a:bodyPr>
+          <a:lstStyle/>
+          <a:p>
+            <a:pPr algn="l">
+              <a:lnSpc>
+                <a:spcPct val="115000"/>
+              </a:lnSpc>
+            </a:pPr>
+            <a:r>
+              <a:rPr sz="1000" b="1" i="0" spc="200">
+                <a:solidFill>
+                  <a:srgbClr val="8E867B"/>
+                </a:solidFill>
+                <a:latin typeface="Inter"/>
+              </a:rPr>
+              <a:t>IF CURSOR GETS HIT</a:t>
+            </a:r>
+          </a:p>
+        </p:txBody>
+      </p:sp>
+      <p:sp>
+        <p:nvSpPr>
+          <p:cNvPr id="14" name="TextBox 13"/>
+          <p:cNvSpPr txBox="1"/>
+          <p:nvPr/>
+        </p:nvSpPr>
+        <p:spPr>
+          <a:xfrm>
+            <a:off x="6355080" y="3538728"/>
+            <a:ext cx="5349240" cy="640080"/>
+          </a:xfrm>
+          <a:prstGeom prst="rect">
+            <a:avLst/>
+          </a:prstGeom>
+          <a:noFill/>
+        </p:spPr>
+        <p:txBody>
+          <a:bodyPr wrap="square" lIns="0" rIns="0" tIns="0" bIns="0" anchor="t">
+            <a:spAutoFit/>
+          </a:bodyPr>
+          <a:lstStyle/>
+          <a:p>
+            <a:pPr algn="l">
+              <a:lnSpc>
+                <a:spcPct val="140000"/>
+              </a:lnSpc>
+            </a:pPr>
+            <a:r>
+              <a:rPr sz="1200" b="0" i="1">
+                <a:solidFill>
+                  <a:srgbClr val="3A332C"/>
+                </a:solidFill>
+                <a:latin typeface="Inter"/>
+              </a:rPr>
+              <a:t>"Fair feedback — here's what we do well, here's where we're not the best."</a:t>
+            </a:r>
+          </a:p>
+        </p:txBody>
+      </p:sp>
+      <p:sp>
+        <p:nvSpPr>
+          <p:cNvPr id="15" name="TextBox 14"/>
+          <p:cNvSpPr txBox="1"/>
+          <p:nvPr/>
+        </p:nvSpPr>
+        <p:spPr>
+          <a:xfrm>
+            <a:off x="502920" y="4251960"/>
+            <a:ext cx="5349240" cy="365760"/>
+          </a:xfrm>
+          <a:prstGeom prst="rect">
+            <a:avLst/>
+          </a:prstGeom>
+          <a:noFill/>
+        </p:spPr>
+        <p:txBody>
+          <a:bodyPr wrap="square" lIns="0" rIns="0" tIns="0" bIns="0" anchor="t">
+            <a:spAutoFit/>
+          </a:bodyPr>
+          <a:lstStyle/>
+          <a:p>
+            <a:pPr algn="l">
+              <a:lnSpc>
+                <a:spcPct val="115000"/>
+              </a:lnSpc>
+            </a:pPr>
+            <a:r>
+              <a:rPr sz="1000" b="1" i="0" spc="200">
+                <a:solidFill>
+                  <a:srgbClr val="8E867B"/>
+                </a:solidFill>
+                <a:latin typeface="Inter"/>
+              </a:rPr>
+              <a:t>IF ASKED A NUMBER YOU DON'T KNOW</a:t>
+            </a:r>
+          </a:p>
+        </p:txBody>
+      </p:sp>
+      <p:sp>
+        <p:nvSpPr>
+          <p:cNvPr id="16" name="TextBox 15"/>
+          <p:cNvSpPr txBox="1"/>
+          <p:nvPr/>
+        </p:nvSpPr>
+        <p:spPr>
+          <a:xfrm>
+            <a:off x="502920" y="4544568"/>
+            <a:ext cx="5349240" cy="640080"/>
+          </a:xfrm>
+          <a:prstGeom prst="rect">
+            <a:avLst/>
+          </a:prstGeom>
+          <a:noFill/>
+        </p:spPr>
+        <p:txBody>
+          <a:bodyPr wrap="square" lIns="0" rIns="0" tIns="0" bIns="0" anchor="t">
+            <a:spAutoFit/>
+          </a:bodyPr>
+          <a:lstStyle/>
+          <a:p>
+            <a:pPr algn="l">
+              <a:lnSpc>
+                <a:spcPct val="140000"/>
+              </a:lnSpc>
+            </a:pPr>
+            <a:r>
+              <a:rPr sz="1200" b="0" i="1">
+                <a:solidFill>
+                  <a:srgbClr val="3A332C"/>
+                </a:solidFill>
+                <a:latin typeface="Inter"/>
+              </a:rPr>
+              <a:t>"I don't want to make one up — I'll get back to you with the real answer today."</a:t>
+            </a:r>
+          </a:p>
+        </p:txBody>
+      </p:sp>
+      <p:sp>
+        <p:nvSpPr>
+          <p:cNvPr id="17" name="TextBox 16"/>
+          <p:cNvSpPr txBox="1"/>
+          <p:nvPr/>
+        </p:nvSpPr>
+        <p:spPr>
+          <a:xfrm>
+            <a:off x="6355080" y="4251960"/>
+            <a:ext cx="5349240" cy="365760"/>
+          </a:xfrm>
+          <a:prstGeom prst="rect">
+            <a:avLst/>
+          </a:prstGeom>
+          <a:noFill/>
+        </p:spPr>
+        <p:txBody>
+          <a:bodyPr wrap="square" lIns="0" rIns="0" tIns="0" bIns="0" anchor="t">
+            <a:spAutoFit/>
+          </a:bodyPr>
+          <a:lstStyle/>
+          <a:p>
+            <a:pPr algn="l">
+              <a:lnSpc>
+                <a:spcPct val="115000"/>
+              </a:lnSpc>
+            </a:pPr>
+            <a:r>
+              <a:rPr sz="1000" b="1" i="0" spc="200">
+                <a:solidFill>
+                  <a:srgbClr val="8E867B"/>
+                </a:solidFill>
+                <a:latin typeface="Inter"/>
+              </a:rPr>
+              <a:t>TO PRESSURE-TEST</a:t>
+            </a:r>
+          </a:p>
+        </p:txBody>
+      </p:sp>
+      <p:sp>
+        <p:nvSpPr>
+          <p:cNvPr id="18" name="TextBox 17"/>
+          <p:cNvSpPr txBox="1"/>
+          <p:nvPr/>
+        </p:nvSpPr>
+        <p:spPr>
+          <a:xfrm>
+            <a:off x="6355080" y="4544568"/>
+            <a:ext cx="5349240" cy="640080"/>
+          </a:xfrm>
+          <a:prstGeom prst="rect">
+            <a:avLst/>
+          </a:prstGeom>
+          <a:noFill/>
+        </p:spPr>
+        <p:txBody>
+          <a:bodyPr wrap="square" lIns="0" rIns="0" tIns="0" bIns="0" anchor="t">
+            <a:spAutoFit/>
+          </a:bodyPr>
+          <a:lstStyle/>
+          <a:p>
+            <a:pPr algn="l">
+              <a:lnSpc>
+                <a:spcPct val="140000"/>
+              </a:lnSpc>
+            </a:pPr>
+            <a:r>
+              <a:rPr sz="1200" b="0" i="1">
+                <a:solidFill>
+                  <a:srgbClr val="3A332C"/>
+                </a:solidFill>
+                <a:latin typeface="Inter"/>
+              </a:rPr>
+              <a:t>"What would need to be true for this to be a no?"</a:t>
+            </a:r>
+          </a:p>
+        </p:txBody>
+      </p:sp>
+      <p:sp>
+        <p:nvSpPr>
+          <p:cNvPr id="19" name="TextBox 18"/>
+          <p:cNvSpPr txBox="1"/>
+          <p:nvPr/>
+        </p:nvSpPr>
+        <p:spPr>
+          <a:xfrm>
+            <a:off x="502920" y="5257800"/>
+            <a:ext cx="5349240" cy="365760"/>
+          </a:xfrm>
+          <a:prstGeom prst="rect">
+            <a:avLst/>
+          </a:prstGeom>
+          <a:noFill/>
+        </p:spPr>
+        <p:txBody>
+          <a:bodyPr wrap="square" lIns="0" rIns="0" tIns="0" bIns="0" anchor="t">
+            <a:spAutoFit/>
+          </a:bodyPr>
+          <a:lstStyle/>
+          <a:p>
+            <a:pPr algn="l">
+              <a:lnSpc>
+                <a:spcPct val="115000"/>
+              </a:lnSpc>
+            </a:pPr>
+            <a:r>
+              <a:rPr sz="1000" b="1" i="0" spc="200">
+                <a:solidFill>
+                  <a:srgbClr val="8E867B"/>
+                </a:solidFill>
+                <a:latin typeface="Inter"/>
+              </a:rPr>
+              <a:t>TO PIVOT TO SECURITY</a:t>
+            </a:r>
+          </a:p>
+        </p:txBody>
+      </p:sp>
+      <p:sp>
+        <p:nvSpPr>
+          <p:cNvPr id="20" name="TextBox 19"/>
+          <p:cNvSpPr txBox="1"/>
+          <p:nvPr/>
+        </p:nvSpPr>
+        <p:spPr>
+          <a:xfrm>
+            <a:off x="502920" y="5550408"/>
+            <a:ext cx="5349240" cy="640080"/>
+          </a:xfrm>
+          <a:prstGeom prst="rect">
+            <a:avLst/>
+          </a:prstGeom>
+          <a:noFill/>
+        </p:spPr>
+        <p:txBody>
+          <a:bodyPr wrap="square" lIns="0" rIns="0" tIns="0" bIns="0" anchor="t">
+            <a:spAutoFit/>
+          </a:bodyPr>
+          <a:lstStyle/>
+          <a:p>
+            <a:pPr algn="l">
+              <a:lnSpc>
+                <a:spcPct val="140000"/>
+              </a:lnSpc>
+            </a:pPr>
+            <a:r>
+              <a:rPr sz="1200" b="0" i="1">
+                <a:solidFill>
+                  <a:srgbClr val="3A332C"/>
+                </a:solidFill>
+                <a:latin typeface="Inter"/>
+              </a:rPr>
+              <a:t>"Before we go further, I want to open security — that's where this gets real."</a:t>
+            </a:r>
+          </a:p>
+        </p:txBody>
+      </p:sp>
+      <p:sp>
+        <p:nvSpPr>
+          <p:cNvPr id="21" name="TextBox 20"/>
+          <p:cNvSpPr txBox="1"/>
+          <p:nvPr/>
+        </p:nvSpPr>
+        <p:spPr>
+          <a:xfrm>
+            <a:off x="6355080" y="5257800"/>
+            <a:ext cx="5349240" cy="365760"/>
+          </a:xfrm>
+          <a:prstGeom prst="rect">
+            <a:avLst/>
+          </a:prstGeom>
+          <a:noFill/>
+        </p:spPr>
+        <p:txBody>
+          <a:bodyPr wrap="square" lIns="0" rIns="0" tIns="0" bIns="0" anchor="t">
+            <a:spAutoFit/>
+          </a:bodyPr>
+          <a:lstStyle/>
+          <a:p>
+            <a:pPr algn="l">
+              <a:lnSpc>
+                <a:spcPct val="115000"/>
+              </a:lnSpc>
+            </a:pPr>
+            <a:r>
+              <a:rPr sz="1000" b="1" i="0" spc="200">
+                <a:solidFill>
+                  <a:srgbClr val="8E867B"/>
+                </a:solidFill>
+                <a:latin typeface="Inter"/>
+              </a:rPr>
+              <a:t>TO CLOSE</a:t>
+            </a:r>
+          </a:p>
+        </p:txBody>
+      </p:sp>
+      <p:sp>
+        <p:nvSpPr>
+          <p:cNvPr id="22" name="TextBox 21"/>
+          <p:cNvSpPr txBox="1"/>
+          <p:nvPr/>
+        </p:nvSpPr>
+        <p:spPr>
+          <a:xfrm>
+            <a:off x="6355080" y="5550408"/>
+            <a:ext cx="5349240" cy="640080"/>
+          </a:xfrm>
+          <a:prstGeom prst="rect">
+            <a:avLst/>
+          </a:prstGeom>
+          <a:noFill/>
+        </p:spPr>
+        <p:txBody>
+          <a:bodyPr wrap="square" lIns="0" rIns="0" tIns="0" bIns="0" anchor="t">
+            <a:spAutoFit/>
+          </a:bodyPr>
+          <a:lstStyle/>
+          <a:p>
+            <a:pPr algn="l">
+              <a:lnSpc>
+                <a:spcPct val="140000"/>
+              </a:lnSpc>
+            </a:pPr>
+            <a:r>
+              <a:rPr sz="1200" b="0" i="1">
+                <a:solidFill>
+                  <a:srgbClr val="3A332C"/>
+                </a:solidFill>
+                <a:latin typeface="Inter"/>
+              </a:rPr>
+              <a:t>"One question before we book the follow-up: what should I have asked?"</a:t>
+            </a:r>
+          </a:p>
+        </p:txBody>
+      </p:sp>
+    </p:spTree>
+  </p:cSld>
+  <p:clrMapOvr>
+    <a:masterClrMapping/>
+  </p:clrMapOvr>
+</p:sld>
+</file>
+
+<file path=ppt/slides/slide25.xml><?xml version="1.0" encoding="utf-8"?>
+<p:sld xmlns:a="http://schemas.openxmlformats.org/drawingml/2006/main" xmlns:p="http://schemas.openxmlformats.org/presentationml/2006/main" xmlns:r="http://schemas.openxmlformats.org/officeDocument/2006/relationships">
+  <p:cSld>
+    <p:spTree>
+      <p:nvGrpSpPr>
+        <p:cNvPr id="1" name=""/>
+        <p:cNvGrpSpPr/>
+        <p:nvPr/>
+      </p:nvGrpSpPr>
+      <p:grpSpPr/>
+      <p:sp>
+        <p:nvSpPr>
+          <p:cNvPr id="2" name="Rectangle 1"/>
+          <p:cNvSpPr/>
+          <p:nvPr/>
+        </p:nvSpPr>
+        <p:spPr>
+          <a:xfrm>
+            <a:off x="0" y="0"/>
+            <a:ext cx="12191695" cy="6858000"/>
+          </a:xfrm>
+          <a:prstGeom prst="rect">
+            <a:avLst/>
+          </a:prstGeom>
+          <a:solidFill>
+            <a:srgbClr val="F0EAE0"/>
+          </a:solidFill>
+          <a:ln>
+            <a:noFill/>
+          </a:ln>
+          <a:effectLst/>
+        </p:spPr>
+        <p:style>
+          <a:lnRef idx="1">
+            <a:schemeClr val="accent1"/>
+          </a:lnRef>
+          <a:fillRef idx="3">
+            <a:schemeClr val="accent1"/>
+          </a:fillRef>
+          <a:effectRef idx="2">
+            <a:schemeClr val="accent1"/>
+          </a:effectRef>
+          <a:fontRef idx="minor">
+            <a:schemeClr val="lt1"/>
+          </a:fontRef>
+        </p:style>
+        <p:txBody>
+          <a:bodyPr rtlCol="0" anchor="ctr"/>
+          <a:lstStyle/>
+          <a:p>
+            <a:pPr algn="ctr"/>
+          </a:p>
+        </p:txBody>
+      </p:sp>
+      <p:sp>
+        <p:nvSpPr>
+          <p:cNvPr id="3" name="TextBox 2"/>
+          <p:cNvSpPr txBox="1"/>
+          <p:nvPr/>
+        </p:nvSpPr>
+        <p:spPr>
+          <a:xfrm>
+            <a:off x="502920" y="320040"/>
+            <a:ext cx="2743200" cy="365760"/>
+          </a:xfrm>
+          <a:prstGeom prst="rect">
+            <a:avLst/>
+          </a:prstGeom>
+          <a:noFill/>
+        </p:spPr>
+        <p:txBody>
+          <a:bodyPr wrap="square" lIns="0" rIns="0" tIns="0" bIns="0" anchor="t">
+            <a:spAutoFit/>
+          </a:bodyPr>
+          <a:lstStyle/>
+          <a:p>
+            <a:pPr algn="l">
+              <a:lnSpc>
+                <a:spcPct val="115000"/>
+              </a:lnSpc>
+            </a:pPr>
+            <a:r>
+              <a:rPr sz="1100" b="1" i="0" spc="20">
+                <a:solidFill>
+                  <a:srgbClr val="1F1B16"/>
+                </a:solidFill>
+                <a:latin typeface="Inter"/>
+              </a:rPr>
+              <a:t>● cursor</a:t>
+            </a:r>
+          </a:p>
+        </p:txBody>
+      </p:sp>
+      <p:sp>
+        <p:nvSpPr>
+          <p:cNvPr id="4" name="TextBox 3"/>
+          <p:cNvSpPr txBox="1"/>
+          <p:nvPr/>
+        </p:nvSpPr>
+        <p:spPr>
+          <a:xfrm>
+            <a:off x="6400800" y="320040"/>
+            <a:ext cx="5303520" cy="365760"/>
+          </a:xfrm>
+          <a:prstGeom prst="rect">
+            <a:avLst/>
+          </a:prstGeom>
+          <a:noFill/>
+        </p:spPr>
+        <p:txBody>
+          <a:bodyPr wrap="square" lIns="0" rIns="0" tIns="0" bIns="0" anchor="t">
+            <a:spAutoFit/>
+          </a:bodyPr>
+          <a:lstStyle/>
+          <a:p>
+            <a:pPr algn="r">
+              <a:lnSpc>
+                <a:spcPct val="115000"/>
+              </a:lnSpc>
+            </a:pPr>
+            <a:r>
+              <a:rPr sz="900" b="0" i="0" spc="200">
+                <a:solidFill>
+                  <a:srgbClr val="8E867B"/>
+                </a:solidFill>
+                <a:latin typeface="Inter"/>
+              </a:rPr>
+              <a:t>META · CANDIDATE-ONLY</a:t>
+            </a:r>
+          </a:p>
+        </p:txBody>
+      </p:sp>
+      <p:sp>
+        <p:nvSpPr>
+          <p:cNvPr id="5" name="TextBox 4"/>
+          <p:cNvSpPr txBox="1"/>
+          <p:nvPr/>
+        </p:nvSpPr>
+        <p:spPr>
+          <a:xfrm>
+            <a:off x="502920" y="6446520"/>
+            <a:ext cx="5943600" cy="274320"/>
+          </a:xfrm>
+          <a:prstGeom prst="rect">
+            <a:avLst/>
+          </a:prstGeom>
+          <a:noFill/>
+        </p:spPr>
+        <p:txBody>
+          <a:bodyPr wrap="square" lIns="0" rIns="0" tIns="0" bIns="0" anchor="t">
+            <a:spAutoFit/>
+          </a:bodyPr>
+          <a:lstStyle/>
+          <a:p>
+            <a:pPr algn="l">
+              <a:lnSpc>
+                <a:spcPct val="115000"/>
+              </a:lnSpc>
+            </a:pPr>
+            <a:r>
+              <a:rPr sz="900" b="0" i="0" spc="80">
+                <a:solidFill>
+                  <a:srgbClr val="8E867B"/>
+                </a:solidFill>
+                <a:latin typeface="Inter"/>
+              </a:rPr>
+              <a:t>Cursor Enterprise — PG + Disco Challenge  ·  Prep deck</a:t>
+            </a:r>
+          </a:p>
+        </p:txBody>
+      </p:sp>
+      <p:sp>
+        <p:nvSpPr>
+          <p:cNvPr id="6" name="TextBox 5"/>
+          <p:cNvSpPr txBox="1"/>
+          <p:nvPr/>
+        </p:nvSpPr>
+        <p:spPr>
+          <a:xfrm>
+            <a:off x="10515600" y="6446520"/>
+            <a:ext cx="1188720" cy="274320"/>
+          </a:xfrm>
+          <a:prstGeom prst="rect">
+            <a:avLst/>
+          </a:prstGeom>
+          <a:noFill/>
+        </p:spPr>
+        <p:txBody>
+          <a:bodyPr wrap="square" lIns="0" rIns="0" tIns="0" bIns="0" anchor="t">
+            <a:spAutoFit/>
+          </a:bodyPr>
+          <a:lstStyle/>
+          <a:p>
+            <a:pPr algn="r">
+              <a:lnSpc>
+                <a:spcPct val="115000"/>
+              </a:lnSpc>
+            </a:pPr>
+            <a:r>
+              <a:rPr sz="900" b="0" i="0" spc="50">
+                <a:solidFill>
+                  <a:srgbClr val="8E867B"/>
+                </a:solidFill>
+                <a:latin typeface="JetBrains Mono"/>
+              </a:rPr>
+              <a:t>25 / 25</a:t>
             </a:r>
           </a:p>
         </p:txBody>
@@ -19959,7 +20861,7 @@
                 </a:solidFill>
                 <a:latin typeface="JetBrains Mono"/>
               </a:rPr>
-              <a:t>03 / 24</a:t>
+              <a:t>03 / 25</a:t>
             </a:r>
           </a:p>
         </p:txBody>
@@ -20177,7 +21079,7 @@
                 </a:solidFill>
                 <a:latin typeface="JetBrains Mono"/>
               </a:rPr>
-              <a:t>04 / 24</a:t>
+              <a:t>04 / 25</a:t>
             </a:r>
           </a:p>
         </p:txBody>
@@ -21361,7 +22263,7 @@
                 </a:solidFill>
                 <a:latin typeface="JetBrains Mono"/>
               </a:rPr>
-              <a:t>05 / 24</a:t>
+              <a:t>05 / 25</a:t>
             </a:r>
           </a:p>
         </p:txBody>
@@ -22960,7 +23862,7 @@
                 </a:solidFill>
                 <a:latin typeface="JetBrains Mono"/>
               </a:rPr>
-              <a:t>06 / 24</a:t>
+              <a:t>06 / 25</a:t>
             </a:r>
           </a:p>
         </p:txBody>
@@ -24323,7 +25225,7 @@
                 </a:solidFill>
                 <a:latin typeface="JetBrains Mono"/>
               </a:rPr>
-              <a:t>07 / 24</a:t>
+              <a:t>07 / 25</a:t>
             </a:r>
           </a:p>
         </p:txBody>
@@ -25702,7 +26604,7 @@
                 </a:solidFill>
                 <a:latin typeface="JetBrains Mono"/>
               </a:rPr>
-              <a:t>08 / 24</a:t>
+              <a:t>08 / 25</a:t>
             </a:r>
           </a:p>
         </p:txBody>
@@ -27055,7 +27957,7 @@
                 </a:solidFill>
                 <a:latin typeface="JetBrains Mono"/>
               </a:rPr>
-              <a:t>09 / 24</a:t>
+              <a:t>09 / 25</a:t>
             </a:r>
           </a:p>
         </p:txBody>
